--- a/course_information/COURSE_OUTLINE_10_WEEKS.pptx
+++ b/course_information/COURSE_OUTLINE_10_WEEKS.pptx
@@ -5,7 +5,7 @@
     <p:sldMasterId id="2147483660" r:id="rId1"/>
   </p:sldMasterIdLst>
   <p:notesMasterIdLst>
-    <p:notesMasterId r:id="rId37"/>
+    <p:notesMasterId r:id="rId38"/>
   </p:notesMasterIdLst>
   <p:sldIdLst>
     <p:sldId id="256" r:id="rId2"/>
@@ -18,31 +18,32 @@
     <p:sldId id="287" r:id="rId9"/>
     <p:sldId id="258" r:id="rId10"/>
     <p:sldId id="260" r:id="rId11"/>
-    <p:sldId id="277" r:id="rId12"/>
-    <p:sldId id="278" r:id="rId13"/>
-    <p:sldId id="263" r:id="rId14"/>
-    <p:sldId id="262" r:id="rId15"/>
-    <p:sldId id="271" r:id="rId16"/>
-    <p:sldId id="272" r:id="rId17"/>
-    <p:sldId id="275" r:id="rId18"/>
-    <p:sldId id="280" r:id="rId19"/>
-    <p:sldId id="261" r:id="rId20"/>
-    <p:sldId id="281" r:id="rId21"/>
-    <p:sldId id="279" r:id="rId22"/>
-    <p:sldId id="282" r:id="rId23"/>
-    <p:sldId id="273" r:id="rId24"/>
-    <p:sldId id="284" r:id="rId25"/>
-    <p:sldId id="283" r:id="rId26"/>
-    <p:sldId id="268" r:id="rId27"/>
-    <p:sldId id="264" r:id="rId28"/>
-    <p:sldId id="269" r:id="rId29"/>
-    <p:sldId id="270" r:id="rId30"/>
-    <p:sldId id="274" r:id="rId31"/>
-    <p:sldId id="285" r:id="rId32"/>
-    <p:sldId id="286" r:id="rId33"/>
-    <p:sldId id="276" r:id="rId34"/>
-    <p:sldId id="266" r:id="rId35"/>
-    <p:sldId id="267" r:id="rId36"/>
+    <p:sldId id="293" r:id="rId12"/>
+    <p:sldId id="277" r:id="rId13"/>
+    <p:sldId id="278" r:id="rId14"/>
+    <p:sldId id="263" r:id="rId15"/>
+    <p:sldId id="262" r:id="rId16"/>
+    <p:sldId id="271" r:id="rId17"/>
+    <p:sldId id="272" r:id="rId18"/>
+    <p:sldId id="275" r:id="rId19"/>
+    <p:sldId id="280" r:id="rId20"/>
+    <p:sldId id="261" r:id="rId21"/>
+    <p:sldId id="281" r:id="rId22"/>
+    <p:sldId id="279" r:id="rId23"/>
+    <p:sldId id="282" r:id="rId24"/>
+    <p:sldId id="273" r:id="rId25"/>
+    <p:sldId id="284" r:id="rId26"/>
+    <p:sldId id="283" r:id="rId27"/>
+    <p:sldId id="268" r:id="rId28"/>
+    <p:sldId id="264" r:id="rId29"/>
+    <p:sldId id="269" r:id="rId30"/>
+    <p:sldId id="270" r:id="rId31"/>
+    <p:sldId id="274" r:id="rId32"/>
+    <p:sldId id="285" r:id="rId33"/>
+    <p:sldId id="286" r:id="rId34"/>
+    <p:sldId id="276" r:id="rId35"/>
+    <p:sldId id="266" r:id="rId36"/>
+    <p:sldId id="267" r:id="rId37"/>
   </p:sldIdLst>
   <p:sldSz cx="12192000" cy="6858000"/>
   <p:notesSz cx="6858000" cy="9144000"/>
@@ -231,7 +232,7 @@
           <a:p>
             <a:fld id="{3D165E93-E323-764B-9CF0-D55E433161EB}" type="datetimeFigureOut">
               <a:rPr lang="en-US" smtClean="0"/>
-              <a:t>9/1/26</a:t>
+              <a:t>9/8/26</a:t>
             </a:fld>
             <a:endParaRPr lang="en-US"/>
           </a:p>
@@ -7533,6 +7534,224 @@
   <p:cSld>
     <p:spTree>
       <p:nvGrpSpPr>
+        <p:cNvPr id="1" name="">
+          <a:extLst>
+            <a:ext uri="{FF2B5EF4-FFF2-40B4-BE49-F238E27FC236}">
+              <a16:creationId xmlns:a16="http://schemas.microsoft.com/office/drawing/2014/main" id="{19C9F049-FB3C-F3EA-FE6C-9B23A1072B32}"/>
+            </a:ext>
+          </a:extLst>
+        </p:cNvPr>
+        <p:cNvGrpSpPr/>
+        <p:nvPr/>
+      </p:nvGrpSpPr>
+      <p:grpSpPr>
+        <a:xfrm>
+          <a:off x="0" y="0"/>
+          <a:ext cx="0" cy="0"/>
+          <a:chOff x="0" y="0"/>
+          <a:chExt cx="0" cy="0"/>
+        </a:xfrm>
+      </p:grpSpPr>
+      <p:sp>
+        <p:nvSpPr>
+          <p:cNvPr id="2" name="Title 1">
+            <a:extLst>
+              <a:ext uri="{FF2B5EF4-FFF2-40B4-BE49-F238E27FC236}">
+                <a16:creationId xmlns:a16="http://schemas.microsoft.com/office/drawing/2014/main" id="{473CB78C-22E5-141A-23D5-6E5445BD393D}"/>
+              </a:ext>
+            </a:extLst>
+          </p:cNvPr>
+          <p:cNvSpPr>
+            <a:spLocks noGrp="1"/>
+          </p:cNvSpPr>
+          <p:nvPr>
+            <p:ph type="ctrTitle"/>
+          </p:nvPr>
+        </p:nvSpPr>
+        <p:spPr>
+          <a:xfrm>
+            <a:off x="1524000" y="652805"/>
+            <a:ext cx="9144000" cy="663529"/>
+          </a:xfrm>
+        </p:spPr>
+        <p:txBody>
+          <a:bodyPr>
+            <a:normAutofit fontScale="90000"/>
+          </a:bodyPr>
+          <a:lstStyle/>
+          <a:p>
+            <a:r>
+              <a:rPr lang="en-US" dirty="0"/>
+              <a:t>1. MapReduce Paradigm</a:t>
+            </a:r>
+          </a:p>
+        </p:txBody>
+      </p:sp>
+      <p:pic>
+        <p:nvPicPr>
+          <p:cNvPr id="4" name="Picture 3">
+            <a:extLst>
+              <a:ext uri="{FF2B5EF4-FFF2-40B4-BE49-F238E27FC236}">
+                <a16:creationId xmlns:a16="http://schemas.microsoft.com/office/drawing/2014/main" id="{8838F92D-46A1-6B82-6845-2C0B522B7A63}"/>
+              </a:ext>
+            </a:extLst>
+          </p:cNvPr>
+          <p:cNvPicPr>
+            <a:picLocks noChangeAspect="1"/>
+          </p:cNvPicPr>
+          <p:nvPr/>
+        </p:nvPicPr>
+        <p:blipFill>
+          <a:blip r:embed="rId2"/>
+          <a:stretch>
+            <a:fillRect/>
+          </a:stretch>
+        </p:blipFill>
+        <p:spPr>
+          <a:xfrm>
+            <a:off x="1828800" y="1447800"/>
+            <a:ext cx="7772400" cy="3608614"/>
+          </a:xfrm>
+          <a:prstGeom prst="rect">
+            <a:avLst/>
+          </a:prstGeom>
+        </p:spPr>
+      </p:pic>
+      <p:sp>
+        <p:nvSpPr>
+          <p:cNvPr id="3" name="Subtitle 2">
+            <a:extLst>
+              <a:ext uri="{FF2B5EF4-FFF2-40B4-BE49-F238E27FC236}">
+                <a16:creationId xmlns:a16="http://schemas.microsoft.com/office/drawing/2014/main" id="{C19252A4-2E91-97FC-D02F-3C7B6C906D41}"/>
+              </a:ext>
+            </a:extLst>
+          </p:cNvPr>
+          <p:cNvSpPr>
+            <a:spLocks noGrp="1"/>
+          </p:cNvSpPr>
+          <p:nvPr>
+            <p:ph type="subTitle" idx="1"/>
+          </p:nvPr>
+        </p:nvSpPr>
+        <p:spPr>
+          <a:xfrm>
+            <a:off x="1524000" y="1567965"/>
+            <a:ext cx="9144000" cy="3968678"/>
+          </a:xfrm>
+        </p:spPr>
+        <p:txBody>
+          <a:bodyPr>
+            <a:normAutofit/>
+          </a:bodyPr>
+          <a:lstStyle/>
+          <a:p>
+            <a:pPr marL="457200" lvl="1" algn="l"/>
+            <a:endParaRPr lang="en-US" sz="1200" dirty="0"/>
+          </a:p>
+        </p:txBody>
+      </p:sp>
+    </p:spTree>
+    <p:extLst>
+      <p:ext uri="{BB962C8B-B14F-4D97-AF65-F5344CB8AC3E}">
+        <p14:creationId xmlns:p14="http://schemas.microsoft.com/office/powerpoint/2010/main" val="342100755"/>
+      </p:ext>
+    </p:extLst>
+  </p:cSld>
+  <p:clrMapOvr>
+    <a:masterClrMapping/>
+  </p:clrMapOvr>
+  <p:timing>
+    <p:tnLst>
+      <p:par>
+        <p:cTn id="1" dur="indefinite" restart="never" nodeType="tmRoot">
+          <p:childTnLst>
+            <p:seq concurrent="1" nextAc="seek">
+              <p:cTn id="2" dur="indefinite" nodeType="mainSeq">
+                <p:childTnLst>
+                  <p:par>
+                    <p:cTn id="3" fill="hold">
+                      <p:stCondLst>
+                        <p:cond delay="indefinite"/>
+                      </p:stCondLst>
+                      <p:childTnLst>
+                        <p:par>
+                          <p:cTn id="4" fill="hold">
+                            <p:stCondLst>
+                              <p:cond delay="0"/>
+                            </p:stCondLst>
+                            <p:childTnLst>
+                              <p:par>
+                                <p:cTn id="5" presetID="1" presetClass="entr" presetSubtype="0" fill="hold" nodeType="clickEffect" nodePh="1">
+                                  <p:stCondLst>
+                                    <p:cond delay="0"/>
+                                  </p:stCondLst>
+                                  <p:endCondLst>
+                                    <p:cond evt="begin" delay="0">
+                                      <p:tn val="5"/>
+                                    </p:cond>
+                                  </p:endCondLst>
+                                  <p:childTnLst>
+                                    <p:set>
+                                      <p:cBhvr>
+                                        <p:cTn id="6" dur="1" fill="hold">
+                                          <p:stCondLst>
+                                            <p:cond delay="0"/>
+                                          </p:stCondLst>
+                                        </p:cTn>
+                                        <p:tgtEl>
+                                          <p:spTgt spid="3">
+                                            <p:txEl>
+                                              <p:pRg st="0" end="0"/>
+                                            </p:txEl>
+                                          </p:spTgt>
+                                        </p:tgtEl>
+                                        <p:attrNameLst>
+                                          <p:attrName>style.visibility</p:attrName>
+                                        </p:attrNameLst>
+                                      </p:cBhvr>
+                                      <p:to>
+                                        <p:strVal val="visible"/>
+                                      </p:to>
+                                    </p:set>
+                                  </p:childTnLst>
+                                </p:cTn>
+                              </p:par>
+                            </p:childTnLst>
+                          </p:cTn>
+                        </p:par>
+                      </p:childTnLst>
+                    </p:cTn>
+                  </p:par>
+                </p:childTnLst>
+              </p:cTn>
+              <p:prevCondLst>
+                <p:cond evt="onPrev" delay="0">
+                  <p:tgtEl>
+                    <p:sldTgt/>
+                  </p:tgtEl>
+                </p:cond>
+              </p:prevCondLst>
+              <p:nextCondLst>
+                <p:cond evt="onNext" delay="0">
+                  <p:tgtEl>
+                    <p:sldTgt/>
+                  </p:tgtEl>
+                </p:cond>
+              </p:nextCondLst>
+            </p:seq>
+          </p:childTnLst>
+        </p:cTn>
+      </p:par>
+    </p:tnLst>
+  </p:timing>
+</p:sld>
+</file>
+
+<file path=ppt/slides/slide12.xml><?xml version="1.0" encoding="utf-8"?>
+<p:sld xmlns:a="http://schemas.openxmlformats.org/drawingml/2006/main" xmlns:r="http://schemas.openxmlformats.org/officeDocument/2006/relationships" xmlns:p="http://schemas.openxmlformats.org/presentationml/2006/main">
+  <p:cSld>
+    <p:spTree>
+      <p:nvGrpSpPr>
         <p:cNvPr id="1" name=""/>
         <p:cNvGrpSpPr/>
         <p:nvPr/>
@@ -7985,7 +8204,7 @@
 </p:sld>
 </file>
 
-<file path=ppt/slides/slide12.xml><?xml version="1.0" encoding="utf-8"?>
+<file path=ppt/slides/slide13.xml><?xml version="1.0" encoding="utf-8"?>
 <p:sld xmlns:a="http://schemas.openxmlformats.org/drawingml/2006/main" xmlns:r="http://schemas.openxmlformats.org/officeDocument/2006/relationships" xmlns:p="http://schemas.openxmlformats.org/presentationml/2006/main">
   <p:cSld>
     <p:spTree>
@@ -8446,7 +8665,7 @@
 </p:sld>
 </file>
 
-<file path=ppt/slides/slide13.xml><?xml version="1.0" encoding="utf-8"?>
+<file path=ppt/slides/slide14.xml><?xml version="1.0" encoding="utf-8"?>
 <p:sld xmlns:a="http://schemas.openxmlformats.org/drawingml/2006/main" xmlns:r="http://schemas.openxmlformats.org/officeDocument/2006/relationships" xmlns:p="http://schemas.openxmlformats.org/presentationml/2006/main">
   <p:cSld>
     <p:spTree>
@@ -8995,7 +9214,7 @@
 </p:sld>
 </file>
 
-<file path=ppt/slides/slide14.xml><?xml version="1.0" encoding="utf-8"?>
+<file path=ppt/slides/slide15.xml><?xml version="1.0" encoding="utf-8"?>
 <p:sld xmlns:a="http://schemas.openxmlformats.org/drawingml/2006/main" xmlns:r="http://schemas.openxmlformats.org/officeDocument/2006/relationships" xmlns:p="http://schemas.openxmlformats.org/presentationml/2006/main">
   <p:cSld>
     <p:spTree>
@@ -9126,7 +9345,7 @@
 </p:sld>
 </file>
 
-<file path=ppt/slides/slide15.xml><?xml version="1.0" encoding="utf-8"?>
+<file path=ppt/slides/slide16.xml><?xml version="1.0" encoding="utf-8"?>
 <p:sld xmlns:a="http://schemas.openxmlformats.org/drawingml/2006/main" xmlns:r="http://schemas.openxmlformats.org/officeDocument/2006/relationships" xmlns:p="http://schemas.openxmlformats.org/presentationml/2006/main">
   <p:cSld>
     <p:spTree>
@@ -9221,7 +9440,7 @@
 </p:sld>
 </file>
 
-<file path=ppt/slides/slide16.xml><?xml version="1.0" encoding="utf-8"?>
+<file path=ppt/slides/slide17.xml><?xml version="1.0" encoding="utf-8"?>
 <p:sld xmlns:a="http://schemas.openxmlformats.org/drawingml/2006/main" xmlns:r="http://schemas.openxmlformats.org/officeDocument/2006/relationships" xmlns:p="http://schemas.openxmlformats.org/presentationml/2006/main">
   <p:cSld>
     <p:spTree>
@@ -9316,7 +9535,7 @@
 </p:sld>
 </file>
 
-<file path=ppt/slides/slide17.xml><?xml version="1.0" encoding="utf-8"?>
+<file path=ppt/slides/slide18.xml><?xml version="1.0" encoding="utf-8"?>
 <p:sld xmlns:a="http://schemas.openxmlformats.org/drawingml/2006/main" xmlns:r="http://schemas.openxmlformats.org/officeDocument/2006/relationships" xmlns:p="http://schemas.openxmlformats.org/presentationml/2006/main">
   <p:cSld>
     <p:spTree>
@@ -9411,7 +9630,7 @@
 </p:sld>
 </file>
 
-<file path=ppt/slides/slide18.xml><?xml version="1.0" encoding="utf-8"?>
+<file path=ppt/slides/slide19.xml><?xml version="1.0" encoding="utf-8"?>
 <p:sld xmlns:a="http://schemas.openxmlformats.org/drawingml/2006/main" xmlns:r="http://schemas.openxmlformats.org/officeDocument/2006/relationships" xmlns:p="http://schemas.openxmlformats.org/presentationml/2006/main">
   <p:cSld>
     <p:spTree>
@@ -10115,793 +10334,6 @@
 </p:sld>
 </file>
 
-<file path=ppt/slides/slide19.xml><?xml version="1.0" encoding="utf-8"?>
-<p:sld xmlns:a="http://schemas.openxmlformats.org/drawingml/2006/main" xmlns:r="http://schemas.openxmlformats.org/officeDocument/2006/relationships" xmlns:p="http://schemas.openxmlformats.org/presentationml/2006/main">
-  <p:cSld>
-    <p:spTree>
-      <p:nvGrpSpPr>
-        <p:cNvPr id="1" name=""/>
-        <p:cNvGrpSpPr/>
-        <p:nvPr/>
-      </p:nvGrpSpPr>
-      <p:grpSpPr>
-        <a:xfrm>
-          <a:off x="0" y="0"/>
-          <a:ext cx="0" cy="0"/>
-          <a:chOff x="0" y="0"/>
-          <a:chExt cx="0" cy="0"/>
-        </a:xfrm>
-      </p:grpSpPr>
-      <p:sp>
-        <p:nvSpPr>
-          <p:cNvPr id="2" name="Title 1">
-            <a:extLst>
-              <a:ext uri="{FF2B5EF4-FFF2-40B4-BE49-F238E27FC236}">
-                <a16:creationId xmlns:a16="http://schemas.microsoft.com/office/drawing/2014/main" id="{8207F09F-B406-FB4C-ABE0-890E4E4F95C8}"/>
-              </a:ext>
-            </a:extLst>
-          </p:cNvPr>
-          <p:cNvSpPr>
-            <a:spLocks noGrp="1"/>
-          </p:cNvSpPr>
-          <p:nvPr>
-            <p:ph type="ctrTitle"/>
-          </p:nvPr>
-        </p:nvSpPr>
-        <p:spPr>
-          <a:xfrm>
-            <a:off x="1524000" y="596349"/>
-            <a:ext cx="9144000" cy="646042"/>
-          </a:xfrm>
-        </p:spPr>
-        <p:txBody>
-          <a:bodyPr>
-            <a:noAutofit/>
-          </a:bodyPr>
-          <a:lstStyle/>
-          <a:p>
-            <a:r>
-              <a:rPr lang="en-US" sz="3600" dirty="0">
-                <a:solidFill>
-                  <a:srgbClr val="002060"/>
-                </a:solidFill>
-              </a:rPr>
-              <a:t>Solving a Big Data Problem with MapReduce (2)</a:t>
-            </a:r>
-          </a:p>
-        </p:txBody>
-      </p:sp>
-      <p:sp>
-        <p:nvSpPr>
-          <p:cNvPr id="3" name="Subtitle 2">
-            <a:extLst>
-              <a:ext uri="{FF2B5EF4-FFF2-40B4-BE49-F238E27FC236}">
-                <a16:creationId xmlns:a16="http://schemas.microsoft.com/office/drawing/2014/main" id="{67BA4937-A89D-8343-B4A3-942B771C889A}"/>
-              </a:ext>
-            </a:extLst>
-          </p:cNvPr>
-          <p:cNvSpPr>
-            <a:spLocks noGrp="1"/>
-          </p:cNvSpPr>
-          <p:nvPr>
-            <p:ph type="subTitle" idx="1"/>
-          </p:nvPr>
-        </p:nvSpPr>
-        <p:spPr>
-          <a:xfrm>
-            <a:off x="1524000" y="1242392"/>
-            <a:ext cx="9144000" cy="4731026"/>
-          </a:xfrm>
-        </p:spPr>
-        <p:txBody>
-          <a:bodyPr>
-            <a:normAutofit/>
-          </a:bodyPr>
-          <a:lstStyle/>
-          <a:p>
-            <a:pPr marL="342900" indent="-342900">
-              <a:buFont typeface="Arial" panose="020B0604020202020204" pitchFamily="34" charset="0"/>
-              <a:buChar char="•"/>
-            </a:pPr>
-            <a:r>
-              <a:rPr lang="en-US" dirty="0">
-                <a:solidFill>
-                  <a:schemeClr val="tx1"/>
-                </a:solidFill>
-              </a:rPr>
-              <a:t>All mappers output go to </a:t>
-            </a:r>
-            <a:r>
-              <a:rPr lang="en-US" b="1" i="1" u="sng" dirty="0">
-                <a:solidFill>
-                  <a:srgbClr val="00B050"/>
-                </a:solidFill>
-              </a:rPr>
-              <a:t>Sort &amp; Shuffle</a:t>
-            </a:r>
-            <a:r>
-              <a:rPr lang="en-US" b="1" i="1" u="sng" dirty="0">
-                <a:solidFill>
-                  <a:schemeClr val="tx1"/>
-                </a:solidFill>
-              </a:rPr>
-              <a:t>  </a:t>
-            </a:r>
-            <a:r>
-              <a:rPr lang="en-US" dirty="0">
-                <a:solidFill>
-                  <a:schemeClr val="tx1"/>
-                </a:solidFill>
-              </a:rPr>
-              <a:t>phase, which groups values by unique keys (similar to GROUP BY in SQL). </a:t>
-            </a:r>
-          </a:p>
-          <a:p>
-            <a:pPr marL="342900" indent="-342900">
-              <a:buFont typeface="Arial" panose="020B0604020202020204" pitchFamily="34" charset="0"/>
-              <a:buChar char="•"/>
-            </a:pPr>
-            <a:r>
-              <a:rPr lang="en-US" dirty="0">
-                <a:solidFill>
-                  <a:srgbClr val="00B050"/>
-                </a:solidFill>
-              </a:rPr>
-              <a:t>Sort &amp; Shuffle  </a:t>
-            </a:r>
-            <a:r>
-              <a:rPr lang="en-US" dirty="0">
-                <a:solidFill>
-                  <a:schemeClr val="tx1"/>
-                </a:solidFill>
-              </a:rPr>
-              <a:t>creates (key, value) pairs as:</a:t>
-            </a:r>
-          </a:p>
-          <a:p>
-            <a:r>
-              <a:rPr lang="en-US" dirty="0">
-                <a:solidFill>
-                  <a:schemeClr val="tx1"/>
-                </a:solidFill>
-                <a:highlight>
-                  <a:srgbClr val="FFFF00"/>
-                </a:highlight>
-                <a:latin typeface="Courier" pitchFamily="2" charset="0"/>
-              </a:rPr>
-              <a:t>(</a:t>
-            </a:r>
-            <a:r>
-              <a:rPr lang="en-US" b="1" dirty="0">
-                <a:solidFill>
-                  <a:schemeClr val="tx1"/>
-                </a:solidFill>
-                <a:highlight>
-                  <a:srgbClr val="FFFF00"/>
-                </a:highlight>
-                <a:latin typeface="Courier" pitchFamily="2" charset="0"/>
-              </a:rPr>
-              <a:t>key_1</a:t>
-            </a:r>
-            <a:r>
-              <a:rPr lang="en-US" dirty="0">
-                <a:solidFill>
-                  <a:schemeClr val="tx1"/>
-                </a:solidFill>
-                <a:highlight>
-                  <a:srgbClr val="FFFF00"/>
-                </a:highlight>
-                <a:latin typeface="Courier" pitchFamily="2" charset="0"/>
-              </a:rPr>
-              <a:t>, [v1, v2, …])</a:t>
-            </a:r>
-          </a:p>
-          <a:p>
-            <a:r>
-              <a:rPr lang="en-US" dirty="0">
-                <a:solidFill>
-                  <a:schemeClr val="tx1"/>
-                </a:solidFill>
-                <a:highlight>
-                  <a:srgbClr val="FFFF00"/>
-                </a:highlight>
-                <a:latin typeface="Courier" pitchFamily="2" charset="0"/>
-              </a:rPr>
-              <a:t>(</a:t>
-            </a:r>
-            <a:r>
-              <a:rPr lang="en-US" b="1" dirty="0">
-                <a:solidFill>
-                  <a:schemeClr val="tx1"/>
-                </a:solidFill>
-                <a:highlight>
-                  <a:srgbClr val="FFFF00"/>
-                </a:highlight>
-                <a:latin typeface="Courier" pitchFamily="2" charset="0"/>
-              </a:rPr>
-              <a:t>key_2</a:t>
-            </a:r>
-            <a:r>
-              <a:rPr lang="en-US" dirty="0">
-                <a:solidFill>
-                  <a:schemeClr val="tx1"/>
-                </a:solidFill>
-                <a:highlight>
-                  <a:srgbClr val="FFFF00"/>
-                </a:highlight>
-                <a:latin typeface="Courier" pitchFamily="2" charset="0"/>
-              </a:rPr>
-              <a:t>, [u1, u2, …])</a:t>
-            </a:r>
-          </a:p>
-          <a:p>
-            <a:r>
-              <a:rPr lang="en-US" dirty="0">
-                <a:solidFill>
-                  <a:schemeClr val="tx1"/>
-                </a:solidFill>
-                <a:highlight>
-                  <a:srgbClr val="FFFF00"/>
-                </a:highlight>
-                <a:latin typeface="Courier" pitchFamily="2" charset="0"/>
-              </a:rPr>
-              <a:t>…</a:t>
-            </a:r>
-          </a:p>
-          <a:p>
-            <a:r>
-              <a:rPr lang="en-US" dirty="0">
-                <a:solidFill>
-                  <a:schemeClr val="tx1"/>
-                </a:solidFill>
-                <a:highlight>
-                  <a:srgbClr val="FFFF00"/>
-                </a:highlight>
-                <a:latin typeface="Courier" pitchFamily="2" charset="0"/>
-              </a:rPr>
-              <a:t>(</a:t>
-            </a:r>
-            <a:r>
-              <a:rPr lang="en-US" b="1" dirty="0" err="1">
-                <a:solidFill>
-                  <a:schemeClr val="tx1"/>
-                </a:solidFill>
-                <a:highlight>
-                  <a:srgbClr val="FFFF00"/>
-                </a:highlight>
-                <a:latin typeface="Courier" pitchFamily="2" charset="0"/>
-              </a:rPr>
-              <a:t>key_n</a:t>
-            </a:r>
-            <a:r>
-              <a:rPr lang="en-US" dirty="0">
-                <a:solidFill>
-                  <a:schemeClr val="tx1"/>
-                </a:solidFill>
-                <a:highlight>
-                  <a:srgbClr val="FFFF00"/>
-                </a:highlight>
-                <a:latin typeface="Courier" pitchFamily="2" charset="0"/>
-              </a:rPr>
-              <a:t>, [t1, t2, …])</a:t>
-            </a:r>
-          </a:p>
-          <a:p>
-            <a:r>
-              <a:rPr lang="en-US" dirty="0">
-                <a:solidFill>
-                  <a:schemeClr val="tx1"/>
-                </a:solidFill>
-              </a:rPr>
-              <a:t>Where  </a:t>
-            </a:r>
-            <a:r>
-              <a:rPr lang="en-US" dirty="0">
-                <a:solidFill>
-                  <a:schemeClr val="tx1"/>
-                </a:solidFill>
-                <a:highlight>
-                  <a:srgbClr val="FFFF00"/>
-                </a:highlight>
-              </a:rPr>
-              <a:t>{ </a:t>
-            </a:r>
-            <a:r>
-              <a:rPr lang="en-US" b="1" dirty="0">
-                <a:solidFill>
-                  <a:schemeClr val="tx1"/>
-                </a:solidFill>
-                <a:highlight>
-                  <a:srgbClr val="FFFF00"/>
-                </a:highlight>
-                <a:latin typeface="Courier" pitchFamily="2" charset="0"/>
-              </a:rPr>
-              <a:t>key_1, key_2, … </a:t>
-            </a:r>
-            <a:r>
-              <a:rPr lang="en-US" b="1" dirty="0" err="1">
-                <a:solidFill>
-                  <a:schemeClr val="tx1"/>
-                </a:solidFill>
-                <a:highlight>
-                  <a:srgbClr val="FFFF00"/>
-                </a:highlight>
-                <a:latin typeface="Courier" pitchFamily="2" charset="0"/>
-              </a:rPr>
-              <a:t>key_n</a:t>
-            </a:r>
-            <a:r>
-              <a:rPr lang="en-US" b="1" dirty="0">
-                <a:solidFill>
-                  <a:schemeClr val="tx1"/>
-                </a:solidFill>
-                <a:highlight>
-                  <a:srgbClr val="FFFF00"/>
-                </a:highlight>
-                <a:latin typeface="Courier" pitchFamily="2" charset="0"/>
-              </a:rPr>
-              <a:t> </a:t>
-            </a:r>
-            <a:r>
-              <a:rPr lang="en-US" dirty="0">
-                <a:solidFill>
-                  <a:schemeClr val="tx1"/>
-                </a:solidFill>
-                <a:highlight>
-                  <a:srgbClr val="FFFF00"/>
-                </a:highlight>
-                <a:latin typeface="Courier" pitchFamily="2" charset="0"/>
-              </a:rPr>
-              <a:t>} </a:t>
-            </a:r>
-          </a:p>
-          <a:p>
-            <a:r>
-              <a:rPr lang="en-US" dirty="0">
-                <a:solidFill>
-                  <a:schemeClr val="tx1"/>
-                </a:solidFill>
-              </a:rPr>
-              <a:t>are the unique keys created by all mappers</a:t>
-            </a:r>
-          </a:p>
-        </p:txBody>
-      </p:sp>
-    </p:spTree>
-    <p:extLst>
-      <p:ext uri="{BB962C8B-B14F-4D97-AF65-F5344CB8AC3E}">
-        <p14:creationId xmlns:p14="http://schemas.microsoft.com/office/powerpoint/2010/main" val="2903010917"/>
-      </p:ext>
-    </p:extLst>
-  </p:cSld>
-  <p:clrMapOvr>
-    <a:masterClrMapping/>
-  </p:clrMapOvr>
-  <p:timing>
-    <p:tnLst>
-      <p:par>
-        <p:cTn id="1" dur="indefinite" restart="never" nodeType="tmRoot">
-          <p:childTnLst>
-            <p:seq concurrent="1" nextAc="seek">
-              <p:cTn id="2" dur="indefinite" nodeType="mainSeq">
-                <p:childTnLst>
-                  <p:par>
-                    <p:cTn id="3" fill="hold">
-                      <p:stCondLst>
-                        <p:cond delay="indefinite"/>
-                      </p:stCondLst>
-                      <p:childTnLst>
-                        <p:par>
-                          <p:cTn id="4" fill="hold">
-                            <p:stCondLst>
-                              <p:cond delay="0"/>
-                            </p:stCondLst>
-                            <p:childTnLst>
-                              <p:par>
-                                <p:cTn id="5" presetID="1" presetClass="entr" presetSubtype="0" fill="hold" nodeType="clickEffect">
-                                  <p:stCondLst>
-                                    <p:cond delay="0"/>
-                                  </p:stCondLst>
-                                  <p:childTnLst>
-                                    <p:set>
-                                      <p:cBhvr>
-                                        <p:cTn id="6" dur="1" fill="hold">
-                                          <p:stCondLst>
-                                            <p:cond delay="0"/>
-                                          </p:stCondLst>
-                                        </p:cTn>
-                                        <p:tgtEl>
-                                          <p:spTgt spid="3">
-                                            <p:txEl>
-                                              <p:pRg st="0" end="0"/>
-                                            </p:txEl>
-                                          </p:spTgt>
-                                        </p:tgtEl>
-                                        <p:attrNameLst>
-                                          <p:attrName>style.visibility</p:attrName>
-                                        </p:attrNameLst>
-                                      </p:cBhvr>
-                                      <p:to>
-                                        <p:strVal val="visible"/>
-                                      </p:to>
-                                    </p:set>
-                                  </p:childTnLst>
-                                </p:cTn>
-                              </p:par>
-                            </p:childTnLst>
-                          </p:cTn>
-                        </p:par>
-                      </p:childTnLst>
-                    </p:cTn>
-                  </p:par>
-                  <p:par>
-                    <p:cTn id="7" fill="hold">
-                      <p:stCondLst>
-                        <p:cond delay="indefinite"/>
-                      </p:stCondLst>
-                      <p:childTnLst>
-                        <p:par>
-                          <p:cTn id="8" fill="hold">
-                            <p:stCondLst>
-                              <p:cond delay="0"/>
-                            </p:stCondLst>
-                            <p:childTnLst>
-                              <p:par>
-                                <p:cTn id="9" presetID="1" presetClass="entr" presetSubtype="0" fill="hold" nodeType="clickEffect">
-                                  <p:stCondLst>
-                                    <p:cond delay="0"/>
-                                  </p:stCondLst>
-                                  <p:childTnLst>
-                                    <p:set>
-                                      <p:cBhvr>
-                                        <p:cTn id="10" dur="1" fill="hold">
-                                          <p:stCondLst>
-                                            <p:cond delay="0"/>
-                                          </p:stCondLst>
-                                        </p:cTn>
-                                        <p:tgtEl>
-                                          <p:spTgt spid="3">
-                                            <p:txEl>
-                                              <p:pRg st="1" end="1"/>
-                                            </p:txEl>
-                                          </p:spTgt>
-                                        </p:tgtEl>
-                                        <p:attrNameLst>
-                                          <p:attrName>style.visibility</p:attrName>
-                                        </p:attrNameLst>
-                                      </p:cBhvr>
-                                      <p:to>
-                                        <p:strVal val="visible"/>
-                                      </p:to>
-                                    </p:set>
-                                  </p:childTnLst>
-                                </p:cTn>
-                              </p:par>
-                            </p:childTnLst>
-                          </p:cTn>
-                        </p:par>
-                      </p:childTnLst>
-                    </p:cTn>
-                  </p:par>
-                  <p:par>
-                    <p:cTn id="11" fill="hold">
-                      <p:stCondLst>
-                        <p:cond delay="indefinite"/>
-                      </p:stCondLst>
-                      <p:childTnLst>
-                        <p:par>
-                          <p:cTn id="12" fill="hold">
-                            <p:stCondLst>
-                              <p:cond delay="0"/>
-                            </p:stCondLst>
-                            <p:childTnLst>
-                              <p:par>
-                                <p:cTn id="13" presetID="1" presetClass="entr" presetSubtype="0" fill="hold" nodeType="clickEffect">
-                                  <p:stCondLst>
-                                    <p:cond delay="0"/>
-                                  </p:stCondLst>
-                                  <p:childTnLst>
-                                    <p:set>
-                                      <p:cBhvr>
-                                        <p:cTn id="14" dur="1" fill="hold">
-                                          <p:stCondLst>
-                                            <p:cond delay="0"/>
-                                          </p:stCondLst>
-                                        </p:cTn>
-                                        <p:tgtEl>
-                                          <p:spTgt spid="3">
-                                            <p:txEl>
-                                              <p:pRg st="2" end="2"/>
-                                            </p:txEl>
-                                          </p:spTgt>
-                                        </p:tgtEl>
-                                        <p:attrNameLst>
-                                          <p:attrName>style.visibility</p:attrName>
-                                        </p:attrNameLst>
-                                      </p:cBhvr>
-                                      <p:to>
-                                        <p:strVal val="visible"/>
-                                      </p:to>
-                                    </p:set>
-                                  </p:childTnLst>
-                                </p:cTn>
-                              </p:par>
-                            </p:childTnLst>
-                          </p:cTn>
-                        </p:par>
-                      </p:childTnLst>
-                    </p:cTn>
-                  </p:par>
-                  <p:par>
-                    <p:cTn id="15" fill="hold">
-                      <p:stCondLst>
-                        <p:cond delay="indefinite"/>
-                      </p:stCondLst>
-                      <p:childTnLst>
-                        <p:par>
-                          <p:cTn id="16" fill="hold">
-                            <p:stCondLst>
-                              <p:cond delay="0"/>
-                            </p:stCondLst>
-                            <p:childTnLst>
-                              <p:par>
-                                <p:cTn id="17" presetID="1" presetClass="entr" presetSubtype="0" fill="hold" nodeType="clickEffect">
-                                  <p:stCondLst>
-                                    <p:cond delay="0"/>
-                                  </p:stCondLst>
-                                  <p:childTnLst>
-                                    <p:set>
-                                      <p:cBhvr>
-                                        <p:cTn id="18" dur="1" fill="hold">
-                                          <p:stCondLst>
-                                            <p:cond delay="0"/>
-                                          </p:stCondLst>
-                                        </p:cTn>
-                                        <p:tgtEl>
-                                          <p:spTgt spid="3">
-                                            <p:txEl>
-                                              <p:pRg st="3" end="3"/>
-                                            </p:txEl>
-                                          </p:spTgt>
-                                        </p:tgtEl>
-                                        <p:attrNameLst>
-                                          <p:attrName>style.visibility</p:attrName>
-                                        </p:attrNameLst>
-                                      </p:cBhvr>
-                                      <p:to>
-                                        <p:strVal val="visible"/>
-                                      </p:to>
-                                    </p:set>
-                                  </p:childTnLst>
-                                </p:cTn>
-                              </p:par>
-                            </p:childTnLst>
-                          </p:cTn>
-                        </p:par>
-                      </p:childTnLst>
-                    </p:cTn>
-                  </p:par>
-                  <p:par>
-                    <p:cTn id="19" fill="hold">
-                      <p:stCondLst>
-                        <p:cond delay="indefinite"/>
-                      </p:stCondLst>
-                      <p:childTnLst>
-                        <p:par>
-                          <p:cTn id="20" fill="hold">
-                            <p:stCondLst>
-                              <p:cond delay="0"/>
-                            </p:stCondLst>
-                            <p:childTnLst>
-                              <p:par>
-                                <p:cTn id="21" presetID="1" presetClass="entr" presetSubtype="0" fill="hold" nodeType="clickEffect">
-                                  <p:stCondLst>
-                                    <p:cond delay="0"/>
-                                  </p:stCondLst>
-                                  <p:childTnLst>
-                                    <p:set>
-                                      <p:cBhvr>
-                                        <p:cTn id="22" dur="1" fill="hold">
-                                          <p:stCondLst>
-                                            <p:cond delay="0"/>
-                                          </p:stCondLst>
-                                        </p:cTn>
-                                        <p:tgtEl>
-                                          <p:spTgt spid="3">
-                                            <p:txEl>
-                                              <p:pRg st="4" end="4"/>
-                                            </p:txEl>
-                                          </p:spTgt>
-                                        </p:tgtEl>
-                                        <p:attrNameLst>
-                                          <p:attrName>style.visibility</p:attrName>
-                                        </p:attrNameLst>
-                                      </p:cBhvr>
-                                      <p:to>
-                                        <p:strVal val="visible"/>
-                                      </p:to>
-                                    </p:set>
-                                  </p:childTnLst>
-                                </p:cTn>
-                              </p:par>
-                            </p:childTnLst>
-                          </p:cTn>
-                        </p:par>
-                      </p:childTnLst>
-                    </p:cTn>
-                  </p:par>
-                  <p:par>
-                    <p:cTn id="23" fill="hold">
-                      <p:stCondLst>
-                        <p:cond delay="indefinite"/>
-                      </p:stCondLst>
-                      <p:childTnLst>
-                        <p:par>
-                          <p:cTn id="24" fill="hold">
-                            <p:stCondLst>
-                              <p:cond delay="0"/>
-                            </p:stCondLst>
-                            <p:childTnLst>
-                              <p:par>
-                                <p:cTn id="25" presetID="1" presetClass="entr" presetSubtype="0" fill="hold" nodeType="clickEffect">
-                                  <p:stCondLst>
-                                    <p:cond delay="0"/>
-                                  </p:stCondLst>
-                                  <p:childTnLst>
-                                    <p:set>
-                                      <p:cBhvr>
-                                        <p:cTn id="26" dur="1" fill="hold">
-                                          <p:stCondLst>
-                                            <p:cond delay="0"/>
-                                          </p:stCondLst>
-                                        </p:cTn>
-                                        <p:tgtEl>
-                                          <p:spTgt spid="3">
-                                            <p:txEl>
-                                              <p:pRg st="5" end="5"/>
-                                            </p:txEl>
-                                          </p:spTgt>
-                                        </p:tgtEl>
-                                        <p:attrNameLst>
-                                          <p:attrName>style.visibility</p:attrName>
-                                        </p:attrNameLst>
-                                      </p:cBhvr>
-                                      <p:to>
-                                        <p:strVal val="visible"/>
-                                      </p:to>
-                                    </p:set>
-                                  </p:childTnLst>
-                                </p:cTn>
-                              </p:par>
-                            </p:childTnLst>
-                          </p:cTn>
-                        </p:par>
-                      </p:childTnLst>
-                    </p:cTn>
-                  </p:par>
-                  <p:par>
-                    <p:cTn id="27" fill="hold">
-                      <p:stCondLst>
-                        <p:cond delay="indefinite"/>
-                      </p:stCondLst>
-                      <p:childTnLst>
-                        <p:par>
-                          <p:cTn id="28" fill="hold">
-                            <p:stCondLst>
-                              <p:cond delay="0"/>
-                            </p:stCondLst>
-                            <p:childTnLst>
-                              <p:par>
-                                <p:cTn id="29" presetID="1" presetClass="entr" presetSubtype="0" fill="hold" nodeType="clickEffect">
-                                  <p:stCondLst>
-                                    <p:cond delay="0"/>
-                                  </p:stCondLst>
-                                  <p:childTnLst>
-                                    <p:set>
-                                      <p:cBhvr>
-                                        <p:cTn id="30" dur="1" fill="hold">
-                                          <p:stCondLst>
-                                            <p:cond delay="0"/>
-                                          </p:stCondLst>
-                                        </p:cTn>
-                                        <p:tgtEl>
-                                          <p:spTgt spid="3">
-                                            <p:txEl>
-                                              <p:pRg st="6" end="6"/>
-                                            </p:txEl>
-                                          </p:spTgt>
-                                        </p:tgtEl>
-                                        <p:attrNameLst>
-                                          <p:attrName>style.visibility</p:attrName>
-                                        </p:attrNameLst>
-                                      </p:cBhvr>
-                                      <p:to>
-                                        <p:strVal val="visible"/>
-                                      </p:to>
-                                    </p:set>
-                                  </p:childTnLst>
-                                </p:cTn>
-                              </p:par>
-                            </p:childTnLst>
-                          </p:cTn>
-                        </p:par>
-                      </p:childTnLst>
-                    </p:cTn>
-                  </p:par>
-                  <p:par>
-                    <p:cTn id="31" fill="hold">
-                      <p:stCondLst>
-                        <p:cond delay="indefinite"/>
-                      </p:stCondLst>
-                      <p:childTnLst>
-                        <p:par>
-                          <p:cTn id="32" fill="hold">
-                            <p:stCondLst>
-                              <p:cond delay="0"/>
-                            </p:stCondLst>
-                            <p:childTnLst>
-                              <p:par>
-                                <p:cTn id="33" presetID="1" presetClass="entr" presetSubtype="0" fill="hold" nodeType="clickEffect">
-                                  <p:stCondLst>
-                                    <p:cond delay="0"/>
-                                  </p:stCondLst>
-                                  <p:childTnLst>
-                                    <p:set>
-                                      <p:cBhvr>
-                                        <p:cTn id="34" dur="1" fill="hold">
-                                          <p:stCondLst>
-                                            <p:cond delay="0"/>
-                                          </p:stCondLst>
-                                        </p:cTn>
-                                        <p:tgtEl>
-                                          <p:spTgt spid="3">
-                                            <p:txEl>
-                                              <p:pRg st="7" end="7"/>
-                                            </p:txEl>
-                                          </p:spTgt>
-                                        </p:tgtEl>
-                                        <p:attrNameLst>
-                                          <p:attrName>style.visibility</p:attrName>
-                                        </p:attrNameLst>
-                                      </p:cBhvr>
-                                      <p:to>
-                                        <p:strVal val="visible"/>
-                                      </p:to>
-                                    </p:set>
-                                  </p:childTnLst>
-                                </p:cTn>
-                              </p:par>
-                            </p:childTnLst>
-                          </p:cTn>
-                        </p:par>
-                      </p:childTnLst>
-                    </p:cTn>
-                  </p:par>
-                </p:childTnLst>
-              </p:cTn>
-              <p:prevCondLst>
-                <p:cond evt="onPrev" delay="0">
-                  <p:tgtEl>
-                    <p:sldTgt/>
-                  </p:tgtEl>
-                </p:cond>
-              </p:prevCondLst>
-              <p:nextCondLst>
-                <p:cond evt="onNext" delay="0">
-                  <p:tgtEl>
-                    <p:sldTgt/>
-                  </p:tgtEl>
-                </p:cond>
-              </p:nextCondLst>
-            </p:seq>
-          </p:childTnLst>
-        </p:cTn>
-      </p:par>
-    </p:tnLst>
-  </p:timing>
-</p:sld>
-</file>
-
 <file path=ppt/slides/slide2.xml><?xml version="1.0" encoding="utf-8"?>
 <p:sld xmlns:a="http://schemas.openxmlformats.org/drawingml/2006/main" xmlns:r="http://schemas.openxmlformats.org/officeDocument/2006/relationships" xmlns:p="http://schemas.openxmlformats.org/presentationml/2006/main">
   <p:cSld>
@@ -11564,6 +10996,793 @@
 </file>
 
 <file path=ppt/slides/slide20.xml><?xml version="1.0" encoding="utf-8"?>
+<p:sld xmlns:a="http://schemas.openxmlformats.org/drawingml/2006/main" xmlns:r="http://schemas.openxmlformats.org/officeDocument/2006/relationships" xmlns:p="http://schemas.openxmlformats.org/presentationml/2006/main">
+  <p:cSld>
+    <p:spTree>
+      <p:nvGrpSpPr>
+        <p:cNvPr id="1" name=""/>
+        <p:cNvGrpSpPr/>
+        <p:nvPr/>
+      </p:nvGrpSpPr>
+      <p:grpSpPr>
+        <a:xfrm>
+          <a:off x="0" y="0"/>
+          <a:ext cx="0" cy="0"/>
+          <a:chOff x="0" y="0"/>
+          <a:chExt cx="0" cy="0"/>
+        </a:xfrm>
+      </p:grpSpPr>
+      <p:sp>
+        <p:nvSpPr>
+          <p:cNvPr id="2" name="Title 1">
+            <a:extLst>
+              <a:ext uri="{FF2B5EF4-FFF2-40B4-BE49-F238E27FC236}">
+                <a16:creationId xmlns:a16="http://schemas.microsoft.com/office/drawing/2014/main" id="{8207F09F-B406-FB4C-ABE0-890E4E4F95C8}"/>
+              </a:ext>
+            </a:extLst>
+          </p:cNvPr>
+          <p:cNvSpPr>
+            <a:spLocks noGrp="1"/>
+          </p:cNvSpPr>
+          <p:nvPr>
+            <p:ph type="ctrTitle"/>
+          </p:nvPr>
+        </p:nvSpPr>
+        <p:spPr>
+          <a:xfrm>
+            <a:off x="1524000" y="596349"/>
+            <a:ext cx="9144000" cy="646042"/>
+          </a:xfrm>
+        </p:spPr>
+        <p:txBody>
+          <a:bodyPr>
+            <a:noAutofit/>
+          </a:bodyPr>
+          <a:lstStyle/>
+          <a:p>
+            <a:r>
+              <a:rPr lang="en-US" sz="3600" dirty="0">
+                <a:solidFill>
+                  <a:srgbClr val="002060"/>
+                </a:solidFill>
+              </a:rPr>
+              <a:t>Solving a Big Data Problem with MapReduce (2)</a:t>
+            </a:r>
+          </a:p>
+        </p:txBody>
+      </p:sp>
+      <p:sp>
+        <p:nvSpPr>
+          <p:cNvPr id="3" name="Subtitle 2">
+            <a:extLst>
+              <a:ext uri="{FF2B5EF4-FFF2-40B4-BE49-F238E27FC236}">
+                <a16:creationId xmlns:a16="http://schemas.microsoft.com/office/drawing/2014/main" id="{67BA4937-A89D-8343-B4A3-942B771C889A}"/>
+              </a:ext>
+            </a:extLst>
+          </p:cNvPr>
+          <p:cNvSpPr>
+            <a:spLocks noGrp="1"/>
+          </p:cNvSpPr>
+          <p:nvPr>
+            <p:ph type="subTitle" idx="1"/>
+          </p:nvPr>
+        </p:nvSpPr>
+        <p:spPr>
+          <a:xfrm>
+            <a:off x="1524000" y="1242392"/>
+            <a:ext cx="9144000" cy="4731026"/>
+          </a:xfrm>
+        </p:spPr>
+        <p:txBody>
+          <a:bodyPr>
+            <a:normAutofit/>
+          </a:bodyPr>
+          <a:lstStyle/>
+          <a:p>
+            <a:pPr marL="342900" indent="-342900">
+              <a:buFont typeface="Arial" panose="020B0604020202020204" pitchFamily="34" charset="0"/>
+              <a:buChar char="•"/>
+            </a:pPr>
+            <a:r>
+              <a:rPr lang="en-US" dirty="0">
+                <a:solidFill>
+                  <a:schemeClr val="tx1"/>
+                </a:solidFill>
+              </a:rPr>
+              <a:t>All mappers output go to </a:t>
+            </a:r>
+            <a:r>
+              <a:rPr lang="en-US" b="1" i="1" u="sng" dirty="0">
+                <a:solidFill>
+                  <a:srgbClr val="00B050"/>
+                </a:solidFill>
+              </a:rPr>
+              <a:t>Sort &amp; Shuffle</a:t>
+            </a:r>
+            <a:r>
+              <a:rPr lang="en-US" b="1" i="1" u="sng" dirty="0">
+                <a:solidFill>
+                  <a:schemeClr val="tx1"/>
+                </a:solidFill>
+              </a:rPr>
+              <a:t>  </a:t>
+            </a:r>
+            <a:r>
+              <a:rPr lang="en-US" dirty="0">
+                <a:solidFill>
+                  <a:schemeClr val="tx1"/>
+                </a:solidFill>
+              </a:rPr>
+              <a:t>phase, which groups values by unique keys (similar to GROUP BY in SQL). </a:t>
+            </a:r>
+          </a:p>
+          <a:p>
+            <a:pPr marL="342900" indent="-342900">
+              <a:buFont typeface="Arial" panose="020B0604020202020204" pitchFamily="34" charset="0"/>
+              <a:buChar char="•"/>
+            </a:pPr>
+            <a:r>
+              <a:rPr lang="en-US" dirty="0">
+                <a:solidFill>
+                  <a:srgbClr val="00B050"/>
+                </a:solidFill>
+              </a:rPr>
+              <a:t>Sort &amp; Shuffle  </a:t>
+            </a:r>
+            <a:r>
+              <a:rPr lang="en-US" dirty="0">
+                <a:solidFill>
+                  <a:schemeClr val="tx1"/>
+                </a:solidFill>
+              </a:rPr>
+              <a:t>creates (key, value) pairs as:</a:t>
+            </a:r>
+          </a:p>
+          <a:p>
+            <a:r>
+              <a:rPr lang="en-US" dirty="0">
+                <a:solidFill>
+                  <a:schemeClr val="tx1"/>
+                </a:solidFill>
+                <a:highlight>
+                  <a:srgbClr val="FFFF00"/>
+                </a:highlight>
+                <a:latin typeface="Courier" pitchFamily="2" charset="0"/>
+              </a:rPr>
+              <a:t>(</a:t>
+            </a:r>
+            <a:r>
+              <a:rPr lang="en-US" b="1" dirty="0">
+                <a:solidFill>
+                  <a:schemeClr val="tx1"/>
+                </a:solidFill>
+                <a:highlight>
+                  <a:srgbClr val="FFFF00"/>
+                </a:highlight>
+                <a:latin typeface="Courier" pitchFamily="2" charset="0"/>
+              </a:rPr>
+              <a:t>key_1</a:t>
+            </a:r>
+            <a:r>
+              <a:rPr lang="en-US" dirty="0">
+                <a:solidFill>
+                  <a:schemeClr val="tx1"/>
+                </a:solidFill>
+                <a:highlight>
+                  <a:srgbClr val="FFFF00"/>
+                </a:highlight>
+                <a:latin typeface="Courier" pitchFamily="2" charset="0"/>
+              </a:rPr>
+              <a:t>, [v1, v2, …])</a:t>
+            </a:r>
+          </a:p>
+          <a:p>
+            <a:r>
+              <a:rPr lang="en-US" dirty="0">
+                <a:solidFill>
+                  <a:schemeClr val="tx1"/>
+                </a:solidFill>
+                <a:highlight>
+                  <a:srgbClr val="FFFF00"/>
+                </a:highlight>
+                <a:latin typeface="Courier" pitchFamily="2" charset="0"/>
+              </a:rPr>
+              <a:t>(</a:t>
+            </a:r>
+            <a:r>
+              <a:rPr lang="en-US" b="1" dirty="0">
+                <a:solidFill>
+                  <a:schemeClr val="tx1"/>
+                </a:solidFill>
+                <a:highlight>
+                  <a:srgbClr val="FFFF00"/>
+                </a:highlight>
+                <a:latin typeface="Courier" pitchFamily="2" charset="0"/>
+              </a:rPr>
+              <a:t>key_2</a:t>
+            </a:r>
+            <a:r>
+              <a:rPr lang="en-US" dirty="0">
+                <a:solidFill>
+                  <a:schemeClr val="tx1"/>
+                </a:solidFill>
+                <a:highlight>
+                  <a:srgbClr val="FFFF00"/>
+                </a:highlight>
+                <a:latin typeface="Courier" pitchFamily="2" charset="0"/>
+              </a:rPr>
+              <a:t>, [u1, u2, …])</a:t>
+            </a:r>
+          </a:p>
+          <a:p>
+            <a:r>
+              <a:rPr lang="en-US" dirty="0">
+                <a:solidFill>
+                  <a:schemeClr val="tx1"/>
+                </a:solidFill>
+                <a:highlight>
+                  <a:srgbClr val="FFFF00"/>
+                </a:highlight>
+                <a:latin typeface="Courier" pitchFamily="2" charset="0"/>
+              </a:rPr>
+              <a:t>…</a:t>
+            </a:r>
+          </a:p>
+          <a:p>
+            <a:r>
+              <a:rPr lang="en-US" dirty="0">
+                <a:solidFill>
+                  <a:schemeClr val="tx1"/>
+                </a:solidFill>
+                <a:highlight>
+                  <a:srgbClr val="FFFF00"/>
+                </a:highlight>
+                <a:latin typeface="Courier" pitchFamily="2" charset="0"/>
+              </a:rPr>
+              <a:t>(</a:t>
+            </a:r>
+            <a:r>
+              <a:rPr lang="en-US" b="1" dirty="0" err="1">
+                <a:solidFill>
+                  <a:schemeClr val="tx1"/>
+                </a:solidFill>
+                <a:highlight>
+                  <a:srgbClr val="FFFF00"/>
+                </a:highlight>
+                <a:latin typeface="Courier" pitchFamily="2" charset="0"/>
+              </a:rPr>
+              <a:t>key_n</a:t>
+            </a:r>
+            <a:r>
+              <a:rPr lang="en-US" dirty="0">
+                <a:solidFill>
+                  <a:schemeClr val="tx1"/>
+                </a:solidFill>
+                <a:highlight>
+                  <a:srgbClr val="FFFF00"/>
+                </a:highlight>
+                <a:latin typeface="Courier" pitchFamily="2" charset="0"/>
+              </a:rPr>
+              <a:t>, [t1, t2, …])</a:t>
+            </a:r>
+          </a:p>
+          <a:p>
+            <a:r>
+              <a:rPr lang="en-US" dirty="0">
+                <a:solidFill>
+                  <a:schemeClr val="tx1"/>
+                </a:solidFill>
+              </a:rPr>
+              <a:t>Where  </a:t>
+            </a:r>
+            <a:r>
+              <a:rPr lang="en-US" dirty="0">
+                <a:solidFill>
+                  <a:schemeClr val="tx1"/>
+                </a:solidFill>
+                <a:highlight>
+                  <a:srgbClr val="FFFF00"/>
+                </a:highlight>
+              </a:rPr>
+              <a:t>{ </a:t>
+            </a:r>
+            <a:r>
+              <a:rPr lang="en-US" b="1" dirty="0">
+                <a:solidFill>
+                  <a:schemeClr val="tx1"/>
+                </a:solidFill>
+                <a:highlight>
+                  <a:srgbClr val="FFFF00"/>
+                </a:highlight>
+                <a:latin typeface="Courier" pitchFamily="2" charset="0"/>
+              </a:rPr>
+              <a:t>key_1, key_2, … </a:t>
+            </a:r>
+            <a:r>
+              <a:rPr lang="en-US" b="1" dirty="0" err="1">
+                <a:solidFill>
+                  <a:schemeClr val="tx1"/>
+                </a:solidFill>
+                <a:highlight>
+                  <a:srgbClr val="FFFF00"/>
+                </a:highlight>
+                <a:latin typeface="Courier" pitchFamily="2" charset="0"/>
+              </a:rPr>
+              <a:t>key_n</a:t>
+            </a:r>
+            <a:r>
+              <a:rPr lang="en-US" b="1" dirty="0">
+                <a:solidFill>
+                  <a:schemeClr val="tx1"/>
+                </a:solidFill>
+                <a:highlight>
+                  <a:srgbClr val="FFFF00"/>
+                </a:highlight>
+                <a:latin typeface="Courier" pitchFamily="2" charset="0"/>
+              </a:rPr>
+              <a:t> </a:t>
+            </a:r>
+            <a:r>
+              <a:rPr lang="en-US" dirty="0">
+                <a:solidFill>
+                  <a:schemeClr val="tx1"/>
+                </a:solidFill>
+                <a:highlight>
+                  <a:srgbClr val="FFFF00"/>
+                </a:highlight>
+                <a:latin typeface="Courier" pitchFamily="2" charset="0"/>
+              </a:rPr>
+              <a:t>} </a:t>
+            </a:r>
+          </a:p>
+          <a:p>
+            <a:r>
+              <a:rPr lang="en-US" dirty="0">
+                <a:solidFill>
+                  <a:schemeClr val="tx1"/>
+                </a:solidFill>
+              </a:rPr>
+              <a:t>are the unique keys created by all mappers</a:t>
+            </a:r>
+          </a:p>
+        </p:txBody>
+      </p:sp>
+    </p:spTree>
+    <p:extLst>
+      <p:ext uri="{BB962C8B-B14F-4D97-AF65-F5344CB8AC3E}">
+        <p14:creationId xmlns:p14="http://schemas.microsoft.com/office/powerpoint/2010/main" val="2903010917"/>
+      </p:ext>
+    </p:extLst>
+  </p:cSld>
+  <p:clrMapOvr>
+    <a:masterClrMapping/>
+  </p:clrMapOvr>
+  <p:timing>
+    <p:tnLst>
+      <p:par>
+        <p:cTn id="1" dur="indefinite" restart="never" nodeType="tmRoot">
+          <p:childTnLst>
+            <p:seq concurrent="1" nextAc="seek">
+              <p:cTn id="2" dur="indefinite" nodeType="mainSeq">
+                <p:childTnLst>
+                  <p:par>
+                    <p:cTn id="3" fill="hold">
+                      <p:stCondLst>
+                        <p:cond delay="indefinite"/>
+                      </p:stCondLst>
+                      <p:childTnLst>
+                        <p:par>
+                          <p:cTn id="4" fill="hold">
+                            <p:stCondLst>
+                              <p:cond delay="0"/>
+                            </p:stCondLst>
+                            <p:childTnLst>
+                              <p:par>
+                                <p:cTn id="5" presetID="1" presetClass="entr" presetSubtype="0" fill="hold" nodeType="clickEffect">
+                                  <p:stCondLst>
+                                    <p:cond delay="0"/>
+                                  </p:stCondLst>
+                                  <p:childTnLst>
+                                    <p:set>
+                                      <p:cBhvr>
+                                        <p:cTn id="6" dur="1" fill="hold">
+                                          <p:stCondLst>
+                                            <p:cond delay="0"/>
+                                          </p:stCondLst>
+                                        </p:cTn>
+                                        <p:tgtEl>
+                                          <p:spTgt spid="3">
+                                            <p:txEl>
+                                              <p:pRg st="0" end="0"/>
+                                            </p:txEl>
+                                          </p:spTgt>
+                                        </p:tgtEl>
+                                        <p:attrNameLst>
+                                          <p:attrName>style.visibility</p:attrName>
+                                        </p:attrNameLst>
+                                      </p:cBhvr>
+                                      <p:to>
+                                        <p:strVal val="visible"/>
+                                      </p:to>
+                                    </p:set>
+                                  </p:childTnLst>
+                                </p:cTn>
+                              </p:par>
+                            </p:childTnLst>
+                          </p:cTn>
+                        </p:par>
+                      </p:childTnLst>
+                    </p:cTn>
+                  </p:par>
+                  <p:par>
+                    <p:cTn id="7" fill="hold">
+                      <p:stCondLst>
+                        <p:cond delay="indefinite"/>
+                      </p:stCondLst>
+                      <p:childTnLst>
+                        <p:par>
+                          <p:cTn id="8" fill="hold">
+                            <p:stCondLst>
+                              <p:cond delay="0"/>
+                            </p:stCondLst>
+                            <p:childTnLst>
+                              <p:par>
+                                <p:cTn id="9" presetID="1" presetClass="entr" presetSubtype="0" fill="hold" nodeType="clickEffect">
+                                  <p:stCondLst>
+                                    <p:cond delay="0"/>
+                                  </p:stCondLst>
+                                  <p:childTnLst>
+                                    <p:set>
+                                      <p:cBhvr>
+                                        <p:cTn id="10" dur="1" fill="hold">
+                                          <p:stCondLst>
+                                            <p:cond delay="0"/>
+                                          </p:stCondLst>
+                                        </p:cTn>
+                                        <p:tgtEl>
+                                          <p:spTgt spid="3">
+                                            <p:txEl>
+                                              <p:pRg st="1" end="1"/>
+                                            </p:txEl>
+                                          </p:spTgt>
+                                        </p:tgtEl>
+                                        <p:attrNameLst>
+                                          <p:attrName>style.visibility</p:attrName>
+                                        </p:attrNameLst>
+                                      </p:cBhvr>
+                                      <p:to>
+                                        <p:strVal val="visible"/>
+                                      </p:to>
+                                    </p:set>
+                                  </p:childTnLst>
+                                </p:cTn>
+                              </p:par>
+                            </p:childTnLst>
+                          </p:cTn>
+                        </p:par>
+                      </p:childTnLst>
+                    </p:cTn>
+                  </p:par>
+                  <p:par>
+                    <p:cTn id="11" fill="hold">
+                      <p:stCondLst>
+                        <p:cond delay="indefinite"/>
+                      </p:stCondLst>
+                      <p:childTnLst>
+                        <p:par>
+                          <p:cTn id="12" fill="hold">
+                            <p:stCondLst>
+                              <p:cond delay="0"/>
+                            </p:stCondLst>
+                            <p:childTnLst>
+                              <p:par>
+                                <p:cTn id="13" presetID="1" presetClass="entr" presetSubtype="0" fill="hold" nodeType="clickEffect">
+                                  <p:stCondLst>
+                                    <p:cond delay="0"/>
+                                  </p:stCondLst>
+                                  <p:childTnLst>
+                                    <p:set>
+                                      <p:cBhvr>
+                                        <p:cTn id="14" dur="1" fill="hold">
+                                          <p:stCondLst>
+                                            <p:cond delay="0"/>
+                                          </p:stCondLst>
+                                        </p:cTn>
+                                        <p:tgtEl>
+                                          <p:spTgt spid="3">
+                                            <p:txEl>
+                                              <p:pRg st="2" end="2"/>
+                                            </p:txEl>
+                                          </p:spTgt>
+                                        </p:tgtEl>
+                                        <p:attrNameLst>
+                                          <p:attrName>style.visibility</p:attrName>
+                                        </p:attrNameLst>
+                                      </p:cBhvr>
+                                      <p:to>
+                                        <p:strVal val="visible"/>
+                                      </p:to>
+                                    </p:set>
+                                  </p:childTnLst>
+                                </p:cTn>
+                              </p:par>
+                            </p:childTnLst>
+                          </p:cTn>
+                        </p:par>
+                      </p:childTnLst>
+                    </p:cTn>
+                  </p:par>
+                  <p:par>
+                    <p:cTn id="15" fill="hold">
+                      <p:stCondLst>
+                        <p:cond delay="indefinite"/>
+                      </p:stCondLst>
+                      <p:childTnLst>
+                        <p:par>
+                          <p:cTn id="16" fill="hold">
+                            <p:stCondLst>
+                              <p:cond delay="0"/>
+                            </p:stCondLst>
+                            <p:childTnLst>
+                              <p:par>
+                                <p:cTn id="17" presetID="1" presetClass="entr" presetSubtype="0" fill="hold" nodeType="clickEffect">
+                                  <p:stCondLst>
+                                    <p:cond delay="0"/>
+                                  </p:stCondLst>
+                                  <p:childTnLst>
+                                    <p:set>
+                                      <p:cBhvr>
+                                        <p:cTn id="18" dur="1" fill="hold">
+                                          <p:stCondLst>
+                                            <p:cond delay="0"/>
+                                          </p:stCondLst>
+                                        </p:cTn>
+                                        <p:tgtEl>
+                                          <p:spTgt spid="3">
+                                            <p:txEl>
+                                              <p:pRg st="3" end="3"/>
+                                            </p:txEl>
+                                          </p:spTgt>
+                                        </p:tgtEl>
+                                        <p:attrNameLst>
+                                          <p:attrName>style.visibility</p:attrName>
+                                        </p:attrNameLst>
+                                      </p:cBhvr>
+                                      <p:to>
+                                        <p:strVal val="visible"/>
+                                      </p:to>
+                                    </p:set>
+                                  </p:childTnLst>
+                                </p:cTn>
+                              </p:par>
+                            </p:childTnLst>
+                          </p:cTn>
+                        </p:par>
+                      </p:childTnLst>
+                    </p:cTn>
+                  </p:par>
+                  <p:par>
+                    <p:cTn id="19" fill="hold">
+                      <p:stCondLst>
+                        <p:cond delay="indefinite"/>
+                      </p:stCondLst>
+                      <p:childTnLst>
+                        <p:par>
+                          <p:cTn id="20" fill="hold">
+                            <p:stCondLst>
+                              <p:cond delay="0"/>
+                            </p:stCondLst>
+                            <p:childTnLst>
+                              <p:par>
+                                <p:cTn id="21" presetID="1" presetClass="entr" presetSubtype="0" fill="hold" nodeType="clickEffect">
+                                  <p:stCondLst>
+                                    <p:cond delay="0"/>
+                                  </p:stCondLst>
+                                  <p:childTnLst>
+                                    <p:set>
+                                      <p:cBhvr>
+                                        <p:cTn id="22" dur="1" fill="hold">
+                                          <p:stCondLst>
+                                            <p:cond delay="0"/>
+                                          </p:stCondLst>
+                                        </p:cTn>
+                                        <p:tgtEl>
+                                          <p:spTgt spid="3">
+                                            <p:txEl>
+                                              <p:pRg st="4" end="4"/>
+                                            </p:txEl>
+                                          </p:spTgt>
+                                        </p:tgtEl>
+                                        <p:attrNameLst>
+                                          <p:attrName>style.visibility</p:attrName>
+                                        </p:attrNameLst>
+                                      </p:cBhvr>
+                                      <p:to>
+                                        <p:strVal val="visible"/>
+                                      </p:to>
+                                    </p:set>
+                                  </p:childTnLst>
+                                </p:cTn>
+                              </p:par>
+                            </p:childTnLst>
+                          </p:cTn>
+                        </p:par>
+                      </p:childTnLst>
+                    </p:cTn>
+                  </p:par>
+                  <p:par>
+                    <p:cTn id="23" fill="hold">
+                      <p:stCondLst>
+                        <p:cond delay="indefinite"/>
+                      </p:stCondLst>
+                      <p:childTnLst>
+                        <p:par>
+                          <p:cTn id="24" fill="hold">
+                            <p:stCondLst>
+                              <p:cond delay="0"/>
+                            </p:stCondLst>
+                            <p:childTnLst>
+                              <p:par>
+                                <p:cTn id="25" presetID="1" presetClass="entr" presetSubtype="0" fill="hold" nodeType="clickEffect">
+                                  <p:stCondLst>
+                                    <p:cond delay="0"/>
+                                  </p:stCondLst>
+                                  <p:childTnLst>
+                                    <p:set>
+                                      <p:cBhvr>
+                                        <p:cTn id="26" dur="1" fill="hold">
+                                          <p:stCondLst>
+                                            <p:cond delay="0"/>
+                                          </p:stCondLst>
+                                        </p:cTn>
+                                        <p:tgtEl>
+                                          <p:spTgt spid="3">
+                                            <p:txEl>
+                                              <p:pRg st="5" end="5"/>
+                                            </p:txEl>
+                                          </p:spTgt>
+                                        </p:tgtEl>
+                                        <p:attrNameLst>
+                                          <p:attrName>style.visibility</p:attrName>
+                                        </p:attrNameLst>
+                                      </p:cBhvr>
+                                      <p:to>
+                                        <p:strVal val="visible"/>
+                                      </p:to>
+                                    </p:set>
+                                  </p:childTnLst>
+                                </p:cTn>
+                              </p:par>
+                            </p:childTnLst>
+                          </p:cTn>
+                        </p:par>
+                      </p:childTnLst>
+                    </p:cTn>
+                  </p:par>
+                  <p:par>
+                    <p:cTn id="27" fill="hold">
+                      <p:stCondLst>
+                        <p:cond delay="indefinite"/>
+                      </p:stCondLst>
+                      <p:childTnLst>
+                        <p:par>
+                          <p:cTn id="28" fill="hold">
+                            <p:stCondLst>
+                              <p:cond delay="0"/>
+                            </p:stCondLst>
+                            <p:childTnLst>
+                              <p:par>
+                                <p:cTn id="29" presetID="1" presetClass="entr" presetSubtype="0" fill="hold" nodeType="clickEffect">
+                                  <p:stCondLst>
+                                    <p:cond delay="0"/>
+                                  </p:stCondLst>
+                                  <p:childTnLst>
+                                    <p:set>
+                                      <p:cBhvr>
+                                        <p:cTn id="30" dur="1" fill="hold">
+                                          <p:stCondLst>
+                                            <p:cond delay="0"/>
+                                          </p:stCondLst>
+                                        </p:cTn>
+                                        <p:tgtEl>
+                                          <p:spTgt spid="3">
+                                            <p:txEl>
+                                              <p:pRg st="6" end="6"/>
+                                            </p:txEl>
+                                          </p:spTgt>
+                                        </p:tgtEl>
+                                        <p:attrNameLst>
+                                          <p:attrName>style.visibility</p:attrName>
+                                        </p:attrNameLst>
+                                      </p:cBhvr>
+                                      <p:to>
+                                        <p:strVal val="visible"/>
+                                      </p:to>
+                                    </p:set>
+                                  </p:childTnLst>
+                                </p:cTn>
+                              </p:par>
+                            </p:childTnLst>
+                          </p:cTn>
+                        </p:par>
+                      </p:childTnLst>
+                    </p:cTn>
+                  </p:par>
+                  <p:par>
+                    <p:cTn id="31" fill="hold">
+                      <p:stCondLst>
+                        <p:cond delay="indefinite"/>
+                      </p:stCondLst>
+                      <p:childTnLst>
+                        <p:par>
+                          <p:cTn id="32" fill="hold">
+                            <p:stCondLst>
+                              <p:cond delay="0"/>
+                            </p:stCondLst>
+                            <p:childTnLst>
+                              <p:par>
+                                <p:cTn id="33" presetID="1" presetClass="entr" presetSubtype="0" fill="hold" nodeType="clickEffect">
+                                  <p:stCondLst>
+                                    <p:cond delay="0"/>
+                                  </p:stCondLst>
+                                  <p:childTnLst>
+                                    <p:set>
+                                      <p:cBhvr>
+                                        <p:cTn id="34" dur="1" fill="hold">
+                                          <p:stCondLst>
+                                            <p:cond delay="0"/>
+                                          </p:stCondLst>
+                                        </p:cTn>
+                                        <p:tgtEl>
+                                          <p:spTgt spid="3">
+                                            <p:txEl>
+                                              <p:pRg st="7" end="7"/>
+                                            </p:txEl>
+                                          </p:spTgt>
+                                        </p:tgtEl>
+                                        <p:attrNameLst>
+                                          <p:attrName>style.visibility</p:attrName>
+                                        </p:attrNameLst>
+                                      </p:cBhvr>
+                                      <p:to>
+                                        <p:strVal val="visible"/>
+                                      </p:to>
+                                    </p:set>
+                                  </p:childTnLst>
+                                </p:cTn>
+                              </p:par>
+                            </p:childTnLst>
+                          </p:cTn>
+                        </p:par>
+                      </p:childTnLst>
+                    </p:cTn>
+                  </p:par>
+                </p:childTnLst>
+              </p:cTn>
+              <p:prevCondLst>
+                <p:cond evt="onPrev" delay="0">
+                  <p:tgtEl>
+                    <p:sldTgt/>
+                  </p:tgtEl>
+                </p:cond>
+              </p:prevCondLst>
+              <p:nextCondLst>
+                <p:cond evt="onNext" delay="0">
+                  <p:tgtEl>
+                    <p:sldTgt/>
+                  </p:tgtEl>
+                </p:cond>
+              </p:nextCondLst>
+            </p:seq>
+          </p:childTnLst>
+        </p:cTn>
+      </p:par>
+    </p:tnLst>
+  </p:timing>
+</p:sld>
+</file>
+
+<file path=ppt/slides/slide21.xml><?xml version="1.0" encoding="utf-8"?>
 <p:sld xmlns:a="http://schemas.openxmlformats.org/drawingml/2006/main" xmlns:r="http://schemas.openxmlformats.org/officeDocument/2006/relationships" xmlns:p="http://schemas.openxmlformats.org/presentationml/2006/main">
   <p:cSld>
     <p:spTree>
@@ -12428,7 +12647,7 @@
 </p:sld>
 </file>
 
-<file path=ppt/slides/slide21.xml><?xml version="1.0" encoding="utf-8"?>
+<file path=ppt/slides/slide22.xml><?xml version="1.0" encoding="utf-8"?>
 <p:sld xmlns:a="http://schemas.openxmlformats.org/drawingml/2006/main" xmlns:r="http://schemas.openxmlformats.org/officeDocument/2006/relationships" xmlns:p="http://schemas.openxmlformats.org/presentationml/2006/main">
   <p:cSld>
     <p:spTree>
@@ -12869,7 +13088,7 @@
 </p:sld>
 </file>
 
-<file path=ppt/slides/slide22.xml><?xml version="1.0" encoding="utf-8"?>
+<file path=ppt/slides/slide23.xml><?xml version="1.0" encoding="utf-8"?>
 <p:sld xmlns:a="http://schemas.openxmlformats.org/drawingml/2006/main" xmlns:r="http://schemas.openxmlformats.org/officeDocument/2006/relationships" xmlns:p="http://schemas.openxmlformats.org/presentationml/2006/main">
   <p:cSld>
     <p:spTree>
@@ -13890,7 +14109,7 @@
 </p:sld>
 </file>
 
-<file path=ppt/slides/slide23.xml><?xml version="1.0" encoding="utf-8"?>
+<file path=ppt/slides/slide24.xml><?xml version="1.0" encoding="utf-8"?>
 <p:sld xmlns:a="http://schemas.openxmlformats.org/drawingml/2006/main" xmlns:r="http://schemas.openxmlformats.org/officeDocument/2006/relationships" xmlns:p="http://schemas.openxmlformats.org/presentationml/2006/main">
   <p:cSld>
     <p:bg>
@@ -13993,7 +14212,7 @@
 </p:sld>
 </file>
 
-<file path=ppt/slides/slide24.xml><?xml version="1.0" encoding="utf-8"?>
+<file path=ppt/slides/slide25.xml><?xml version="1.0" encoding="utf-8"?>
 <p:sld xmlns:a="http://schemas.openxmlformats.org/drawingml/2006/main" xmlns:r="http://schemas.openxmlformats.org/officeDocument/2006/relationships" xmlns:p="http://schemas.openxmlformats.org/presentationml/2006/main">
   <p:cSld>
     <p:spTree>
@@ -14662,7 +14881,7 @@
 </p:sld>
 </file>
 
-<file path=ppt/slides/slide25.xml><?xml version="1.0" encoding="utf-8"?>
+<file path=ppt/slides/slide26.xml><?xml version="1.0" encoding="utf-8"?>
 <p:sld xmlns:a="http://schemas.openxmlformats.org/drawingml/2006/main" xmlns:r="http://schemas.openxmlformats.org/officeDocument/2006/relationships" xmlns:p="http://schemas.openxmlformats.org/presentationml/2006/main">
   <p:cSld>
     <p:spTree>
@@ -14771,7 +14990,7 @@
 </p:sld>
 </file>
 
-<file path=ppt/slides/slide26.xml><?xml version="1.0" encoding="utf-8"?>
+<file path=ppt/slides/slide27.xml><?xml version="1.0" encoding="utf-8"?>
 <p:sld xmlns:a="http://schemas.openxmlformats.org/drawingml/2006/main" xmlns:r="http://schemas.openxmlformats.org/officeDocument/2006/relationships" xmlns:p="http://schemas.openxmlformats.org/presentationml/2006/main">
   <p:cSld>
     <p:spTree>
@@ -14866,7 +15085,7 @@
 </p:sld>
 </file>
 
-<file path=ppt/slides/slide27.xml><?xml version="1.0" encoding="utf-8"?>
+<file path=ppt/slides/slide28.xml><?xml version="1.0" encoding="utf-8"?>
 <p:sld xmlns:a="http://schemas.openxmlformats.org/drawingml/2006/main" xmlns:r="http://schemas.openxmlformats.org/officeDocument/2006/relationships" xmlns:p="http://schemas.openxmlformats.org/presentationml/2006/main">
   <p:cSld>
     <p:spTree>
@@ -14976,7 +15195,7 @@
 </p:sld>
 </file>
 
-<file path=ppt/slides/slide28.xml><?xml version="1.0" encoding="utf-8"?>
+<file path=ppt/slides/slide29.xml><?xml version="1.0" encoding="utf-8"?>
 <p:sld xmlns:a="http://schemas.openxmlformats.org/drawingml/2006/main" xmlns:r="http://schemas.openxmlformats.org/officeDocument/2006/relationships" xmlns:p="http://schemas.openxmlformats.org/presentationml/2006/main">
   <p:cSld>
     <p:spTree>
@@ -15583,461 +15802,6 @@
 </p:sld>
 </file>
 
-<file path=ppt/slides/slide29.xml><?xml version="1.0" encoding="utf-8"?>
-<p:sld xmlns:a="http://schemas.openxmlformats.org/drawingml/2006/main" xmlns:r="http://schemas.openxmlformats.org/officeDocument/2006/relationships" xmlns:p="http://schemas.openxmlformats.org/presentationml/2006/main">
-  <p:cSld>
-    <p:spTree>
-      <p:nvGrpSpPr>
-        <p:cNvPr id="1" name=""/>
-        <p:cNvGrpSpPr/>
-        <p:nvPr/>
-      </p:nvGrpSpPr>
-      <p:grpSpPr>
-        <a:xfrm>
-          <a:off x="0" y="0"/>
-          <a:ext cx="0" cy="0"/>
-          <a:chOff x="0" y="0"/>
-          <a:chExt cx="0" cy="0"/>
-        </a:xfrm>
-      </p:grpSpPr>
-      <p:sp>
-        <p:nvSpPr>
-          <p:cNvPr id="2" name="Title 1">
-            <a:extLst>
-              <a:ext uri="{FF2B5EF4-FFF2-40B4-BE49-F238E27FC236}">
-                <a16:creationId xmlns:a16="http://schemas.microsoft.com/office/drawing/2014/main" id="{8207F09F-B406-FB4C-ABE0-890E4E4F95C8}"/>
-              </a:ext>
-            </a:extLst>
-          </p:cNvPr>
-          <p:cNvSpPr>
-            <a:spLocks noGrp="1"/>
-          </p:cNvSpPr>
-          <p:nvPr>
-            <p:ph type="ctrTitle"/>
-          </p:nvPr>
-        </p:nvSpPr>
-        <p:spPr>
-          <a:xfrm>
-            <a:off x="1524000" y="565772"/>
-            <a:ext cx="9144000" cy="1544546"/>
-          </a:xfrm>
-        </p:spPr>
-        <p:txBody>
-          <a:bodyPr>
-            <a:normAutofit fontScale="90000"/>
-          </a:bodyPr>
-          <a:lstStyle/>
-          <a:p>
-            <a:r>
-              <a:rPr lang="en-US" sz="3600"/>
-              <a:t>Spark Data Abstractions: RDDs</a:t>
-            </a:r>
-            <a:br>
-              <a:rPr lang="en-US" sz="3600"/>
-            </a:br>
-            <a:r>
-              <a:rPr lang="en-US" sz="3600"/>
-              <a:t>Billions of data elements</a:t>
-            </a:r>
-            <a:br>
-              <a:rPr lang="en-US"/>
-            </a:br>
-            <a:r>
-              <a:rPr lang="en-US" b="1"/>
-              <a:t>Each element</a:t>
-            </a:r>
-            <a:r>
-              <a:rPr lang="en-US"/>
-              <a:t>: </a:t>
-            </a:r>
-            <a:r>
-              <a:rPr lang="en-US" sz="3600">
-                <a:latin typeface="Courier" pitchFamily="2" charset="0"/>
-              </a:rPr>
-              <a:t>(String, (Float, Float))</a:t>
-            </a:r>
-            <a:endParaRPr lang="en-US">
-              <a:latin typeface="Courier" pitchFamily="2" charset="0"/>
-            </a:endParaRPr>
-          </a:p>
-        </p:txBody>
-      </p:sp>
-      <p:sp>
-        <p:nvSpPr>
-          <p:cNvPr id="3" name="Rectangle 2">
-            <a:extLst>
-              <a:ext uri="{FF2B5EF4-FFF2-40B4-BE49-F238E27FC236}">
-                <a16:creationId xmlns:a16="http://schemas.microsoft.com/office/drawing/2014/main" id="{36D03003-7654-F6E6-3F41-F63F0836835D}"/>
-              </a:ext>
-            </a:extLst>
-          </p:cNvPr>
-          <p:cNvSpPr/>
-          <p:nvPr/>
-        </p:nvSpPr>
-        <p:spPr>
-          <a:xfrm>
-            <a:off x="3892378" y="2883839"/>
-            <a:ext cx="4522573" cy="617838"/>
-          </a:xfrm>
-          <a:prstGeom prst="rect">
-            <a:avLst/>
-          </a:prstGeom>
-          <a:solidFill>
-            <a:schemeClr val="accent1"/>
-          </a:solidFill>
-        </p:spPr>
-        <p:style>
-          <a:lnRef idx="2">
-            <a:schemeClr val="accent6"/>
-          </a:lnRef>
-          <a:fillRef idx="1">
-            <a:schemeClr val="lt1"/>
-          </a:fillRef>
-          <a:effectRef idx="0">
-            <a:schemeClr val="accent6"/>
-          </a:effectRef>
-          <a:fontRef idx="minor">
-            <a:schemeClr val="dk1"/>
-          </a:fontRef>
-        </p:style>
-        <p:txBody>
-          <a:bodyPr rtlCol="0" anchor="ctr"/>
-          <a:lstStyle/>
-          <a:p>
-            <a:pPr algn="ctr"/>
-            <a:r>
-              <a:rPr lang="en-US" sz="2400">
-                <a:latin typeface="Courier" pitchFamily="2" charset="0"/>
-              </a:rPr>
-              <a:t>(gene-1, (3.0, 4.5))</a:t>
-            </a:r>
-          </a:p>
-        </p:txBody>
-      </p:sp>
-      <p:sp>
-        <p:nvSpPr>
-          <p:cNvPr id="6" name="Rectangle 5">
-            <a:extLst>
-              <a:ext uri="{FF2B5EF4-FFF2-40B4-BE49-F238E27FC236}">
-                <a16:creationId xmlns:a16="http://schemas.microsoft.com/office/drawing/2014/main" id="{B4387292-774D-A2E0-8CFD-AA9655E89DC9}"/>
-              </a:ext>
-            </a:extLst>
-          </p:cNvPr>
-          <p:cNvSpPr/>
-          <p:nvPr/>
-        </p:nvSpPr>
-        <p:spPr>
-          <a:xfrm>
-            <a:off x="3892378" y="3521408"/>
-            <a:ext cx="4522573" cy="617838"/>
-          </a:xfrm>
-          <a:prstGeom prst="rect">
-            <a:avLst/>
-          </a:prstGeom>
-          <a:solidFill>
-            <a:schemeClr val="accent1"/>
-          </a:solidFill>
-        </p:spPr>
-        <p:style>
-          <a:lnRef idx="2">
-            <a:schemeClr val="accent6"/>
-          </a:lnRef>
-          <a:fillRef idx="1">
-            <a:schemeClr val="lt1"/>
-          </a:fillRef>
-          <a:effectRef idx="0">
-            <a:schemeClr val="accent6"/>
-          </a:effectRef>
-          <a:fontRef idx="minor">
-            <a:schemeClr val="dk1"/>
-          </a:fontRef>
-        </p:style>
-        <p:txBody>
-          <a:bodyPr rtlCol="0" anchor="ctr"/>
-          <a:lstStyle/>
-          <a:p>
-            <a:pPr algn="ctr"/>
-            <a:r>
-              <a:rPr lang="en-US" sz="2400">
-                <a:latin typeface="Courier" pitchFamily="2" charset="0"/>
-              </a:rPr>
-              <a:t>(gene-2, (1.0, 1.5))</a:t>
-            </a:r>
-          </a:p>
-        </p:txBody>
-      </p:sp>
-      <p:sp>
-        <p:nvSpPr>
-          <p:cNvPr id="7" name="Rectangle 6">
-            <a:extLst>
-              <a:ext uri="{FF2B5EF4-FFF2-40B4-BE49-F238E27FC236}">
-                <a16:creationId xmlns:a16="http://schemas.microsoft.com/office/drawing/2014/main" id="{E0C70153-45FB-FDB9-BA3D-071A040BE1E9}"/>
-              </a:ext>
-            </a:extLst>
-          </p:cNvPr>
-          <p:cNvSpPr/>
-          <p:nvPr/>
-        </p:nvSpPr>
-        <p:spPr>
-          <a:xfrm>
-            <a:off x="3892381" y="4129844"/>
-            <a:ext cx="4522572" cy="617838"/>
-          </a:xfrm>
-          <a:prstGeom prst="rect">
-            <a:avLst/>
-          </a:prstGeom>
-          <a:solidFill>
-            <a:schemeClr val="accent1"/>
-          </a:solidFill>
-        </p:spPr>
-        <p:style>
-          <a:lnRef idx="2">
-            <a:schemeClr val="accent6"/>
-          </a:lnRef>
-          <a:fillRef idx="1">
-            <a:schemeClr val="lt1"/>
-          </a:fillRef>
-          <a:effectRef idx="0">
-            <a:schemeClr val="accent6"/>
-          </a:effectRef>
-          <a:fontRef idx="minor">
-            <a:schemeClr val="dk1"/>
-          </a:fontRef>
-        </p:style>
-        <p:txBody>
-          <a:bodyPr rtlCol="0" anchor="ctr"/>
-          <a:lstStyle/>
-          <a:p>
-            <a:pPr algn="ctr"/>
-            <a:r>
-              <a:rPr lang="en-US" sz="2400">
-                <a:latin typeface="Courier" pitchFamily="2" charset="0"/>
-              </a:rPr>
-              <a:t>(gene-1, (2.1, 1.6))</a:t>
-            </a:r>
-          </a:p>
-        </p:txBody>
-      </p:sp>
-      <p:sp>
-        <p:nvSpPr>
-          <p:cNvPr id="8" name="Rectangle 7">
-            <a:extLst>
-              <a:ext uri="{FF2B5EF4-FFF2-40B4-BE49-F238E27FC236}">
-                <a16:creationId xmlns:a16="http://schemas.microsoft.com/office/drawing/2014/main" id="{2DC54BA7-A88E-2D55-E068-B678EDBF8D95}"/>
-              </a:ext>
-            </a:extLst>
-          </p:cNvPr>
-          <p:cNvSpPr/>
-          <p:nvPr/>
-        </p:nvSpPr>
-        <p:spPr>
-          <a:xfrm>
-            <a:off x="3892380" y="4747682"/>
-            <a:ext cx="4522572" cy="617838"/>
-          </a:xfrm>
-          <a:prstGeom prst="rect">
-            <a:avLst/>
-          </a:prstGeom>
-          <a:solidFill>
-            <a:schemeClr val="accent1"/>
-          </a:solidFill>
-        </p:spPr>
-        <p:style>
-          <a:lnRef idx="2">
-            <a:schemeClr val="accent6"/>
-          </a:lnRef>
-          <a:fillRef idx="1">
-            <a:schemeClr val="lt1"/>
-          </a:fillRef>
-          <a:effectRef idx="0">
-            <a:schemeClr val="accent6"/>
-          </a:effectRef>
-          <a:fontRef idx="minor">
-            <a:schemeClr val="dk1"/>
-          </a:fontRef>
-        </p:style>
-        <p:txBody>
-          <a:bodyPr rtlCol="0" anchor="ctr"/>
-          <a:lstStyle/>
-          <a:p>
-            <a:pPr algn="ctr"/>
-            <a:r>
-              <a:rPr lang="en-US" sz="2400"/>
-              <a:t>…</a:t>
-            </a:r>
-          </a:p>
-        </p:txBody>
-      </p:sp>
-      <p:sp>
-        <p:nvSpPr>
-          <p:cNvPr id="9" name="Rectangle 8">
-            <a:extLst>
-              <a:ext uri="{FF2B5EF4-FFF2-40B4-BE49-F238E27FC236}">
-                <a16:creationId xmlns:a16="http://schemas.microsoft.com/office/drawing/2014/main" id="{DFA70693-A1D8-34A9-453A-168C09D12FEF}"/>
-              </a:ext>
-            </a:extLst>
-          </p:cNvPr>
-          <p:cNvSpPr/>
-          <p:nvPr/>
-        </p:nvSpPr>
-        <p:spPr>
-          <a:xfrm>
-            <a:off x="3892379" y="5365520"/>
-            <a:ext cx="4522572" cy="617838"/>
-          </a:xfrm>
-          <a:prstGeom prst="rect">
-            <a:avLst/>
-          </a:prstGeom>
-          <a:solidFill>
-            <a:schemeClr val="accent1"/>
-          </a:solidFill>
-        </p:spPr>
-        <p:style>
-          <a:lnRef idx="2">
-            <a:schemeClr val="accent6"/>
-          </a:lnRef>
-          <a:fillRef idx="1">
-            <a:schemeClr val="lt1"/>
-          </a:fillRef>
-          <a:effectRef idx="0">
-            <a:schemeClr val="accent6"/>
-          </a:effectRef>
-          <a:fontRef idx="minor">
-            <a:schemeClr val="dk1"/>
-          </a:fontRef>
-        </p:style>
-        <p:txBody>
-          <a:bodyPr rtlCol="0" anchor="ctr"/>
-          <a:lstStyle/>
-          <a:p>
-            <a:pPr algn="ctr"/>
-            <a:r>
-              <a:rPr lang="en-US" sz="2400">
-                <a:latin typeface="Courier" pitchFamily="2" charset="0"/>
-              </a:rPr>
-              <a:t>(gene-8, (3.1, 5.1))</a:t>
-            </a:r>
-          </a:p>
-        </p:txBody>
-      </p:sp>
-      <p:sp>
-        <p:nvSpPr>
-          <p:cNvPr id="4" name="TextBox 3">
-            <a:extLst>
-              <a:ext uri="{FF2B5EF4-FFF2-40B4-BE49-F238E27FC236}">
-                <a16:creationId xmlns:a16="http://schemas.microsoft.com/office/drawing/2014/main" id="{CBFFCA8E-1E83-60DF-7F07-5461F30BA5AE}"/>
-              </a:ext>
-            </a:extLst>
-          </p:cNvPr>
-          <p:cNvSpPr txBox="1"/>
-          <p:nvPr/>
-        </p:nvSpPr>
-        <p:spPr>
-          <a:xfrm>
-            <a:off x="2413066" y="3059668"/>
-            <a:ext cx="1300959" cy="369332"/>
-          </a:xfrm>
-          <a:prstGeom prst="rect">
-            <a:avLst/>
-          </a:prstGeom>
-          <a:noFill/>
-        </p:spPr>
-        <p:txBody>
-          <a:bodyPr wrap="square" rtlCol="0">
-            <a:spAutoFit/>
-          </a:bodyPr>
-          <a:lstStyle/>
-          <a:p>
-            <a:r>
-              <a:rPr lang="en-US"/>
-              <a:t>Element-1:</a:t>
-            </a:r>
-          </a:p>
-        </p:txBody>
-      </p:sp>
-      <p:sp>
-        <p:nvSpPr>
-          <p:cNvPr id="10" name="TextBox 9">
-            <a:extLst>
-              <a:ext uri="{FF2B5EF4-FFF2-40B4-BE49-F238E27FC236}">
-                <a16:creationId xmlns:a16="http://schemas.microsoft.com/office/drawing/2014/main" id="{65BEB91C-B550-5236-0253-66528F8B1595}"/>
-              </a:ext>
-            </a:extLst>
-          </p:cNvPr>
-          <p:cNvSpPr txBox="1"/>
-          <p:nvPr/>
-        </p:nvSpPr>
-        <p:spPr>
-          <a:xfrm>
-            <a:off x="2413067" y="3645661"/>
-            <a:ext cx="1300959" cy="369332"/>
-          </a:xfrm>
-          <a:prstGeom prst="rect">
-            <a:avLst/>
-          </a:prstGeom>
-          <a:noFill/>
-        </p:spPr>
-        <p:txBody>
-          <a:bodyPr wrap="square" rtlCol="0">
-            <a:spAutoFit/>
-          </a:bodyPr>
-          <a:lstStyle/>
-          <a:p>
-            <a:r>
-              <a:rPr lang="en-US"/>
-              <a:t>Element-2:</a:t>
-            </a:r>
-          </a:p>
-        </p:txBody>
-      </p:sp>
-      <p:sp>
-        <p:nvSpPr>
-          <p:cNvPr id="11" name="TextBox 10">
-            <a:extLst>
-              <a:ext uri="{FF2B5EF4-FFF2-40B4-BE49-F238E27FC236}">
-                <a16:creationId xmlns:a16="http://schemas.microsoft.com/office/drawing/2014/main" id="{27D15F95-1521-1672-10E9-96080CB96D8F}"/>
-              </a:ext>
-            </a:extLst>
-          </p:cNvPr>
-          <p:cNvSpPr txBox="1"/>
-          <p:nvPr/>
-        </p:nvSpPr>
-        <p:spPr>
-          <a:xfrm>
-            <a:off x="2413067" y="4254097"/>
-            <a:ext cx="1300959" cy="369332"/>
-          </a:xfrm>
-          <a:prstGeom prst="rect">
-            <a:avLst/>
-          </a:prstGeom>
-          <a:noFill/>
-        </p:spPr>
-        <p:txBody>
-          <a:bodyPr wrap="square" rtlCol="0">
-            <a:spAutoFit/>
-          </a:bodyPr>
-          <a:lstStyle/>
-          <a:p>
-            <a:r>
-              <a:rPr lang="en-US"/>
-              <a:t>Element-3:</a:t>
-            </a:r>
-          </a:p>
-        </p:txBody>
-      </p:sp>
-    </p:spTree>
-    <p:extLst>
-      <p:ext uri="{BB962C8B-B14F-4D97-AF65-F5344CB8AC3E}">
-        <p14:creationId xmlns:p14="http://schemas.microsoft.com/office/powerpoint/2010/main" val="321331892"/>
-      </p:ext>
-    </p:extLst>
-  </p:cSld>
-  <p:clrMapOvr>
-    <a:masterClrMapping/>
-  </p:clrMapOvr>
-</p:sld>
-</file>
-
 <file path=ppt/slides/slide3.xml><?xml version="1.0" encoding="utf-8"?>
 <p:sld xmlns:a="http://schemas.openxmlformats.org/drawingml/2006/main" xmlns:r="http://schemas.openxmlformats.org/officeDocument/2006/relationships" xmlns:p="http://schemas.openxmlformats.org/presentationml/2006/main">
   <p:cSld>
@@ -16446,6 +16210,461 @@
         <p:spPr>
           <a:xfrm>
             <a:off x="1524000" y="565772"/>
+            <a:ext cx="9144000" cy="1544546"/>
+          </a:xfrm>
+        </p:spPr>
+        <p:txBody>
+          <a:bodyPr>
+            <a:normAutofit fontScale="90000"/>
+          </a:bodyPr>
+          <a:lstStyle/>
+          <a:p>
+            <a:r>
+              <a:rPr lang="en-US" sz="3600"/>
+              <a:t>Spark Data Abstractions: RDDs</a:t>
+            </a:r>
+            <a:br>
+              <a:rPr lang="en-US" sz="3600"/>
+            </a:br>
+            <a:r>
+              <a:rPr lang="en-US" sz="3600"/>
+              <a:t>Billions of data elements</a:t>
+            </a:r>
+            <a:br>
+              <a:rPr lang="en-US"/>
+            </a:br>
+            <a:r>
+              <a:rPr lang="en-US" b="1"/>
+              <a:t>Each element</a:t>
+            </a:r>
+            <a:r>
+              <a:rPr lang="en-US"/>
+              <a:t>: </a:t>
+            </a:r>
+            <a:r>
+              <a:rPr lang="en-US" sz="3600">
+                <a:latin typeface="Courier" pitchFamily="2" charset="0"/>
+              </a:rPr>
+              <a:t>(String, (Float, Float))</a:t>
+            </a:r>
+            <a:endParaRPr lang="en-US">
+              <a:latin typeface="Courier" pitchFamily="2" charset="0"/>
+            </a:endParaRPr>
+          </a:p>
+        </p:txBody>
+      </p:sp>
+      <p:sp>
+        <p:nvSpPr>
+          <p:cNvPr id="3" name="Rectangle 2">
+            <a:extLst>
+              <a:ext uri="{FF2B5EF4-FFF2-40B4-BE49-F238E27FC236}">
+                <a16:creationId xmlns:a16="http://schemas.microsoft.com/office/drawing/2014/main" id="{36D03003-7654-F6E6-3F41-F63F0836835D}"/>
+              </a:ext>
+            </a:extLst>
+          </p:cNvPr>
+          <p:cNvSpPr/>
+          <p:nvPr/>
+        </p:nvSpPr>
+        <p:spPr>
+          <a:xfrm>
+            <a:off x="3892378" y="2883839"/>
+            <a:ext cx="4522573" cy="617838"/>
+          </a:xfrm>
+          <a:prstGeom prst="rect">
+            <a:avLst/>
+          </a:prstGeom>
+          <a:solidFill>
+            <a:schemeClr val="accent1"/>
+          </a:solidFill>
+        </p:spPr>
+        <p:style>
+          <a:lnRef idx="2">
+            <a:schemeClr val="accent6"/>
+          </a:lnRef>
+          <a:fillRef idx="1">
+            <a:schemeClr val="lt1"/>
+          </a:fillRef>
+          <a:effectRef idx="0">
+            <a:schemeClr val="accent6"/>
+          </a:effectRef>
+          <a:fontRef idx="minor">
+            <a:schemeClr val="dk1"/>
+          </a:fontRef>
+        </p:style>
+        <p:txBody>
+          <a:bodyPr rtlCol="0" anchor="ctr"/>
+          <a:lstStyle/>
+          <a:p>
+            <a:pPr algn="ctr"/>
+            <a:r>
+              <a:rPr lang="en-US" sz="2400">
+                <a:latin typeface="Courier" pitchFamily="2" charset="0"/>
+              </a:rPr>
+              <a:t>(gene-1, (3.0, 4.5))</a:t>
+            </a:r>
+          </a:p>
+        </p:txBody>
+      </p:sp>
+      <p:sp>
+        <p:nvSpPr>
+          <p:cNvPr id="6" name="Rectangle 5">
+            <a:extLst>
+              <a:ext uri="{FF2B5EF4-FFF2-40B4-BE49-F238E27FC236}">
+                <a16:creationId xmlns:a16="http://schemas.microsoft.com/office/drawing/2014/main" id="{B4387292-774D-A2E0-8CFD-AA9655E89DC9}"/>
+              </a:ext>
+            </a:extLst>
+          </p:cNvPr>
+          <p:cNvSpPr/>
+          <p:nvPr/>
+        </p:nvSpPr>
+        <p:spPr>
+          <a:xfrm>
+            <a:off x="3892378" y="3521408"/>
+            <a:ext cx="4522573" cy="617838"/>
+          </a:xfrm>
+          <a:prstGeom prst="rect">
+            <a:avLst/>
+          </a:prstGeom>
+          <a:solidFill>
+            <a:schemeClr val="accent1"/>
+          </a:solidFill>
+        </p:spPr>
+        <p:style>
+          <a:lnRef idx="2">
+            <a:schemeClr val="accent6"/>
+          </a:lnRef>
+          <a:fillRef idx="1">
+            <a:schemeClr val="lt1"/>
+          </a:fillRef>
+          <a:effectRef idx="0">
+            <a:schemeClr val="accent6"/>
+          </a:effectRef>
+          <a:fontRef idx="minor">
+            <a:schemeClr val="dk1"/>
+          </a:fontRef>
+        </p:style>
+        <p:txBody>
+          <a:bodyPr rtlCol="0" anchor="ctr"/>
+          <a:lstStyle/>
+          <a:p>
+            <a:pPr algn="ctr"/>
+            <a:r>
+              <a:rPr lang="en-US" sz="2400">
+                <a:latin typeface="Courier" pitchFamily="2" charset="0"/>
+              </a:rPr>
+              <a:t>(gene-2, (1.0, 1.5))</a:t>
+            </a:r>
+          </a:p>
+        </p:txBody>
+      </p:sp>
+      <p:sp>
+        <p:nvSpPr>
+          <p:cNvPr id="7" name="Rectangle 6">
+            <a:extLst>
+              <a:ext uri="{FF2B5EF4-FFF2-40B4-BE49-F238E27FC236}">
+                <a16:creationId xmlns:a16="http://schemas.microsoft.com/office/drawing/2014/main" id="{E0C70153-45FB-FDB9-BA3D-071A040BE1E9}"/>
+              </a:ext>
+            </a:extLst>
+          </p:cNvPr>
+          <p:cNvSpPr/>
+          <p:nvPr/>
+        </p:nvSpPr>
+        <p:spPr>
+          <a:xfrm>
+            <a:off x="3892381" y="4129844"/>
+            <a:ext cx="4522572" cy="617838"/>
+          </a:xfrm>
+          <a:prstGeom prst="rect">
+            <a:avLst/>
+          </a:prstGeom>
+          <a:solidFill>
+            <a:schemeClr val="accent1"/>
+          </a:solidFill>
+        </p:spPr>
+        <p:style>
+          <a:lnRef idx="2">
+            <a:schemeClr val="accent6"/>
+          </a:lnRef>
+          <a:fillRef idx="1">
+            <a:schemeClr val="lt1"/>
+          </a:fillRef>
+          <a:effectRef idx="0">
+            <a:schemeClr val="accent6"/>
+          </a:effectRef>
+          <a:fontRef idx="minor">
+            <a:schemeClr val="dk1"/>
+          </a:fontRef>
+        </p:style>
+        <p:txBody>
+          <a:bodyPr rtlCol="0" anchor="ctr"/>
+          <a:lstStyle/>
+          <a:p>
+            <a:pPr algn="ctr"/>
+            <a:r>
+              <a:rPr lang="en-US" sz="2400">
+                <a:latin typeface="Courier" pitchFamily="2" charset="0"/>
+              </a:rPr>
+              <a:t>(gene-1, (2.1, 1.6))</a:t>
+            </a:r>
+          </a:p>
+        </p:txBody>
+      </p:sp>
+      <p:sp>
+        <p:nvSpPr>
+          <p:cNvPr id="8" name="Rectangle 7">
+            <a:extLst>
+              <a:ext uri="{FF2B5EF4-FFF2-40B4-BE49-F238E27FC236}">
+                <a16:creationId xmlns:a16="http://schemas.microsoft.com/office/drawing/2014/main" id="{2DC54BA7-A88E-2D55-E068-B678EDBF8D95}"/>
+              </a:ext>
+            </a:extLst>
+          </p:cNvPr>
+          <p:cNvSpPr/>
+          <p:nvPr/>
+        </p:nvSpPr>
+        <p:spPr>
+          <a:xfrm>
+            <a:off x="3892380" y="4747682"/>
+            <a:ext cx="4522572" cy="617838"/>
+          </a:xfrm>
+          <a:prstGeom prst="rect">
+            <a:avLst/>
+          </a:prstGeom>
+          <a:solidFill>
+            <a:schemeClr val="accent1"/>
+          </a:solidFill>
+        </p:spPr>
+        <p:style>
+          <a:lnRef idx="2">
+            <a:schemeClr val="accent6"/>
+          </a:lnRef>
+          <a:fillRef idx="1">
+            <a:schemeClr val="lt1"/>
+          </a:fillRef>
+          <a:effectRef idx="0">
+            <a:schemeClr val="accent6"/>
+          </a:effectRef>
+          <a:fontRef idx="minor">
+            <a:schemeClr val="dk1"/>
+          </a:fontRef>
+        </p:style>
+        <p:txBody>
+          <a:bodyPr rtlCol="0" anchor="ctr"/>
+          <a:lstStyle/>
+          <a:p>
+            <a:pPr algn="ctr"/>
+            <a:r>
+              <a:rPr lang="en-US" sz="2400"/>
+              <a:t>…</a:t>
+            </a:r>
+          </a:p>
+        </p:txBody>
+      </p:sp>
+      <p:sp>
+        <p:nvSpPr>
+          <p:cNvPr id="9" name="Rectangle 8">
+            <a:extLst>
+              <a:ext uri="{FF2B5EF4-FFF2-40B4-BE49-F238E27FC236}">
+                <a16:creationId xmlns:a16="http://schemas.microsoft.com/office/drawing/2014/main" id="{DFA70693-A1D8-34A9-453A-168C09D12FEF}"/>
+              </a:ext>
+            </a:extLst>
+          </p:cNvPr>
+          <p:cNvSpPr/>
+          <p:nvPr/>
+        </p:nvSpPr>
+        <p:spPr>
+          <a:xfrm>
+            <a:off x="3892379" y="5365520"/>
+            <a:ext cx="4522572" cy="617838"/>
+          </a:xfrm>
+          <a:prstGeom prst="rect">
+            <a:avLst/>
+          </a:prstGeom>
+          <a:solidFill>
+            <a:schemeClr val="accent1"/>
+          </a:solidFill>
+        </p:spPr>
+        <p:style>
+          <a:lnRef idx="2">
+            <a:schemeClr val="accent6"/>
+          </a:lnRef>
+          <a:fillRef idx="1">
+            <a:schemeClr val="lt1"/>
+          </a:fillRef>
+          <a:effectRef idx="0">
+            <a:schemeClr val="accent6"/>
+          </a:effectRef>
+          <a:fontRef idx="minor">
+            <a:schemeClr val="dk1"/>
+          </a:fontRef>
+        </p:style>
+        <p:txBody>
+          <a:bodyPr rtlCol="0" anchor="ctr"/>
+          <a:lstStyle/>
+          <a:p>
+            <a:pPr algn="ctr"/>
+            <a:r>
+              <a:rPr lang="en-US" sz="2400">
+                <a:latin typeface="Courier" pitchFamily="2" charset="0"/>
+              </a:rPr>
+              <a:t>(gene-8, (3.1, 5.1))</a:t>
+            </a:r>
+          </a:p>
+        </p:txBody>
+      </p:sp>
+      <p:sp>
+        <p:nvSpPr>
+          <p:cNvPr id="4" name="TextBox 3">
+            <a:extLst>
+              <a:ext uri="{FF2B5EF4-FFF2-40B4-BE49-F238E27FC236}">
+                <a16:creationId xmlns:a16="http://schemas.microsoft.com/office/drawing/2014/main" id="{CBFFCA8E-1E83-60DF-7F07-5461F30BA5AE}"/>
+              </a:ext>
+            </a:extLst>
+          </p:cNvPr>
+          <p:cNvSpPr txBox="1"/>
+          <p:nvPr/>
+        </p:nvSpPr>
+        <p:spPr>
+          <a:xfrm>
+            <a:off x="2413066" y="3059668"/>
+            <a:ext cx="1300959" cy="369332"/>
+          </a:xfrm>
+          <a:prstGeom prst="rect">
+            <a:avLst/>
+          </a:prstGeom>
+          <a:noFill/>
+        </p:spPr>
+        <p:txBody>
+          <a:bodyPr wrap="square" rtlCol="0">
+            <a:spAutoFit/>
+          </a:bodyPr>
+          <a:lstStyle/>
+          <a:p>
+            <a:r>
+              <a:rPr lang="en-US"/>
+              <a:t>Element-1:</a:t>
+            </a:r>
+          </a:p>
+        </p:txBody>
+      </p:sp>
+      <p:sp>
+        <p:nvSpPr>
+          <p:cNvPr id="10" name="TextBox 9">
+            <a:extLst>
+              <a:ext uri="{FF2B5EF4-FFF2-40B4-BE49-F238E27FC236}">
+                <a16:creationId xmlns:a16="http://schemas.microsoft.com/office/drawing/2014/main" id="{65BEB91C-B550-5236-0253-66528F8B1595}"/>
+              </a:ext>
+            </a:extLst>
+          </p:cNvPr>
+          <p:cNvSpPr txBox="1"/>
+          <p:nvPr/>
+        </p:nvSpPr>
+        <p:spPr>
+          <a:xfrm>
+            <a:off x="2413067" y="3645661"/>
+            <a:ext cx="1300959" cy="369332"/>
+          </a:xfrm>
+          <a:prstGeom prst="rect">
+            <a:avLst/>
+          </a:prstGeom>
+          <a:noFill/>
+        </p:spPr>
+        <p:txBody>
+          <a:bodyPr wrap="square" rtlCol="0">
+            <a:spAutoFit/>
+          </a:bodyPr>
+          <a:lstStyle/>
+          <a:p>
+            <a:r>
+              <a:rPr lang="en-US"/>
+              <a:t>Element-2:</a:t>
+            </a:r>
+          </a:p>
+        </p:txBody>
+      </p:sp>
+      <p:sp>
+        <p:nvSpPr>
+          <p:cNvPr id="11" name="TextBox 10">
+            <a:extLst>
+              <a:ext uri="{FF2B5EF4-FFF2-40B4-BE49-F238E27FC236}">
+                <a16:creationId xmlns:a16="http://schemas.microsoft.com/office/drawing/2014/main" id="{27D15F95-1521-1672-10E9-96080CB96D8F}"/>
+              </a:ext>
+            </a:extLst>
+          </p:cNvPr>
+          <p:cNvSpPr txBox="1"/>
+          <p:nvPr/>
+        </p:nvSpPr>
+        <p:spPr>
+          <a:xfrm>
+            <a:off x="2413067" y="4254097"/>
+            <a:ext cx="1300959" cy="369332"/>
+          </a:xfrm>
+          <a:prstGeom prst="rect">
+            <a:avLst/>
+          </a:prstGeom>
+          <a:noFill/>
+        </p:spPr>
+        <p:txBody>
+          <a:bodyPr wrap="square" rtlCol="0">
+            <a:spAutoFit/>
+          </a:bodyPr>
+          <a:lstStyle/>
+          <a:p>
+            <a:r>
+              <a:rPr lang="en-US"/>
+              <a:t>Element-3:</a:t>
+            </a:r>
+          </a:p>
+        </p:txBody>
+      </p:sp>
+    </p:spTree>
+    <p:extLst>
+      <p:ext uri="{BB962C8B-B14F-4D97-AF65-F5344CB8AC3E}">
+        <p14:creationId xmlns:p14="http://schemas.microsoft.com/office/powerpoint/2010/main" val="321331892"/>
+      </p:ext>
+    </p:extLst>
+  </p:cSld>
+  <p:clrMapOvr>
+    <a:masterClrMapping/>
+  </p:clrMapOvr>
+</p:sld>
+</file>
+
+<file path=ppt/slides/slide31.xml><?xml version="1.0" encoding="utf-8"?>
+<p:sld xmlns:a="http://schemas.openxmlformats.org/drawingml/2006/main" xmlns:r="http://schemas.openxmlformats.org/officeDocument/2006/relationships" xmlns:p="http://schemas.openxmlformats.org/presentationml/2006/main">
+  <p:cSld>
+    <p:spTree>
+      <p:nvGrpSpPr>
+        <p:cNvPr id="1" name=""/>
+        <p:cNvGrpSpPr/>
+        <p:nvPr/>
+      </p:nvGrpSpPr>
+      <p:grpSpPr>
+        <a:xfrm>
+          <a:off x="0" y="0"/>
+          <a:ext cx="0" cy="0"/>
+          <a:chOff x="0" y="0"/>
+          <a:chExt cx="0" cy="0"/>
+        </a:xfrm>
+      </p:grpSpPr>
+      <p:sp>
+        <p:nvSpPr>
+          <p:cNvPr id="2" name="Title 1">
+            <a:extLst>
+              <a:ext uri="{FF2B5EF4-FFF2-40B4-BE49-F238E27FC236}">
+                <a16:creationId xmlns:a16="http://schemas.microsoft.com/office/drawing/2014/main" id="{8207F09F-B406-FB4C-ABE0-890E4E4F95C8}"/>
+              </a:ext>
+            </a:extLst>
+          </p:cNvPr>
+          <p:cNvSpPr>
+            <a:spLocks noGrp="1"/>
+          </p:cNvSpPr>
+          <p:nvPr>
+            <p:ph type="ctrTitle"/>
+          </p:nvPr>
+        </p:nvSpPr>
+        <p:spPr>
+          <a:xfrm>
+            <a:off x="1524000" y="565772"/>
             <a:ext cx="9144000" cy="915159"/>
           </a:xfrm>
         </p:spPr>
@@ -16508,7 +16727,7 @@
 </p:sld>
 </file>
 
-<file path=ppt/slides/slide31.xml><?xml version="1.0" encoding="utf-8"?>
+<file path=ppt/slides/slide32.xml><?xml version="1.0" encoding="utf-8"?>
 <p:sld xmlns:a="http://schemas.openxmlformats.org/drawingml/2006/main" xmlns:r="http://schemas.openxmlformats.org/officeDocument/2006/relationships" xmlns:p="http://schemas.openxmlformats.org/presentationml/2006/main">
   <p:cSld>
     <p:spTree>
@@ -17509,7 +17728,7 @@
 </p:sld>
 </file>
 
-<file path=ppt/slides/slide32.xml><?xml version="1.0" encoding="utf-8"?>
+<file path=ppt/slides/slide33.xml><?xml version="1.0" encoding="utf-8"?>
 <p:sld xmlns:a="http://schemas.openxmlformats.org/drawingml/2006/main" xmlns:r="http://schemas.openxmlformats.org/officeDocument/2006/relationships" xmlns:p="http://schemas.openxmlformats.org/presentationml/2006/main">
   <p:cSld>
     <p:spTree>
@@ -18607,7 +18826,7 @@
 </p:sld>
 </file>
 
-<file path=ppt/slides/slide33.xml><?xml version="1.0" encoding="utf-8"?>
+<file path=ppt/slides/slide34.xml><?xml version="1.0" encoding="utf-8"?>
 <p:sld xmlns:a="http://schemas.openxmlformats.org/drawingml/2006/main" xmlns:r="http://schemas.openxmlformats.org/officeDocument/2006/relationships" xmlns:p="http://schemas.openxmlformats.org/presentationml/2006/main">
   <p:cSld>
     <p:spTree>
@@ -18894,7 +19113,7 @@
 </p:sld>
 </file>
 
-<file path=ppt/slides/slide34.xml><?xml version="1.0" encoding="utf-8"?>
+<file path=ppt/slides/slide35.xml><?xml version="1.0" encoding="utf-8"?>
 <p:sld xmlns:a="http://schemas.openxmlformats.org/drawingml/2006/main" xmlns:r="http://schemas.openxmlformats.org/officeDocument/2006/relationships" xmlns:p="http://schemas.openxmlformats.org/presentationml/2006/main">
   <p:cSld>
     <p:spTree>
@@ -19372,7 +19591,7 @@
 </p:sld>
 </file>
 
-<file path=ppt/slides/slide35.xml><?xml version="1.0" encoding="utf-8"?>
+<file path=ppt/slides/slide36.xml><?xml version="1.0" encoding="utf-8"?>
 <p:sld xmlns:a="http://schemas.openxmlformats.org/drawingml/2006/main" xmlns:r="http://schemas.openxmlformats.org/officeDocument/2006/relationships" xmlns:p="http://schemas.openxmlformats.org/presentationml/2006/main">
   <p:cSld>
     <p:spTree>

--- a/course_information/COURSE_OUTLINE_10_WEEKS.pptx
+++ b/course_information/COURSE_OUTLINE_10_WEEKS.pptx
@@ -5,7 +5,7 @@
     <p:sldMasterId id="2147483660" r:id="rId1"/>
   </p:sldMasterIdLst>
   <p:notesMasterIdLst>
-    <p:notesMasterId r:id="rId38"/>
+    <p:notesMasterId r:id="rId45"/>
   </p:notesMasterIdLst>
   <p:sldIdLst>
     <p:sldId id="256" r:id="rId2"/>
@@ -41,9 +41,16 @@
     <p:sldId id="274" r:id="rId32"/>
     <p:sldId id="285" r:id="rId33"/>
     <p:sldId id="286" r:id="rId34"/>
-    <p:sldId id="276" r:id="rId35"/>
-    <p:sldId id="266" r:id="rId36"/>
-    <p:sldId id="267" r:id="rId37"/>
+    <p:sldId id="294" r:id="rId35"/>
+    <p:sldId id="295" r:id="rId36"/>
+    <p:sldId id="296" r:id="rId37"/>
+    <p:sldId id="297" r:id="rId38"/>
+    <p:sldId id="298" r:id="rId39"/>
+    <p:sldId id="299" r:id="rId40"/>
+    <p:sldId id="300" r:id="rId41"/>
+    <p:sldId id="276" r:id="rId42"/>
+    <p:sldId id="266" r:id="rId43"/>
+    <p:sldId id="267" r:id="rId44"/>
   </p:sldIdLst>
   <p:sldSz cx="12192000" cy="6858000"/>
   <p:notesSz cx="6858000" cy="9144000"/>
@@ -18831,7 +18838,13 @@
   <p:cSld>
     <p:spTree>
       <p:nvGrpSpPr>
-        <p:cNvPr id="1" name=""/>
+        <p:cNvPr id="1" name="">
+          <a:extLst>
+            <a:ext uri="{FF2B5EF4-FFF2-40B4-BE49-F238E27FC236}">
+              <a16:creationId xmlns:a16="http://schemas.microsoft.com/office/drawing/2014/main" id="{89EA3B6A-5B89-5D74-D46B-44E067DB7111}"/>
+            </a:ext>
+          </a:extLst>
+        </p:cNvPr>
         <p:cNvGrpSpPr/>
         <p:nvPr/>
       </p:nvGrpSpPr>
@@ -18848,7 +18861,7 @@
           <p:cNvPr id="2" name="Title 1">
             <a:extLst>
               <a:ext uri="{FF2B5EF4-FFF2-40B4-BE49-F238E27FC236}">
-                <a16:creationId xmlns:a16="http://schemas.microsoft.com/office/drawing/2014/main" id="{8207F09F-B406-FB4C-ABE0-890E4E4F95C8}"/>
+                <a16:creationId xmlns:a16="http://schemas.microsoft.com/office/drawing/2014/main" id="{F19F6548-3DB0-678C-C8BB-E0D55AF736B2}"/>
               </a:ext>
             </a:extLst>
           </p:cNvPr>
@@ -18861,28 +18874,32 @@
         </p:nvSpPr>
         <p:spPr>
           <a:xfrm>
-            <a:off x="1524000" y="974035"/>
-            <a:ext cx="9144000" cy="1222893"/>
+            <a:off x="1524000" y="382580"/>
+            <a:ext cx="9144000" cy="502003"/>
           </a:xfrm>
         </p:spPr>
         <p:txBody>
           <a:bodyPr>
-            <a:normAutofit fontScale="90000"/>
+            <a:noAutofit/>
           </a:bodyPr>
           <a:lstStyle/>
           <a:p>
             <a:r>
-              <a:rPr lang="en-US"/>
-              <a:t>3. Main Course Components</a:t>
-            </a:r>
-            <a:br>
-              <a:rPr lang="en-US"/>
-            </a:br>
-            <a:r>
-              <a:rPr lang="en-US" sz="4800"/>
-              <a:t>Serverless SQL Access to Big Data (15%)</a:t>
-            </a:r>
-            <a:endParaRPr lang="en-US"/>
+              <a:rPr lang="en-US" sz="3200" dirty="0" err="1"/>
+              <a:t>PySpark</a:t>
+            </a:r>
+            <a:r>
+              <a:rPr lang="en-US" sz="3200" dirty="0"/>
+              <a:t> </a:t>
+            </a:r>
+            <a:r>
+              <a:rPr lang="en-US" sz="3200" dirty="0" err="1"/>
+              <a:t>DataFrame</a:t>
+            </a:r>
+            <a:r>
+              <a:rPr lang="en-US" sz="3200" dirty="0"/>
+              <a:t> Example 2 - 0001</a:t>
+            </a:r>
           </a:p>
         </p:txBody>
       </p:sp>
@@ -18891,7 +18908,7 @@
           <p:cNvPr id="3" name="Subtitle 2">
             <a:extLst>
               <a:ext uri="{FF2B5EF4-FFF2-40B4-BE49-F238E27FC236}">
-                <a16:creationId xmlns:a16="http://schemas.microsoft.com/office/drawing/2014/main" id="{67BA4937-A89D-8343-B4A3-942B771C889A}"/>
+                <a16:creationId xmlns:a16="http://schemas.microsoft.com/office/drawing/2014/main" id="{206889B5-12DB-781B-4371-A7941F95D649}"/>
               </a:ext>
             </a:extLst>
           </p:cNvPr>
@@ -18904,8 +18921,8 @@
         </p:nvSpPr>
         <p:spPr>
           <a:xfrm>
-            <a:off x="1524000" y="2415209"/>
-            <a:ext cx="9144000" cy="3558208"/>
+            <a:off x="1524000" y="884584"/>
+            <a:ext cx="9144000" cy="5088834"/>
           </a:xfrm>
         </p:spPr>
         <p:txBody>
@@ -18914,52 +18931,402 @@
           </a:bodyPr>
           <a:lstStyle/>
           <a:p>
-            <a:pPr marL="1485900" lvl="2" indent="-571500" algn="l">
-              <a:buFont typeface="Arial" panose="020B0604020202020204" pitchFamily="34" charset="0"/>
-              <a:buChar char="•"/>
-            </a:pPr>
-            <a:r>
-              <a:rPr lang="en-US" sz="3600" dirty="0"/>
-              <a:t>Amazon Athena</a:t>
-            </a:r>
-          </a:p>
-          <a:p>
-            <a:pPr marL="1485900" lvl="2" indent="-571500" algn="l">
-              <a:buFont typeface="Arial" panose="020B0604020202020204" pitchFamily="34" charset="0"/>
-              <a:buChar char="•"/>
-            </a:pPr>
-            <a:r>
-              <a:rPr lang="en-US" sz="4000" dirty="0"/>
-              <a:t>Google BigQuery</a:t>
-            </a:r>
-          </a:p>
-          <a:p>
-            <a:pPr marL="1485900" lvl="2" indent="-571500" algn="l">
-              <a:buFont typeface="Arial" panose="020B0604020202020204" pitchFamily="34" charset="0"/>
-              <a:buChar char="•"/>
-            </a:pPr>
-            <a:r>
-              <a:rPr lang="en-US" sz="4000" dirty="0"/>
-              <a:t>Snowflake</a:t>
-            </a:r>
-          </a:p>
-          <a:p>
-            <a:pPr lvl="1" algn="l"/>
-            <a:endParaRPr lang="en-US" sz="1200" dirty="0"/>
-          </a:p>
-          <a:p>
-            <a:pPr marL="800100" lvl="1" indent="-342900" algn="l">
-              <a:buFont typeface="+mj-lt"/>
-              <a:buAutoNum type="arabicPeriod"/>
-            </a:pPr>
-            <a:endParaRPr lang="en-US" sz="1200" dirty="0"/>
+            <a:r>
+              <a:rPr lang="en-US" sz="2000" dirty="0">
+                <a:solidFill>
+                  <a:schemeClr val="tx1"/>
+                </a:solidFill>
+                <a:highlight>
+                  <a:srgbClr val="C0C0C0"/>
+                </a:highlight>
+                <a:latin typeface="Consolas" panose="020B0609020204030204" pitchFamily="49" charset="0"/>
+                <a:cs typeface="Consolas" panose="020B0609020204030204" pitchFamily="49" charset="0"/>
+              </a:rPr>
+              <a:t># This example introduces key intermediate concepts </a:t>
+            </a:r>
+          </a:p>
+          <a:p>
+            <a:r>
+              <a:rPr lang="en-US" sz="2000" dirty="0">
+                <a:solidFill>
+                  <a:schemeClr val="tx1"/>
+                </a:solidFill>
+                <a:highlight>
+                  <a:srgbClr val="C0C0C0"/>
+                </a:highlight>
+                <a:latin typeface="Consolas" panose="020B0609020204030204" pitchFamily="49" charset="0"/>
+                <a:cs typeface="Consolas" panose="020B0609020204030204" pitchFamily="49" charset="0"/>
+              </a:rPr>
+              <a:t># like </a:t>
+            </a:r>
+            <a:r>
+              <a:rPr lang="en-US" sz="2000" b="1" dirty="0">
+                <a:solidFill>
+                  <a:schemeClr val="tx1"/>
+                </a:solidFill>
+                <a:highlight>
+                  <a:srgbClr val="C0C0C0"/>
+                </a:highlight>
+                <a:latin typeface="Consolas" panose="020B0609020204030204" pitchFamily="49" charset="0"/>
+                <a:cs typeface="Consolas" panose="020B0609020204030204" pitchFamily="49" charset="0"/>
+              </a:rPr>
+              <a:t>aggregation (</a:t>
+            </a:r>
+            <a:r>
+              <a:rPr lang="en-US" sz="2000" b="1" dirty="0" err="1">
+                <a:solidFill>
+                  <a:schemeClr val="tx1"/>
+                </a:solidFill>
+                <a:highlight>
+                  <a:srgbClr val="C0C0C0"/>
+                </a:highlight>
+                <a:latin typeface="Consolas" panose="020B0609020204030204" pitchFamily="49" charset="0"/>
+                <a:cs typeface="Consolas" panose="020B0609020204030204" pitchFamily="49" charset="0"/>
+              </a:rPr>
+              <a:t>groupBy</a:t>
+            </a:r>
+            <a:r>
+              <a:rPr lang="en-US" sz="2000" b="1" dirty="0">
+                <a:solidFill>
+                  <a:schemeClr val="tx1"/>
+                </a:solidFill>
+                <a:highlight>
+                  <a:srgbClr val="C0C0C0"/>
+                </a:highlight>
+                <a:latin typeface="Consolas" panose="020B0609020204030204" pitchFamily="49" charset="0"/>
+                <a:cs typeface="Consolas" panose="020B0609020204030204" pitchFamily="49" charset="0"/>
+              </a:rPr>
+              <a:t>)</a:t>
+            </a:r>
+            <a:r>
+              <a:rPr lang="en-US" sz="2000" dirty="0">
+                <a:solidFill>
+                  <a:schemeClr val="tx1"/>
+                </a:solidFill>
+                <a:highlight>
+                  <a:srgbClr val="C0C0C0"/>
+                </a:highlight>
+                <a:latin typeface="Consolas" panose="020B0609020204030204" pitchFamily="49" charset="0"/>
+                <a:cs typeface="Consolas" panose="020B0609020204030204" pitchFamily="49" charset="0"/>
+              </a:rPr>
+              <a:t>, </a:t>
+            </a:r>
+            <a:r>
+              <a:rPr lang="en-US" sz="2000" b="1" dirty="0">
+                <a:solidFill>
+                  <a:schemeClr val="tx1"/>
+                </a:solidFill>
+                <a:highlight>
+                  <a:srgbClr val="C0C0C0"/>
+                </a:highlight>
+                <a:latin typeface="Consolas" panose="020B0609020204030204" pitchFamily="49" charset="0"/>
+                <a:cs typeface="Consolas" panose="020B0609020204030204" pitchFamily="49" charset="0"/>
+              </a:rPr>
+              <a:t>built-in column functions </a:t>
+            </a:r>
+          </a:p>
+          <a:p>
+            <a:r>
+              <a:rPr lang="en-US" sz="2000" b="1" dirty="0">
+                <a:solidFill>
+                  <a:schemeClr val="tx1"/>
+                </a:solidFill>
+                <a:highlight>
+                  <a:srgbClr val="C0C0C0"/>
+                </a:highlight>
+                <a:latin typeface="Consolas" panose="020B0609020204030204" pitchFamily="49" charset="0"/>
+                <a:cs typeface="Consolas" panose="020B0609020204030204" pitchFamily="49" charset="0"/>
+              </a:rPr>
+              <a:t># (when, avg)</a:t>
+            </a:r>
+            <a:r>
+              <a:rPr lang="en-US" sz="2000" dirty="0">
+                <a:solidFill>
+                  <a:schemeClr val="tx1"/>
+                </a:solidFill>
+                <a:highlight>
+                  <a:srgbClr val="C0C0C0"/>
+                </a:highlight>
+                <a:latin typeface="Consolas" panose="020B0609020204030204" pitchFamily="49" charset="0"/>
+                <a:cs typeface="Consolas" panose="020B0609020204030204" pitchFamily="49" charset="0"/>
+              </a:rPr>
+              <a:t>, and </a:t>
+            </a:r>
+            <a:r>
+              <a:rPr lang="en-US" sz="2000" b="1" dirty="0">
+                <a:solidFill>
+                  <a:schemeClr val="tx1"/>
+                </a:solidFill>
+                <a:highlight>
+                  <a:srgbClr val="C0C0C0"/>
+                </a:highlight>
+                <a:latin typeface="Consolas" panose="020B0609020204030204" pitchFamily="49" charset="0"/>
+                <a:cs typeface="Consolas" panose="020B0609020204030204" pitchFamily="49" charset="0"/>
+              </a:rPr>
+              <a:t>handling null values (</a:t>
+            </a:r>
+            <a:r>
+              <a:rPr lang="en-US" sz="2000" b="1" dirty="0" err="1">
+                <a:solidFill>
+                  <a:schemeClr val="tx1"/>
+                </a:solidFill>
+                <a:highlight>
+                  <a:srgbClr val="C0C0C0"/>
+                </a:highlight>
+                <a:latin typeface="Consolas" panose="020B0609020204030204" pitchFamily="49" charset="0"/>
+                <a:cs typeface="Consolas" panose="020B0609020204030204" pitchFamily="49" charset="0"/>
+              </a:rPr>
+              <a:t>na.fill</a:t>
+            </a:r>
+            <a:r>
+              <a:rPr lang="en-US" sz="2000" b="1" dirty="0">
+                <a:solidFill>
+                  <a:schemeClr val="tx1"/>
+                </a:solidFill>
+                <a:highlight>
+                  <a:srgbClr val="C0C0C0"/>
+                </a:highlight>
+                <a:latin typeface="Consolas" panose="020B0609020204030204" pitchFamily="49" charset="0"/>
+                <a:cs typeface="Consolas" panose="020B0609020204030204" pitchFamily="49" charset="0"/>
+              </a:rPr>
+              <a:t>)</a:t>
+            </a:r>
+            <a:r>
+              <a:rPr lang="en-US" sz="2000" dirty="0">
+                <a:solidFill>
+                  <a:schemeClr val="tx1"/>
+                </a:solidFill>
+                <a:highlight>
+                  <a:srgbClr val="C0C0C0"/>
+                </a:highlight>
+                <a:latin typeface="Consolas" panose="020B0609020204030204" pitchFamily="49" charset="0"/>
+                <a:cs typeface="Consolas" panose="020B0609020204030204" pitchFamily="49" charset="0"/>
+              </a:rPr>
+              <a:t>.</a:t>
+            </a:r>
+          </a:p>
+          <a:p>
+            <a:endParaRPr lang="en-US" sz="2000" dirty="0">
+              <a:solidFill>
+                <a:schemeClr val="tx1"/>
+              </a:solidFill>
+              <a:latin typeface="Consolas" panose="020B0609020204030204" pitchFamily="49" charset="0"/>
+              <a:cs typeface="Consolas" panose="020B0609020204030204" pitchFamily="49" charset="0"/>
+            </a:endParaRPr>
+          </a:p>
+          <a:p>
+            <a:r>
+              <a:rPr lang="en-US" sz="2000" dirty="0">
+                <a:solidFill>
+                  <a:schemeClr val="tx1"/>
+                </a:solidFill>
+                <a:highlight>
+                  <a:srgbClr val="FFFF00"/>
+                </a:highlight>
+                <a:latin typeface="Consolas" panose="020B0609020204030204" pitchFamily="49" charset="0"/>
+                <a:cs typeface="Consolas" panose="020B0609020204030204" pitchFamily="49" charset="0"/>
+              </a:rPr>
+              <a:t># 1. Import required libraries</a:t>
+            </a:r>
+          </a:p>
+          <a:p>
+            <a:r>
+              <a:rPr lang="en-US" sz="2000" dirty="0">
+                <a:solidFill>
+                  <a:schemeClr val="tx1"/>
+                </a:solidFill>
+                <a:latin typeface="Consolas" panose="020B0609020204030204" pitchFamily="49" charset="0"/>
+                <a:cs typeface="Consolas" panose="020B0609020204030204" pitchFamily="49" charset="0"/>
+              </a:rPr>
+              <a:t>from </a:t>
+            </a:r>
+            <a:r>
+              <a:rPr lang="en-US" sz="2000" dirty="0" err="1">
+                <a:solidFill>
+                  <a:schemeClr val="tx1"/>
+                </a:solidFill>
+                <a:latin typeface="Consolas" panose="020B0609020204030204" pitchFamily="49" charset="0"/>
+                <a:cs typeface="Consolas" panose="020B0609020204030204" pitchFamily="49" charset="0"/>
+              </a:rPr>
+              <a:t>pyspark.sql</a:t>
+            </a:r>
+            <a:r>
+              <a:rPr lang="en-US" sz="2000" dirty="0">
+                <a:solidFill>
+                  <a:schemeClr val="tx1"/>
+                </a:solidFill>
+                <a:latin typeface="Consolas" panose="020B0609020204030204" pitchFamily="49" charset="0"/>
+                <a:cs typeface="Consolas" panose="020B0609020204030204" pitchFamily="49" charset="0"/>
+              </a:rPr>
+              <a:t> import </a:t>
+            </a:r>
+            <a:r>
+              <a:rPr lang="en-US" sz="2000" dirty="0" err="1">
+                <a:solidFill>
+                  <a:schemeClr val="tx1"/>
+                </a:solidFill>
+                <a:latin typeface="Consolas" panose="020B0609020204030204" pitchFamily="49" charset="0"/>
+                <a:cs typeface="Consolas" panose="020B0609020204030204" pitchFamily="49" charset="0"/>
+              </a:rPr>
+              <a:t>SparkSession</a:t>
+            </a:r>
+            <a:endParaRPr lang="en-US" sz="2000" dirty="0">
+              <a:solidFill>
+                <a:schemeClr val="tx1"/>
+              </a:solidFill>
+              <a:latin typeface="Consolas" panose="020B0609020204030204" pitchFamily="49" charset="0"/>
+              <a:cs typeface="Consolas" panose="020B0609020204030204" pitchFamily="49" charset="0"/>
+            </a:endParaRPr>
+          </a:p>
+          <a:p>
+            <a:r>
+              <a:rPr lang="en-US" sz="2000" dirty="0">
+                <a:solidFill>
+                  <a:schemeClr val="tx1"/>
+                </a:solidFill>
+                <a:latin typeface="Consolas" panose="020B0609020204030204" pitchFamily="49" charset="0"/>
+                <a:cs typeface="Consolas" panose="020B0609020204030204" pitchFamily="49" charset="0"/>
+              </a:rPr>
+              <a:t>from </a:t>
+            </a:r>
+            <a:r>
+              <a:rPr lang="en-US" sz="2000" dirty="0" err="1">
+                <a:solidFill>
+                  <a:schemeClr val="tx1"/>
+                </a:solidFill>
+                <a:latin typeface="Consolas" panose="020B0609020204030204" pitchFamily="49" charset="0"/>
+                <a:cs typeface="Consolas" panose="020B0609020204030204" pitchFamily="49" charset="0"/>
+              </a:rPr>
+              <a:t>pyspark.sql</a:t>
+            </a:r>
+            <a:r>
+              <a:rPr lang="en-US" sz="2000" dirty="0">
+                <a:solidFill>
+                  <a:schemeClr val="tx1"/>
+                </a:solidFill>
+                <a:latin typeface="Consolas" panose="020B0609020204030204" pitchFamily="49" charset="0"/>
+                <a:cs typeface="Consolas" panose="020B0609020204030204" pitchFamily="49" charset="0"/>
+              </a:rPr>
+              <a:t> import functions as F</a:t>
+            </a:r>
+          </a:p>
+          <a:p>
+            <a:endParaRPr lang="en-US" sz="2000" dirty="0">
+              <a:solidFill>
+                <a:schemeClr val="tx1"/>
+              </a:solidFill>
+              <a:highlight>
+                <a:srgbClr val="FFFF00"/>
+              </a:highlight>
+              <a:latin typeface="Consolas" panose="020B0609020204030204" pitchFamily="49" charset="0"/>
+              <a:cs typeface="Consolas" panose="020B0609020204030204" pitchFamily="49" charset="0"/>
+            </a:endParaRPr>
+          </a:p>
+          <a:p>
+            <a:r>
+              <a:rPr lang="en-US" sz="2000" dirty="0">
+                <a:solidFill>
+                  <a:schemeClr val="tx1"/>
+                </a:solidFill>
+                <a:highlight>
+                  <a:srgbClr val="FFFF00"/>
+                </a:highlight>
+                <a:latin typeface="Consolas" panose="020B0609020204030204" pitchFamily="49" charset="0"/>
+                <a:cs typeface="Consolas" panose="020B0609020204030204" pitchFamily="49" charset="0"/>
+              </a:rPr>
+              <a:t># 2. Initialize a </a:t>
+            </a:r>
+            <a:r>
+              <a:rPr lang="en-US" sz="2000" dirty="0" err="1">
+                <a:solidFill>
+                  <a:schemeClr val="tx1"/>
+                </a:solidFill>
+                <a:highlight>
+                  <a:srgbClr val="FFFF00"/>
+                </a:highlight>
+                <a:latin typeface="Consolas" panose="020B0609020204030204" pitchFamily="49" charset="0"/>
+                <a:cs typeface="Consolas" panose="020B0609020204030204" pitchFamily="49" charset="0"/>
+              </a:rPr>
+              <a:t>SparkSession</a:t>
+            </a:r>
+            <a:endParaRPr lang="en-US" sz="2000" dirty="0">
+              <a:solidFill>
+                <a:schemeClr val="tx1"/>
+              </a:solidFill>
+              <a:highlight>
+                <a:srgbClr val="FFFF00"/>
+              </a:highlight>
+              <a:latin typeface="Consolas" panose="020B0609020204030204" pitchFamily="49" charset="0"/>
+              <a:cs typeface="Consolas" panose="020B0609020204030204" pitchFamily="49" charset="0"/>
+            </a:endParaRPr>
+          </a:p>
+          <a:p>
+            <a:r>
+              <a:rPr lang="en-US" sz="2000" dirty="0">
+                <a:solidFill>
+                  <a:schemeClr val="tx1"/>
+                </a:solidFill>
+                <a:latin typeface="Consolas" panose="020B0609020204030204" pitchFamily="49" charset="0"/>
+                <a:cs typeface="Consolas" panose="020B0609020204030204" pitchFamily="49" charset="0"/>
+              </a:rPr>
+              <a:t>spark = </a:t>
+            </a:r>
+            <a:r>
+              <a:rPr lang="en-US" sz="2000" dirty="0" err="1">
+                <a:solidFill>
+                  <a:schemeClr val="tx1"/>
+                </a:solidFill>
+                <a:latin typeface="Consolas" panose="020B0609020204030204" pitchFamily="49" charset="0"/>
+                <a:cs typeface="Consolas" panose="020B0609020204030204" pitchFamily="49" charset="0"/>
+              </a:rPr>
+              <a:t>SparkSession.builder.appName</a:t>
+            </a:r>
+            <a:r>
+              <a:rPr lang="en-US" sz="2000" dirty="0">
+                <a:solidFill>
+                  <a:schemeClr val="tx1"/>
+                </a:solidFill>
+                <a:latin typeface="Consolas" panose="020B0609020204030204" pitchFamily="49" charset="0"/>
+                <a:cs typeface="Consolas" panose="020B0609020204030204" pitchFamily="49" charset="0"/>
+              </a:rPr>
+              <a:t>("demo").</a:t>
+            </a:r>
+            <a:r>
+              <a:rPr lang="en-US" sz="2000" dirty="0" err="1">
+                <a:solidFill>
+                  <a:schemeClr val="tx1"/>
+                </a:solidFill>
+                <a:latin typeface="Consolas" panose="020B0609020204030204" pitchFamily="49" charset="0"/>
+                <a:cs typeface="Consolas" panose="020B0609020204030204" pitchFamily="49" charset="0"/>
+              </a:rPr>
+              <a:t>getOrCreate</a:t>
+            </a:r>
+            <a:r>
+              <a:rPr lang="en-US" sz="2000" dirty="0">
+                <a:solidFill>
+                  <a:schemeClr val="tx1"/>
+                </a:solidFill>
+                <a:latin typeface="Consolas" panose="020B0609020204030204" pitchFamily="49" charset="0"/>
+                <a:cs typeface="Consolas" panose="020B0609020204030204" pitchFamily="49" charset="0"/>
+              </a:rPr>
+              <a:t>()</a:t>
+            </a:r>
+          </a:p>
+          <a:p>
+            <a:endParaRPr lang="en-US" sz="1800" dirty="0">
+              <a:solidFill>
+                <a:schemeClr val="tx1"/>
+              </a:solidFill>
+              <a:latin typeface="Consolas" panose="020B0609020204030204" pitchFamily="49" charset="0"/>
+              <a:cs typeface="Consolas" panose="020B0609020204030204" pitchFamily="49" charset="0"/>
+            </a:endParaRPr>
           </a:p>
         </p:txBody>
       </p:sp>
     </p:spTree>
     <p:extLst>
       <p:ext uri="{BB962C8B-B14F-4D97-AF65-F5344CB8AC3E}">
-        <p14:creationId xmlns:p14="http://schemas.microsoft.com/office/powerpoint/2010/main" val="839248039"/>
+        <p14:creationId xmlns:p14="http://schemas.microsoft.com/office/powerpoint/2010/main" val="647124839"/>
       </p:ext>
     </p:extLst>
   </p:cSld>
@@ -18978,9 +19345,6 @@
                     <p:cTn id="3" fill="hold">
                       <p:stCondLst>
                         <p:cond delay="indefinite"/>
-                        <p:cond evt="onBegin" delay="0">
-                          <p:tn val="2"/>
-                        </p:cond>
                       </p:stCondLst>
                       <p:childTnLst>
                         <p:par>
@@ -18990,7 +19354,7 @@
                             </p:stCondLst>
                             <p:childTnLst>
                               <p:par>
-                                <p:cTn id="5" presetID="1" presetClass="entr" presetSubtype="0" fill="hold" nodeType="withEffect">
+                                <p:cTn id="5" presetID="1" presetClass="entr" presetSubtype="0" fill="hold" nodeType="clickEffect">
                                   <p:stCondLst>
                                     <p:cond delay="0"/>
                                   </p:stCondLst>
@@ -18998,6 +19362,104 @@
                                     <p:set>
                                       <p:cBhvr>
                                         <p:cTn id="6" dur="1" fill="hold">
+                                          <p:stCondLst>
+                                            <p:cond delay="0"/>
+                                          </p:stCondLst>
+                                        </p:cTn>
+                                        <p:tgtEl>
+                                          <p:spTgt spid="3">
+                                            <p:txEl>
+                                              <p:pRg st="5" end="5"/>
+                                            </p:txEl>
+                                          </p:spTgt>
+                                        </p:tgtEl>
+                                        <p:attrNameLst>
+                                          <p:attrName>style.visibility</p:attrName>
+                                        </p:attrNameLst>
+                                      </p:cBhvr>
+                                      <p:to>
+                                        <p:strVal val="visible"/>
+                                      </p:to>
+                                    </p:set>
+                                  </p:childTnLst>
+                                </p:cTn>
+                              </p:par>
+                            </p:childTnLst>
+                          </p:cTn>
+                        </p:par>
+                      </p:childTnLst>
+                    </p:cTn>
+                  </p:par>
+                  <p:par>
+                    <p:cTn id="7" fill="hold">
+                      <p:stCondLst>
+                        <p:cond delay="indefinite"/>
+                      </p:stCondLst>
+                      <p:childTnLst>
+                        <p:par>
+                          <p:cTn id="8" fill="hold">
+                            <p:stCondLst>
+                              <p:cond delay="0"/>
+                            </p:stCondLst>
+                            <p:childTnLst>
+                              <p:par>
+                                <p:cTn id="9" presetID="1" presetClass="entr" presetSubtype="0" fill="hold" nodeType="clickEffect">
+                                  <p:stCondLst>
+                                    <p:cond delay="0"/>
+                                  </p:stCondLst>
+                                  <p:childTnLst>
+                                    <p:set>
+                                      <p:cBhvr>
+                                        <p:cTn id="10" dur="1" fill="hold">
+                                          <p:stCondLst>
+                                            <p:cond delay="0"/>
+                                          </p:stCondLst>
+                                        </p:cTn>
+                                        <p:tgtEl>
+                                          <p:spTgt spid="3">
+                                            <p:txEl>
+                                              <p:pRg st="6" end="6"/>
+                                            </p:txEl>
+                                          </p:spTgt>
+                                        </p:tgtEl>
+                                        <p:attrNameLst>
+                                          <p:attrName>style.visibility</p:attrName>
+                                        </p:attrNameLst>
+                                      </p:cBhvr>
+                                      <p:to>
+                                        <p:strVal val="visible"/>
+                                      </p:to>
+                                    </p:set>
+                                  </p:childTnLst>
+                                </p:cTn>
+                              </p:par>
+                            </p:childTnLst>
+                          </p:cTn>
+                        </p:par>
+                      </p:childTnLst>
+                    </p:cTn>
+                  </p:par>
+                  <p:par>
+                    <p:cTn id="11" fill="hold">
+                      <p:stCondLst>
+                        <p:cond delay="indefinite"/>
+                      </p:stCondLst>
+                      <p:childTnLst>
+                        <p:par>
+                          <p:cTn id="12" fill="hold">
+                            <p:stCondLst>
+                              <p:cond delay="0"/>
+                            </p:stCondLst>
+                            <p:childTnLst>
+                              <p:par>
+                                <p:cTn id="13" presetID="1" presetClass="entr" presetSubtype="0" fill="hold" nodeType="clickEffect">
+                                  <p:stCondLst>
+                                    <p:cond delay="0"/>
+                                  </p:stCondLst>
+                                  <p:childTnLst>
+                                    <p:set>
+                                      <p:cBhvr>
+                                        <p:cTn id="14" dur="1" fill="hold">
                                           <p:stCondLst>
                                             <p:cond delay="0"/>
                                           </p:stCondLst>
@@ -19020,15 +19482,33 @@
                                   </p:childTnLst>
                                 </p:cTn>
                               </p:par>
+                            </p:childTnLst>
+                          </p:cTn>
+                        </p:par>
+                      </p:childTnLst>
+                    </p:cTn>
+                  </p:par>
+                  <p:par>
+                    <p:cTn id="15" fill="hold">
+                      <p:stCondLst>
+                        <p:cond delay="indefinite"/>
+                      </p:stCondLst>
+                      <p:childTnLst>
+                        <p:par>
+                          <p:cTn id="16" fill="hold">
+                            <p:stCondLst>
+                              <p:cond delay="0"/>
+                            </p:stCondLst>
+                            <p:childTnLst>
                               <p:par>
-                                <p:cTn id="7" presetID="1" presetClass="entr" presetSubtype="0" fill="hold" nodeType="withEffect">
+                                <p:cTn id="17" presetID="1" presetClass="entr" presetSubtype="0" fill="hold" nodeType="clickEffect">
                                   <p:stCondLst>
                                     <p:cond delay="0"/>
                                   </p:stCondLst>
                                   <p:childTnLst>
                                     <p:set>
                                       <p:cBhvr>
-                                        <p:cTn id="8" dur="1" fill="hold">
+                                        <p:cTn id="18" dur="1" fill="hold">
                                           <p:stCondLst>
                                             <p:cond delay="0"/>
                                           </p:stCondLst>
@@ -19051,15 +19531,33 @@
                                   </p:childTnLst>
                                 </p:cTn>
                               </p:par>
+                            </p:childTnLst>
+                          </p:cTn>
+                        </p:par>
+                      </p:childTnLst>
+                    </p:cTn>
+                  </p:par>
+                  <p:par>
+                    <p:cTn id="19" fill="hold">
+                      <p:stCondLst>
+                        <p:cond delay="indefinite"/>
+                      </p:stCondLst>
+                      <p:childTnLst>
+                        <p:par>
+                          <p:cTn id="20" fill="hold">
+                            <p:stCondLst>
+                              <p:cond delay="0"/>
+                            </p:stCondLst>
+                            <p:childTnLst>
                               <p:par>
-                                <p:cTn id="9" presetID="1" presetClass="entr" presetSubtype="0" fill="hold" nodeType="withEffect">
+                                <p:cTn id="21" presetID="1" presetClass="entr" presetSubtype="0" fill="hold" nodeType="clickEffect">
                                   <p:stCondLst>
                                     <p:cond delay="0"/>
                                   </p:stCondLst>
                                   <p:childTnLst>
                                     <p:set>
                                       <p:cBhvr>
-                                        <p:cTn id="10" dur="1" fill="hold">
+                                        <p:cTn id="22" dur="1" fill="hold">
                                           <p:stCondLst>
                                             <p:cond delay="0"/>
                                           </p:stCondLst>
@@ -19068,6 +19566,153 @@
                                           <p:spTgt spid="3">
                                             <p:txEl>
                                               <p:pRg st="2" end="2"/>
+                                            </p:txEl>
+                                          </p:spTgt>
+                                        </p:tgtEl>
+                                        <p:attrNameLst>
+                                          <p:attrName>style.visibility</p:attrName>
+                                        </p:attrNameLst>
+                                      </p:cBhvr>
+                                      <p:to>
+                                        <p:strVal val="visible"/>
+                                      </p:to>
+                                    </p:set>
+                                  </p:childTnLst>
+                                </p:cTn>
+                              </p:par>
+                            </p:childTnLst>
+                          </p:cTn>
+                        </p:par>
+                      </p:childTnLst>
+                    </p:cTn>
+                  </p:par>
+                  <p:par>
+                    <p:cTn id="23" fill="hold">
+                      <p:stCondLst>
+                        <p:cond delay="indefinite"/>
+                      </p:stCondLst>
+                      <p:childTnLst>
+                        <p:par>
+                          <p:cTn id="24" fill="hold">
+                            <p:stCondLst>
+                              <p:cond delay="0"/>
+                            </p:stCondLst>
+                            <p:childTnLst>
+                              <p:par>
+                                <p:cTn id="25" presetID="1" presetClass="entr" presetSubtype="0" fill="hold" nodeType="clickEffect">
+                                  <p:stCondLst>
+                                    <p:cond delay="0"/>
+                                  </p:stCondLst>
+                                  <p:childTnLst>
+                                    <p:set>
+                                      <p:cBhvr>
+                                        <p:cTn id="26" dur="1" fill="hold">
+                                          <p:stCondLst>
+                                            <p:cond delay="0"/>
+                                          </p:stCondLst>
+                                        </p:cTn>
+                                        <p:tgtEl>
+                                          <p:spTgt spid="3">
+                                            <p:txEl>
+                                              <p:pRg st="4" end="4"/>
+                                            </p:txEl>
+                                          </p:spTgt>
+                                        </p:tgtEl>
+                                        <p:attrNameLst>
+                                          <p:attrName>style.visibility</p:attrName>
+                                        </p:attrNameLst>
+                                      </p:cBhvr>
+                                      <p:to>
+                                        <p:strVal val="visible"/>
+                                      </p:to>
+                                    </p:set>
+                                  </p:childTnLst>
+                                </p:cTn>
+                              </p:par>
+                            </p:childTnLst>
+                          </p:cTn>
+                        </p:par>
+                      </p:childTnLst>
+                    </p:cTn>
+                  </p:par>
+                  <p:par>
+                    <p:cTn id="27" fill="hold">
+                      <p:stCondLst>
+                        <p:cond delay="indefinite"/>
+                      </p:stCondLst>
+                      <p:childTnLst>
+                        <p:par>
+                          <p:cTn id="28" fill="hold">
+                            <p:stCondLst>
+                              <p:cond delay="0"/>
+                            </p:stCondLst>
+                            <p:childTnLst>
+                              <p:par>
+                                <p:cTn id="29" presetID="1" presetClass="entr" presetSubtype="0" fill="hold" nodeType="clickEffect">
+                                  <p:stCondLst>
+                                    <p:cond delay="0"/>
+                                  </p:stCondLst>
+                                  <p:childTnLst>
+                                    <p:set>
+                                      <p:cBhvr>
+                                        <p:cTn id="30" dur="1" fill="hold">
+                                          <p:stCondLst>
+                                            <p:cond delay="0"/>
+                                          </p:stCondLst>
+                                        </p:cTn>
+                                        <p:tgtEl>
+                                          <p:spTgt spid="3">
+                                            <p:txEl>
+                                              <p:pRg st="8" end="8"/>
+                                            </p:txEl>
+                                          </p:spTgt>
+                                        </p:tgtEl>
+                                        <p:attrNameLst>
+                                          <p:attrName>style.visibility</p:attrName>
+                                        </p:attrNameLst>
+                                      </p:cBhvr>
+                                      <p:to>
+                                        <p:strVal val="visible"/>
+                                      </p:to>
+                                    </p:set>
+                                  </p:childTnLst>
+                                </p:cTn>
+                              </p:par>
+                            </p:childTnLst>
+                          </p:cTn>
+                        </p:par>
+                      </p:childTnLst>
+                    </p:cTn>
+                  </p:par>
+                  <p:par>
+                    <p:cTn id="31" fill="hold">
+                      <p:stCondLst>
+                        <p:cond delay="indefinite"/>
+                      </p:stCondLst>
+                      <p:childTnLst>
+                        <p:par>
+                          <p:cTn id="32" fill="hold">
+                            <p:stCondLst>
+                              <p:cond delay="0"/>
+                            </p:stCondLst>
+                            <p:childTnLst>
+                              <p:par>
+                                <p:cTn id="33" presetID="1" presetClass="entr" presetSubtype="0" fill="hold" nodeType="clickEffect">
+                                  <p:stCondLst>
+                                    <p:cond delay="0"/>
+                                  </p:stCondLst>
+                                  <p:childTnLst>
+                                    <p:set>
+                                      <p:cBhvr>
+                                        <p:cTn id="34" dur="1" fill="hold">
+                                          <p:stCondLst>
+                                            <p:cond delay="0"/>
+                                          </p:stCondLst>
+                                        </p:cTn>
+                                        <p:tgtEl>
+                                          <p:spTgt spid="3">
+                                            <p:txEl>
+                                              <p:pRg st="9" end="9"/>
                                             </p:txEl>
                                           </p:spTgt>
                                         </p:tgtEl>
@@ -19118,7 +19763,13 @@
   <p:cSld>
     <p:spTree>
       <p:nvGrpSpPr>
-        <p:cNvPr id="1" name=""/>
+        <p:cNvPr id="1" name="">
+          <a:extLst>
+            <a:ext uri="{FF2B5EF4-FFF2-40B4-BE49-F238E27FC236}">
+              <a16:creationId xmlns:a16="http://schemas.microsoft.com/office/drawing/2014/main" id="{62E09814-836A-9F2E-CF70-F0415055BF58}"/>
+            </a:ext>
+          </a:extLst>
+        </p:cNvPr>
         <p:cNvGrpSpPr/>
         <p:nvPr/>
       </p:nvGrpSpPr>
@@ -19135,7 +19786,7 @@
           <p:cNvPr id="2" name="Title 1">
             <a:extLst>
               <a:ext uri="{FF2B5EF4-FFF2-40B4-BE49-F238E27FC236}">
-                <a16:creationId xmlns:a16="http://schemas.microsoft.com/office/drawing/2014/main" id="{8207F09F-B406-FB4C-ABE0-890E4E4F95C8}"/>
+                <a16:creationId xmlns:a16="http://schemas.microsoft.com/office/drawing/2014/main" id="{E3640E5E-C8C3-2F82-62F7-746DF27FF6EC}"/>
               </a:ext>
             </a:extLst>
           </p:cNvPr>
@@ -19148,19 +19799,31 @@
         </p:nvSpPr>
         <p:spPr>
           <a:xfrm>
-            <a:off x="1524000" y="1122363"/>
-            <a:ext cx="9144000" cy="706437"/>
+            <a:off x="1524000" y="382580"/>
+            <a:ext cx="9144000" cy="502003"/>
           </a:xfrm>
         </p:spPr>
         <p:txBody>
           <a:bodyPr>
-            <a:normAutofit fontScale="90000"/>
+            <a:noAutofit/>
           </a:bodyPr>
           <a:lstStyle/>
           <a:p>
             <a:r>
-              <a:rPr lang="en-US"/>
-              <a:t>Amazon Athena</a:t>
+              <a:rPr lang="en-US" sz="3200" dirty="0" err="1"/>
+              <a:t>PySpark</a:t>
+            </a:r>
+            <a:r>
+              <a:rPr lang="en-US" sz="3200" dirty="0"/>
+              <a:t> </a:t>
+            </a:r>
+            <a:r>
+              <a:rPr lang="en-US" sz="3200" dirty="0" err="1"/>
+              <a:t>DataFrame</a:t>
+            </a:r>
+            <a:r>
+              <a:rPr lang="en-US" sz="3200" dirty="0"/>
+              <a:t> Example 2 - 0002</a:t>
             </a:r>
           </a:p>
         </p:txBody>
@@ -19170,7 +19833,7 @@
           <p:cNvPr id="3" name="Subtitle 2">
             <a:extLst>
               <a:ext uri="{FF2B5EF4-FFF2-40B4-BE49-F238E27FC236}">
-                <a16:creationId xmlns:a16="http://schemas.microsoft.com/office/drawing/2014/main" id="{67BA4937-A89D-8343-B4A3-942B771C889A}"/>
+                <a16:creationId xmlns:a16="http://schemas.microsoft.com/office/drawing/2014/main" id="{DCEA4932-BD18-AF16-7EED-950443E21AAE}"/>
               </a:ext>
             </a:extLst>
           </p:cNvPr>
@@ -19183,73 +19846,392 @@
         </p:nvSpPr>
         <p:spPr>
           <a:xfrm>
-            <a:off x="1524000" y="1828800"/>
-            <a:ext cx="9144000" cy="4144617"/>
+            <a:off x="1524000" y="884584"/>
+            <a:ext cx="9144000" cy="5088834"/>
           </a:xfrm>
         </p:spPr>
         <p:txBody>
           <a:bodyPr>
-            <a:normAutofit/>
+            <a:normAutofit lnSpcReduction="10000"/>
           </a:bodyPr>
           <a:lstStyle/>
           <a:p>
-            <a:pPr marL="457200" indent="-457200" algn="l">
-              <a:buFont typeface="Arial" panose="020B0604020202020204" pitchFamily="34" charset="0"/>
-              <a:buChar char="•"/>
-            </a:pPr>
-            <a:r>
-              <a:rPr lang="en-US" sz="2800"/>
-              <a:t>Interactive query service</a:t>
-            </a:r>
-          </a:p>
-          <a:p>
-            <a:pPr marL="457200" indent="-457200" algn="l">
-              <a:buFont typeface="Arial" panose="020B0604020202020204" pitchFamily="34" charset="0"/>
-              <a:buChar char="•"/>
-            </a:pPr>
-            <a:r>
-              <a:rPr lang="en-US" sz="2800"/>
-              <a:t>Serverless. Zero infrastructure. Zero administration.</a:t>
-            </a:r>
-          </a:p>
-          <a:p>
-            <a:pPr marL="457200" indent="-457200" algn="l">
-              <a:buFont typeface="Arial" panose="020B0604020202020204" pitchFamily="34" charset="0"/>
-              <a:buChar char="•"/>
-            </a:pPr>
-            <a:r>
-              <a:rPr lang="en-US" sz="2800"/>
-              <a:t>Put your data in S3</a:t>
-            </a:r>
-          </a:p>
-          <a:p>
-            <a:pPr marL="457200" indent="-457200" algn="l">
-              <a:buFont typeface="Arial" panose="020B0604020202020204" pitchFamily="34" charset="0"/>
-              <a:buChar char="•"/>
-            </a:pPr>
-            <a:r>
-              <a:rPr lang="en-US" sz="2800"/>
-              <a:t>Access your data by SQL</a:t>
-            </a:r>
-          </a:p>
-          <a:p>
-            <a:pPr marL="457200" indent="-457200" algn="l">
-              <a:buFont typeface="Arial" panose="020B0604020202020204" pitchFamily="34" charset="0"/>
-              <a:buChar char="•"/>
-            </a:pPr>
-            <a:r>
-              <a:rPr lang="en-US" sz="2800"/>
-              <a:t>Pay by query</a:t>
-            </a:r>
-          </a:p>
-          <a:p>
-            <a:pPr marL="457200" indent="-457200" algn="l">
-              <a:buFont typeface="Arial" panose="020B0604020202020204" pitchFamily="34" charset="0"/>
-              <a:buChar char="•"/>
-            </a:pPr>
-            <a:r>
-              <a:rPr lang="en-US" sz="2800"/>
-              <a:t>Fast performance</a:t>
+            <a:r>
+              <a:rPr lang="en-US" sz="2000" dirty="0">
+                <a:solidFill>
+                  <a:schemeClr val="tx1"/>
+                </a:solidFill>
+                <a:highlight>
+                  <a:srgbClr val="FFFF00"/>
+                </a:highlight>
+                <a:latin typeface="Consolas" panose="020B0609020204030204" pitchFamily="49" charset="0"/>
+                <a:cs typeface="Consolas" panose="020B0609020204030204" pitchFamily="49" charset="0"/>
+              </a:rPr>
+              <a:t># 3.  Sample e-commerce transaction data </a:t>
+            </a:r>
+          </a:p>
+          <a:p>
+            <a:r>
+              <a:rPr lang="en-US" sz="2000" dirty="0">
+                <a:solidFill>
+                  <a:schemeClr val="tx1"/>
+                </a:solidFill>
+                <a:highlight>
+                  <a:srgbClr val="FFFF00"/>
+                </a:highlight>
+                <a:latin typeface="Consolas" panose="020B0609020204030204" pitchFamily="49" charset="0"/>
+                <a:cs typeface="Consolas" panose="020B0609020204030204" pitchFamily="49" charset="0"/>
+              </a:rPr>
+              <a:t># (with some </a:t>
+            </a:r>
+            <a:r>
+              <a:rPr lang="en-US" sz="2000" dirty="0">
+                <a:solidFill>
+                  <a:schemeClr val="tx1"/>
+                </a:solidFill>
+                <a:highlight>
+                  <a:srgbClr val="FF0000"/>
+                </a:highlight>
+                <a:latin typeface="Consolas" panose="020B0609020204030204" pitchFamily="49" charset="0"/>
+                <a:cs typeface="Consolas" panose="020B0609020204030204" pitchFamily="49" charset="0"/>
+              </a:rPr>
+              <a:t>missing</a:t>
+            </a:r>
+            <a:r>
+              <a:rPr lang="en-US" sz="2000" dirty="0">
+                <a:solidFill>
+                  <a:schemeClr val="tx1"/>
+                </a:solidFill>
+                <a:highlight>
+                  <a:srgbClr val="FFFF00"/>
+                </a:highlight>
+                <a:latin typeface="Consolas" panose="020B0609020204030204" pitchFamily="49" charset="0"/>
+                <a:cs typeface="Consolas" panose="020B0609020204030204" pitchFamily="49" charset="0"/>
+              </a:rPr>
+              <a:t> values) </a:t>
+            </a:r>
+          </a:p>
+          <a:p>
+            <a:r>
+              <a:rPr lang="en-US" sz="2000" dirty="0">
+                <a:solidFill>
+                  <a:schemeClr val="tx1"/>
+                </a:solidFill>
+                <a:latin typeface="Consolas" panose="020B0609020204030204" pitchFamily="49" charset="0"/>
+                <a:cs typeface="Consolas" panose="020B0609020204030204" pitchFamily="49" charset="0"/>
+              </a:rPr>
+              <a:t>data = [ ("</a:t>
+            </a:r>
+            <a:r>
+              <a:rPr lang="en-US" sz="2000" dirty="0" err="1">
+                <a:solidFill>
+                  <a:schemeClr val="tx1"/>
+                </a:solidFill>
+                <a:latin typeface="Consolas" panose="020B0609020204030204" pitchFamily="49" charset="0"/>
+                <a:cs typeface="Consolas" panose="020B0609020204030204" pitchFamily="49" charset="0"/>
+              </a:rPr>
+              <a:t>User_A</a:t>
+            </a:r>
+            <a:r>
+              <a:rPr lang="en-US" sz="2000" dirty="0">
+                <a:solidFill>
+                  <a:schemeClr val="tx1"/>
+                </a:solidFill>
+                <a:latin typeface="Consolas" panose="020B0609020204030204" pitchFamily="49" charset="0"/>
+                <a:cs typeface="Consolas" panose="020B0609020204030204" pitchFamily="49" charset="0"/>
+              </a:rPr>
+              <a:t>", "Electronics", 1200.0, "US"), </a:t>
+            </a:r>
+          </a:p>
+          <a:p>
+            <a:r>
+              <a:rPr lang="en-US" sz="2000" dirty="0">
+                <a:solidFill>
+                  <a:schemeClr val="tx1"/>
+                </a:solidFill>
+                <a:latin typeface="Consolas" panose="020B0609020204030204" pitchFamily="49" charset="0"/>
+                <a:cs typeface="Consolas" panose="020B0609020204030204" pitchFamily="49" charset="0"/>
+              </a:rPr>
+              <a:t>         ("</a:t>
+            </a:r>
+            <a:r>
+              <a:rPr lang="en-US" sz="2000" dirty="0" err="1">
+                <a:solidFill>
+                  <a:schemeClr val="tx1"/>
+                </a:solidFill>
+                <a:latin typeface="Consolas" panose="020B0609020204030204" pitchFamily="49" charset="0"/>
+                <a:cs typeface="Consolas" panose="020B0609020204030204" pitchFamily="49" charset="0"/>
+              </a:rPr>
+              <a:t>User_B</a:t>
+            </a:r>
+            <a:r>
+              <a:rPr lang="en-US" sz="2000" dirty="0">
+                <a:solidFill>
+                  <a:schemeClr val="tx1"/>
+                </a:solidFill>
+                <a:latin typeface="Consolas" panose="020B0609020204030204" pitchFamily="49" charset="0"/>
+                <a:cs typeface="Consolas" panose="020B0609020204030204" pitchFamily="49" charset="0"/>
+              </a:rPr>
+              <a:t>", "Clothing", 45.50, "CA"), </a:t>
+            </a:r>
+          </a:p>
+          <a:p>
+            <a:r>
+              <a:rPr lang="en-US" sz="2000" dirty="0">
+                <a:solidFill>
+                  <a:schemeClr val="tx1"/>
+                </a:solidFill>
+                <a:latin typeface="Consolas" panose="020B0609020204030204" pitchFamily="49" charset="0"/>
+                <a:cs typeface="Consolas" panose="020B0609020204030204" pitchFamily="49" charset="0"/>
+              </a:rPr>
+              <a:t>         ("</a:t>
+            </a:r>
+            <a:r>
+              <a:rPr lang="en-US" sz="2000" dirty="0" err="1">
+                <a:solidFill>
+                  <a:schemeClr val="tx1"/>
+                </a:solidFill>
+                <a:latin typeface="Consolas" panose="020B0609020204030204" pitchFamily="49" charset="0"/>
+                <a:cs typeface="Consolas" panose="020B0609020204030204" pitchFamily="49" charset="0"/>
+              </a:rPr>
+              <a:t>User_C</a:t>
+            </a:r>
+            <a:r>
+              <a:rPr lang="en-US" sz="2000" dirty="0">
+                <a:solidFill>
+                  <a:schemeClr val="tx1"/>
+                </a:solidFill>
+                <a:latin typeface="Consolas" panose="020B0609020204030204" pitchFamily="49" charset="0"/>
+                <a:cs typeface="Consolas" panose="020B0609020204030204" pitchFamily="49" charset="0"/>
+              </a:rPr>
+              <a:t>", "Electronics", </a:t>
+            </a:r>
+            <a:r>
+              <a:rPr lang="en-US" sz="2000" dirty="0">
+                <a:solidFill>
+                  <a:schemeClr val="tx1"/>
+                </a:solidFill>
+                <a:highlight>
+                  <a:srgbClr val="FF0000"/>
+                </a:highlight>
+                <a:latin typeface="Consolas" panose="020B0609020204030204" pitchFamily="49" charset="0"/>
+                <a:cs typeface="Consolas" panose="020B0609020204030204" pitchFamily="49" charset="0"/>
+              </a:rPr>
+              <a:t>None</a:t>
+            </a:r>
+            <a:r>
+              <a:rPr lang="en-US" sz="2000" dirty="0">
+                <a:solidFill>
+                  <a:schemeClr val="tx1"/>
+                </a:solidFill>
+                <a:latin typeface="Consolas" panose="020B0609020204030204" pitchFamily="49" charset="0"/>
+                <a:cs typeface="Consolas" panose="020B0609020204030204" pitchFamily="49" charset="0"/>
+              </a:rPr>
+              <a:t>, "US"), </a:t>
+            </a:r>
+          </a:p>
+          <a:p>
+            <a:r>
+              <a:rPr lang="en-US" sz="2000" dirty="0">
+                <a:solidFill>
+                  <a:schemeClr val="tx1"/>
+                </a:solidFill>
+                <a:latin typeface="Consolas" panose="020B0609020204030204" pitchFamily="49" charset="0"/>
+                <a:cs typeface="Consolas" panose="020B0609020204030204" pitchFamily="49" charset="0"/>
+              </a:rPr>
+              <a:t>         ("</a:t>
+            </a:r>
+            <a:r>
+              <a:rPr lang="en-US" sz="2000" dirty="0" err="1">
+                <a:solidFill>
+                  <a:schemeClr val="tx1"/>
+                </a:solidFill>
+                <a:latin typeface="Consolas" panose="020B0609020204030204" pitchFamily="49" charset="0"/>
+                <a:cs typeface="Consolas" panose="020B0609020204030204" pitchFamily="49" charset="0"/>
+              </a:rPr>
+              <a:t>User_A</a:t>
+            </a:r>
+            <a:r>
+              <a:rPr lang="en-US" sz="2000" dirty="0">
+                <a:solidFill>
+                  <a:schemeClr val="tx1"/>
+                </a:solidFill>
+                <a:latin typeface="Consolas" panose="020B0609020204030204" pitchFamily="49" charset="0"/>
+                <a:cs typeface="Consolas" panose="020B0609020204030204" pitchFamily="49" charset="0"/>
+              </a:rPr>
+              <a:t>", "Electronics", 150.0, "US"), </a:t>
+            </a:r>
+          </a:p>
+          <a:p>
+            <a:r>
+              <a:rPr lang="en-US" sz="2000" dirty="0">
+                <a:solidFill>
+                  <a:schemeClr val="tx1"/>
+                </a:solidFill>
+                <a:latin typeface="Consolas" panose="020B0609020204030204" pitchFamily="49" charset="0"/>
+                <a:cs typeface="Consolas" panose="020B0609020204030204" pitchFamily="49" charset="0"/>
+              </a:rPr>
+              <a:t>         ("</a:t>
+            </a:r>
+            <a:r>
+              <a:rPr lang="en-US" sz="2000" dirty="0" err="1">
+                <a:solidFill>
+                  <a:schemeClr val="tx1"/>
+                </a:solidFill>
+                <a:latin typeface="Consolas" panose="020B0609020204030204" pitchFamily="49" charset="0"/>
+                <a:cs typeface="Consolas" panose="020B0609020204030204" pitchFamily="49" charset="0"/>
+              </a:rPr>
+              <a:t>User_D</a:t>
+            </a:r>
+            <a:r>
+              <a:rPr lang="en-US" sz="2000" dirty="0">
+                <a:solidFill>
+                  <a:schemeClr val="tx1"/>
+                </a:solidFill>
+                <a:latin typeface="Consolas" panose="020B0609020204030204" pitchFamily="49" charset="0"/>
+                <a:cs typeface="Consolas" panose="020B0609020204030204" pitchFamily="49" charset="0"/>
+              </a:rPr>
+              <a:t>", "Books", 22.00, "UK"), </a:t>
+            </a:r>
+          </a:p>
+          <a:p>
+            <a:r>
+              <a:rPr lang="en-US" sz="2000" dirty="0">
+                <a:solidFill>
+                  <a:schemeClr val="tx1"/>
+                </a:solidFill>
+                <a:latin typeface="Consolas" panose="020B0609020204030204" pitchFamily="49" charset="0"/>
+                <a:cs typeface="Consolas" panose="020B0609020204030204" pitchFamily="49" charset="0"/>
+              </a:rPr>
+              <a:t>         ("</a:t>
+            </a:r>
+            <a:r>
+              <a:rPr lang="en-US" sz="2000" dirty="0" err="1">
+                <a:solidFill>
+                  <a:schemeClr val="tx1"/>
+                </a:solidFill>
+                <a:latin typeface="Consolas" panose="020B0609020204030204" pitchFamily="49" charset="0"/>
+                <a:cs typeface="Consolas" panose="020B0609020204030204" pitchFamily="49" charset="0"/>
+              </a:rPr>
+              <a:t>User_B</a:t>
+            </a:r>
+            <a:r>
+              <a:rPr lang="en-US" sz="2000" dirty="0">
+                <a:solidFill>
+                  <a:schemeClr val="tx1"/>
+                </a:solidFill>
+                <a:latin typeface="Consolas" panose="020B0609020204030204" pitchFamily="49" charset="0"/>
+                <a:cs typeface="Consolas" panose="020B0609020204030204" pitchFamily="49" charset="0"/>
+              </a:rPr>
+              <a:t>", "Clothing", 80.00, "CA"), </a:t>
+            </a:r>
+          </a:p>
+          <a:p>
+            <a:r>
+              <a:rPr lang="en-US" sz="2000" dirty="0">
+                <a:solidFill>
+                  <a:schemeClr val="tx1"/>
+                </a:solidFill>
+                <a:latin typeface="Consolas" panose="020B0609020204030204" pitchFamily="49" charset="0"/>
+                <a:cs typeface="Consolas" panose="020B0609020204030204" pitchFamily="49" charset="0"/>
+              </a:rPr>
+              <a:t>         ("</a:t>
+            </a:r>
+            <a:r>
+              <a:rPr lang="en-US" sz="2000" dirty="0" err="1">
+                <a:solidFill>
+                  <a:schemeClr val="tx1"/>
+                </a:solidFill>
+                <a:latin typeface="Consolas" panose="020B0609020204030204" pitchFamily="49" charset="0"/>
+                <a:cs typeface="Consolas" panose="020B0609020204030204" pitchFamily="49" charset="0"/>
+              </a:rPr>
+              <a:t>User_E</a:t>
+            </a:r>
+            <a:r>
+              <a:rPr lang="en-US" sz="2000" dirty="0">
+                <a:solidFill>
+                  <a:schemeClr val="tx1"/>
+                </a:solidFill>
+                <a:latin typeface="Consolas" panose="020B0609020204030204" pitchFamily="49" charset="0"/>
+                <a:cs typeface="Consolas" panose="020B0609020204030204" pitchFamily="49" charset="0"/>
+              </a:rPr>
+              <a:t>", "Books", 15.75, </a:t>
+            </a:r>
+            <a:r>
+              <a:rPr lang="en-US" sz="2000" dirty="0">
+                <a:solidFill>
+                  <a:schemeClr val="tx1"/>
+                </a:solidFill>
+                <a:highlight>
+                  <a:srgbClr val="FF0000"/>
+                </a:highlight>
+                <a:latin typeface="Consolas" panose="020B0609020204030204" pitchFamily="49" charset="0"/>
+                <a:cs typeface="Consolas" panose="020B0609020204030204" pitchFamily="49" charset="0"/>
+              </a:rPr>
+              <a:t>None</a:t>
+            </a:r>
+            <a:r>
+              <a:rPr lang="en-US" sz="2000" dirty="0">
+                <a:solidFill>
+                  <a:schemeClr val="tx1"/>
+                </a:solidFill>
+                <a:latin typeface="Consolas" panose="020B0609020204030204" pitchFamily="49" charset="0"/>
+                <a:cs typeface="Consolas" panose="020B0609020204030204" pitchFamily="49" charset="0"/>
+              </a:rPr>
+              <a:t>),</a:t>
+            </a:r>
+          </a:p>
+          <a:p>
+            <a:r>
+              <a:rPr lang="en-US" sz="2000" dirty="0">
+                <a:solidFill>
+                  <a:schemeClr val="tx1"/>
+                </a:solidFill>
+                <a:latin typeface="Consolas" panose="020B0609020204030204" pitchFamily="49" charset="0"/>
+                <a:cs typeface="Consolas" panose="020B0609020204030204" pitchFamily="49" charset="0"/>
+              </a:rPr>
+              <a:t>] </a:t>
+            </a:r>
+          </a:p>
+          <a:p>
+            <a:endParaRPr lang="en-US" sz="2000" dirty="0">
+              <a:solidFill>
+                <a:schemeClr val="tx1"/>
+              </a:solidFill>
+              <a:latin typeface="Consolas" panose="020B0609020204030204" pitchFamily="49" charset="0"/>
+              <a:cs typeface="Consolas" panose="020B0609020204030204" pitchFamily="49" charset="0"/>
+            </a:endParaRPr>
+          </a:p>
+          <a:p>
+            <a:r>
+              <a:rPr lang="en-US" sz="2000" dirty="0">
+                <a:solidFill>
+                  <a:schemeClr val="tx1"/>
+                </a:solidFill>
+                <a:latin typeface="Consolas" panose="020B0609020204030204" pitchFamily="49" charset="0"/>
+                <a:cs typeface="Consolas" panose="020B0609020204030204" pitchFamily="49" charset="0"/>
+              </a:rPr>
+              <a:t>schema = ["</a:t>
+            </a:r>
+            <a:r>
+              <a:rPr lang="en-US" sz="2000" dirty="0" err="1">
+                <a:solidFill>
+                  <a:schemeClr val="tx1"/>
+                </a:solidFill>
+                <a:latin typeface="Consolas" panose="020B0609020204030204" pitchFamily="49" charset="0"/>
+                <a:cs typeface="Consolas" panose="020B0609020204030204" pitchFamily="49" charset="0"/>
+              </a:rPr>
+              <a:t>UserID</a:t>
+            </a:r>
+            <a:r>
+              <a:rPr lang="en-US" sz="2000" dirty="0">
+                <a:solidFill>
+                  <a:schemeClr val="tx1"/>
+                </a:solidFill>
+                <a:latin typeface="Consolas" panose="020B0609020204030204" pitchFamily="49" charset="0"/>
+                <a:cs typeface="Consolas" panose="020B0609020204030204" pitchFamily="49" charset="0"/>
+              </a:rPr>
+              <a:t>", "Category", "Amount", "Country"]</a:t>
             </a:r>
           </a:p>
         </p:txBody>
@@ -19257,7 +20239,7 @@
     </p:spTree>
     <p:extLst>
       <p:ext uri="{BB962C8B-B14F-4D97-AF65-F5344CB8AC3E}">
-        <p14:creationId xmlns:p14="http://schemas.microsoft.com/office/powerpoint/2010/main" val="3364964900"/>
+        <p14:creationId xmlns:p14="http://schemas.microsoft.com/office/powerpoint/2010/main" val="1344424828"/>
       </p:ext>
     </p:extLst>
   </p:cSld>
@@ -19566,6 +20548,251 @@
                       </p:childTnLst>
                     </p:cTn>
                   </p:par>
+                  <p:par>
+                    <p:cTn id="27" fill="hold">
+                      <p:stCondLst>
+                        <p:cond delay="indefinite"/>
+                      </p:stCondLst>
+                      <p:childTnLst>
+                        <p:par>
+                          <p:cTn id="28" fill="hold">
+                            <p:stCondLst>
+                              <p:cond delay="0"/>
+                            </p:stCondLst>
+                            <p:childTnLst>
+                              <p:par>
+                                <p:cTn id="29" presetID="1" presetClass="entr" presetSubtype="0" fill="hold" nodeType="clickEffect">
+                                  <p:stCondLst>
+                                    <p:cond delay="0"/>
+                                  </p:stCondLst>
+                                  <p:childTnLst>
+                                    <p:set>
+                                      <p:cBhvr>
+                                        <p:cTn id="30" dur="1" fill="hold">
+                                          <p:stCondLst>
+                                            <p:cond delay="0"/>
+                                          </p:stCondLst>
+                                        </p:cTn>
+                                        <p:tgtEl>
+                                          <p:spTgt spid="3">
+                                            <p:txEl>
+                                              <p:pRg st="6" end="6"/>
+                                            </p:txEl>
+                                          </p:spTgt>
+                                        </p:tgtEl>
+                                        <p:attrNameLst>
+                                          <p:attrName>style.visibility</p:attrName>
+                                        </p:attrNameLst>
+                                      </p:cBhvr>
+                                      <p:to>
+                                        <p:strVal val="visible"/>
+                                      </p:to>
+                                    </p:set>
+                                  </p:childTnLst>
+                                </p:cTn>
+                              </p:par>
+                            </p:childTnLst>
+                          </p:cTn>
+                        </p:par>
+                      </p:childTnLst>
+                    </p:cTn>
+                  </p:par>
+                  <p:par>
+                    <p:cTn id="31" fill="hold">
+                      <p:stCondLst>
+                        <p:cond delay="indefinite"/>
+                      </p:stCondLst>
+                      <p:childTnLst>
+                        <p:par>
+                          <p:cTn id="32" fill="hold">
+                            <p:stCondLst>
+                              <p:cond delay="0"/>
+                            </p:stCondLst>
+                            <p:childTnLst>
+                              <p:par>
+                                <p:cTn id="33" presetID="1" presetClass="entr" presetSubtype="0" fill="hold" nodeType="clickEffect">
+                                  <p:stCondLst>
+                                    <p:cond delay="0"/>
+                                  </p:stCondLst>
+                                  <p:childTnLst>
+                                    <p:set>
+                                      <p:cBhvr>
+                                        <p:cTn id="34" dur="1" fill="hold">
+                                          <p:stCondLst>
+                                            <p:cond delay="0"/>
+                                          </p:stCondLst>
+                                        </p:cTn>
+                                        <p:tgtEl>
+                                          <p:spTgt spid="3">
+                                            <p:txEl>
+                                              <p:pRg st="7" end="7"/>
+                                            </p:txEl>
+                                          </p:spTgt>
+                                        </p:tgtEl>
+                                        <p:attrNameLst>
+                                          <p:attrName>style.visibility</p:attrName>
+                                        </p:attrNameLst>
+                                      </p:cBhvr>
+                                      <p:to>
+                                        <p:strVal val="visible"/>
+                                      </p:to>
+                                    </p:set>
+                                  </p:childTnLst>
+                                </p:cTn>
+                              </p:par>
+                            </p:childTnLst>
+                          </p:cTn>
+                        </p:par>
+                      </p:childTnLst>
+                    </p:cTn>
+                  </p:par>
+                  <p:par>
+                    <p:cTn id="35" fill="hold">
+                      <p:stCondLst>
+                        <p:cond delay="indefinite"/>
+                      </p:stCondLst>
+                      <p:childTnLst>
+                        <p:par>
+                          <p:cTn id="36" fill="hold">
+                            <p:stCondLst>
+                              <p:cond delay="0"/>
+                            </p:stCondLst>
+                            <p:childTnLst>
+                              <p:par>
+                                <p:cTn id="37" presetID="1" presetClass="entr" presetSubtype="0" fill="hold" nodeType="clickEffect">
+                                  <p:stCondLst>
+                                    <p:cond delay="0"/>
+                                  </p:stCondLst>
+                                  <p:childTnLst>
+                                    <p:set>
+                                      <p:cBhvr>
+                                        <p:cTn id="38" dur="1" fill="hold">
+                                          <p:stCondLst>
+                                            <p:cond delay="0"/>
+                                          </p:stCondLst>
+                                        </p:cTn>
+                                        <p:tgtEl>
+                                          <p:spTgt spid="3">
+                                            <p:txEl>
+                                              <p:pRg st="8" end="8"/>
+                                            </p:txEl>
+                                          </p:spTgt>
+                                        </p:tgtEl>
+                                        <p:attrNameLst>
+                                          <p:attrName>style.visibility</p:attrName>
+                                        </p:attrNameLst>
+                                      </p:cBhvr>
+                                      <p:to>
+                                        <p:strVal val="visible"/>
+                                      </p:to>
+                                    </p:set>
+                                  </p:childTnLst>
+                                </p:cTn>
+                              </p:par>
+                            </p:childTnLst>
+                          </p:cTn>
+                        </p:par>
+                      </p:childTnLst>
+                    </p:cTn>
+                  </p:par>
+                  <p:par>
+                    <p:cTn id="39" fill="hold">
+                      <p:stCondLst>
+                        <p:cond delay="indefinite"/>
+                      </p:stCondLst>
+                      <p:childTnLst>
+                        <p:par>
+                          <p:cTn id="40" fill="hold">
+                            <p:stCondLst>
+                              <p:cond delay="0"/>
+                            </p:stCondLst>
+                            <p:childTnLst>
+                              <p:par>
+                                <p:cTn id="41" presetID="1" presetClass="entr" presetSubtype="0" fill="hold" nodeType="clickEffect">
+                                  <p:stCondLst>
+                                    <p:cond delay="0"/>
+                                  </p:stCondLst>
+                                  <p:childTnLst>
+                                    <p:set>
+                                      <p:cBhvr>
+                                        <p:cTn id="42" dur="1" fill="hold">
+                                          <p:stCondLst>
+                                            <p:cond delay="0"/>
+                                          </p:stCondLst>
+                                        </p:cTn>
+                                        <p:tgtEl>
+                                          <p:spTgt spid="3">
+                                            <p:txEl>
+                                              <p:pRg st="9" end="9"/>
+                                            </p:txEl>
+                                          </p:spTgt>
+                                        </p:tgtEl>
+                                        <p:attrNameLst>
+                                          <p:attrName>style.visibility</p:attrName>
+                                        </p:attrNameLst>
+                                      </p:cBhvr>
+                                      <p:to>
+                                        <p:strVal val="visible"/>
+                                      </p:to>
+                                    </p:set>
+                                  </p:childTnLst>
+                                </p:cTn>
+                              </p:par>
+                            </p:childTnLst>
+                          </p:cTn>
+                        </p:par>
+                      </p:childTnLst>
+                    </p:cTn>
+                  </p:par>
+                  <p:par>
+                    <p:cTn id="43" fill="hold">
+                      <p:stCondLst>
+                        <p:cond delay="indefinite"/>
+                      </p:stCondLst>
+                      <p:childTnLst>
+                        <p:par>
+                          <p:cTn id="44" fill="hold">
+                            <p:stCondLst>
+                              <p:cond delay="0"/>
+                            </p:stCondLst>
+                            <p:childTnLst>
+                              <p:par>
+                                <p:cTn id="45" presetID="1" presetClass="entr" presetSubtype="0" fill="hold" nodeType="clickEffect">
+                                  <p:stCondLst>
+                                    <p:cond delay="0"/>
+                                  </p:stCondLst>
+                                  <p:childTnLst>
+                                    <p:set>
+                                      <p:cBhvr>
+                                        <p:cTn id="46" dur="1" fill="hold">
+                                          <p:stCondLst>
+                                            <p:cond delay="0"/>
+                                          </p:stCondLst>
+                                        </p:cTn>
+                                        <p:tgtEl>
+                                          <p:spTgt spid="3">
+                                            <p:txEl>
+                                              <p:pRg st="11" end="11"/>
+                                            </p:txEl>
+                                          </p:spTgt>
+                                        </p:tgtEl>
+                                        <p:attrNameLst>
+                                          <p:attrName>style.visibility</p:attrName>
+                                        </p:attrNameLst>
+                                      </p:cBhvr>
+                                      <p:to>
+                                        <p:strVal val="visible"/>
+                                      </p:to>
+                                    </p:set>
+                                  </p:childTnLst>
+                                </p:cTn>
+                              </p:par>
+                            </p:childTnLst>
+                          </p:cTn>
+                        </p:par>
+                      </p:childTnLst>
+                    </p:cTn>
+                  </p:par>
                 </p:childTnLst>
               </p:cTn>
               <p:prevCondLst>
@@ -19596,7 +20823,13 @@
   <p:cSld>
     <p:spTree>
       <p:nvGrpSpPr>
-        <p:cNvPr id="1" name=""/>
+        <p:cNvPr id="1" name="">
+          <a:extLst>
+            <a:ext uri="{FF2B5EF4-FFF2-40B4-BE49-F238E27FC236}">
+              <a16:creationId xmlns:a16="http://schemas.microsoft.com/office/drawing/2014/main" id="{48E5F0AB-1BA2-CDE4-756D-8F40C2250986}"/>
+            </a:ext>
+          </a:extLst>
+        </p:cNvPr>
         <p:cNvGrpSpPr/>
         <p:nvPr/>
       </p:nvGrpSpPr>
@@ -19613,7 +20846,7 @@
           <p:cNvPr id="2" name="Title 1">
             <a:extLst>
               <a:ext uri="{FF2B5EF4-FFF2-40B4-BE49-F238E27FC236}">
-                <a16:creationId xmlns:a16="http://schemas.microsoft.com/office/drawing/2014/main" id="{8207F09F-B406-FB4C-ABE0-890E4E4F95C8}"/>
+                <a16:creationId xmlns:a16="http://schemas.microsoft.com/office/drawing/2014/main" id="{D61EB8B1-BB12-1BF5-1805-696B156B8538}"/>
               </a:ext>
             </a:extLst>
           </p:cNvPr>
@@ -19626,61 +20859,4553 @@
         </p:nvSpPr>
         <p:spPr>
           <a:xfrm>
-            <a:off x="1524000" y="628093"/>
-            <a:ext cx="9144000" cy="915159"/>
+            <a:off x="1524000" y="382580"/>
+            <a:ext cx="9144000" cy="502003"/>
           </a:xfrm>
         </p:spPr>
         <p:txBody>
-          <a:bodyPr/>
+          <a:bodyPr>
+            <a:noAutofit/>
+          </a:bodyPr>
           <a:lstStyle/>
           <a:p>
             <a:r>
-              <a:rPr lang="en-US"/>
-              <a:t>Amazon Athena</a:t>
+              <a:rPr lang="en-US" sz="3200" dirty="0" err="1"/>
+              <a:t>PySpark</a:t>
+            </a:r>
+            <a:r>
+              <a:rPr lang="en-US" sz="3200" dirty="0"/>
+              <a:t> </a:t>
+            </a:r>
+            <a:r>
+              <a:rPr lang="en-US" sz="3200" dirty="0" err="1"/>
+              <a:t>DataFrame</a:t>
+            </a:r>
+            <a:r>
+              <a:rPr lang="en-US" sz="3200" dirty="0"/>
+              <a:t> Example 2 - 0003</a:t>
             </a:r>
           </a:p>
         </p:txBody>
       </p:sp>
-      <p:pic>
-        <p:nvPicPr>
-          <p:cNvPr id="5" name="Picture 4" descr="Diagram&#10;&#10;Description automatically generated">
+      <p:sp>
+        <p:nvSpPr>
+          <p:cNvPr id="3" name="Subtitle 2">
             <a:extLst>
               <a:ext uri="{FF2B5EF4-FFF2-40B4-BE49-F238E27FC236}">
-                <a16:creationId xmlns:a16="http://schemas.microsoft.com/office/drawing/2014/main" id="{A8FA6E48-77E3-5068-7DC9-F7519FBE0CB8}"/>
+                <a16:creationId xmlns:a16="http://schemas.microsoft.com/office/drawing/2014/main" id="{2D97D4A7-DC41-3406-4535-1893411EAF6E}"/>
               </a:ext>
             </a:extLst>
           </p:cNvPr>
-          <p:cNvPicPr>
-            <a:picLocks noChangeAspect="1"/>
-          </p:cNvPicPr>
-          <p:nvPr/>
-        </p:nvPicPr>
-        <p:blipFill>
-          <a:blip r:embed="rId2"/>
-          <a:stretch>
-            <a:fillRect/>
-          </a:stretch>
-        </p:blipFill>
+          <p:cNvSpPr>
+            <a:spLocks noGrp="1"/>
+          </p:cNvSpPr>
+          <p:nvPr>
+            <p:ph type="subTitle" idx="1"/>
+          </p:nvPr>
+        </p:nvSpPr>
         <p:spPr>
           <a:xfrm>
-            <a:off x="1754659" y="1878226"/>
-            <a:ext cx="7253417" cy="3150973"/>
+            <a:off x="1524000" y="884584"/>
+            <a:ext cx="9144000" cy="5088834"/>
           </a:xfrm>
-          <a:prstGeom prst="rect">
-            <a:avLst/>
-          </a:prstGeom>
         </p:spPr>
-      </p:pic>
+        <p:txBody>
+          <a:bodyPr>
+            <a:normAutofit fontScale="62500" lnSpcReduction="20000"/>
+          </a:bodyPr>
+          <a:lstStyle/>
+          <a:p>
+            <a:r>
+              <a:rPr lang="en-US" dirty="0">
+                <a:solidFill>
+                  <a:schemeClr val="tx1"/>
+                </a:solidFill>
+                <a:highlight>
+                  <a:srgbClr val="FFFF00"/>
+                </a:highlight>
+                <a:latin typeface="Consolas" panose="020B0609020204030204" pitchFamily="49" charset="0"/>
+                <a:cs typeface="Consolas" panose="020B0609020204030204" pitchFamily="49" charset="0"/>
+              </a:rPr>
+              <a:t># 4. Create a </a:t>
+            </a:r>
+            <a:r>
+              <a:rPr lang="en-US" dirty="0" err="1">
+                <a:solidFill>
+                  <a:schemeClr val="tx1"/>
+                </a:solidFill>
+                <a:highlight>
+                  <a:srgbClr val="FFFF00"/>
+                </a:highlight>
+                <a:latin typeface="Consolas" panose="020B0609020204030204" pitchFamily="49" charset="0"/>
+                <a:cs typeface="Consolas" panose="020B0609020204030204" pitchFamily="49" charset="0"/>
+              </a:rPr>
+              <a:t>DataFrame</a:t>
+            </a:r>
+            <a:r>
+              <a:rPr lang="en-US" dirty="0">
+                <a:solidFill>
+                  <a:schemeClr val="tx1"/>
+                </a:solidFill>
+                <a:highlight>
+                  <a:srgbClr val="FFFF00"/>
+                </a:highlight>
+                <a:latin typeface="Consolas" panose="020B0609020204030204" pitchFamily="49" charset="0"/>
+                <a:cs typeface="Consolas" panose="020B0609020204030204" pitchFamily="49" charset="0"/>
+              </a:rPr>
+              <a:t> </a:t>
+            </a:r>
+          </a:p>
+          <a:p>
+            <a:r>
+              <a:rPr lang="en-US" dirty="0" err="1">
+                <a:solidFill>
+                  <a:schemeClr val="tx1"/>
+                </a:solidFill>
+                <a:latin typeface="Consolas" panose="020B0609020204030204" pitchFamily="49" charset="0"/>
+                <a:cs typeface="Consolas" panose="020B0609020204030204" pitchFamily="49" charset="0"/>
+              </a:rPr>
+              <a:t>df</a:t>
+            </a:r>
+            <a:r>
+              <a:rPr lang="en-US" dirty="0">
+                <a:solidFill>
+                  <a:schemeClr val="tx1"/>
+                </a:solidFill>
+                <a:latin typeface="Consolas" panose="020B0609020204030204" pitchFamily="49" charset="0"/>
+                <a:cs typeface="Consolas" panose="020B0609020204030204" pitchFamily="49" charset="0"/>
+              </a:rPr>
+              <a:t> = </a:t>
+            </a:r>
+            <a:r>
+              <a:rPr lang="en-US" dirty="0" err="1">
+                <a:solidFill>
+                  <a:schemeClr val="tx1"/>
+                </a:solidFill>
+                <a:latin typeface="Consolas" panose="020B0609020204030204" pitchFamily="49" charset="0"/>
+                <a:cs typeface="Consolas" panose="020B0609020204030204" pitchFamily="49" charset="0"/>
+              </a:rPr>
+              <a:t>spark.createDataFrame</a:t>
+            </a:r>
+            <a:r>
+              <a:rPr lang="en-US" dirty="0">
+                <a:solidFill>
+                  <a:schemeClr val="tx1"/>
+                </a:solidFill>
+                <a:latin typeface="Consolas" panose="020B0609020204030204" pitchFamily="49" charset="0"/>
+                <a:cs typeface="Consolas" panose="020B0609020204030204" pitchFamily="49" charset="0"/>
+              </a:rPr>
+              <a:t>(data, schema=schema) </a:t>
+            </a:r>
+          </a:p>
+          <a:p>
+            <a:r>
+              <a:rPr lang="en-US" dirty="0">
+                <a:solidFill>
+                  <a:schemeClr val="tx1"/>
+                </a:solidFill>
+                <a:latin typeface="Consolas" panose="020B0609020204030204" pitchFamily="49" charset="0"/>
+                <a:cs typeface="Consolas" panose="020B0609020204030204" pitchFamily="49" charset="0"/>
+              </a:rPr>
+              <a:t>print("--- Raw Data ---") </a:t>
+            </a:r>
+          </a:p>
+          <a:p>
+            <a:r>
+              <a:rPr lang="en-US" dirty="0" err="1">
+                <a:solidFill>
+                  <a:schemeClr val="tx1"/>
+                </a:solidFill>
+                <a:latin typeface="Consolas" panose="020B0609020204030204" pitchFamily="49" charset="0"/>
+                <a:cs typeface="Consolas" panose="020B0609020204030204" pitchFamily="49" charset="0"/>
+              </a:rPr>
+              <a:t>df.show</a:t>
+            </a:r>
+            <a:r>
+              <a:rPr lang="en-US" dirty="0">
+                <a:solidFill>
+                  <a:schemeClr val="tx1"/>
+                </a:solidFill>
+                <a:latin typeface="Consolas" panose="020B0609020204030204" pitchFamily="49" charset="0"/>
+                <a:cs typeface="Consolas" panose="020B0609020204030204" pitchFamily="49" charset="0"/>
+              </a:rPr>
+              <a:t>() </a:t>
+            </a:r>
+          </a:p>
+          <a:p>
+            <a:r>
+              <a:rPr lang="en-US" dirty="0">
+                <a:solidFill>
+                  <a:schemeClr val="tx1"/>
+                </a:solidFill>
+                <a:latin typeface="Consolas" panose="020B0609020204030204" pitchFamily="49" charset="0"/>
+                <a:cs typeface="Consolas" panose="020B0609020204030204" pitchFamily="49" charset="0"/>
+              </a:rPr>
+              <a:t>--- Raw Data --- </a:t>
+            </a:r>
+          </a:p>
+          <a:p>
+            <a:r>
+              <a:rPr lang="en-US" dirty="0">
+                <a:solidFill>
+                  <a:schemeClr val="tx1"/>
+                </a:solidFill>
+                <a:latin typeface="Consolas" panose="020B0609020204030204" pitchFamily="49" charset="0"/>
+                <a:cs typeface="Consolas" panose="020B0609020204030204" pitchFamily="49" charset="0"/>
+              </a:rPr>
+              <a:t>+------+-----------+------+-------+</a:t>
+            </a:r>
+          </a:p>
+          <a:p>
+            <a:r>
+              <a:rPr lang="en-US" dirty="0">
+                <a:solidFill>
+                  <a:schemeClr val="tx1"/>
+                </a:solidFill>
+                <a:highlight>
+                  <a:srgbClr val="00FF00"/>
+                </a:highlight>
+                <a:latin typeface="Consolas" panose="020B0609020204030204" pitchFamily="49" charset="0"/>
+                <a:cs typeface="Consolas" panose="020B0609020204030204" pitchFamily="49" charset="0"/>
+              </a:rPr>
+              <a:t>|</a:t>
+            </a:r>
+            <a:r>
+              <a:rPr lang="en-US" dirty="0" err="1">
+                <a:solidFill>
+                  <a:schemeClr val="tx1"/>
+                </a:solidFill>
+                <a:highlight>
+                  <a:srgbClr val="00FF00"/>
+                </a:highlight>
+                <a:latin typeface="Consolas" panose="020B0609020204030204" pitchFamily="49" charset="0"/>
+                <a:cs typeface="Consolas" panose="020B0609020204030204" pitchFamily="49" charset="0"/>
+              </a:rPr>
+              <a:t>UserID</a:t>
+            </a:r>
+            <a:r>
+              <a:rPr lang="en-US" dirty="0">
+                <a:solidFill>
+                  <a:schemeClr val="tx1"/>
+                </a:solidFill>
+                <a:highlight>
+                  <a:srgbClr val="00FF00"/>
+                </a:highlight>
+                <a:latin typeface="Consolas" panose="020B0609020204030204" pitchFamily="49" charset="0"/>
+                <a:cs typeface="Consolas" panose="020B0609020204030204" pitchFamily="49" charset="0"/>
+              </a:rPr>
+              <a:t>|   </a:t>
+            </a:r>
+            <a:r>
+              <a:rPr lang="en-US" dirty="0" err="1">
+                <a:solidFill>
+                  <a:schemeClr val="tx1"/>
+                </a:solidFill>
+                <a:highlight>
+                  <a:srgbClr val="00FF00"/>
+                </a:highlight>
+                <a:latin typeface="Consolas" panose="020B0609020204030204" pitchFamily="49" charset="0"/>
+                <a:cs typeface="Consolas" panose="020B0609020204030204" pitchFamily="49" charset="0"/>
+              </a:rPr>
+              <a:t>Category|Amount|Country</a:t>
+            </a:r>
+            <a:r>
+              <a:rPr lang="en-US" dirty="0">
+                <a:solidFill>
+                  <a:schemeClr val="tx1"/>
+                </a:solidFill>
+                <a:highlight>
+                  <a:srgbClr val="00FF00"/>
+                </a:highlight>
+                <a:latin typeface="Consolas" panose="020B0609020204030204" pitchFamily="49" charset="0"/>
+                <a:cs typeface="Consolas" panose="020B0609020204030204" pitchFamily="49" charset="0"/>
+              </a:rPr>
+              <a:t>|</a:t>
+            </a:r>
+          </a:p>
+          <a:p>
+            <a:r>
+              <a:rPr lang="en-US" dirty="0">
+                <a:solidFill>
+                  <a:schemeClr val="tx1"/>
+                </a:solidFill>
+                <a:latin typeface="Consolas" panose="020B0609020204030204" pitchFamily="49" charset="0"/>
+                <a:cs typeface="Consolas" panose="020B0609020204030204" pitchFamily="49" charset="0"/>
+              </a:rPr>
+              <a:t>+------+-----------+------+-------+</a:t>
+            </a:r>
+          </a:p>
+          <a:p>
+            <a:r>
+              <a:rPr lang="en-US" dirty="0">
+                <a:solidFill>
+                  <a:schemeClr val="tx1"/>
+                </a:solidFill>
+                <a:latin typeface="Consolas" panose="020B0609020204030204" pitchFamily="49" charset="0"/>
+                <a:cs typeface="Consolas" panose="020B0609020204030204" pitchFamily="49" charset="0"/>
+              </a:rPr>
+              <a:t>|User_A|Electronics|1200.0|     US|</a:t>
+            </a:r>
+          </a:p>
+          <a:p>
+            <a:r>
+              <a:rPr lang="en-US" dirty="0">
+                <a:solidFill>
+                  <a:schemeClr val="tx1"/>
+                </a:solidFill>
+                <a:latin typeface="Consolas" panose="020B0609020204030204" pitchFamily="49" charset="0"/>
+                <a:cs typeface="Consolas" panose="020B0609020204030204" pitchFamily="49" charset="0"/>
+              </a:rPr>
+              <a:t>|</a:t>
+            </a:r>
+            <a:r>
+              <a:rPr lang="en-US" dirty="0" err="1">
+                <a:solidFill>
+                  <a:schemeClr val="tx1"/>
+                </a:solidFill>
+                <a:latin typeface="Consolas" panose="020B0609020204030204" pitchFamily="49" charset="0"/>
+                <a:cs typeface="Consolas" panose="020B0609020204030204" pitchFamily="49" charset="0"/>
+              </a:rPr>
+              <a:t>User_B</a:t>
+            </a:r>
+            <a:r>
+              <a:rPr lang="en-US" dirty="0">
+                <a:solidFill>
+                  <a:schemeClr val="tx1"/>
+                </a:solidFill>
+                <a:latin typeface="Consolas" panose="020B0609020204030204" pitchFamily="49" charset="0"/>
+                <a:cs typeface="Consolas" panose="020B0609020204030204" pitchFamily="49" charset="0"/>
+              </a:rPr>
+              <a:t>|   Clothing|  45.5|     CA|</a:t>
+            </a:r>
+          </a:p>
+          <a:p>
+            <a:r>
+              <a:rPr lang="en-US" dirty="0">
+                <a:solidFill>
+                  <a:schemeClr val="tx1"/>
+                </a:solidFill>
+                <a:latin typeface="Consolas" panose="020B0609020204030204" pitchFamily="49" charset="0"/>
+                <a:cs typeface="Consolas" panose="020B0609020204030204" pitchFamily="49" charset="0"/>
+              </a:rPr>
+              <a:t>|</a:t>
+            </a:r>
+            <a:r>
+              <a:rPr lang="en-US" dirty="0" err="1">
+                <a:solidFill>
+                  <a:schemeClr val="tx1"/>
+                </a:solidFill>
+                <a:latin typeface="Consolas" panose="020B0609020204030204" pitchFamily="49" charset="0"/>
+                <a:cs typeface="Consolas" panose="020B0609020204030204" pitchFamily="49" charset="0"/>
+              </a:rPr>
+              <a:t>User_C|Electronics</a:t>
+            </a:r>
+            <a:r>
+              <a:rPr lang="en-US" dirty="0">
+                <a:solidFill>
+                  <a:schemeClr val="tx1"/>
+                </a:solidFill>
+                <a:latin typeface="Consolas" panose="020B0609020204030204" pitchFamily="49" charset="0"/>
+                <a:cs typeface="Consolas" panose="020B0609020204030204" pitchFamily="49" charset="0"/>
+              </a:rPr>
+              <a:t>|  </a:t>
+            </a:r>
+            <a:r>
+              <a:rPr lang="en-US" dirty="0">
+                <a:solidFill>
+                  <a:schemeClr val="tx1"/>
+                </a:solidFill>
+                <a:highlight>
+                  <a:srgbClr val="FF0000"/>
+                </a:highlight>
+                <a:latin typeface="Consolas" panose="020B0609020204030204" pitchFamily="49" charset="0"/>
+                <a:cs typeface="Consolas" panose="020B0609020204030204" pitchFamily="49" charset="0"/>
+              </a:rPr>
+              <a:t>null</a:t>
+            </a:r>
+            <a:r>
+              <a:rPr lang="en-US" dirty="0">
+                <a:solidFill>
+                  <a:schemeClr val="tx1"/>
+                </a:solidFill>
+                <a:latin typeface="Consolas" panose="020B0609020204030204" pitchFamily="49" charset="0"/>
+                <a:cs typeface="Consolas" panose="020B0609020204030204" pitchFamily="49" charset="0"/>
+              </a:rPr>
+              <a:t>|     US|</a:t>
+            </a:r>
+          </a:p>
+          <a:p>
+            <a:r>
+              <a:rPr lang="en-US" dirty="0">
+                <a:solidFill>
+                  <a:schemeClr val="tx1"/>
+                </a:solidFill>
+                <a:latin typeface="Consolas" panose="020B0609020204030204" pitchFamily="49" charset="0"/>
+                <a:cs typeface="Consolas" panose="020B0609020204030204" pitchFamily="49" charset="0"/>
+              </a:rPr>
+              <a:t>|</a:t>
+            </a:r>
+            <a:r>
+              <a:rPr lang="en-US" dirty="0" err="1">
+                <a:solidFill>
+                  <a:schemeClr val="tx1"/>
+                </a:solidFill>
+                <a:latin typeface="Consolas" panose="020B0609020204030204" pitchFamily="49" charset="0"/>
+                <a:cs typeface="Consolas" panose="020B0609020204030204" pitchFamily="49" charset="0"/>
+              </a:rPr>
+              <a:t>User_A|Electronics</a:t>
+            </a:r>
+            <a:r>
+              <a:rPr lang="en-US" dirty="0">
+                <a:solidFill>
+                  <a:schemeClr val="tx1"/>
+                </a:solidFill>
+                <a:latin typeface="Consolas" panose="020B0609020204030204" pitchFamily="49" charset="0"/>
+                <a:cs typeface="Consolas" panose="020B0609020204030204" pitchFamily="49" charset="0"/>
+              </a:rPr>
+              <a:t>| 150.0|     US|</a:t>
+            </a:r>
+          </a:p>
+          <a:p>
+            <a:r>
+              <a:rPr lang="en-US" dirty="0">
+                <a:solidFill>
+                  <a:schemeClr val="tx1"/>
+                </a:solidFill>
+                <a:latin typeface="Consolas" panose="020B0609020204030204" pitchFamily="49" charset="0"/>
+                <a:cs typeface="Consolas" panose="020B0609020204030204" pitchFamily="49" charset="0"/>
+              </a:rPr>
+              <a:t>|</a:t>
+            </a:r>
+            <a:r>
+              <a:rPr lang="en-US" dirty="0" err="1">
+                <a:solidFill>
+                  <a:schemeClr val="tx1"/>
+                </a:solidFill>
+                <a:latin typeface="Consolas" panose="020B0609020204030204" pitchFamily="49" charset="0"/>
+                <a:cs typeface="Consolas" panose="020B0609020204030204" pitchFamily="49" charset="0"/>
+              </a:rPr>
+              <a:t>User_D</a:t>
+            </a:r>
+            <a:r>
+              <a:rPr lang="en-US" dirty="0">
+                <a:solidFill>
+                  <a:schemeClr val="tx1"/>
+                </a:solidFill>
+                <a:latin typeface="Consolas" panose="020B0609020204030204" pitchFamily="49" charset="0"/>
+                <a:cs typeface="Consolas" panose="020B0609020204030204" pitchFamily="49" charset="0"/>
+              </a:rPr>
+              <a:t>|      Books|  22.0|     UK|</a:t>
+            </a:r>
+          </a:p>
+          <a:p>
+            <a:r>
+              <a:rPr lang="en-US" dirty="0">
+                <a:solidFill>
+                  <a:schemeClr val="tx1"/>
+                </a:solidFill>
+                <a:latin typeface="Consolas" panose="020B0609020204030204" pitchFamily="49" charset="0"/>
+                <a:cs typeface="Consolas" panose="020B0609020204030204" pitchFamily="49" charset="0"/>
+              </a:rPr>
+              <a:t>|</a:t>
+            </a:r>
+            <a:r>
+              <a:rPr lang="en-US" dirty="0" err="1">
+                <a:solidFill>
+                  <a:schemeClr val="tx1"/>
+                </a:solidFill>
+                <a:latin typeface="Consolas" panose="020B0609020204030204" pitchFamily="49" charset="0"/>
+                <a:cs typeface="Consolas" panose="020B0609020204030204" pitchFamily="49" charset="0"/>
+              </a:rPr>
+              <a:t>User_B</a:t>
+            </a:r>
+            <a:r>
+              <a:rPr lang="en-US" dirty="0">
+                <a:solidFill>
+                  <a:schemeClr val="tx1"/>
+                </a:solidFill>
+                <a:latin typeface="Consolas" panose="020B0609020204030204" pitchFamily="49" charset="0"/>
+                <a:cs typeface="Consolas" panose="020B0609020204030204" pitchFamily="49" charset="0"/>
+              </a:rPr>
+              <a:t>|   Clothing|  80.0|     CA|</a:t>
+            </a:r>
+          </a:p>
+          <a:p>
+            <a:r>
+              <a:rPr lang="en-US" dirty="0">
+                <a:solidFill>
+                  <a:schemeClr val="tx1"/>
+                </a:solidFill>
+                <a:latin typeface="Consolas" panose="020B0609020204030204" pitchFamily="49" charset="0"/>
+                <a:cs typeface="Consolas" panose="020B0609020204030204" pitchFamily="49" charset="0"/>
+              </a:rPr>
+              <a:t>|</a:t>
+            </a:r>
+            <a:r>
+              <a:rPr lang="en-US" dirty="0" err="1">
+                <a:solidFill>
+                  <a:schemeClr val="tx1"/>
+                </a:solidFill>
+                <a:latin typeface="Consolas" panose="020B0609020204030204" pitchFamily="49" charset="0"/>
+                <a:cs typeface="Consolas" panose="020B0609020204030204" pitchFamily="49" charset="0"/>
+              </a:rPr>
+              <a:t>User_E</a:t>
+            </a:r>
+            <a:r>
+              <a:rPr lang="en-US" dirty="0">
+                <a:solidFill>
+                  <a:schemeClr val="tx1"/>
+                </a:solidFill>
+                <a:latin typeface="Consolas" panose="020B0609020204030204" pitchFamily="49" charset="0"/>
+                <a:cs typeface="Consolas" panose="020B0609020204030204" pitchFamily="49" charset="0"/>
+              </a:rPr>
+              <a:t>|      Books| 15.75|   </a:t>
+            </a:r>
+            <a:r>
+              <a:rPr lang="en-US" dirty="0">
+                <a:solidFill>
+                  <a:schemeClr val="tx1"/>
+                </a:solidFill>
+                <a:highlight>
+                  <a:srgbClr val="FF0000"/>
+                </a:highlight>
+                <a:latin typeface="Consolas" panose="020B0609020204030204" pitchFamily="49" charset="0"/>
+                <a:cs typeface="Consolas" panose="020B0609020204030204" pitchFamily="49" charset="0"/>
+              </a:rPr>
+              <a:t>null</a:t>
+            </a:r>
+            <a:r>
+              <a:rPr lang="en-US" dirty="0">
+                <a:solidFill>
+                  <a:schemeClr val="tx1"/>
+                </a:solidFill>
+                <a:latin typeface="Consolas" panose="020B0609020204030204" pitchFamily="49" charset="0"/>
+                <a:cs typeface="Consolas" panose="020B0609020204030204" pitchFamily="49" charset="0"/>
+              </a:rPr>
+              <a:t>|</a:t>
+            </a:r>
+          </a:p>
+          <a:p>
+            <a:r>
+              <a:rPr lang="en-US" dirty="0">
+                <a:solidFill>
+                  <a:schemeClr val="tx1"/>
+                </a:solidFill>
+                <a:latin typeface="Consolas" panose="020B0609020204030204" pitchFamily="49" charset="0"/>
+                <a:cs typeface="Consolas" panose="020B0609020204030204" pitchFamily="49" charset="0"/>
+              </a:rPr>
+              <a:t>+------+-----------+------+-------+</a:t>
+            </a:r>
+          </a:p>
+        </p:txBody>
+      </p:sp>
     </p:spTree>
     <p:extLst>
       <p:ext uri="{BB962C8B-B14F-4D97-AF65-F5344CB8AC3E}">
-        <p14:creationId xmlns:p14="http://schemas.microsoft.com/office/powerpoint/2010/main" val="2977580650"/>
+        <p14:creationId xmlns:p14="http://schemas.microsoft.com/office/powerpoint/2010/main" val="3838501448"/>
       </p:ext>
     </p:extLst>
   </p:cSld>
   <p:clrMapOvr>
     <a:masterClrMapping/>
   </p:clrMapOvr>
+  <p:timing>
+    <p:tnLst>
+      <p:par>
+        <p:cTn id="1" dur="indefinite" restart="never" nodeType="tmRoot">
+          <p:childTnLst>
+            <p:seq concurrent="1" nextAc="seek">
+              <p:cTn id="2" dur="indefinite" nodeType="mainSeq">
+                <p:childTnLst>
+                  <p:par>
+                    <p:cTn id="3" fill="hold">
+                      <p:stCondLst>
+                        <p:cond delay="indefinite"/>
+                      </p:stCondLst>
+                      <p:childTnLst>
+                        <p:par>
+                          <p:cTn id="4" fill="hold">
+                            <p:stCondLst>
+                              <p:cond delay="0"/>
+                            </p:stCondLst>
+                            <p:childTnLst>
+                              <p:par>
+                                <p:cTn id="5" presetID="1" presetClass="entr" presetSubtype="0" fill="hold" nodeType="clickEffect">
+                                  <p:stCondLst>
+                                    <p:cond delay="0"/>
+                                  </p:stCondLst>
+                                  <p:childTnLst>
+                                    <p:set>
+                                      <p:cBhvr>
+                                        <p:cTn id="6" dur="1" fill="hold">
+                                          <p:stCondLst>
+                                            <p:cond delay="0"/>
+                                          </p:stCondLst>
+                                        </p:cTn>
+                                        <p:tgtEl>
+                                          <p:spTgt spid="3">
+                                            <p:txEl>
+                                              <p:pRg st="0" end="0"/>
+                                            </p:txEl>
+                                          </p:spTgt>
+                                        </p:tgtEl>
+                                        <p:attrNameLst>
+                                          <p:attrName>style.visibility</p:attrName>
+                                        </p:attrNameLst>
+                                      </p:cBhvr>
+                                      <p:to>
+                                        <p:strVal val="visible"/>
+                                      </p:to>
+                                    </p:set>
+                                  </p:childTnLst>
+                                </p:cTn>
+                              </p:par>
+                            </p:childTnLst>
+                          </p:cTn>
+                        </p:par>
+                      </p:childTnLst>
+                    </p:cTn>
+                  </p:par>
+                  <p:par>
+                    <p:cTn id="7" fill="hold">
+                      <p:stCondLst>
+                        <p:cond delay="indefinite"/>
+                      </p:stCondLst>
+                      <p:childTnLst>
+                        <p:par>
+                          <p:cTn id="8" fill="hold">
+                            <p:stCondLst>
+                              <p:cond delay="0"/>
+                            </p:stCondLst>
+                            <p:childTnLst>
+                              <p:par>
+                                <p:cTn id="9" presetID="1" presetClass="entr" presetSubtype="0" fill="hold" nodeType="clickEffect">
+                                  <p:stCondLst>
+                                    <p:cond delay="0"/>
+                                  </p:stCondLst>
+                                  <p:childTnLst>
+                                    <p:set>
+                                      <p:cBhvr>
+                                        <p:cTn id="10" dur="1" fill="hold">
+                                          <p:stCondLst>
+                                            <p:cond delay="0"/>
+                                          </p:stCondLst>
+                                        </p:cTn>
+                                        <p:tgtEl>
+                                          <p:spTgt spid="3">
+                                            <p:txEl>
+                                              <p:pRg st="1" end="1"/>
+                                            </p:txEl>
+                                          </p:spTgt>
+                                        </p:tgtEl>
+                                        <p:attrNameLst>
+                                          <p:attrName>style.visibility</p:attrName>
+                                        </p:attrNameLst>
+                                      </p:cBhvr>
+                                      <p:to>
+                                        <p:strVal val="visible"/>
+                                      </p:to>
+                                    </p:set>
+                                  </p:childTnLst>
+                                </p:cTn>
+                              </p:par>
+                            </p:childTnLst>
+                          </p:cTn>
+                        </p:par>
+                      </p:childTnLst>
+                    </p:cTn>
+                  </p:par>
+                  <p:par>
+                    <p:cTn id="11" fill="hold">
+                      <p:stCondLst>
+                        <p:cond delay="indefinite"/>
+                      </p:stCondLst>
+                      <p:childTnLst>
+                        <p:par>
+                          <p:cTn id="12" fill="hold">
+                            <p:stCondLst>
+                              <p:cond delay="0"/>
+                            </p:stCondLst>
+                            <p:childTnLst>
+                              <p:par>
+                                <p:cTn id="13" presetID="1" presetClass="entr" presetSubtype="0" fill="hold" nodeType="clickEffect">
+                                  <p:stCondLst>
+                                    <p:cond delay="0"/>
+                                  </p:stCondLst>
+                                  <p:childTnLst>
+                                    <p:set>
+                                      <p:cBhvr>
+                                        <p:cTn id="14" dur="1" fill="hold">
+                                          <p:stCondLst>
+                                            <p:cond delay="0"/>
+                                          </p:stCondLst>
+                                        </p:cTn>
+                                        <p:tgtEl>
+                                          <p:spTgt spid="3">
+                                            <p:txEl>
+                                              <p:pRg st="2" end="2"/>
+                                            </p:txEl>
+                                          </p:spTgt>
+                                        </p:tgtEl>
+                                        <p:attrNameLst>
+                                          <p:attrName>style.visibility</p:attrName>
+                                        </p:attrNameLst>
+                                      </p:cBhvr>
+                                      <p:to>
+                                        <p:strVal val="visible"/>
+                                      </p:to>
+                                    </p:set>
+                                  </p:childTnLst>
+                                </p:cTn>
+                              </p:par>
+                            </p:childTnLst>
+                          </p:cTn>
+                        </p:par>
+                      </p:childTnLst>
+                    </p:cTn>
+                  </p:par>
+                  <p:par>
+                    <p:cTn id="15" fill="hold">
+                      <p:stCondLst>
+                        <p:cond delay="indefinite"/>
+                      </p:stCondLst>
+                      <p:childTnLst>
+                        <p:par>
+                          <p:cTn id="16" fill="hold">
+                            <p:stCondLst>
+                              <p:cond delay="0"/>
+                            </p:stCondLst>
+                            <p:childTnLst>
+                              <p:par>
+                                <p:cTn id="17" presetID="1" presetClass="entr" presetSubtype="0" fill="hold" nodeType="clickEffect">
+                                  <p:stCondLst>
+                                    <p:cond delay="0"/>
+                                  </p:stCondLst>
+                                  <p:childTnLst>
+                                    <p:set>
+                                      <p:cBhvr>
+                                        <p:cTn id="18" dur="1" fill="hold">
+                                          <p:stCondLst>
+                                            <p:cond delay="0"/>
+                                          </p:stCondLst>
+                                        </p:cTn>
+                                        <p:tgtEl>
+                                          <p:spTgt spid="3">
+                                            <p:txEl>
+                                              <p:pRg st="3" end="3"/>
+                                            </p:txEl>
+                                          </p:spTgt>
+                                        </p:tgtEl>
+                                        <p:attrNameLst>
+                                          <p:attrName>style.visibility</p:attrName>
+                                        </p:attrNameLst>
+                                      </p:cBhvr>
+                                      <p:to>
+                                        <p:strVal val="visible"/>
+                                      </p:to>
+                                    </p:set>
+                                  </p:childTnLst>
+                                </p:cTn>
+                              </p:par>
+                            </p:childTnLst>
+                          </p:cTn>
+                        </p:par>
+                      </p:childTnLst>
+                    </p:cTn>
+                  </p:par>
+                  <p:par>
+                    <p:cTn id="19" fill="hold">
+                      <p:stCondLst>
+                        <p:cond delay="indefinite"/>
+                      </p:stCondLst>
+                      <p:childTnLst>
+                        <p:par>
+                          <p:cTn id="20" fill="hold">
+                            <p:stCondLst>
+                              <p:cond delay="0"/>
+                            </p:stCondLst>
+                            <p:childTnLst>
+                              <p:par>
+                                <p:cTn id="21" presetID="1" presetClass="entr" presetSubtype="0" fill="hold" nodeType="clickEffect">
+                                  <p:stCondLst>
+                                    <p:cond delay="0"/>
+                                  </p:stCondLst>
+                                  <p:childTnLst>
+                                    <p:set>
+                                      <p:cBhvr>
+                                        <p:cTn id="22" dur="1" fill="hold">
+                                          <p:stCondLst>
+                                            <p:cond delay="0"/>
+                                          </p:stCondLst>
+                                        </p:cTn>
+                                        <p:tgtEl>
+                                          <p:spTgt spid="3">
+                                            <p:txEl>
+                                              <p:pRg st="4" end="4"/>
+                                            </p:txEl>
+                                          </p:spTgt>
+                                        </p:tgtEl>
+                                        <p:attrNameLst>
+                                          <p:attrName>style.visibility</p:attrName>
+                                        </p:attrNameLst>
+                                      </p:cBhvr>
+                                      <p:to>
+                                        <p:strVal val="visible"/>
+                                      </p:to>
+                                    </p:set>
+                                  </p:childTnLst>
+                                </p:cTn>
+                              </p:par>
+                            </p:childTnLst>
+                          </p:cTn>
+                        </p:par>
+                      </p:childTnLst>
+                    </p:cTn>
+                  </p:par>
+                  <p:par>
+                    <p:cTn id="23" fill="hold">
+                      <p:stCondLst>
+                        <p:cond delay="indefinite"/>
+                      </p:stCondLst>
+                      <p:childTnLst>
+                        <p:par>
+                          <p:cTn id="24" fill="hold">
+                            <p:stCondLst>
+                              <p:cond delay="0"/>
+                            </p:stCondLst>
+                            <p:childTnLst>
+                              <p:par>
+                                <p:cTn id="25" presetID="1" presetClass="entr" presetSubtype="0" fill="hold" nodeType="clickEffect">
+                                  <p:stCondLst>
+                                    <p:cond delay="0"/>
+                                  </p:stCondLst>
+                                  <p:childTnLst>
+                                    <p:set>
+                                      <p:cBhvr>
+                                        <p:cTn id="26" dur="1" fill="hold">
+                                          <p:stCondLst>
+                                            <p:cond delay="0"/>
+                                          </p:stCondLst>
+                                        </p:cTn>
+                                        <p:tgtEl>
+                                          <p:spTgt spid="3">
+                                            <p:txEl>
+                                              <p:pRg st="15" end="15"/>
+                                            </p:txEl>
+                                          </p:spTgt>
+                                        </p:tgtEl>
+                                        <p:attrNameLst>
+                                          <p:attrName>style.visibility</p:attrName>
+                                        </p:attrNameLst>
+                                      </p:cBhvr>
+                                      <p:to>
+                                        <p:strVal val="visible"/>
+                                      </p:to>
+                                    </p:set>
+                                  </p:childTnLst>
+                                </p:cTn>
+                              </p:par>
+                            </p:childTnLst>
+                          </p:cTn>
+                        </p:par>
+                      </p:childTnLst>
+                    </p:cTn>
+                  </p:par>
+                  <p:par>
+                    <p:cTn id="27" fill="hold">
+                      <p:stCondLst>
+                        <p:cond delay="indefinite"/>
+                      </p:stCondLst>
+                      <p:childTnLst>
+                        <p:par>
+                          <p:cTn id="28" fill="hold">
+                            <p:stCondLst>
+                              <p:cond delay="0"/>
+                            </p:stCondLst>
+                            <p:childTnLst>
+                              <p:par>
+                                <p:cTn id="29" presetID="1" presetClass="entr" presetSubtype="0" fill="hold" nodeType="clickEffect">
+                                  <p:stCondLst>
+                                    <p:cond delay="0"/>
+                                  </p:stCondLst>
+                                  <p:childTnLst>
+                                    <p:set>
+                                      <p:cBhvr>
+                                        <p:cTn id="30" dur="1" fill="hold">
+                                          <p:stCondLst>
+                                            <p:cond delay="0"/>
+                                          </p:stCondLst>
+                                        </p:cTn>
+                                        <p:tgtEl>
+                                          <p:spTgt spid="3">
+                                            <p:txEl>
+                                              <p:pRg st="5" end="5"/>
+                                            </p:txEl>
+                                          </p:spTgt>
+                                        </p:tgtEl>
+                                        <p:attrNameLst>
+                                          <p:attrName>style.visibility</p:attrName>
+                                        </p:attrNameLst>
+                                      </p:cBhvr>
+                                      <p:to>
+                                        <p:strVal val="visible"/>
+                                      </p:to>
+                                    </p:set>
+                                  </p:childTnLst>
+                                </p:cTn>
+                              </p:par>
+                            </p:childTnLst>
+                          </p:cTn>
+                        </p:par>
+                      </p:childTnLst>
+                    </p:cTn>
+                  </p:par>
+                  <p:par>
+                    <p:cTn id="31" fill="hold">
+                      <p:stCondLst>
+                        <p:cond delay="indefinite"/>
+                      </p:stCondLst>
+                      <p:childTnLst>
+                        <p:par>
+                          <p:cTn id="32" fill="hold">
+                            <p:stCondLst>
+                              <p:cond delay="0"/>
+                            </p:stCondLst>
+                            <p:childTnLst>
+                              <p:par>
+                                <p:cTn id="33" presetID="1" presetClass="entr" presetSubtype="0" fill="hold" nodeType="clickEffect">
+                                  <p:stCondLst>
+                                    <p:cond delay="0"/>
+                                  </p:stCondLst>
+                                  <p:childTnLst>
+                                    <p:set>
+                                      <p:cBhvr>
+                                        <p:cTn id="34" dur="1" fill="hold">
+                                          <p:stCondLst>
+                                            <p:cond delay="0"/>
+                                          </p:stCondLst>
+                                        </p:cTn>
+                                        <p:tgtEl>
+                                          <p:spTgt spid="3">
+                                            <p:txEl>
+                                              <p:pRg st="6" end="6"/>
+                                            </p:txEl>
+                                          </p:spTgt>
+                                        </p:tgtEl>
+                                        <p:attrNameLst>
+                                          <p:attrName>style.visibility</p:attrName>
+                                        </p:attrNameLst>
+                                      </p:cBhvr>
+                                      <p:to>
+                                        <p:strVal val="visible"/>
+                                      </p:to>
+                                    </p:set>
+                                  </p:childTnLst>
+                                </p:cTn>
+                              </p:par>
+                            </p:childTnLst>
+                          </p:cTn>
+                        </p:par>
+                      </p:childTnLst>
+                    </p:cTn>
+                  </p:par>
+                  <p:par>
+                    <p:cTn id="35" fill="hold">
+                      <p:stCondLst>
+                        <p:cond delay="indefinite"/>
+                      </p:stCondLst>
+                      <p:childTnLst>
+                        <p:par>
+                          <p:cTn id="36" fill="hold">
+                            <p:stCondLst>
+                              <p:cond delay="0"/>
+                            </p:stCondLst>
+                            <p:childTnLst>
+                              <p:par>
+                                <p:cTn id="37" presetID="1" presetClass="entr" presetSubtype="0" fill="hold" nodeType="clickEffect">
+                                  <p:stCondLst>
+                                    <p:cond delay="0"/>
+                                  </p:stCondLst>
+                                  <p:childTnLst>
+                                    <p:set>
+                                      <p:cBhvr>
+                                        <p:cTn id="38" dur="1" fill="hold">
+                                          <p:stCondLst>
+                                            <p:cond delay="0"/>
+                                          </p:stCondLst>
+                                        </p:cTn>
+                                        <p:tgtEl>
+                                          <p:spTgt spid="3">
+                                            <p:txEl>
+                                              <p:pRg st="7" end="7"/>
+                                            </p:txEl>
+                                          </p:spTgt>
+                                        </p:tgtEl>
+                                        <p:attrNameLst>
+                                          <p:attrName>style.visibility</p:attrName>
+                                        </p:attrNameLst>
+                                      </p:cBhvr>
+                                      <p:to>
+                                        <p:strVal val="visible"/>
+                                      </p:to>
+                                    </p:set>
+                                  </p:childTnLst>
+                                </p:cTn>
+                              </p:par>
+                            </p:childTnLst>
+                          </p:cTn>
+                        </p:par>
+                      </p:childTnLst>
+                    </p:cTn>
+                  </p:par>
+                  <p:par>
+                    <p:cTn id="39" fill="hold">
+                      <p:stCondLst>
+                        <p:cond delay="indefinite"/>
+                      </p:stCondLst>
+                      <p:childTnLst>
+                        <p:par>
+                          <p:cTn id="40" fill="hold">
+                            <p:stCondLst>
+                              <p:cond delay="0"/>
+                            </p:stCondLst>
+                            <p:childTnLst>
+                              <p:par>
+                                <p:cTn id="41" presetID="1" presetClass="entr" presetSubtype="0" fill="hold" nodeType="clickEffect">
+                                  <p:stCondLst>
+                                    <p:cond delay="0"/>
+                                  </p:stCondLst>
+                                  <p:childTnLst>
+                                    <p:set>
+                                      <p:cBhvr>
+                                        <p:cTn id="42" dur="1" fill="hold">
+                                          <p:stCondLst>
+                                            <p:cond delay="0"/>
+                                          </p:stCondLst>
+                                        </p:cTn>
+                                        <p:tgtEl>
+                                          <p:spTgt spid="3">
+                                            <p:txEl>
+                                              <p:pRg st="8" end="8"/>
+                                            </p:txEl>
+                                          </p:spTgt>
+                                        </p:tgtEl>
+                                        <p:attrNameLst>
+                                          <p:attrName>style.visibility</p:attrName>
+                                        </p:attrNameLst>
+                                      </p:cBhvr>
+                                      <p:to>
+                                        <p:strVal val="visible"/>
+                                      </p:to>
+                                    </p:set>
+                                  </p:childTnLst>
+                                </p:cTn>
+                              </p:par>
+                            </p:childTnLst>
+                          </p:cTn>
+                        </p:par>
+                      </p:childTnLst>
+                    </p:cTn>
+                  </p:par>
+                  <p:par>
+                    <p:cTn id="43" fill="hold">
+                      <p:stCondLst>
+                        <p:cond delay="indefinite"/>
+                      </p:stCondLst>
+                      <p:childTnLst>
+                        <p:par>
+                          <p:cTn id="44" fill="hold">
+                            <p:stCondLst>
+                              <p:cond delay="0"/>
+                            </p:stCondLst>
+                            <p:childTnLst>
+                              <p:par>
+                                <p:cTn id="45" presetID="1" presetClass="entr" presetSubtype="0" fill="hold" nodeType="clickEffect">
+                                  <p:stCondLst>
+                                    <p:cond delay="0"/>
+                                  </p:stCondLst>
+                                  <p:childTnLst>
+                                    <p:set>
+                                      <p:cBhvr>
+                                        <p:cTn id="46" dur="1" fill="hold">
+                                          <p:stCondLst>
+                                            <p:cond delay="0"/>
+                                          </p:stCondLst>
+                                        </p:cTn>
+                                        <p:tgtEl>
+                                          <p:spTgt spid="3">
+                                            <p:txEl>
+                                              <p:pRg st="9" end="9"/>
+                                            </p:txEl>
+                                          </p:spTgt>
+                                        </p:tgtEl>
+                                        <p:attrNameLst>
+                                          <p:attrName>style.visibility</p:attrName>
+                                        </p:attrNameLst>
+                                      </p:cBhvr>
+                                      <p:to>
+                                        <p:strVal val="visible"/>
+                                      </p:to>
+                                    </p:set>
+                                  </p:childTnLst>
+                                </p:cTn>
+                              </p:par>
+                            </p:childTnLst>
+                          </p:cTn>
+                        </p:par>
+                      </p:childTnLst>
+                    </p:cTn>
+                  </p:par>
+                  <p:par>
+                    <p:cTn id="47" fill="hold">
+                      <p:stCondLst>
+                        <p:cond delay="indefinite"/>
+                      </p:stCondLst>
+                      <p:childTnLst>
+                        <p:par>
+                          <p:cTn id="48" fill="hold">
+                            <p:stCondLst>
+                              <p:cond delay="0"/>
+                            </p:stCondLst>
+                            <p:childTnLst>
+                              <p:par>
+                                <p:cTn id="49" presetID="1" presetClass="entr" presetSubtype="0" fill="hold" nodeType="clickEffect">
+                                  <p:stCondLst>
+                                    <p:cond delay="0"/>
+                                  </p:stCondLst>
+                                  <p:childTnLst>
+                                    <p:set>
+                                      <p:cBhvr>
+                                        <p:cTn id="50" dur="1" fill="hold">
+                                          <p:stCondLst>
+                                            <p:cond delay="0"/>
+                                          </p:stCondLst>
+                                        </p:cTn>
+                                        <p:tgtEl>
+                                          <p:spTgt spid="3">
+                                            <p:txEl>
+                                              <p:pRg st="10" end="10"/>
+                                            </p:txEl>
+                                          </p:spTgt>
+                                        </p:tgtEl>
+                                        <p:attrNameLst>
+                                          <p:attrName>style.visibility</p:attrName>
+                                        </p:attrNameLst>
+                                      </p:cBhvr>
+                                      <p:to>
+                                        <p:strVal val="visible"/>
+                                      </p:to>
+                                    </p:set>
+                                  </p:childTnLst>
+                                </p:cTn>
+                              </p:par>
+                            </p:childTnLst>
+                          </p:cTn>
+                        </p:par>
+                      </p:childTnLst>
+                    </p:cTn>
+                  </p:par>
+                  <p:par>
+                    <p:cTn id="51" fill="hold">
+                      <p:stCondLst>
+                        <p:cond delay="indefinite"/>
+                      </p:stCondLst>
+                      <p:childTnLst>
+                        <p:par>
+                          <p:cTn id="52" fill="hold">
+                            <p:stCondLst>
+                              <p:cond delay="0"/>
+                            </p:stCondLst>
+                            <p:childTnLst>
+                              <p:par>
+                                <p:cTn id="53" presetID="1" presetClass="entr" presetSubtype="0" fill="hold" nodeType="clickEffect">
+                                  <p:stCondLst>
+                                    <p:cond delay="0"/>
+                                  </p:stCondLst>
+                                  <p:childTnLst>
+                                    <p:set>
+                                      <p:cBhvr>
+                                        <p:cTn id="54" dur="1" fill="hold">
+                                          <p:stCondLst>
+                                            <p:cond delay="0"/>
+                                          </p:stCondLst>
+                                        </p:cTn>
+                                        <p:tgtEl>
+                                          <p:spTgt spid="3">
+                                            <p:txEl>
+                                              <p:pRg st="11" end="11"/>
+                                            </p:txEl>
+                                          </p:spTgt>
+                                        </p:tgtEl>
+                                        <p:attrNameLst>
+                                          <p:attrName>style.visibility</p:attrName>
+                                        </p:attrNameLst>
+                                      </p:cBhvr>
+                                      <p:to>
+                                        <p:strVal val="visible"/>
+                                      </p:to>
+                                    </p:set>
+                                  </p:childTnLst>
+                                </p:cTn>
+                              </p:par>
+                            </p:childTnLst>
+                          </p:cTn>
+                        </p:par>
+                      </p:childTnLst>
+                    </p:cTn>
+                  </p:par>
+                  <p:par>
+                    <p:cTn id="55" fill="hold">
+                      <p:stCondLst>
+                        <p:cond delay="indefinite"/>
+                      </p:stCondLst>
+                      <p:childTnLst>
+                        <p:par>
+                          <p:cTn id="56" fill="hold">
+                            <p:stCondLst>
+                              <p:cond delay="0"/>
+                            </p:stCondLst>
+                            <p:childTnLst>
+                              <p:par>
+                                <p:cTn id="57" presetID="1" presetClass="entr" presetSubtype="0" fill="hold" nodeType="clickEffect">
+                                  <p:stCondLst>
+                                    <p:cond delay="0"/>
+                                  </p:stCondLst>
+                                  <p:childTnLst>
+                                    <p:set>
+                                      <p:cBhvr>
+                                        <p:cTn id="58" dur="1" fill="hold">
+                                          <p:stCondLst>
+                                            <p:cond delay="0"/>
+                                          </p:stCondLst>
+                                        </p:cTn>
+                                        <p:tgtEl>
+                                          <p:spTgt spid="3">
+                                            <p:txEl>
+                                              <p:pRg st="12" end="12"/>
+                                            </p:txEl>
+                                          </p:spTgt>
+                                        </p:tgtEl>
+                                        <p:attrNameLst>
+                                          <p:attrName>style.visibility</p:attrName>
+                                        </p:attrNameLst>
+                                      </p:cBhvr>
+                                      <p:to>
+                                        <p:strVal val="visible"/>
+                                      </p:to>
+                                    </p:set>
+                                  </p:childTnLst>
+                                </p:cTn>
+                              </p:par>
+                            </p:childTnLst>
+                          </p:cTn>
+                        </p:par>
+                      </p:childTnLst>
+                    </p:cTn>
+                  </p:par>
+                  <p:par>
+                    <p:cTn id="59" fill="hold">
+                      <p:stCondLst>
+                        <p:cond delay="indefinite"/>
+                      </p:stCondLst>
+                      <p:childTnLst>
+                        <p:par>
+                          <p:cTn id="60" fill="hold">
+                            <p:stCondLst>
+                              <p:cond delay="0"/>
+                            </p:stCondLst>
+                            <p:childTnLst>
+                              <p:par>
+                                <p:cTn id="61" presetID="1" presetClass="entr" presetSubtype="0" fill="hold" nodeType="clickEffect">
+                                  <p:stCondLst>
+                                    <p:cond delay="0"/>
+                                  </p:stCondLst>
+                                  <p:childTnLst>
+                                    <p:set>
+                                      <p:cBhvr>
+                                        <p:cTn id="62" dur="1" fill="hold">
+                                          <p:stCondLst>
+                                            <p:cond delay="0"/>
+                                          </p:stCondLst>
+                                        </p:cTn>
+                                        <p:tgtEl>
+                                          <p:spTgt spid="3">
+                                            <p:txEl>
+                                              <p:pRg st="13" end="13"/>
+                                            </p:txEl>
+                                          </p:spTgt>
+                                        </p:tgtEl>
+                                        <p:attrNameLst>
+                                          <p:attrName>style.visibility</p:attrName>
+                                        </p:attrNameLst>
+                                      </p:cBhvr>
+                                      <p:to>
+                                        <p:strVal val="visible"/>
+                                      </p:to>
+                                    </p:set>
+                                  </p:childTnLst>
+                                </p:cTn>
+                              </p:par>
+                            </p:childTnLst>
+                          </p:cTn>
+                        </p:par>
+                      </p:childTnLst>
+                    </p:cTn>
+                  </p:par>
+                  <p:par>
+                    <p:cTn id="63" fill="hold">
+                      <p:stCondLst>
+                        <p:cond delay="indefinite"/>
+                      </p:stCondLst>
+                      <p:childTnLst>
+                        <p:par>
+                          <p:cTn id="64" fill="hold">
+                            <p:stCondLst>
+                              <p:cond delay="0"/>
+                            </p:stCondLst>
+                            <p:childTnLst>
+                              <p:par>
+                                <p:cTn id="65" presetID="1" presetClass="entr" presetSubtype="0" fill="hold" nodeType="clickEffect">
+                                  <p:stCondLst>
+                                    <p:cond delay="0"/>
+                                  </p:stCondLst>
+                                  <p:childTnLst>
+                                    <p:set>
+                                      <p:cBhvr>
+                                        <p:cTn id="66" dur="1" fill="hold">
+                                          <p:stCondLst>
+                                            <p:cond delay="0"/>
+                                          </p:stCondLst>
+                                        </p:cTn>
+                                        <p:tgtEl>
+                                          <p:spTgt spid="3">
+                                            <p:txEl>
+                                              <p:pRg st="14" end="14"/>
+                                            </p:txEl>
+                                          </p:spTgt>
+                                        </p:tgtEl>
+                                        <p:attrNameLst>
+                                          <p:attrName>style.visibility</p:attrName>
+                                        </p:attrNameLst>
+                                      </p:cBhvr>
+                                      <p:to>
+                                        <p:strVal val="visible"/>
+                                      </p:to>
+                                    </p:set>
+                                  </p:childTnLst>
+                                </p:cTn>
+                              </p:par>
+                            </p:childTnLst>
+                          </p:cTn>
+                        </p:par>
+                      </p:childTnLst>
+                    </p:cTn>
+                  </p:par>
+                </p:childTnLst>
+              </p:cTn>
+              <p:prevCondLst>
+                <p:cond evt="onPrev" delay="0">
+                  <p:tgtEl>
+                    <p:sldTgt/>
+                  </p:tgtEl>
+                </p:cond>
+              </p:prevCondLst>
+              <p:nextCondLst>
+                <p:cond evt="onNext" delay="0">
+                  <p:tgtEl>
+                    <p:sldTgt/>
+                  </p:tgtEl>
+                </p:cond>
+              </p:nextCondLst>
+            </p:seq>
+          </p:childTnLst>
+        </p:cTn>
+      </p:par>
+    </p:tnLst>
+  </p:timing>
+</p:sld>
+</file>
+
+<file path=ppt/slides/slide37.xml><?xml version="1.0" encoding="utf-8"?>
+<p:sld xmlns:a="http://schemas.openxmlformats.org/drawingml/2006/main" xmlns:r="http://schemas.openxmlformats.org/officeDocument/2006/relationships" xmlns:p="http://schemas.openxmlformats.org/presentationml/2006/main">
+  <p:cSld>
+    <p:spTree>
+      <p:nvGrpSpPr>
+        <p:cNvPr id="1" name="">
+          <a:extLst>
+            <a:ext uri="{FF2B5EF4-FFF2-40B4-BE49-F238E27FC236}">
+              <a16:creationId xmlns:a16="http://schemas.microsoft.com/office/drawing/2014/main" id="{506FFE11-A2FC-B4C5-719D-E513CB537404}"/>
+            </a:ext>
+          </a:extLst>
+        </p:cNvPr>
+        <p:cNvGrpSpPr/>
+        <p:nvPr/>
+      </p:nvGrpSpPr>
+      <p:grpSpPr>
+        <a:xfrm>
+          <a:off x="0" y="0"/>
+          <a:ext cx="0" cy="0"/>
+          <a:chOff x="0" y="0"/>
+          <a:chExt cx="0" cy="0"/>
+        </a:xfrm>
+      </p:grpSpPr>
+      <p:sp>
+        <p:nvSpPr>
+          <p:cNvPr id="2" name="Title 1">
+            <a:extLst>
+              <a:ext uri="{FF2B5EF4-FFF2-40B4-BE49-F238E27FC236}">
+                <a16:creationId xmlns:a16="http://schemas.microsoft.com/office/drawing/2014/main" id="{F86EB281-72F4-A0A8-C822-84C3275DC918}"/>
+              </a:ext>
+            </a:extLst>
+          </p:cNvPr>
+          <p:cNvSpPr>
+            <a:spLocks noGrp="1"/>
+          </p:cNvSpPr>
+          <p:nvPr>
+            <p:ph type="ctrTitle"/>
+          </p:nvPr>
+        </p:nvSpPr>
+        <p:spPr>
+          <a:xfrm>
+            <a:off x="1524000" y="382580"/>
+            <a:ext cx="9144000" cy="502003"/>
+          </a:xfrm>
+        </p:spPr>
+        <p:txBody>
+          <a:bodyPr>
+            <a:noAutofit/>
+          </a:bodyPr>
+          <a:lstStyle/>
+          <a:p>
+            <a:r>
+              <a:rPr lang="en-US" sz="3200" dirty="0" err="1"/>
+              <a:t>PySpark</a:t>
+            </a:r>
+            <a:r>
+              <a:rPr lang="en-US" sz="3200" dirty="0"/>
+              <a:t> </a:t>
+            </a:r>
+            <a:r>
+              <a:rPr lang="en-US" sz="3200" dirty="0" err="1"/>
+              <a:t>DataFrame</a:t>
+            </a:r>
+            <a:r>
+              <a:rPr lang="en-US" sz="3200" dirty="0"/>
+              <a:t> Example 2 - 0004</a:t>
+            </a:r>
+          </a:p>
+        </p:txBody>
+      </p:sp>
+      <p:sp>
+        <p:nvSpPr>
+          <p:cNvPr id="3" name="Subtitle 2">
+            <a:extLst>
+              <a:ext uri="{FF2B5EF4-FFF2-40B4-BE49-F238E27FC236}">
+                <a16:creationId xmlns:a16="http://schemas.microsoft.com/office/drawing/2014/main" id="{0C563606-0952-DB88-CB9A-9846EB917EBB}"/>
+              </a:ext>
+            </a:extLst>
+          </p:cNvPr>
+          <p:cNvSpPr>
+            <a:spLocks noGrp="1"/>
+          </p:cNvSpPr>
+          <p:nvPr>
+            <p:ph type="subTitle" idx="1"/>
+          </p:nvPr>
+        </p:nvSpPr>
+        <p:spPr>
+          <a:xfrm>
+            <a:off x="1524000" y="884584"/>
+            <a:ext cx="9144000" cy="5088834"/>
+          </a:xfrm>
+        </p:spPr>
+        <p:txBody>
+          <a:bodyPr>
+            <a:normAutofit fontScale="92500" lnSpcReduction="10000"/>
+          </a:bodyPr>
+          <a:lstStyle/>
+          <a:p>
+            <a:r>
+              <a:rPr lang="en-US" sz="1800" dirty="0">
+                <a:solidFill>
+                  <a:schemeClr val="tx1"/>
+                </a:solidFill>
+                <a:highlight>
+                  <a:srgbClr val="FFFF00"/>
+                </a:highlight>
+                <a:latin typeface="Consolas" panose="020B0609020204030204" pitchFamily="49" charset="0"/>
+                <a:cs typeface="Consolas" panose="020B0609020204030204" pitchFamily="49" charset="0"/>
+              </a:rPr>
+              <a:t># 5. Data Cleaning: Handle missing values </a:t>
+            </a:r>
+          </a:p>
+          <a:p>
+            <a:r>
+              <a:rPr lang="en-US" sz="1800" dirty="0">
+                <a:solidFill>
+                  <a:schemeClr val="tx1"/>
+                </a:solidFill>
+                <a:highlight>
+                  <a:srgbClr val="FFFF00"/>
+                </a:highlight>
+                <a:latin typeface="Consolas" panose="020B0609020204030204" pitchFamily="49" charset="0"/>
+                <a:cs typeface="Consolas" panose="020B0609020204030204" pitchFamily="49" charset="0"/>
+              </a:rPr>
+              <a:t># Fill missing Amounts with 0.0, and </a:t>
+            </a:r>
+          </a:p>
+          <a:p>
+            <a:r>
+              <a:rPr lang="en-US" sz="1800" dirty="0">
+                <a:solidFill>
+                  <a:schemeClr val="tx1"/>
+                </a:solidFill>
+                <a:highlight>
+                  <a:srgbClr val="FFFF00"/>
+                </a:highlight>
+                <a:latin typeface="Consolas" panose="020B0609020204030204" pitchFamily="49" charset="0"/>
+                <a:cs typeface="Consolas" panose="020B0609020204030204" pitchFamily="49" charset="0"/>
+              </a:rPr>
+              <a:t># Fill missing Countries with 'Unknown’ </a:t>
+            </a:r>
+          </a:p>
+          <a:p>
+            <a:r>
+              <a:rPr lang="en-US" sz="1800" dirty="0" err="1">
+                <a:solidFill>
+                  <a:schemeClr val="tx1"/>
+                </a:solidFill>
+                <a:latin typeface="Consolas" panose="020B0609020204030204" pitchFamily="49" charset="0"/>
+                <a:cs typeface="Consolas" panose="020B0609020204030204" pitchFamily="49" charset="0"/>
+              </a:rPr>
+              <a:t>df_cleaned</a:t>
+            </a:r>
+            <a:r>
+              <a:rPr lang="en-US" sz="1800" dirty="0">
+                <a:solidFill>
+                  <a:schemeClr val="tx1"/>
+                </a:solidFill>
+                <a:latin typeface="Consolas" panose="020B0609020204030204" pitchFamily="49" charset="0"/>
+                <a:cs typeface="Consolas" panose="020B0609020204030204" pitchFamily="49" charset="0"/>
+              </a:rPr>
+              <a:t> = </a:t>
+            </a:r>
+            <a:r>
+              <a:rPr lang="en-US" sz="1800" dirty="0" err="1">
+                <a:solidFill>
+                  <a:schemeClr val="tx1"/>
+                </a:solidFill>
+                <a:latin typeface="Consolas" panose="020B0609020204030204" pitchFamily="49" charset="0"/>
+                <a:cs typeface="Consolas" panose="020B0609020204030204" pitchFamily="49" charset="0"/>
+              </a:rPr>
+              <a:t>df.na.fill</a:t>
+            </a:r>
+            <a:r>
+              <a:rPr lang="en-US" sz="1800" dirty="0">
+                <a:solidFill>
+                  <a:schemeClr val="tx1"/>
+                </a:solidFill>
+                <a:latin typeface="Consolas" panose="020B0609020204030204" pitchFamily="49" charset="0"/>
+                <a:cs typeface="Consolas" panose="020B0609020204030204" pitchFamily="49" charset="0"/>
+              </a:rPr>
+              <a:t>({"Amount": 0.0, "Country": "Unknown"}) </a:t>
+            </a:r>
+          </a:p>
+          <a:p>
+            <a:endParaRPr lang="en-US" sz="1800" dirty="0">
+              <a:solidFill>
+                <a:schemeClr val="tx1"/>
+              </a:solidFill>
+              <a:latin typeface="Consolas" panose="020B0609020204030204" pitchFamily="49" charset="0"/>
+              <a:cs typeface="Consolas" panose="020B0609020204030204" pitchFamily="49" charset="0"/>
+            </a:endParaRPr>
+          </a:p>
+          <a:p>
+            <a:r>
+              <a:rPr lang="en-US" sz="1800" dirty="0">
+                <a:solidFill>
+                  <a:schemeClr val="tx1"/>
+                </a:solidFill>
+                <a:highlight>
+                  <a:srgbClr val="FFFF00"/>
+                </a:highlight>
+                <a:latin typeface="Consolas" panose="020B0609020204030204" pitchFamily="49" charset="0"/>
+                <a:cs typeface="Consolas" panose="020B0609020204030204" pitchFamily="49" charset="0"/>
+              </a:rPr>
+              <a:t># 6. Data Transformation: Add a conditional "</a:t>
+            </a:r>
+            <a:r>
+              <a:rPr lang="en-US" sz="1800" dirty="0" err="1">
+                <a:solidFill>
+                  <a:schemeClr val="tx1"/>
+                </a:solidFill>
+                <a:highlight>
+                  <a:srgbClr val="FFFF00"/>
+                </a:highlight>
+                <a:latin typeface="Consolas" panose="020B0609020204030204" pitchFamily="49" charset="0"/>
+                <a:cs typeface="Consolas" panose="020B0609020204030204" pitchFamily="49" charset="0"/>
+              </a:rPr>
+              <a:t>Customer_Segment</a:t>
+            </a:r>
+            <a:r>
+              <a:rPr lang="en-US" sz="1800" dirty="0">
+                <a:solidFill>
+                  <a:schemeClr val="tx1"/>
+                </a:solidFill>
+                <a:highlight>
+                  <a:srgbClr val="FFFF00"/>
+                </a:highlight>
+                <a:latin typeface="Consolas" panose="020B0609020204030204" pitchFamily="49" charset="0"/>
+                <a:cs typeface="Consolas" panose="020B0609020204030204" pitchFamily="49" charset="0"/>
+              </a:rPr>
+              <a:t>" column </a:t>
+            </a:r>
+          </a:p>
+          <a:p>
+            <a:r>
+              <a:rPr lang="en-US" sz="1800" dirty="0">
+                <a:solidFill>
+                  <a:schemeClr val="tx1"/>
+                </a:solidFill>
+                <a:highlight>
+                  <a:srgbClr val="FFFF00"/>
+                </a:highlight>
+                <a:latin typeface="Consolas" panose="020B0609020204030204" pitchFamily="49" charset="0"/>
+                <a:cs typeface="Consolas" panose="020B0609020204030204" pitchFamily="49" charset="0"/>
+              </a:rPr>
+              <a:t># High spenders (&gt; $500), Medium spenders (&gt; $0), and Inactive ($0) </a:t>
+            </a:r>
+          </a:p>
+          <a:p>
+            <a:r>
+              <a:rPr lang="en-US" sz="1800" dirty="0" err="1">
+                <a:solidFill>
+                  <a:schemeClr val="tx1"/>
+                </a:solidFill>
+                <a:latin typeface="Consolas" panose="020B0609020204030204" pitchFamily="49" charset="0"/>
+                <a:cs typeface="Consolas" panose="020B0609020204030204" pitchFamily="49" charset="0"/>
+              </a:rPr>
+              <a:t>df_transformed</a:t>
+            </a:r>
+            <a:r>
+              <a:rPr lang="en-US" sz="1800" dirty="0">
+                <a:solidFill>
+                  <a:schemeClr val="tx1"/>
+                </a:solidFill>
+                <a:latin typeface="Consolas" panose="020B0609020204030204" pitchFamily="49" charset="0"/>
+                <a:cs typeface="Consolas" panose="020B0609020204030204" pitchFamily="49" charset="0"/>
+              </a:rPr>
+              <a:t> = </a:t>
+            </a:r>
+            <a:r>
+              <a:rPr lang="en-US" sz="1800" dirty="0" err="1">
+                <a:solidFill>
+                  <a:schemeClr val="tx1"/>
+                </a:solidFill>
+                <a:latin typeface="Consolas" panose="020B0609020204030204" pitchFamily="49" charset="0"/>
+                <a:cs typeface="Consolas" panose="020B0609020204030204" pitchFamily="49" charset="0"/>
+              </a:rPr>
+              <a:t>df_cleaned.withColumn</a:t>
+            </a:r>
+            <a:r>
+              <a:rPr lang="en-US" sz="1800" dirty="0">
+                <a:solidFill>
+                  <a:schemeClr val="tx1"/>
+                </a:solidFill>
+                <a:latin typeface="Consolas" panose="020B0609020204030204" pitchFamily="49" charset="0"/>
+                <a:cs typeface="Consolas" panose="020B0609020204030204" pitchFamily="49" charset="0"/>
+              </a:rPr>
+              <a:t>( "Segment", </a:t>
+            </a:r>
+          </a:p>
+          <a:p>
+            <a:r>
+              <a:rPr lang="en-US" sz="1800" dirty="0" err="1">
+                <a:solidFill>
+                  <a:schemeClr val="tx1"/>
+                </a:solidFill>
+                <a:latin typeface="Consolas" panose="020B0609020204030204" pitchFamily="49" charset="0"/>
+                <a:cs typeface="Consolas" panose="020B0609020204030204" pitchFamily="49" charset="0"/>
+              </a:rPr>
+              <a:t>F.when</a:t>
+            </a:r>
+            <a:r>
+              <a:rPr lang="en-US" sz="1800" dirty="0">
+                <a:solidFill>
+                  <a:schemeClr val="tx1"/>
+                </a:solidFill>
+                <a:latin typeface="Consolas" panose="020B0609020204030204" pitchFamily="49" charset="0"/>
+                <a:cs typeface="Consolas" panose="020B0609020204030204" pitchFamily="49" charset="0"/>
+              </a:rPr>
+              <a:t>(</a:t>
+            </a:r>
+            <a:r>
+              <a:rPr lang="en-US" sz="1800" dirty="0" err="1">
+                <a:solidFill>
+                  <a:schemeClr val="tx1"/>
+                </a:solidFill>
+                <a:latin typeface="Consolas" panose="020B0609020204030204" pitchFamily="49" charset="0"/>
+                <a:cs typeface="Consolas" panose="020B0609020204030204" pitchFamily="49" charset="0"/>
+              </a:rPr>
+              <a:t>F.col</a:t>
+            </a:r>
+            <a:r>
+              <a:rPr lang="en-US" sz="1800" dirty="0">
+                <a:solidFill>
+                  <a:schemeClr val="tx1"/>
+                </a:solidFill>
+                <a:latin typeface="Consolas" panose="020B0609020204030204" pitchFamily="49" charset="0"/>
+                <a:cs typeface="Consolas" panose="020B0609020204030204" pitchFamily="49" charset="0"/>
+              </a:rPr>
+              <a:t>("Amount") &gt; 500, "High") </a:t>
+            </a:r>
+          </a:p>
+          <a:p>
+            <a:r>
+              <a:rPr lang="en-US" sz="1800" dirty="0">
+                <a:solidFill>
+                  <a:schemeClr val="tx1"/>
+                </a:solidFill>
+                <a:latin typeface="Consolas" panose="020B0609020204030204" pitchFamily="49" charset="0"/>
+                <a:cs typeface="Consolas" panose="020B0609020204030204" pitchFamily="49" charset="0"/>
+              </a:rPr>
+              <a:t>.when(</a:t>
+            </a:r>
+            <a:r>
+              <a:rPr lang="en-US" sz="1800" dirty="0" err="1">
+                <a:solidFill>
+                  <a:schemeClr val="tx1"/>
+                </a:solidFill>
+                <a:latin typeface="Consolas" panose="020B0609020204030204" pitchFamily="49" charset="0"/>
+                <a:cs typeface="Consolas" panose="020B0609020204030204" pitchFamily="49" charset="0"/>
+              </a:rPr>
+              <a:t>F.col</a:t>
+            </a:r>
+            <a:r>
+              <a:rPr lang="en-US" sz="1800" dirty="0">
+                <a:solidFill>
+                  <a:schemeClr val="tx1"/>
+                </a:solidFill>
+                <a:latin typeface="Consolas" panose="020B0609020204030204" pitchFamily="49" charset="0"/>
+                <a:cs typeface="Consolas" panose="020B0609020204030204" pitchFamily="49" charset="0"/>
+              </a:rPr>
+              <a:t>("Amount") &gt; 0, "Medium") </a:t>
+            </a:r>
+          </a:p>
+          <a:p>
+            <a:r>
+              <a:rPr lang="en-US" sz="1800" dirty="0">
+                <a:solidFill>
+                  <a:schemeClr val="tx1"/>
+                </a:solidFill>
+                <a:latin typeface="Consolas" panose="020B0609020204030204" pitchFamily="49" charset="0"/>
+                <a:cs typeface="Consolas" panose="020B0609020204030204" pitchFamily="49" charset="0"/>
+              </a:rPr>
+              <a:t>.otherwise("Inactive"))</a:t>
+            </a:r>
+          </a:p>
+          <a:p>
+            <a:r>
+              <a:rPr lang="en-US" sz="1800" dirty="0">
+                <a:solidFill>
+                  <a:schemeClr val="tx1"/>
+                </a:solidFill>
+                <a:latin typeface="Consolas" panose="020B0609020204030204" pitchFamily="49" charset="0"/>
+                <a:cs typeface="Consolas" panose="020B0609020204030204" pitchFamily="49" charset="0"/>
+              </a:rPr>
+              <a:t> </a:t>
+            </a:r>
+          </a:p>
+          <a:p>
+            <a:r>
+              <a:rPr lang="en-US" sz="1800" dirty="0">
+                <a:solidFill>
+                  <a:schemeClr val="tx1"/>
+                </a:solidFill>
+                <a:latin typeface="Consolas" panose="020B0609020204030204" pitchFamily="49" charset="0"/>
+                <a:cs typeface="Consolas" panose="020B0609020204030204" pitchFamily="49" charset="0"/>
+              </a:rPr>
+              <a:t>print("--- Cleaned and Transformed Data ---") </a:t>
+            </a:r>
+          </a:p>
+          <a:p>
+            <a:r>
+              <a:rPr lang="en-US" sz="1800" dirty="0" err="1">
+                <a:solidFill>
+                  <a:schemeClr val="tx1"/>
+                </a:solidFill>
+                <a:latin typeface="Consolas" panose="020B0609020204030204" pitchFamily="49" charset="0"/>
+                <a:cs typeface="Consolas" panose="020B0609020204030204" pitchFamily="49" charset="0"/>
+              </a:rPr>
+              <a:t>df_transformed.show</a:t>
+            </a:r>
+            <a:r>
+              <a:rPr lang="en-US" sz="1800" dirty="0">
+                <a:solidFill>
+                  <a:schemeClr val="tx1"/>
+                </a:solidFill>
+                <a:latin typeface="Consolas" panose="020B0609020204030204" pitchFamily="49" charset="0"/>
+                <a:cs typeface="Consolas" panose="020B0609020204030204" pitchFamily="49" charset="0"/>
+              </a:rPr>
+              <a:t>()</a:t>
+            </a:r>
+          </a:p>
+        </p:txBody>
+      </p:sp>
+    </p:spTree>
+    <p:extLst>
+      <p:ext uri="{BB962C8B-B14F-4D97-AF65-F5344CB8AC3E}">
+        <p14:creationId xmlns:p14="http://schemas.microsoft.com/office/powerpoint/2010/main" val="2476818922"/>
+      </p:ext>
+    </p:extLst>
+  </p:cSld>
+  <p:clrMapOvr>
+    <a:masterClrMapping/>
+  </p:clrMapOvr>
+  <p:timing>
+    <p:tnLst>
+      <p:par>
+        <p:cTn id="1" dur="indefinite" restart="never" nodeType="tmRoot">
+          <p:childTnLst>
+            <p:seq concurrent="1" nextAc="seek">
+              <p:cTn id="2" dur="indefinite" nodeType="mainSeq">
+                <p:childTnLst>
+                  <p:par>
+                    <p:cTn id="3" fill="hold">
+                      <p:stCondLst>
+                        <p:cond delay="indefinite"/>
+                      </p:stCondLst>
+                      <p:childTnLst>
+                        <p:par>
+                          <p:cTn id="4" fill="hold">
+                            <p:stCondLst>
+                              <p:cond delay="0"/>
+                            </p:stCondLst>
+                            <p:childTnLst>
+                              <p:par>
+                                <p:cTn id="5" presetID="1" presetClass="entr" presetSubtype="0" fill="hold" nodeType="clickEffect">
+                                  <p:stCondLst>
+                                    <p:cond delay="0"/>
+                                  </p:stCondLst>
+                                  <p:childTnLst>
+                                    <p:set>
+                                      <p:cBhvr>
+                                        <p:cTn id="6" dur="1" fill="hold">
+                                          <p:stCondLst>
+                                            <p:cond delay="0"/>
+                                          </p:stCondLst>
+                                        </p:cTn>
+                                        <p:tgtEl>
+                                          <p:spTgt spid="3">
+                                            <p:txEl>
+                                              <p:pRg st="0" end="0"/>
+                                            </p:txEl>
+                                          </p:spTgt>
+                                        </p:tgtEl>
+                                        <p:attrNameLst>
+                                          <p:attrName>style.visibility</p:attrName>
+                                        </p:attrNameLst>
+                                      </p:cBhvr>
+                                      <p:to>
+                                        <p:strVal val="visible"/>
+                                      </p:to>
+                                    </p:set>
+                                  </p:childTnLst>
+                                </p:cTn>
+                              </p:par>
+                            </p:childTnLst>
+                          </p:cTn>
+                        </p:par>
+                      </p:childTnLst>
+                    </p:cTn>
+                  </p:par>
+                  <p:par>
+                    <p:cTn id="7" fill="hold">
+                      <p:stCondLst>
+                        <p:cond delay="indefinite"/>
+                      </p:stCondLst>
+                      <p:childTnLst>
+                        <p:par>
+                          <p:cTn id="8" fill="hold">
+                            <p:stCondLst>
+                              <p:cond delay="0"/>
+                            </p:stCondLst>
+                            <p:childTnLst>
+                              <p:par>
+                                <p:cTn id="9" presetID="1" presetClass="entr" presetSubtype="0" fill="hold" nodeType="clickEffect">
+                                  <p:stCondLst>
+                                    <p:cond delay="0"/>
+                                  </p:stCondLst>
+                                  <p:childTnLst>
+                                    <p:set>
+                                      <p:cBhvr>
+                                        <p:cTn id="10" dur="1" fill="hold">
+                                          <p:stCondLst>
+                                            <p:cond delay="0"/>
+                                          </p:stCondLst>
+                                        </p:cTn>
+                                        <p:tgtEl>
+                                          <p:spTgt spid="3">
+                                            <p:txEl>
+                                              <p:pRg st="1" end="1"/>
+                                            </p:txEl>
+                                          </p:spTgt>
+                                        </p:tgtEl>
+                                        <p:attrNameLst>
+                                          <p:attrName>style.visibility</p:attrName>
+                                        </p:attrNameLst>
+                                      </p:cBhvr>
+                                      <p:to>
+                                        <p:strVal val="visible"/>
+                                      </p:to>
+                                    </p:set>
+                                  </p:childTnLst>
+                                </p:cTn>
+                              </p:par>
+                            </p:childTnLst>
+                          </p:cTn>
+                        </p:par>
+                      </p:childTnLst>
+                    </p:cTn>
+                  </p:par>
+                  <p:par>
+                    <p:cTn id="11" fill="hold">
+                      <p:stCondLst>
+                        <p:cond delay="indefinite"/>
+                      </p:stCondLst>
+                      <p:childTnLst>
+                        <p:par>
+                          <p:cTn id="12" fill="hold">
+                            <p:stCondLst>
+                              <p:cond delay="0"/>
+                            </p:stCondLst>
+                            <p:childTnLst>
+                              <p:par>
+                                <p:cTn id="13" presetID="1" presetClass="entr" presetSubtype="0" fill="hold" nodeType="clickEffect">
+                                  <p:stCondLst>
+                                    <p:cond delay="0"/>
+                                  </p:stCondLst>
+                                  <p:childTnLst>
+                                    <p:set>
+                                      <p:cBhvr>
+                                        <p:cTn id="14" dur="1" fill="hold">
+                                          <p:stCondLst>
+                                            <p:cond delay="0"/>
+                                          </p:stCondLst>
+                                        </p:cTn>
+                                        <p:tgtEl>
+                                          <p:spTgt spid="3">
+                                            <p:txEl>
+                                              <p:pRg st="2" end="2"/>
+                                            </p:txEl>
+                                          </p:spTgt>
+                                        </p:tgtEl>
+                                        <p:attrNameLst>
+                                          <p:attrName>style.visibility</p:attrName>
+                                        </p:attrNameLst>
+                                      </p:cBhvr>
+                                      <p:to>
+                                        <p:strVal val="visible"/>
+                                      </p:to>
+                                    </p:set>
+                                  </p:childTnLst>
+                                </p:cTn>
+                              </p:par>
+                            </p:childTnLst>
+                          </p:cTn>
+                        </p:par>
+                      </p:childTnLst>
+                    </p:cTn>
+                  </p:par>
+                  <p:par>
+                    <p:cTn id="15" fill="hold">
+                      <p:stCondLst>
+                        <p:cond delay="indefinite"/>
+                      </p:stCondLst>
+                      <p:childTnLst>
+                        <p:par>
+                          <p:cTn id="16" fill="hold">
+                            <p:stCondLst>
+                              <p:cond delay="0"/>
+                            </p:stCondLst>
+                            <p:childTnLst>
+                              <p:par>
+                                <p:cTn id="17" presetID="1" presetClass="entr" presetSubtype="0" fill="hold" nodeType="clickEffect">
+                                  <p:stCondLst>
+                                    <p:cond delay="0"/>
+                                  </p:stCondLst>
+                                  <p:childTnLst>
+                                    <p:set>
+                                      <p:cBhvr>
+                                        <p:cTn id="18" dur="1" fill="hold">
+                                          <p:stCondLst>
+                                            <p:cond delay="0"/>
+                                          </p:stCondLst>
+                                        </p:cTn>
+                                        <p:tgtEl>
+                                          <p:spTgt spid="3">
+                                            <p:txEl>
+                                              <p:pRg st="3" end="3"/>
+                                            </p:txEl>
+                                          </p:spTgt>
+                                        </p:tgtEl>
+                                        <p:attrNameLst>
+                                          <p:attrName>style.visibility</p:attrName>
+                                        </p:attrNameLst>
+                                      </p:cBhvr>
+                                      <p:to>
+                                        <p:strVal val="visible"/>
+                                      </p:to>
+                                    </p:set>
+                                  </p:childTnLst>
+                                </p:cTn>
+                              </p:par>
+                            </p:childTnLst>
+                          </p:cTn>
+                        </p:par>
+                      </p:childTnLst>
+                    </p:cTn>
+                  </p:par>
+                  <p:par>
+                    <p:cTn id="19" fill="hold">
+                      <p:stCondLst>
+                        <p:cond delay="indefinite"/>
+                      </p:stCondLst>
+                      <p:childTnLst>
+                        <p:par>
+                          <p:cTn id="20" fill="hold">
+                            <p:stCondLst>
+                              <p:cond delay="0"/>
+                            </p:stCondLst>
+                            <p:childTnLst>
+                              <p:par>
+                                <p:cTn id="21" presetID="1" presetClass="entr" presetSubtype="0" fill="hold" nodeType="clickEffect">
+                                  <p:stCondLst>
+                                    <p:cond delay="0"/>
+                                  </p:stCondLst>
+                                  <p:childTnLst>
+                                    <p:set>
+                                      <p:cBhvr>
+                                        <p:cTn id="22" dur="1" fill="hold">
+                                          <p:stCondLst>
+                                            <p:cond delay="0"/>
+                                          </p:stCondLst>
+                                        </p:cTn>
+                                        <p:tgtEl>
+                                          <p:spTgt spid="3">
+                                            <p:txEl>
+                                              <p:pRg st="5" end="5"/>
+                                            </p:txEl>
+                                          </p:spTgt>
+                                        </p:tgtEl>
+                                        <p:attrNameLst>
+                                          <p:attrName>style.visibility</p:attrName>
+                                        </p:attrNameLst>
+                                      </p:cBhvr>
+                                      <p:to>
+                                        <p:strVal val="visible"/>
+                                      </p:to>
+                                    </p:set>
+                                  </p:childTnLst>
+                                </p:cTn>
+                              </p:par>
+                            </p:childTnLst>
+                          </p:cTn>
+                        </p:par>
+                      </p:childTnLst>
+                    </p:cTn>
+                  </p:par>
+                  <p:par>
+                    <p:cTn id="23" fill="hold">
+                      <p:stCondLst>
+                        <p:cond delay="indefinite"/>
+                      </p:stCondLst>
+                      <p:childTnLst>
+                        <p:par>
+                          <p:cTn id="24" fill="hold">
+                            <p:stCondLst>
+                              <p:cond delay="0"/>
+                            </p:stCondLst>
+                            <p:childTnLst>
+                              <p:par>
+                                <p:cTn id="25" presetID="1" presetClass="entr" presetSubtype="0" fill="hold" nodeType="clickEffect">
+                                  <p:stCondLst>
+                                    <p:cond delay="0"/>
+                                  </p:stCondLst>
+                                  <p:childTnLst>
+                                    <p:set>
+                                      <p:cBhvr>
+                                        <p:cTn id="26" dur="1" fill="hold">
+                                          <p:stCondLst>
+                                            <p:cond delay="0"/>
+                                          </p:stCondLst>
+                                        </p:cTn>
+                                        <p:tgtEl>
+                                          <p:spTgt spid="3">
+                                            <p:txEl>
+                                              <p:pRg st="6" end="6"/>
+                                            </p:txEl>
+                                          </p:spTgt>
+                                        </p:tgtEl>
+                                        <p:attrNameLst>
+                                          <p:attrName>style.visibility</p:attrName>
+                                        </p:attrNameLst>
+                                      </p:cBhvr>
+                                      <p:to>
+                                        <p:strVal val="visible"/>
+                                      </p:to>
+                                    </p:set>
+                                  </p:childTnLst>
+                                </p:cTn>
+                              </p:par>
+                            </p:childTnLst>
+                          </p:cTn>
+                        </p:par>
+                      </p:childTnLst>
+                    </p:cTn>
+                  </p:par>
+                  <p:par>
+                    <p:cTn id="27" fill="hold">
+                      <p:stCondLst>
+                        <p:cond delay="indefinite"/>
+                      </p:stCondLst>
+                      <p:childTnLst>
+                        <p:par>
+                          <p:cTn id="28" fill="hold">
+                            <p:stCondLst>
+                              <p:cond delay="0"/>
+                            </p:stCondLst>
+                            <p:childTnLst>
+                              <p:par>
+                                <p:cTn id="29" presetID="1" presetClass="entr" presetSubtype="0" fill="hold" nodeType="clickEffect">
+                                  <p:stCondLst>
+                                    <p:cond delay="0"/>
+                                  </p:stCondLst>
+                                  <p:childTnLst>
+                                    <p:set>
+                                      <p:cBhvr>
+                                        <p:cTn id="30" dur="1" fill="hold">
+                                          <p:stCondLst>
+                                            <p:cond delay="0"/>
+                                          </p:stCondLst>
+                                        </p:cTn>
+                                        <p:tgtEl>
+                                          <p:spTgt spid="3">
+                                            <p:txEl>
+                                              <p:pRg st="7" end="7"/>
+                                            </p:txEl>
+                                          </p:spTgt>
+                                        </p:tgtEl>
+                                        <p:attrNameLst>
+                                          <p:attrName>style.visibility</p:attrName>
+                                        </p:attrNameLst>
+                                      </p:cBhvr>
+                                      <p:to>
+                                        <p:strVal val="visible"/>
+                                      </p:to>
+                                    </p:set>
+                                  </p:childTnLst>
+                                </p:cTn>
+                              </p:par>
+                            </p:childTnLst>
+                          </p:cTn>
+                        </p:par>
+                      </p:childTnLst>
+                    </p:cTn>
+                  </p:par>
+                  <p:par>
+                    <p:cTn id="31" fill="hold">
+                      <p:stCondLst>
+                        <p:cond delay="indefinite"/>
+                      </p:stCondLst>
+                      <p:childTnLst>
+                        <p:par>
+                          <p:cTn id="32" fill="hold">
+                            <p:stCondLst>
+                              <p:cond delay="0"/>
+                            </p:stCondLst>
+                            <p:childTnLst>
+                              <p:par>
+                                <p:cTn id="33" presetID="1" presetClass="entr" presetSubtype="0" fill="hold" nodeType="clickEffect">
+                                  <p:stCondLst>
+                                    <p:cond delay="0"/>
+                                  </p:stCondLst>
+                                  <p:childTnLst>
+                                    <p:set>
+                                      <p:cBhvr>
+                                        <p:cTn id="34" dur="1" fill="hold">
+                                          <p:stCondLst>
+                                            <p:cond delay="0"/>
+                                          </p:stCondLst>
+                                        </p:cTn>
+                                        <p:tgtEl>
+                                          <p:spTgt spid="3">
+                                            <p:txEl>
+                                              <p:pRg st="8" end="8"/>
+                                            </p:txEl>
+                                          </p:spTgt>
+                                        </p:tgtEl>
+                                        <p:attrNameLst>
+                                          <p:attrName>style.visibility</p:attrName>
+                                        </p:attrNameLst>
+                                      </p:cBhvr>
+                                      <p:to>
+                                        <p:strVal val="visible"/>
+                                      </p:to>
+                                    </p:set>
+                                  </p:childTnLst>
+                                </p:cTn>
+                              </p:par>
+                            </p:childTnLst>
+                          </p:cTn>
+                        </p:par>
+                      </p:childTnLst>
+                    </p:cTn>
+                  </p:par>
+                  <p:par>
+                    <p:cTn id="35" fill="hold">
+                      <p:stCondLst>
+                        <p:cond delay="indefinite"/>
+                      </p:stCondLst>
+                      <p:childTnLst>
+                        <p:par>
+                          <p:cTn id="36" fill="hold">
+                            <p:stCondLst>
+                              <p:cond delay="0"/>
+                            </p:stCondLst>
+                            <p:childTnLst>
+                              <p:par>
+                                <p:cTn id="37" presetID="1" presetClass="entr" presetSubtype="0" fill="hold" nodeType="clickEffect">
+                                  <p:stCondLst>
+                                    <p:cond delay="0"/>
+                                  </p:stCondLst>
+                                  <p:childTnLst>
+                                    <p:set>
+                                      <p:cBhvr>
+                                        <p:cTn id="38" dur="1" fill="hold">
+                                          <p:stCondLst>
+                                            <p:cond delay="0"/>
+                                          </p:stCondLst>
+                                        </p:cTn>
+                                        <p:tgtEl>
+                                          <p:spTgt spid="3">
+                                            <p:txEl>
+                                              <p:pRg st="9" end="9"/>
+                                            </p:txEl>
+                                          </p:spTgt>
+                                        </p:tgtEl>
+                                        <p:attrNameLst>
+                                          <p:attrName>style.visibility</p:attrName>
+                                        </p:attrNameLst>
+                                      </p:cBhvr>
+                                      <p:to>
+                                        <p:strVal val="visible"/>
+                                      </p:to>
+                                    </p:set>
+                                  </p:childTnLst>
+                                </p:cTn>
+                              </p:par>
+                            </p:childTnLst>
+                          </p:cTn>
+                        </p:par>
+                      </p:childTnLst>
+                    </p:cTn>
+                  </p:par>
+                  <p:par>
+                    <p:cTn id="39" fill="hold">
+                      <p:stCondLst>
+                        <p:cond delay="indefinite"/>
+                      </p:stCondLst>
+                      <p:childTnLst>
+                        <p:par>
+                          <p:cTn id="40" fill="hold">
+                            <p:stCondLst>
+                              <p:cond delay="0"/>
+                            </p:stCondLst>
+                            <p:childTnLst>
+                              <p:par>
+                                <p:cTn id="41" presetID="1" presetClass="entr" presetSubtype="0" fill="hold" nodeType="clickEffect">
+                                  <p:stCondLst>
+                                    <p:cond delay="0"/>
+                                  </p:stCondLst>
+                                  <p:childTnLst>
+                                    <p:set>
+                                      <p:cBhvr>
+                                        <p:cTn id="42" dur="1" fill="hold">
+                                          <p:stCondLst>
+                                            <p:cond delay="0"/>
+                                          </p:stCondLst>
+                                        </p:cTn>
+                                        <p:tgtEl>
+                                          <p:spTgt spid="3">
+                                            <p:txEl>
+                                              <p:pRg st="10" end="10"/>
+                                            </p:txEl>
+                                          </p:spTgt>
+                                        </p:tgtEl>
+                                        <p:attrNameLst>
+                                          <p:attrName>style.visibility</p:attrName>
+                                        </p:attrNameLst>
+                                      </p:cBhvr>
+                                      <p:to>
+                                        <p:strVal val="visible"/>
+                                      </p:to>
+                                    </p:set>
+                                  </p:childTnLst>
+                                </p:cTn>
+                              </p:par>
+                            </p:childTnLst>
+                          </p:cTn>
+                        </p:par>
+                      </p:childTnLst>
+                    </p:cTn>
+                  </p:par>
+                  <p:par>
+                    <p:cTn id="43" fill="hold">
+                      <p:stCondLst>
+                        <p:cond delay="indefinite"/>
+                      </p:stCondLst>
+                      <p:childTnLst>
+                        <p:par>
+                          <p:cTn id="44" fill="hold">
+                            <p:stCondLst>
+                              <p:cond delay="0"/>
+                            </p:stCondLst>
+                            <p:childTnLst>
+                              <p:par>
+                                <p:cTn id="45" presetID="1" presetClass="entr" presetSubtype="0" fill="hold" nodeType="clickEffect">
+                                  <p:stCondLst>
+                                    <p:cond delay="0"/>
+                                  </p:stCondLst>
+                                  <p:childTnLst>
+                                    <p:set>
+                                      <p:cBhvr>
+                                        <p:cTn id="46" dur="1" fill="hold">
+                                          <p:stCondLst>
+                                            <p:cond delay="0"/>
+                                          </p:stCondLst>
+                                        </p:cTn>
+                                        <p:tgtEl>
+                                          <p:spTgt spid="3">
+                                            <p:txEl>
+                                              <p:pRg st="11" end="11"/>
+                                            </p:txEl>
+                                          </p:spTgt>
+                                        </p:tgtEl>
+                                        <p:attrNameLst>
+                                          <p:attrName>style.visibility</p:attrName>
+                                        </p:attrNameLst>
+                                      </p:cBhvr>
+                                      <p:to>
+                                        <p:strVal val="visible"/>
+                                      </p:to>
+                                    </p:set>
+                                  </p:childTnLst>
+                                </p:cTn>
+                              </p:par>
+                            </p:childTnLst>
+                          </p:cTn>
+                        </p:par>
+                      </p:childTnLst>
+                    </p:cTn>
+                  </p:par>
+                  <p:par>
+                    <p:cTn id="47" fill="hold">
+                      <p:stCondLst>
+                        <p:cond delay="indefinite"/>
+                      </p:stCondLst>
+                      <p:childTnLst>
+                        <p:par>
+                          <p:cTn id="48" fill="hold">
+                            <p:stCondLst>
+                              <p:cond delay="0"/>
+                            </p:stCondLst>
+                            <p:childTnLst>
+                              <p:par>
+                                <p:cTn id="49" presetID="1" presetClass="entr" presetSubtype="0" fill="hold" nodeType="clickEffect">
+                                  <p:stCondLst>
+                                    <p:cond delay="0"/>
+                                  </p:stCondLst>
+                                  <p:childTnLst>
+                                    <p:set>
+                                      <p:cBhvr>
+                                        <p:cTn id="50" dur="1" fill="hold">
+                                          <p:stCondLst>
+                                            <p:cond delay="0"/>
+                                          </p:stCondLst>
+                                        </p:cTn>
+                                        <p:tgtEl>
+                                          <p:spTgt spid="3">
+                                            <p:txEl>
+                                              <p:pRg st="12" end="12"/>
+                                            </p:txEl>
+                                          </p:spTgt>
+                                        </p:tgtEl>
+                                        <p:attrNameLst>
+                                          <p:attrName>style.visibility</p:attrName>
+                                        </p:attrNameLst>
+                                      </p:cBhvr>
+                                      <p:to>
+                                        <p:strVal val="visible"/>
+                                      </p:to>
+                                    </p:set>
+                                  </p:childTnLst>
+                                </p:cTn>
+                              </p:par>
+                            </p:childTnLst>
+                          </p:cTn>
+                        </p:par>
+                      </p:childTnLst>
+                    </p:cTn>
+                  </p:par>
+                  <p:par>
+                    <p:cTn id="51" fill="hold">
+                      <p:stCondLst>
+                        <p:cond delay="indefinite"/>
+                      </p:stCondLst>
+                      <p:childTnLst>
+                        <p:par>
+                          <p:cTn id="52" fill="hold">
+                            <p:stCondLst>
+                              <p:cond delay="0"/>
+                            </p:stCondLst>
+                            <p:childTnLst>
+                              <p:par>
+                                <p:cTn id="53" presetID="1" presetClass="entr" presetSubtype="0" fill="hold" nodeType="clickEffect">
+                                  <p:stCondLst>
+                                    <p:cond delay="0"/>
+                                  </p:stCondLst>
+                                  <p:childTnLst>
+                                    <p:set>
+                                      <p:cBhvr>
+                                        <p:cTn id="54" dur="1" fill="hold">
+                                          <p:stCondLst>
+                                            <p:cond delay="0"/>
+                                          </p:stCondLst>
+                                        </p:cTn>
+                                        <p:tgtEl>
+                                          <p:spTgt spid="3">
+                                            <p:txEl>
+                                              <p:pRg st="13" end="13"/>
+                                            </p:txEl>
+                                          </p:spTgt>
+                                        </p:tgtEl>
+                                        <p:attrNameLst>
+                                          <p:attrName>style.visibility</p:attrName>
+                                        </p:attrNameLst>
+                                      </p:cBhvr>
+                                      <p:to>
+                                        <p:strVal val="visible"/>
+                                      </p:to>
+                                    </p:set>
+                                  </p:childTnLst>
+                                </p:cTn>
+                              </p:par>
+                            </p:childTnLst>
+                          </p:cTn>
+                        </p:par>
+                      </p:childTnLst>
+                    </p:cTn>
+                  </p:par>
+                </p:childTnLst>
+              </p:cTn>
+              <p:prevCondLst>
+                <p:cond evt="onPrev" delay="0">
+                  <p:tgtEl>
+                    <p:sldTgt/>
+                  </p:tgtEl>
+                </p:cond>
+              </p:prevCondLst>
+              <p:nextCondLst>
+                <p:cond evt="onNext" delay="0">
+                  <p:tgtEl>
+                    <p:sldTgt/>
+                  </p:tgtEl>
+                </p:cond>
+              </p:nextCondLst>
+            </p:seq>
+          </p:childTnLst>
+        </p:cTn>
+      </p:par>
+    </p:tnLst>
+  </p:timing>
+</p:sld>
+</file>
+
+<file path=ppt/slides/slide38.xml><?xml version="1.0" encoding="utf-8"?>
+<p:sld xmlns:a="http://schemas.openxmlformats.org/drawingml/2006/main" xmlns:r="http://schemas.openxmlformats.org/officeDocument/2006/relationships" xmlns:p="http://schemas.openxmlformats.org/presentationml/2006/main">
+  <p:cSld>
+    <p:spTree>
+      <p:nvGrpSpPr>
+        <p:cNvPr id="1" name="">
+          <a:extLst>
+            <a:ext uri="{FF2B5EF4-FFF2-40B4-BE49-F238E27FC236}">
+              <a16:creationId xmlns:a16="http://schemas.microsoft.com/office/drawing/2014/main" id="{1E35D853-9238-05FD-5E78-5D5C79B60BA2}"/>
+            </a:ext>
+          </a:extLst>
+        </p:cNvPr>
+        <p:cNvGrpSpPr/>
+        <p:nvPr/>
+      </p:nvGrpSpPr>
+      <p:grpSpPr>
+        <a:xfrm>
+          <a:off x="0" y="0"/>
+          <a:ext cx="0" cy="0"/>
+          <a:chOff x="0" y="0"/>
+          <a:chExt cx="0" cy="0"/>
+        </a:xfrm>
+      </p:grpSpPr>
+      <p:sp>
+        <p:nvSpPr>
+          <p:cNvPr id="2" name="Title 1">
+            <a:extLst>
+              <a:ext uri="{FF2B5EF4-FFF2-40B4-BE49-F238E27FC236}">
+                <a16:creationId xmlns:a16="http://schemas.microsoft.com/office/drawing/2014/main" id="{ED738278-3D88-2213-DBB2-CE359F4EE281}"/>
+              </a:ext>
+            </a:extLst>
+          </p:cNvPr>
+          <p:cNvSpPr>
+            <a:spLocks noGrp="1"/>
+          </p:cNvSpPr>
+          <p:nvPr>
+            <p:ph type="ctrTitle"/>
+          </p:nvPr>
+        </p:nvSpPr>
+        <p:spPr>
+          <a:xfrm>
+            <a:off x="1524000" y="382580"/>
+            <a:ext cx="9144000" cy="502003"/>
+          </a:xfrm>
+        </p:spPr>
+        <p:txBody>
+          <a:bodyPr>
+            <a:noAutofit/>
+          </a:bodyPr>
+          <a:lstStyle/>
+          <a:p>
+            <a:r>
+              <a:rPr lang="en-US" sz="3200" dirty="0" err="1"/>
+              <a:t>PySpark</a:t>
+            </a:r>
+            <a:r>
+              <a:rPr lang="en-US" sz="3200" dirty="0"/>
+              <a:t> </a:t>
+            </a:r>
+            <a:r>
+              <a:rPr lang="en-US" sz="3200" dirty="0" err="1"/>
+              <a:t>DataFrame</a:t>
+            </a:r>
+            <a:r>
+              <a:rPr lang="en-US" sz="3200" dirty="0"/>
+              <a:t> Example 2 - 0005</a:t>
+            </a:r>
+          </a:p>
+        </p:txBody>
+      </p:sp>
+      <p:sp>
+        <p:nvSpPr>
+          <p:cNvPr id="3" name="Subtitle 2">
+            <a:extLst>
+              <a:ext uri="{FF2B5EF4-FFF2-40B4-BE49-F238E27FC236}">
+                <a16:creationId xmlns:a16="http://schemas.microsoft.com/office/drawing/2014/main" id="{E8C9F955-54F6-F168-6C67-7A0806AE22C9}"/>
+              </a:ext>
+            </a:extLst>
+          </p:cNvPr>
+          <p:cNvSpPr>
+            <a:spLocks noGrp="1"/>
+          </p:cNvSpPr>
+          <p:nvPr>
+            <p:ph type="subTitle" idx="1"/>
+          </p:nvPr>
+        </p:nvSpPr>
+        <p:spPr>
+          <a:xfrm>
+            <a:off x="1524000" y="884584"/>
+            <a:ext cx="9144000" cy="5088834"/>
+          </a:xfrm>
+        </p:spPr>
+        <p:txBody>
+          <a:bodyPr>
+            <a:normAutofit/>
+          </a:bodyPr>
+          <a:lstStyle/>
+          <a:p>
+            <a:r>
+              <a:rPr lang="en-US" sz="1800" dirty="0">
+                <a:solidFill>
+                  <a:schemeClr val="tx1"/>
+                </a:solidFill>
+                <a:latin typeface="Consolas" panose="020B0609020204030204" pitchFamily="49" charset="0"/>
+                <a:cs typeface="Consolas" panose="020B0609020204030204" pitchFamily="49" charset="0"/>
+              </a:rPr>
+              <a:t>--- Cleaned and Transformed Data ---</a:t>
+            </a:r>
+          </a:p>
+          <a:p>
+            <a:r>
+              <a:rPr lang="en-US" sz="1800" dirty="0">
+                <a:solidFill>
+                  <a:schemeClr val="tx1"/>
+                </a:solidFill>
+                <a:latin typeface="Consolas" panose="020B0609020204030204" pitchFamily="49" charset="0"/>
+                <a:cs typeface="Consolas" panose="020B0609020204030204" pitchFamily="49" charset="0"/>
+              </a:rPr>
+              <a:t>+------+-----------+------+-------+-------+</a:t>
+            </a:r>
+          </a:p>
+          <a:p>
+            <a:r>
+              <a:rPr lang="en-US" sz="1800" dirty="0">
+                <a:solidFill>
+                  <a:schemeClr val="tx1"/>
+                </a:solidFill>
+                <a:highlight>
+                  <a:srgbClr val="00FF00"/>
+                </a:highlight>
+                <a:latin typeface="Consolas" panose="020B0609020204030204" pitchFamily="49" charset="0"/>
+                <a:cs typeface="Consolas" panose="020B0609020204030204" pitchFamily="49" charset="0"/>
+              </a:rPr>
+              <a:t>|</a:t>
+            </a:r>
+            <a:r>
+              <a:rPr lang="en-US" sz="1800" dirty="0" err="1">
+                <a:solidFill>
+                  <a:schemeClr val="tx1"/>
+                </a:solidFill>
+                <a:highlight>
+                  <a:srgbClr val="00FF00"/>
+                </a:highlight>
+                <a:latin typeface="Consolas" panose="020B0609020204030204" pitchFamily="49" charset="0"/>
+                <a:cs typeface="Consolas" panose="020B0609020204030204" pitchFamily="49" charset="0"/>
+              </a:rPr>
+              <a:t>UserID</a:t>
+            </a:r>
+            <a:r>
+              <a:rPr lang="en-US" sz="1800" dirty="0">
+                <a:solidFill>
+                  <a:schemeClr val="tx1"/>
+                </a:solidFill>
+                <a:highlight>
+                  <a:srgbClr val="00FF00"/>
+                </a:highlight>
+                <a:latin typeface="Consolas" panose="020B0609020204030204" pitchFamily="49" charset="0"/>
+                <a:cs typeface="Consolas" panose="020B0609020204030204" pitchFamily="49" charset="0"/>
+              </a:rPr>
+              <a:t>|   </a:t>
+            </a:r>
+            <a:r>
+              <a:rPr lang="en-US" sz="1800" dirty="0" err="1">
+                <a:solidFill>
+                  <a:schemeClr val="tx1"/>
+                </a:solidFill>
+                <a:highlight>
+                  <a:srgbClr val="00FF00"/>
+                </a:highlight>
+                <a:latin typeface="Consolas" panose="020B0609020204030204" pitchFamily="49" charset="0"/>
+                <a:cs typeface="Consolas" panose="020B0609020204030204" pitchFamily="49" charset="0"/>
+              </a:rPr>
+              <a:t>Category|Amount|Country|Segment</a:t>
+            </a:r>
+            <a:r>
+              <a:rPr lang="en-US" sz="1800" dirty="0">
+                <a:solidFill>
+                  <a:schemeClr val="tx1"/>
+                </a:solidFill>
+                <a:highlight>
+                  <a:srgbClr val="00FF00"/>
+                </a:highlight>
+                <a:latin typeface="Consolas" panose="020B0609020204030204" pitchFamily="49" charset="0"/>
+                <a:cs typeface="Consolas" panose="020B0609020204030204" pitchFamily="49" charset="0"/>
+              </a:rPr>
+              <a:t>|</a:t>
+            </a:r>
+          </a:p>
+          <a:p>
+            <a:r>
+              <a:rPr lang="en-US" sz="1800" dirty="0">
+                <a:solidFill>
+                  <a:schemeClr val="tx1"/>
+                </a:solidFill>
+                <a:latin typeface="Consolas" panose="020B0609020204030204" pitchFamily="49" charset="0"/>
+                <a:cs typeface="Consolas" panose="020B0609020204030204" pitchFamily="49" charset="0"/>
+              </a:rPr>
+              <a:t>+------+-----------+------+-------+-------+</a:t>
+            </a:r>
+          </a:p>
+          <a:p>
+            <a:r>
+              <a:rPr lang="en-US" sz="1800" dirty="0">
+                <a:solidFill>
+                  <a:schemeClr val="tx1"/>
+                </a:solidFill>
+                <a:latin typeface="Consolas" panose="020B0609020204030204" pitchFamily="49" charset="0"/>
+                <a:cs typeface="Consolas" panose="020B0609020204030204" pitchFamily="49" charset="0"/>
+              </a:rPr>
+              <a:t>|User_A|Electronics|1200.0|     US|   High|</a:t>
+            </a:r>
+          </a:p>
+          <a:p>
+            <a:r>
+              <a:rPr lang="en-US" sz="1800" dirty="0">
+                <a:solidFill>
+                  <a:schemeClr val="tx1"/>
+                </a:solidFill>
+                <a:latin typeface="Consolas" panose="020B0609020204030204" pitchFamily="49" charset="0"/>
+                <a:cs typeface="Consolas" panose="020B0609020204030204" pitchFamily="49" charset="0"/>
+              </a:rPr>
+              <a:t>|</a:t>
+            </a:r>
+            <a:r>
+              <a:rPr lang="en-US" sz="1800" dirty="0" err="1">
+                <a:solidFill>
+                  <a:schemeClr val="tx1"/>
+                </a:solidFill>
+                <a:latin typeface="Consolas" panose="020B0609020204030204" pitchFamily="49" charset="0"/>
+                <a:cs typeface="Consolas" panose="020B0609020204030204" pitchFamily="49" charset="0"/>
+              </a:rPr>
+              <a:t>User_B</a:t>
+            </a:r>
+            <a:r>
+              <a:rPr lang="en-US" sz="1800" dirty="0">
+                <a:solidFill>
+                  <a:schemeClr val="tx1"/>
+                </a:solidFill>
+                <a:latin typeface="Consolas" panose="020B0609020204030204" pitchFamily="49" charset="0"/>
+                <a:cs typeface="Consolas" panose="020B0609020204030204" pitchFamily="49" charset="0"/>
+              </a:rPr>
+              <a:t>|   Clothing|  45.5|     CA| Medium|</a:t>
+            </a:r>
+          </a:p>
+          <a:p>
+            <a:r>
+              <a:rPr lang="en-US" sz="1800" dirty="0">
+                <a:solidFill>
+                  <a:schemeClr val="tx1"/>
+                </a:solidFill>
+                <a:latin typeface="Consolas" panose="020B0609020204030204" pitchFamily="49" charset="0"/>
+                <a:cs typeface="Consolas" panose="020B0609020204030204" pitchFamily="49" charset="0"/>
+              </a:rPr>
+              <a:t>|</a:t>
+            </a:r>
+            <a:r>
+              <a:rPr lang="en-US" sz="1800" dirty="0" err="1">
+                <a:solidFill>
+                  <a:schemeClr val="tx1"/>
+                </a:solidFill>
+                <a:latin typeface="Consolas" panose="020B0609020204030204" pitchFamily="49" charset="0"/>
+                <a:cs typeface="Consolas" panose="020B0609020204030204" pitchFamily="49" charset="0"/>
+              </a:rPr>
+              <a:t>User_C|Electronics</a:t>
+            </a:r>
+            <a:r>
+              <a:rPr lang="en-US" sz="1800" dirty="0">
+                <a:solidFill>
+                  <a:schemeClr val="tx1"/>
+                </a:solidFill>
+                <a:latin typeface="Consolas" panose="020B0609020204030204" pitchFamily="49" charset="0"/>
+                <a:cs typeface="Consolas" panose="020B0609020204030204" pitchFamily="49" charset="0"/>
+              </a:rPr>
+              <a:t>|   0.0|     </a:t>
+            </a:r>
+            <a:r>
+              <a:rPr lang="en-US" sz="1800" dirty="0" err="1">
+                <a:solidFill>
+                  <a:schemeClr val="tx1"/>
+                </a:solidFill>
+                <a:latin typeface="Consolas" panose="020B0609020204030204" pitchFamily="49" charset="0"/>
+                <a:cs typeface="Consolas" panose="020B0609020204030204" pitchFamily="49" charset="0"/>
+              </a:rPr>
+              <a:t>US|Inactive</a:t>
+            </a:r>
+            <a:r>
+              <a:rPr lang="en-US" sz="1800" dirty="0">
+                <a:solidFill>
+                  <a:schemeClr val="tx1"/>
+                </a:solidFill>
+                <a:latin typeface="Consolas" panose="020B0609020204030204" pitchFamily="49" charset="0"/>
+                <a:cs typeface="Consolas" panose="020B0609020204030204" pitchFamily="49" charset="0"/>
+              </a:rPr>
+              <a:t>|</a:t>
+            </a:r>
+          </a:p>
+          <a:p>
+            <a:r>
+              <a:rPr lang="en-US" sz="1800" dirty="0">
+                <a:solidFill>
+                  <a:schemeClr val="tx1"/>
+                </a:solidFill>
+                <a:latin typeface="Consolas" panose="020B0609020204030204" pitchFamily="49" charset="0"/>
+                <a:cs typeface="Consolas" panose="020B0609020204030204" pitchFamily="49" charset="0"/>
+              </a:rPr>
+              <a:t>|</a:t>
+            </a:r>
+            <a:r>
+              <a:rPr lang="en-US" sz="1800" dirty="0" err="1">
+                <a:solidFill>
+                  <a:schemeClr val="tx1"/>
+                </a:solidFill>
+                <a:latin typeface="Consolas" panose="020B0609020204030204" pitchFamily="49" charset="0"/>
+                <a:cs typeface="Consolas" panose="020B0609020204030204" pitchFamily="49" charset="0"/>
+              </a:rPr>
+              <a:t>User_A|Electronics</a:t>
+            </a:r>
+            <a:r>
+              <a:rPr lang="en-US" sz="1800" dirty="0">
+                <a:solidFill>
+                  <a:schemeClr val="tx1"/>
+                </a:solidFill>
+                <a:latin typeface="Consolas" panose="020B0609020204030204" pitchFamily="49" charset="0"/>
+                <a:cs typeface="Consolas" panose="020B0609020204030204" pitchFamily="49" charset="0"/>
+              </a:rPr>
+              <a:t>| 150.0|     US| Medium|</a:t>
+            </a:r>
+          </a:p>
+          <a:p>
+            <a:r>
+              <a:rPr lang="en-US" sz="1800" dirty="0">
+                <a:solidFill>
+                  <a:schemeClr val="tx1"/>
+                </a:solidFill>
+                <a:latin typeface="Consolas" panose="020B0609020204030204" pitchFamily="49" charset="0"/>
+                <a:cs typeface="Consolas" panose="020B0609020204030204" pitchFamily="49" charset="0"/>
+              </a:rPr>
+              <a:t>|</a:t>
+            </a:r>
+            <a:r>
+              <a:rPr lang="en-US" sz="1800" dirty="0" err="1">
+                <a:solidFill>
+                  <a:schemeClr val="tx1"/>
+                </a:solidFill>
+                <a:latin typeface="Consolas" panose="020B0609020204030204" pitchFamily="49" charset="0"/>
+                <a:cs typeface="Consolas" panose="020B0609020204030204" pitchFamily="49" charset="0"/>
+              </a:rPr>
+              <a:t>User_D</a:t>
+            </a:r>
+            <a:r>
+              <a:rPr lang="en-US" sz="1800" dirty="0">
+                <a:solidFill>
+                  <a:schemeClr val="tx1"/>
+                </a:solidFill>
+                <a:latin typeface="Consolas" panose="020B0609020204030204" pitchFamily="49" charset="0"/>
+                <a:cs typeface="Consolas" panose="020B0609020204030204" pitchFamily="49" charset="0"/>
+              </a:rPr>
+              <a:t>|      Books|  22.0|     UK| Medium|</a:t>
+            </a:r>
+          </a:p>
+          <a:p>
+            <a:r>
+              <a:rPr lang="en-US" sz="1800" dirty="0">
+                <a:solidFill>
+                  <a:schemeClr val="tx1"/>
+                </a:solidFill>
+                <a:latin typeface="Consolas" panose="020B0609020204030204" pitchFamily="49" charset="0"/>
+                <a:cs typeface="Consolas" panose="020B0609020204030204" pitchFamily="49" charset="0"/>
+              </a:rPr>
+              <a:t>|</a:t>
+            </a:r>
+            <a:r>
+              <a:rPr lang="en-US" sz="1800" dirty="0" err="1">
+                <a:solidFill>
+                  <a:schemeClr val="tx1"/>
+                </a:solidFill>
+                <a:latin typeface="Consolas" panose="020B0609020204030204" pitchFamily="49" charset="0"/>
+                <a:cs typeface="Consolas" panose="020B0609020204030204" pitchFamily="49" charset="0"/>
+              </a:rPr>
+              <a:t>User_B</a:t>
+            </a:r>
+            <a:r>
+              <a:rPr lang="en-US" sz="1800" dirty="0">
+                <a:solidFill>
+                  <a:schemeClr val="tx1"/>
+                </a:solidFill>
+                <a:latin typeface="Consolas" panose="020B0609020204030204" pitchFamily="49" charset="0"/>
+                <a:cs typeface="Consolas" panose="020B0609020204030204" pitchFamily="49" charset="0"/>
+              </a:rPr>
+              <a:t>|   Clothing|  80.0|     CA| Medium|</a:t>
+            </a:r>
+          </a:p>
+          <a:p>
+            <a:r>
+              <a:rPr lang="en-US" sz="1800" dirty="0">
+                <a:solidFill>
+                  <a:schemeClr val="tx1"/>
+                </a:solidFill>
+                <a:latin typeface="Consolas" panose="020B0609020204030204" pitchFamily="49" charset="0"/>
+                <a:cs typeface="Consolas" panose="020B0609020204030204" pitchFamily="49" charset="0"/>
+              </a:rPr>
+              <a:t>|</a:t>
+            </a:r>
+            <a:r>
+              <a:rPr lang="en-US" sz="1800" dirty="0" err="1">
+                <a:solidFill>
+                  <a:schemeClr val="tx1"/>
+                </a:solidFill>
+                <a:latin typeface="Consolas" panose="020B0609020204030204" pitchFamily="49" charset="0"/>
+                <a:cs typeface="Consolas" panose="020B0609020204030204" pitchFamily="49" charset="0"/>
+              </a:rPr>
+              <a:t>User_E</a:t>
+            </a:r>
+            <a:r>
+              <a:rPr lang="en-US" sz="1800" dirty="0">
+                <a:solidFill>
+                  <a:schemeClr val="tx1"/>
+                </a:solidFill>
+                <a:latin typeface="Consolas" panose="020B0609020204030204" pitchFamily="49" charset="0"/>
+                <a:cs typeface="Consolas" panose="020B0609020204030204" pitchFamily="49" charset="0"/>
+              </a:rPr>
+              <a:t>|      Books| 15.75|Unknown| Medium|</a:t>
+            </a:r>
+          </a:p>
+          <a:p>
+            <a:r>
+              <a:rPr lang="en-US" sz="1800" dirty="0">
+                <a:solidFill>
+                  <a:schemeClr val="tx1"/>
+                </a:solidFill>
+                <a:latin typeface="Consolas" panose="020B0609020204030204" pitchFamily="49" charset="0"/>
+                <a:cs typeface="Consolas" panose="020B0609020204030204" pitchFamily="49" charset="0"/>
+              </a:rPr>
+              <a:t>+------+-----------+------+-------+-------+</a:t>
+            </a:r>
+          </a:p>
+        </p:txBody>
+      </p:sp>
+    </p:spTree>
+    <p:extLst>
+      <p:ext uri="{BB962C8B-B14F-4D97-AF65-F5344CB8AC3E}">
+        <p14:creationId xmlns:p14="http://schemas.microsoft.com/office/powerpoint/2010/main" val="3139502338"/>
+      </p:ext>
+    </p:extLst>
+  </p:cSld>
+  <p:clrMapOvr>
+    <a:masterClrMapping/>
+  </p:clrMapOvr>
+  <p:timing>
+    <p:tnLst>
+      <p:par>
+        <p:cTn id="1" dur="indefinite" restart="never" nodeType="tmRoot">
+          <p:childTnLst>
+            <p:seq concurrent="1" nextAc="seek">
+              <p:cTn id="2" dur="indefinite" nodeType="mainSeq">
+                <p:childTnLst>
+                  <p:par>
+                    <p:cTn id="3" fill="hold">
+                      <p:stCondLst>
+                        <p:cond delay="indefinite"/>
+                      </p:stCondLst>
+                      <p:childTnLst>
+                        <p:par>
+                          <p:cTn id="4" fill="hold">
+                            <p:stCondLst>
+                              <p:cond delay="0"/>
+                            </p:stCondLst>
+                            <p:childTnLst>
+                              <p:par>
+                                <p:cTn id="5" presetID="1" presetClass="entr" presetSubtype="0" fill="hold" nodeType="clickEffect">
+                                  <p:stCondLst>
+                                    <p:cond delay="0"/>
+                                  </p:stCondLst>
+                                  <p:childTnLst>
+                                    <p:set>
+                                      <p:cBhvr>
+                                        <p:cTn id="6" dur="1" fill="hold">
+                                          <p:stCondLst>
+                                            <p:cond delay="0"/>
+                                          </p:stCondLst>
+                                        </p:cTn>
+                                        <p:tgtEl>
+                                          <p:spTgt spid="3">
+                                            <p:txEl>
+                                              <p:pRg st="0" end="0"/>
+                                            </p:txEl>
+                                          </p:spTgt>
+                                        </p:tgtEl>
+                                        <p:attrNameLst>
+                                          <p:attrName>style.visibility</p:attrName>
+                                        </p:attrNameLst>
+                                      </p:cBhvr>
+                                      <p:to>
+                                        <p:strVal val="visible"/>
+                                      </p:to>
+                                    </p:set>
+                                  </p:childTnLst>
+                                </p:cTn>
+                              </p:par>
+                            </p:childTnLst>
+                          </p:cTn>
+                        </p:par>
+                      </p:childTnLst>
+                    </p:cTn>
+                  </p:par>
+                  <p:par>
+                    <p:cTn id="7" fill="hold">
+                      <p:stCondLst>
+                        <p:cond delay="indefinite"/>
+                      </p:stCondLst>
+                      <p:childTnLst>
+                        <p:par>
+                          <p:cTn id="8" fill="hold">
+                            <p:stCondLst>
+                              <p:cond delay="0"/>
+                            </p:stCondLst>
+                            <p:childTnLst>
+                              <p:par>
+                                <p:cTn id="9" presetID="1" presetClass="entr" presetSubtype="0" fill="hold" nodeType="clickEffect">
+                                  <p:stCondLst>
+                                    <p:cond delay="0"/>
+                                  </p:stCondLst>
+                                  <p:childTnLst>
+                                    <p:set>
+                                      <p:cBhvr>
+                                        <p:cTn id="10" dur="1" fill="hold">
+                                          <p:stCondLst>
+                                            <p:cond delay="0"/>
+                                          </p:stCondLst>
+                                        </p:cTn>
+                                        <p:tgtEl>
+                                          <p:spTgt spid="3">
+                                            <p:txEl>
+                                              <p:pRg st="1" end="1"/>
+                                            </p:txEl>
+                                          </p:spTgt>
+                                        </p:tgtEl>
+                                        <p:attrNameLst>
+                                          <p:attrName>style.visibility</p:attrName>
+                                        </p:attrNameLst>
+                                      </p:cBhvr>
+                                      <p:to>
+                                        <p:strVal val="visible"/>
+                                      </p:to>
+                                    </p:set>
+                                  </p:childTnLst>
+                                </p:cTn>
+                              </p:par>
+                            </p:childTnLst>
+                          </p:cTn>
+                        </p:par>
+                      </p:childTnLst>
+                    </p:cTn>
+                  </p:par>
+                  <p:par>
+                    <p:cTn id="11" fill="hold">
+                      <p:stCondLst>
+                        <p:cond delay="indefinite"/>
+                      </p:stCondLst>
+                      <p:childTnLst>
+                        <p:par>
+                          <p:cTn id="12" fill="hold">
+                            <p:stCondLst>
+                              <p:cond delay="0"/>
+                            </p:stCondLst>
+                            <p:childTnLst>
+                              <p:par>
+                                <p:cTn id="13" presetID="1" presetClass="entr" presetSubtype="0" fill="hold" nodeType="clickEffect">
+                                  <p:stCondLst>
+                                    <p:cond delay="0"/>
+                                  </p:stCondLst>
+                                  <p:childTnLst>
+                                    <p:set>
+                                      <p:cBhvr>
+                                        <p:cTn id="14" dur="1" fill="hold">
+                                          <p:stCondLst>
+                                            <p:cond delay="0"/>
+                                          </p:stCondLst>
+                                        </p:cTn>
+                                        <p:tgtEl>
+                                          <p:spTgt spid="3">
+                                            <p:txEl>
+                                              <p:pRg st="2" end="2"/>
+                                            </p:txEl>
+                                          </p:spTgt>
+                                        </p:tgtEl>
+                                        <p:attrNameLst>
+                                          <p:attrName>style.visibility</p:attrName>
+                                        </p:attrNameLst>
+                                      </p:cBhvr>
+                                      <p:to>
+                                        <p:strVal val="visible"/>
+                                      </p:to>
+                                    </p:set>
+                                  </p:childTnLst>
+                                </p:cTn>
+                              </p:par>
+                            </p:childTnLst>
+                          </p:cTn>
+                        </p:par>
+                      </p:childTnLst>
+                    </p:cTn>
+                  </p:par>
+                  <p:par>
+                    <p:cTn id="15" fill="hold">
+                      <p:stCondLst>
+                        <p:cond delay="indefinite"/>
+                      </p:stCondLst>
+                      <p:childTnLst>
+                        <p:par>
+                          <p:cTn id="16" fill="hold">
+                            <p:stCondLst>
+                              <p:cond delay="0"/>
+                            </p:stCondLst>
+                            <p:childTnLst>
+                              <p:par>
+                                <p:cTn id="17" presetID="1" presetClass="entr" presetSubtype="0" fill="hold" nodeType="clickEffect">
+                                  <p:stCondLst>
+                                    <p:cond delay="0"/>
+                                  </p:stCondLst>
+                                  <p:childTnLst>
+                                    <p:set>
+                                      <p:cBhvr>
+                                        <p:cTn id="18" dur="1" fill="hold">
+                                          <p:stCondLst>
+                                            <p:cond delay="0"/>
+                                          </p:stCondLst>
+                                        </p:cTn>
+                                        <p:tgtEl>
+                                          <p:spTgt spid="3">
+                                            <p:txEl>
+                                              <p:pRg st="3" end="3"/>
+                                            </p:txEl>
+                                          </p:spTgt>
+                                        </p:tgtEl>
+                                        <p:attrNameLst>
+                                          <p:attrName>style.visibility</p:attrName>
+                                        </p:attrNameLst>
+                                      </p:cBhvr>
+                                      <p:to>
+                                        <p:strVal val="visible"/>
+                                      </p:to>
+                                    </p:set>
+                                  </p:childTnLst>
+                                </p:cTn>
+                              </p:par>
+                            </p:childTnLst>
+                          </p:cTn>
+                        </p:par>
+                      </p:childTnLst>
+                    </p:cTn>
+                  </p:par>
+                  <p:par>
+                    <p:cTn id="19" fill="hold">
+                      <p:stCondLst>
+                        <p:cond delay="indefinite"/>
+                      </p:stCondLst>
+                      <p:childTnLst>
+                        <p:par>
+                          <p:cTn id="20" fill="hold">
+                            <p:stCondLst>
+                              <p:cond delay="0"/>
+                            </p:stCondLst>
+                            <p:childTnLst>
+                              <p:par>
+                                <p:cTn id="21" presetID="1" presetClass="entr" presetSubtype="0" fill="hold" nodeType="clickEffect">
+                                  <p:stCondLst>
+                                    <p:cond delay="0"/>
+                                  </p:stCondLst>
+                                  <p:childTnLst>
+                                    <p:set>
+                                      <p:cBhvr>
+                                        <p:cTn id="22" dur="1" fill="hold">
+                                          <p:stCondLst>
+                                            <p:cond delay="0"/>
+                                          </p:stCondLst>
+                                        </p:cTn>
+                                        <p:tgtEl>
+                                          <p:spTgt spid="3">
+                                            <p:txEl>
+                                              <p:pRg st="4" end="4"/>
+                                            </p:txEl>
+                                          </p:spTgt>
+                                        </p:tgtEl>
+                                        <p:attrNameLst>
+                                          <p:attrName>style.visibility</p:attrName>
+                                        </p:attrNameLst>
+                                      </p:cBhvr>
+                                      <p:to>
+                                        <p:strVal val="visible"/>
+                                      </p:to>
+                                    </p:set>
+                                  </p:childTnLst>
+                                </p:cTn>
+                              </p:par>
+                            </p:childTnLst>
+                          </p:cTn>
+                        </p:par>
+                      </p:childTnLst>
+                    </p:cTn>
+                  </p:par>
+                  <p:par>
+                    <p:cTn id="23" fill="hold">
+                      <p:stCondLst>
+                        <p:cond delay="indefinite"/>
+                      </p:stCondLst>
+                      <p:childTnLst>
+                        <p:par>
+                          <p:cTn id="24" fill="hold">
+                            <p:stCondLst>
+                              <p:cond delay="0"/>
+                            </p:stCondLst>
+                            <p:childTnLst>
+                              <p:par>
+                                <p:cTn id="25" presetID="1" presetClass="entr" presetSubtype="0" fill="hold" nodeType="clickEffect">
+                                  <p:stCondLst>
+                                    <p:cond delay="0"/>
+                                  </p:stCondLst>
+                                  <p:childTnLst>
+                                    <p:set>
+                                      <p:cBhvr>
+                                        <p:cTn id="26" dur="1" fill="hold">
+                                          <p:stCondLst>
+                                            <p:cond delay="0"/>
+                                          </p:stCondLst>
+                                        </p:cTn>
+                                        <p:tgtEl>
+                                          <p:spTgt spid="3">
+                                            <p:txEl>
+                                              <p:pRg st="5" end="5"/>
+                                            </p:txEl>
+                                          </p:spTgt>
+                                        </p:tgtEl>
+                                        <p:attrNameLst>
+                                          <p:attrName>style.visibility</p:attrName>
+                                        </p:attrNameLst>
+                                      </p:cBhvr>
+                                      <p:to>
+                                        <p:strVal val="visible"/>
+                                      </p:to>
+                                    </p:set>
+                                  </p:childTnLst>
+                                </p:cTn>
+                              </p:par>
+                            </p:childTnLst>
+                          </p:cTn>
+                        </p:par>
+                      </p:childTnLst>
+                    </p:cTn>
+                  </p:par>
+                  <p:par>
+                    <p:cTn id="27" fill="hold">
+                      <p:stCondLst>
+                        <p:cond delay="indefinite"/>
+                      </p:stCondLst>
+                      <p:childTnLst>
+                        <p:par>
+                          <p:cTn id="28" fill="hold">
+                            <p:stCondLst>
+                              <p:cond delay="0"/>
+                            </p:stCondLst>
+                            <p:childTnLst>
+                              <p:par>
+                                <p:cTn id="29" presetID="1" presetClass="entr" presetSubtype="0" fill="hold" nodeType="clickEffect">
+                                  <p:stCondLst>
+                                    <p:cond delay="0"/>
+                                  </p:stCondLst>
+                                  <p:childTnLst>
+                                    <p:set>
+                                      <p:cBhvr>
+                                        <p:cTn id="30" dur="1" fill="hold">
+                                          <p:stCondLst>
+                                            <p:cond delay="0"/>
+                                          </p:stCondLst>
+                                        </p:cTn>
+                                        <p:tgtEl>
+                                          <p:spTgt spid="3">
+                                            <p:txEl>
+                                              <p:pRg st="6" end="6"/>
+                                            </p:txEl>
+                                          </p:spTgt>
+                                        </p:tgtEl>
+                                        <p:attrNameLst>
+                                          <p:attrName>style.visibility</p:attrName>
+                                        </p:attrNameLst>
+                                      </p:cBhvr>
+                                      <p:to>
+                                        <p:strVal val="visible"/>
+                                      </p:to>
+                                    </p:set>
+                                  </p:childTnLst>
+                                </p:cTn>
+                              </p:par>
+                            </p:childTnLst>
+                          </p:cTn>
+                        </p:par>
+                      </p:childTnLst>
+                    </p:cTn>
+                  </p:par>
+                  <p:par>
+                    <p:cTn id="31" fill="hold">
+                      <p:stCondLst>
+                        <p:cond delay="indefinite"/>
+                      </p:stCondLst>
+                      <p:childTnLst>
+                        <p:par>
+                          <p:cTn id="32" fill="hold">
+                            <p:stCondLst>
+                              <p:cond delay="0"/>
+                            </p:stCondLst>
+                            <p:childTnLst>
+                              <p:par>
+                                <p:cTn id="33" presetID="1" presetClass="entr" presetSubtype="0" fill="hold" nodeType="clickEffect">
+                                  <p:stCondLst>
+                                    <p:cond delay="0"/>
+                                  </p:stCondLst>
+                                  <p:childTnLst>
+                                    <p:set>
+                                      <p:cBhvr>
+                                        <p:cTn id="34" dur="1" fill="hold">
+                                          <p:stCondLst>
+                                            <p:cond delay="0"/>
+                                          </p:stCondLst>
+                                        </p:cTn>
+                                        <p:tgtEl>
+                                          <p:spTgt spid="3">
+                                            <p:txEl>
+                                              <p:pRg st="7" end="7"/>
+                                            </p:txEl>
+                                          </p:spTgt>
+                                        </p:tgtEl>
+                                        <p:attrNameLst>
+                                          <p:attrName>style.visibility</p:attrName>
+                                        </p:attrNameLst>
+                                      </p:cBhvr>
+                                      <p:to>
+                                        <p:strVal val="visible"/>
+                                      </p:to>
+                                    </p:set>
+                                  </p:childTnLst>
+                                </p:cTn>
+                              </p:par>
+                            </p:childTnLst>
+                          </p:cTn>
+                        </p:par>
+                      </p:childTnLst>
+                    </p:cTn>
+                  </p:par>
+                  <p:par>
+                    <p:cTn id="35" fill="hold">
+                      <p:stCondLst>
+                        <p:cond delay="indefinite"/>
+                      </p:stCondLst>
+                      <p:childTnLst>
+                        <p:par>
+                          <p:cTn id="36" fill="hold">
+                            <p:stCondLst>
+                              <p:cond delay="0"/>
+                            </p:stCondLst>
+                            <p:childTnLst>
+                              <p:par>
+                                <p:cTn id="37" presetID="1" presetClass="entr" presetSubtype="0" fill="hold" nodeType="clickEffect">
+                                  <p:stCondLst>
+                                    <p:cond delay="0"/>
+                                  </p:stCondLst>
+                                  <p:childTnLst>
+                                    <p:set>
+                                      <p:cBhvr>
+                                        <p:cTn id="38" dur="1" fill="hold">
+                                          <p:stCondLst>
+                                            <p:cond delay="0"/>
+                                          </p:stCondLst>
+                                        </p:cTn>
+                                        <p:tgtEl>
+                                          <p:spTgt spid="3">
+                                            <p:txEl>
+                                              <p:pRg st="8" end="8"/>
+                                            </p:txEl>
+                                          </p:spTgt>
+                                        </p:tgtEl>
+                                        <p:attrNameLst>
+                                          <p:attrName>style.visibility</p:attrName>
+                                        </p:attrNameLst>
+                                      </p:cBhvr>
+                                      <p:to>
+                                        <p:strVal val="visible"/>
+                                      </p:to>
+                                    </p:set>
+                                  </p:childTnLst>
+                                </p:cTn>
+                              </p:par>
+                            </p:childTnLst>
+                          </p:cTn>
+                        </p:par>
+                      </p:childTnLst>
+                    </p:cTn>
+                  </p:par>
+                  <p:par>
+                    <p:cTn id="39" fill="hold">
+                      <p:stCondLst>
+                        <p:cond delay="indefinite"/>
+                      </p:stCondLst>
+                      <p:childTnLst>
+                        <p:par>
+                          <p:cTn id="40" fill="hold">
+                            <p:stCondLst>
+                              <p:cond delay="0"/>
+                            </p:stCondLst>
+                            <p:childTnLst>
+                              <p:par>
+                                <p:cTn id="41" presetID="1" presetClass="entr" presetSubtype="0" fill="hold" nodeType="clickEffect">
+                                  <p:stCondLst>
+                                    <p:cond delay="0"/>
+                                  </p:stCondLst>
+                                  <p:childTnLst>
+                                    <p:set>
+                                      <p:cBhvr>
+                                        <p:cTn id="42" dur="1" fill="hold">
+                                          <p:stCondLst>
+                                            <p:cond delay="0"/>
+                                          </p:stCondLst>
+                                        </p:cTn>
+                                        <p:tgtEl>
+                                          <p:spTgt spid="3">
+                                            <p:txEl>
+                                              <p:pRg st="9" end="9"/>
+                                            </p:txEl>
+                                          </p:spTgt>
+                                        </p:tgtEl>
+                                        <p:attrNameLst>
+                                          <p:attrName>style.visibility</p:attrName>
+                                        </p:attrNameLst>
+                                      </p:cBhvr>
+                                      <p:to>
+                                        <p:strVal val="visible"/>
+                                      </p:to>
+                                    </p:set>
+                                  </p:childTnLst>
+                                </p:cTn>
+                              </p:par>
+                            </p:childTnLst>
+                          </p:cTn>
+                        </p:par>
+                      </p:childTnLst>
+                    </p:cTn>
+                  </p:par>
+                  <p:par>
+                    <p:cTn id="43" fill="hold">
+                      <p:stCondLst>
+                        <p:cond delay="indefinite"/>
+                      </p:stCondLst>
+                      <p:childTnLst>
+                        <p:par>
+                          <p:cTn id="44" fill="hold">
+                            <p:stCondLst>
+                              <p:cond delay="0"/>
+                            </p:stCondLst>
+                            <p:childTnLst>
+                              <p:par>
+                                <p:cTn id="45" presetID="1" presetClass="entr" presetSubtype="0" fill="hold" nodeType="clickEffect">
+                                  <p:stCondLst>
+                                    <p:cond delay="0"/>
+                                  </p:stCondLst>
+                                  <p:childTnLst>
+                                    <p:set>
+                                      <p:cBhvr>
+                                        <p:cTn id="46" dur="1" fill="hold">
+                                          <p:stCondLst>
+                                            <p:cond delay="0"/>
+                                          </p:stCondLst>
+                                        </p:cTn>
+                                        <p:tgtEl>
+                                          <p:spTgt spid="3">
+                                            <p:txEl>
+                                              <p:pRg st="10" end="10"/>
+                                            </p:txEl>
+                                          </p:spTgt>
+                                        </p:tgtEl>
+                                        <p:attrNameLst>
+                                          <p:attrName>style.visibility</p:attrName>
+                                        </p:attrNameLst>
+                                      </p:cBhvr>
+                                      <p:to>
+                                        <p:strVal val="visible"/>
+                                      </p:to>
+                                    </p:set>
+                                  </p:childTnLst>
+                                </p:cTn>
+                              </p:par>
+                            </p:childTnLst>
+                          </p:cTn>
+                        </p:par>
+                      </p:childTnLst>
+                    </p:cTn>
+                  </p:par>
+                  <p:par>
+                    <p:cTn id="47" fill="hold">
+                      <p:stCondLst>
+                        <p:cond delay="indefinite"/>
+                      </p:stCondLst>
+                      <p:childTnLst>
+                        <p:par>
+                          <p:cTn id="48" fill="hold">
+                            <p:stCondLst>
+                              <p:cond delay="0"/>
+                            </p:stCondLst>
+                            <p:childTnLst>
+                              <p:par>
+                                <p:cTn id="49" presetID="1" presetClass="entr" presetSubtype="0" fill="hold" nodeType="clickEffect">
+                                  <p:stCondLst>
+                                    <p:cond delay="0"/>
+                                  </p:stCondLst>
+                                  <p:childTnLst>
+                                    <p:set>
+                                      <p:cBhvr>
+                                        <p:cTn id="50" dur="1" fill="hold">
+                                          <p:stCondLst>
+                                            <p:cond delay="0"/>
+                                          </p:stCondLst>
+                                        </p:cTn>
+                                        <p:tgtEl>
+                                          <p:spTgt spid="3">
+                                            <p:txEl>
+                                              <p:pRg st="11" end="11"/>
+                                            </p:txEl>
+                                          </p:spTgt>
+                                        </p:tgtEl>
+                                        <p:attrNameLst>
+                                          <p:attrName>style.visibility</p:attrName>
+                                        </p:attrNameLst>
+                                      </p:cBhvr>
+                                      <p:to>
+                                        <p:strVal val="visible"/>
+                                      </p:to>
+                                    </p:set>
+                                  </p:childTnLst>
+                                </p:cTn>
+                              </p:par>
+                            </p:childTnLst>
+                          </p:cTn>
+                        </p:par>
+                      </p:childTnLst>
+                    </p:cTn>
+                  </p:par>
+                </p:childTnLst>
+              </p:cTn>
+              <p:prevCondLst>
+                <p:cond evt="onPrev" delay="0">
+                  <p:tgtEl>
+                    <p:sldTgt/>
+                  </p:tgtEl>
+                </p:cond>
+              </p:prevCondLst>
+              <p:nextCondLst>
+                <p:cond evt="onNext" delay="0">
+                  <p:tgtEl>
+                    <p:sldTgt/>
+                  </p:tgtEl>
+                </p:cond>
+              </p:nextCondLst>
+            </p:seq>
+          </p:childTnLst>
+        </p:cTn>
+      </p:par>
+    </p:tnLst>
+  </p:timing>
+</p:sld>
+</file>
+
+<file path=ppt/slides/slide39.xml><?xml version="1.0" encoding="utf-8"?>
+<p:sld xmlns:a="http://schemas.openxmlformats.org/drawingml/2006/main" xmlns:r="http://schemas.openxmlformats.org/officeDocument/2006/relationships" xmlns:p="http://schemas.openxmlformats.org/presentationml/2006/main">
+  <p:cSld>
+    <p:spTree>
+      <p:nvGrpSpPr>
+        <p:cNvPr id="1" name="">
+          <a:extLst>
+            <a:ext uri="{FF2B5EF4-FFF2-40B4-BE49-F238E27FC236}">
+              <a16:creationId xmlns:a16="http://schemas.microsoft.com/office/drawing/2014/main" id="{24A807E0-766D-74F2-79CA-5B5E1CBFCCAF}"/>
+            </a:ext>
+          </a:extLst>
+        </p:cNvPr>
+        <p:cNvGrpSpPr/>
+        <p:nvPr/>
+      </p:nvGrpSpPr>
+      <p:grpSpPr>
+        <a:xfrm>
+          <a:off x="0" y="0"/>
+          <a:ext cx="0" cy="0"/>
+          <a:chOff x="0" y="0"/>
+          <a:chExt cx="0" cy="0"/>
+        </a:xfrm>
+      </p:grpSpPr>
+      <p:sp>
+        <p:nvSpPr>
+          <p:cNvPr id="2" name="Title 1">
+            <a:extLst>
+              <a:ext uri="{FF2B5EF4-FFF2-40B4-BE49-F238E27FC236}">
+                <a16:creationId xmlns:a16="http://schemas.microsoft.com/office/drawing/2014/main" id="{95D0148F-E00D-6F02-670E-AF88CB5B4537}"/>
+              </a:ext>
+            </a:extLst>
+          </p:cNvPr>
+          <p:cNvSpPr>
+            <a:spLocks noGrp="1"/>
+          </p:cNvSpPr>
+          <p:nvPr>
+            <p:ph type="ctrTitle"/>
+          </p:nvPr>
+        </p:nvSpPr>
+        <p:spPr>
+          <a:xfrm>
+            <a:off x="1524000" y="382580"/>
+            <a:ext cx="9144000" cy="502003"/>
+          </a:xfrm>
+        </p:spPr>
+        <p:txBody>
+          <a:bodyPr>
+            <a:noAutofit/>
+          </a:bodyPr>
+          <a:lstStyle/>
+          <a:p>
+            <a:r>
+              <a:rPr lang="en-US" sz="3200" dirty="0" err="1"/>
+              <a:t>PySpark</a:t>
+            </a:r>
+            <a:r>
+              <a:rPr lang="en-US" sz="3200" dirty="0"/>
+              <a:t> </a:t>
+            </a:r>
+            <a:r>
+              <a:rPr lang="en-US" sz="3200" dirty="0" err="1"/>
+              <a:t>DataFrame</a:t>
+            </a:r>
+            <a:r>
+              <a:rPr lang="en-US" sz="3200" dirty="0"/>
+              <a:t> Example 2 - 0006</a:t>
+            </a:r>
+          </a:p>
+        </p:txBody>
+      </p:sp>
+      <p:sp>
+        <p:nvSpPr>
+          <p:cNvPr id="3" name="Subtitle 2">
+            <a:extLst>
+              <a:ext uri="{FF2B5EF4-FFF2-40B4-BE49-F238E27FC236}">
+                <a16:creationId xmlns:a16="http://schemas.microsoft.com/office/drawing/2014/main" id="{D34D4C2F-A2C4-9BB5-9623-5F12F87EBBD7}"/>
+              </a:ext>
+            </a:extLst>
+          </p:cNvPr>
+          <p:cNvSpPr>
+            <a:spLocks noGrp="1"/>
+          </p:cNvSpPr>
+          <p:nvPr>
+            <p:ph type="subTitle" idx="1"/>
+          </p:nvPr>
+        </p:nvSpPr>
+        <p:spPr>
+          <a:xfrm>
+            <a:off x="1524000" y="884584"/>
+            <a:ext cx="9144000" cy="5088834"/>
+          </a:xfrm>
+        </p:spPr>
+        <p:txBody>
+          <a:bodyPr>
+            <a:normAutofit/>
+          </a:bodyPr>
+          <a:lstStyle/>
+          <a:p>
+            <a:r>
+              <a:rPr lang="en-US" sz="2000" dirty="0">
+                <a:solidFill>
+                  <a:schemeClr val="tx1"/>
+                </a:solidFill>
+                <a:highlight>
+                  <a:srgbClr val="FFFF00"/>
+                </a:highlight>
+                <a:latin typeface="Consolas" panose="020B0609020204030204" pitchFamily="49" charset="0"/>
+                <a:cs typeface="Consolas" panose="020B0609020204030204" pitchFamily="49" charset="0"/>
+              </a:rPr>
+              <a:t># 7. Data Aggregation: Calculate metrics by Category </a:t>
+            </a:r>
+          </a:p>
+          <a:p>
+            <a:r>
+              <a:rPr lang="en-US" sz="2000" dirty="0">
+                <a:solidFill>
+                  <a:schemeClr val="tx1"/>
+                </a:solidFill>
+                <a:highlight>
+                  <a:srgbClr val="FFFF00"/>
+                </a:highlight>
+                <a:latin typeface="Consolas" panose="020B0609020204030204" pitchFamily="49" charset="0"/>
+                <a:cs typeface="Consolas" panose="020B0609020204030204" pitchFamily="49" charset="0"/>
+              </a:rPr>
+              <a:t># </a:t>
+            </a:r>
+            <a:r>
+              <a:rPr lang="en-US" sz="1800" dirty="0">
+                <a:solidFill>
+                  <a:schemeClr val="tx1"/>
+                </a:solidFill>
+                <a:highlight>
+                  <a:srgbClr val="FFFF00"/>
+                </a:highlight>
+                <a:latin typeface="Consolas" panose="020B0609020204030204" pitchFamily="49" charset="0"/>
+                <a:cs typeface="Consolas" panose="020B0609020204030204" pitchFamily="49" charset="0"/>
+              </a:rPr>
+              <a:t>Total spend, average spend, and distinct customer count per category </a:t>
+            </a:r>
+            <a:endParaRPr lang="en-US" sz="2000" dirty="0">
+              <a:solidFill>
+                <a:schemeClr val="tx1"/>
+              </a:solidFill>
+              <a:highlight>
+                <a:srgbClr val="FFFF00"/>
+              </a:highlight>
+              <a:latin typeface="Consolas" panose="020B0609020204030204" pitchFamily="49" charset="0"/>
+              <a:cs typeface="Consolas" panose="020B0609020204030204" pitchFamily="49" charset="0"/>
+            </a:endParaRPr>
+          </a:p>
+          <a:p>
+            <a:r>
+              <a:rPr lang="en-US" sz="2000" dirty="0" err="1">
+                <a:solidFill>
+                  <a:schemeClr val="tx1"/>
+                </a:solidFill>
+                <a:latin typeface="Consolas" panose="020B0609020204030204" pitchFamily="49" charset="0"/>
+                <a:cs typeface="Consolas" panose="020B0609020204030204" pitchFamily="49" charset="0"/>
+              </a:rPr>
+              <a:t>df_metrics</a:t>
+            </a:r>
+            <a:r>
+              <a:rPr lang="en-US" sz="2000" dirty="0">
+                <a:solidFill>
+                  <a:schemeClr val="tx1"/>
+                </a:solidFill>
+                <a:latin typeface="Consolas" panose="020B0609020204030204" pitchFamily="49" charset="0"/>
+                <a:cs typeface="Consolas" panose="020B0609020204030204" pitchFamily="49" charset="0"/>
+              </a:rPr>
+              <a:t> = </a:t>
+            </a:r>
+            <a:r>
+              <a:rPr lang="en-US" sz="2000" dirty="0" err="1">
+                <a:solidFill>
+                  <a:schemeClr val="tx1"/>
+                </a:solidFill>
+                <a:latin typeface="Consolas" panose="020B0609020204030204" pitchFamily="49" charset="0"/>
+                <a:cs typeface="Consolas" panose="020B0609020204030204" pitchFamily="49" charset="0"/>
+              </a:rPr>
+              <a:t>df_transformed.groupBy</a:t>
+            </a:r>
+            <a:r>
+              <a:rPr lang="en-US" sz="2000" dirty="0">
+                <a:solidFill>
+                  <a:schemeClr val="tx1"/>
+                </a:solidFill>
+                <a:latin typeface="Consolas" panose="020B0609020204030204" pitchFamily="49" charset="0"/>
+                <a:cs typeface="Consolas" panose="020B0609020204030204" pitchFamily="49" charset="0"/>
+              </a:rPr>
+              <a:t>("Category").</a:t>
+            </a:r>
+            <a:r>
+              <a:rPr lang="en-US" sz="2000" dirty="0" err="1">
+                <a:solidFill>
+                  <a:schemeClr val="tx1"/>
+                </a:solidFill>
+                <a:latin typeface="Consolas" panose="020B0609020204030204" pitchFamily="49" charset="0"/>
+                <a:cs typeface="Consolas" panose="020B0609020204030204" pitchFamily="49" charset="0"/>
+              </a:rPr>
+              <a:t>agg</a:t>
+            </a:r>
+            <a:r>
+              <a:rPr lang="en-US" sz="2000" dirty="0">
+                <a:solidFill>
+                  <a:schemeClr val="tx1"/>
+                </a:solidFill>
+                <a:latin typeface="Consolas" panose="020B0609020204030204" pitchFamily="49" charset="0"/>
+                <a:cs typeface="Consolas" panose="020B0609020204030204" pitchFamily="49" charset="0"/>
+              </a:rPr>
+              <a:t>(     </a:t>
+            </a:r>
+          </a:p>
+          <a:p>
+            <a:r>
+              <a:rPr lang="en-US" sz="2000" dirty="0">
+                <a:solidFill>
+                  <a:schemeClr val="tx1"/>
+                </a:solidFill>
+                <a:latin typeface="Consolas" panose="020B0609020204030204" pitchFamily="49" charset="0"/>
+                <a:cs typeface="Consolas" panose="020B0609020204030204" pitchFamily="49" charset="0"/>
+              </a:rPr>
+              <a:t>   </a:t>
+            </a:r>
+            <a:r>
+              <a:rPr lang="en-US" sz="2000" dirty="0" err="1">
+                <a:solidFill>
+                  <a:schemeClr val="tx1"/>
+                </a:solidFill>
+                <a:latin typeface="Consolas" panose="020B0609020204030204" pitchFamily="49" charset="0"/>
+                <a:cs typeface="Consolas" panose="020B0609020204030204" pitchFamily="49" charset="0"/>
+              </a:rPr>
+              <a:t>F.sum</a:t>
+            </a:r>
+            <a:r>
+              <a:rPr lang="en-US" sz="2000" dirty="0">
+                <a:solidFill>
+                  <a:schemeClr val="tx1"/>
+                </a:solidFill>
+                <a:latin typeface="Consolas" panose="020B0609020204030204" pitchFamily="49" charset="0"/>
+                <a:cs typeface="Consolas" panose="020B0609020204030204" pitchFamily="49" charset="0"/>
+              </a:rPr>
+              <a:t>("Amount").alias("</a:t>
+            </a:r>
+            <a:r>
+              <a:rPr lang="en-US" sz="2000" dirty="0" err="1">
+                <a:solidFill>
+                  <a:schemeClr val="tx1"/>
+                </a:solidFill>
+                <a:latin typeface="Consolas" panose="020B0609020204030204" pitchFamily="49" charset="0"/>
+                <a:cs typeface="Consolas" panose="020B0609020204030204" pitchFamily="49" charset="0"/>
+              </a:rPr>
+              <a:t>Total_Revenue</a:t>
+            </a:r>
+            <a:r>
+              <a:rPr lang="en-US" sz="2000" dirty="0">
+                <a:solidFill>
+                  <a:schemeClr val="tx1"/>
+                </a:solidFill>
+                <a:latin typeface="Consolas" panose="020B0609020204030204" pitchFamily="49" charset="0"/>
+                <a:cs typeface="Consolas" panose="020B0609020204030204" pitchFamily="49" charset="0"/>
+              </a:rPr>
+              <a:t>"), </a:t>
+            </a:r>
+          </a:p>
+          <a:p>
+            <a:r>
+              <a:rPr lang="en-US" sz="2000" dirty="0">
+                <a:solidFill>
+                  <a:schemeClr val="tx1"/>
+                </a:solidFill>
+                <a:latin typeface="Consolas" panose="020B0609020204030204" pitchFamily="49" charset="0"/>
+                <a:cs typeface="Consolas" panose="020B0609020204030204" pitchFamily="49" charset="0"/>
+              </a:rPr>
+              <a:t>   </a:t>
+            </a:r>
+            <a:r>
+              <a:rPr lang="en-US" sz="2000" dirty="0" err="1">
+                <a:solidFill>
+                  <a:schemeClr val="tx1"/>
+                </a:solidFill>
+                <a:latin typeface="Consolas" panose="020B0609020204030204" pitchFamily="49" charset="0"/>
+                <a:cs typeface="Consolas" panose="020B0609020204030204" pitchFamily="49" charset="0"/>
+              </a:rPr>
+              <a:t>F.round</a:t>
+            </a:r>
+            <a:r>
+              <a:rPr lang="en-US" sz="2000" dirty="0">
+                <a:solidFill>
+                  <a:schemeClr val="tx1"/>
+                </a:solidFill>
+                <a:latin typeface="Consolas" panose="020B0609020204030204" pitchFamily="49" charset="0"/>
+                <a:cs typeface="Consolas" panose="020B0609020204030204" pitchFamily="49" charset="0"/>
+              </a:rPr>
+              <a:t>(</a:t>
+            </a:r>
+            <a:r>
+              <a:rPr lang="en-US" sz="2000" dirty="0" err="1">
+                <a:solidFill>
+                  <a:schemeClr val="tx1"/>
+                </a:solidFill>
+                <a:latin typeface="Consolas" panose="020B0609020204030204" pitchFamily="49" charset="0"/>
+                <a:cs typeface="Consolas" panose="020B0609020204030204" pitchFamily="49" charset="0"/>
+              </a:rPr>
+              <a:t>F.avg</a:t>
+            </a:r>
+            <a:r>
+              <a:rPr lang="en-US" sz="2000" dirty="0">
+                <a:solidFill>
+                  <a:schemeClr val="tx1"/>
+                </a:solidFill>
+                <a:latin typeface="Consolas" panose="020B0609020204030204" pitchFamily="49" charset="0"/>
+                <a:cs typeface="Consolas" panose="020B0609020204030204" pitchFamily="49" charset="0"/>
+              </a:rPr>
+              <a:t>("Amount").alias("</a:t>
+            </a:r>
+            <a:r>
+              <a:rPr lang="en-US" sz="2000" dirty="0" err="1">
+                <a:solidFill>
+                  <a:schemeClr val="tx1"/>
+                </a:solidFill>
+                <a:latin typeface="Consolas" panose="020B0609020204030204" pitchFamily="49" charset="0"/>
+                <a:cs typeface="Consolas" panose="020B0609020204030204" pitchFamily="49" charset="0"/>
+              </a:rPr>
+              <a:t>Average_Spend</a:t>
+            </a:r>
+            <a:r>
+              <a:rPr lang="en-US" sz="2000" dirty="0">
+                <a:solidFill>
+                  <a:schemeClr val="tx1"/>
+                </a:solidFill>
+                <a:latin typeface="Consolas" panose="020B0609020204030204" pitchFamily="49" charset="0"/>
+                <a:cs typeface="Consolas" panose="020B0609020204030204" pitchFamily="49" charset="0"/>
+              </a:rPr>
+              <a:t>"),    </a:t>
+            </a:r>
+          </a:p>
+          <a:p>
+            <a:r>
+              <a:rPr lang="en-US" sz="2000" dirty="0">
+                <a:solidFill>
+                  <a:schemeClr val="tx1"/>
+                </a:solidFill>
+                <a:latin typeface="Consolas" panose="020B0609020204030204" pitchFamily="49" charset="0"/>
+                <a:cs typeface="Consolas" panose="020B0609020204030204" pitchFamily="49" charset="0"/>
+              </a:rPr>
+              <a:t>   </a:t>
+            </a:r>
+            <a:r>
+              <a:rPr lang="en-US" sz="2000" dirty="0" err="1">
+                <a:solidFill>
+                  <a:schemeClr val="tx1"/>
+                </a:solidFill>
+                <a:latin typeface="Consolas" panose="020B0609020204030204" pitchFamily="49" charset="0"/>
+                <a:cs typeface="Consolas" panose="020B0609020204030204" pitchFamily="49" charset="0"/>
+              </a:rPr>
+              <a:t>F.countDistinct</a:t>
+            </a:r>
+            <a:r>
+              <a:rPr lang="en-US" sz="2000" dirty="0">
+                <a:solidFill>
+                  <a:schemeClr val="tx1"/>
+                </a:solidFill>
+                <a:latin typeface="Consolas" panose="020B0609020204030204" pitchFamily="49" charset="0"/>
+                <a:cs typeface="Consolas" panose="020B0609020204030204" pitchFamily="49" charset="0"/>
+              </a:rPr>
+              <a:t>("</a:t>
+            </a:r>
+            <a:r>
+              <a:rPr lang="en-US" sz="2000" dirty="0" err="1">
+                <a:solidFill>
+                  <a:schemeClr val="tx1"/>
+                </a:solidFill>
+                <a:latin typeface="Consolas" panose="020B0609020204030204" pitchFamily="49" charset="0"/>
+                <a:cs typeface="Consolas" panose="020B0609020204030204" pitchFamily="49" charset="0"/>
+              </a:rPr>
+              <a:t>UserID</a:t>
+            </a:r>
+            <a:r>
+              <a:rPr lang="en-US" sz="2000" dirty="0">
+                <a:solidFill>
+                  <a:schemeClr val="tx1"/>
+                </a:solidFill>
+                <a:latin typeface="Consolas" panose="020B0609020204030204" pitchFamily="49" charset="0"/>
+                <a:cs typeface="Consolas" panose="020B0609020204030204" pitchFamily="49" charset="0"/>
+              </a:rPr>
+              <a:t>").alias("</a:t>
+            </a:r>
+            <a:r>
+              <a:rPr lang="en-US" sz="2000" dirty="0" err="1">
+                <a:solidFill>
+                  <a:schemeClr val="tx1"/>
+                </a:solidFill>
+                <a:latin typeface="Consolas" panose="020B0609020204030204" pitchFamily="49" charset="0"/>
+                <a:cs typeface="Consolas" panose="020B0609020204030204" pitchFamily="49" charset="0"/>
+              </a:rPr>
+              <a:t>Unique_Customers</a:t>
+            </a:r>
+            <a:r>
+              <a:rPr lang="en-US" sz="2000" dirty="0">
+                <a:solidFill>
+                  <a:schemeClr val="tx1"/>
+                </a:solidFill>
+                <a:latin typeface="Consolas" panose="020B0609020204030204" pitchFamily="49" charset="0"/>
+                <a:cs typeface="Consolas" panose="020B0609020204030204" pitchFamily="49" charset="0"/>
+              </a:rPr>
+              <a:t>") </a:t>
+            </a:r>
+          </a:p>
+          <a:p>
+            <a:r>
+              <a:rPr lang="en-US" sz="2000" dirty="0">
+                <a:solidFill>
+                  <a:schemeClr val="tx1"/>
+                </a:solidFill>
+                <a:latin typeface="Consolas" panose="020B0609020204030204" pitchFamily="49" charset="0"/>
+                <a:cs typeface="Consolas" panose="020B0609020204030204" pitchFamily="49" charset="0"/>
+              </a:rPr>
+              <a:t>).</a:t>
+            </a:r>
+            <a:r>
+              <a:rPr lang="en-US" sz="2000" dirty="0" err="1">
+                <a:solidFill>
+                  <a:schemeClr val="tx1"/>
+                </a:solidFill>
+                <a:latin typeface="Consolas" panose="020B0609020204030204" pitchFamily="49" charset="0"/>
+                <a:cs typeface="Consolas" panose="020B0609020204030204" pitchFamily="49" charset="0"/>
+              </a:rPr>
+              <a:t>orderBy</a:t>
+            </a:r>
+            <a:r>
+              <a:rPr lang="en-US" sz="2000" dirty="0">
+                <a:solidFill>
+                  <a:schemeClr val="tx1"/>
+                </a:solidFill>
+                <a:latin typeface="Consolas" panose="020B0609020204030204" pitchFamily="49" charset="0"/>
+                <a:cs typeface="Consolas" panose="020B0609020204030204" pitchFamily="49" charset="0"/>
+              </a:rPr>
+              <a:t>(</a:t>
+            </a:r>
+            <a:r>
+              <a:rPr lang="en-US" sz="2000" dirty="0" err="1">
+                <a:solidFill>
+                  <a:schemeClr val="tx1"/>
+                </a:solidFill>
+                <a:latin typeface="Consolas" panose="020B0609020204030204" pitchFamily="49" charset="0"/>
+                <a:cs typeface="Consolas" panose="020B0609020204030204" pitchFamily="49" charset="0"/>
+              </a:rPr>
+              <a:t>F.desc</a:t>
+            </a:r>
+            <a:r>
+              <a:rPr lang="en-US" sz="2000" dirty="0">
+                <a:solidFill>
+                  <a:schemeClr val="tx1"/>
+                </a:solidFill>
+                <a:latin typeface="Consolas" panose="020B0609020204030204" pitchFamily="49" charset="0"/>
+                <a:cs typeface="Consolas" panose="020B0609020204030204" pitchFamily="49" charset="0"/>
+              </a:rPr>
+              <a:t>("</a:t>
+            </a:r>
+            <a:r>
+              <a:rPr lang="en-US" sz="2000" dirty="0" err="1">
+                <a:solidFill>
+                  <a:schemeClr val="tx1"/>
+                </a:solidFill>
+                <a:latin typeface="Consolas" panose="020B0609020204030204" pitchFamily="49" charset="0"/>
+                <a:cs typeface="Consolas" panose="020B0609020204030204" pitchFamily="49" charset="0"/>
+              </a:rPr>
+              <a:t>Total_Revenue</a:t>
+            </a:r>
+            <a:r>
+              <a:rPr lang="en-US" sz="2000" dirty="0">
+                <a:solidFill>
+                  <a:schemeClr val="tx1"/>
+                </a:solidFill>
+                <a:latin typeface="Consolas" panose="020B0609020204030204" pitchFamily="49" charset="0"/>
+                <a:cs typeface="Consolas" panose="020B0609020204030204" pitchFamily="49" charset="0"/>
+              </a:rPr>
+              <a:t>")) </a:t>
+            </a:r>
+          </a:p>
+          <a:p>
+            <a:endParaRPr lang="en-US" sz="2000" dirty="0">
+              <a:solidFill>
+                <a:schemeClr val="tx1"/>
+              </a:solidFill>
+              <a:latin typeface="Consolas" panose="020B0609020204030204" pitchFamily="49" charset="0"/>
+              <a:cs typeface="Consolas" panose="020B0609020204030204" pitchFamily="49" charset="0"/>
+            </a:endParaRPr>
+          </a:p>
+          <a:p>
+            <a:r>
+              <a:rPr lang="en-US" sz="2000" dirty="0">
+                <a:solidFill>
+                  <a:schemeClr val="tx1"/>
+                </a:solidFill>
+                <a:latin typeface="Consolas" panose="020B0609020204030204" pitchFamily="49" charset="0"/>
+                <a:cs typeface="Consolas" panose="020B0609020204030204" pitchFamily="49" charset="0"/>
+              </a:rPr>
+              <a:t>print("--- Aggregated Category Metrics ---") </a:t>
+            </a:r>
+          </a:p>
+          <a:p>
+            <a:r>
+              <a:rPr lang="en-US" sz="2000" dirty="0" err="1">
+                <a:solidFill>
+                  <a:schemeClr val="tx1"/>
+                </a:solidFill>
+                <a:latin typeface="Consolas" panose="020B0609020204030204" pitchFamily="49" charset="0"/>
+                <a:cs typeface="Consolas" panose="020B0609020204030204" pitchFamily="49" charset="0"/>
+              </a:rPr>
+              <a:t>df_metrics.show</a:t>
+            </a:r>
+            <a:r>
+              <a:rPr lang="en-US" sz="2000" dirty="0">
+                <a:solidFill>
+                  <a:schemeClr val="tx1"/>
+                </a:solidFill>
+                <a:latin typeface="Consolas" panose="020B0609020204030204" pitchFamily="49" charset="0"/>
+                <a:cs typeface="Consolas" panose="020B0609020204030204" pitchFamily="49" charset="0"/>
+              </a:rPr>
+              <a:t>()</a:t>
+            </a:r>
+          </a:p>
+        </p:txBody>
+      </p:sp>
+    </p:spTree>
+    <p:extLst>
+      <p:ext uri="{BB962C8B-B14F-4D97-AF65-F5344CB8AC3E}">
+        <p14:creationId xmlns:p14="http://schemas.microsoft.com/office/powerpoint/2010/main" val="2571302331"/>
+      </p:ext>
+    </p:extLst>
+  </p:cSld>
+  <p:clrMapOvr>
+    <a:masterClrMapping/>
+  </p:clrMapOvr>
+  <p:timing>
+    <p:tnLst>
+      <p:par>
+        <p:cTn id="1" dur="indefinite" restart="never" nodeType="tmRoot">
+          <p:childTnLst>
+            <p:seq concurrent="1" nextAc="seek">
+              <p:cTn id="2" dur="indefinite" nodeType="mainSeq">
+                <p:childTnLst>
+                  <p:par>
+                    <p:cTn id="3" fill="hold">
+                      <p:stCondLst>
+                        <p:cond delay="indefinite"/>
+                      </p:stCondLst>
+                      <p:childTnLst>
+                        <p:par>
+                          <p:cTn id="4" fill="hold">
+                            <p:stCondLst>
+                              <p:cond delay="0"/>
+                            </p:stCondLst>
+                            <p:childTnLst>
+                              <p:par>
+                                <p:cTn id="5" presetID="1" presetClass="entr" presetSubtype="0" fill="hold" nodeType="clickEffect">
+                                  <p:stCondLst>
+                                    <p:cond delay="0"/>
+                                  </p:stCondLst>
+                                  <p:childTnLst>
+                                    <p:set>
+                                      <p:cBhvr>
+                                        <p:cTn id="6" dur="1" fill="hold">
+                                          <p:stCondLst>
+                                            <p:cond delay="0"/>
+                                          </p:stCondLst>
+                                        </p:cTn>
+                                        <p:tgtEl>
+                                          <p:spTgt spid="3">
+                                            <p:txEl>
+                                              <p:pRg st="0" end="0"/>
+                                            </p:txEl>
+                                          </p:spTgt>
+                                        </p:tgtEl>
+                                        <p:attrNameLst>
+                                          <p:attrName>style.visibility</p:attrName>
+                                        </p:attrNameLst>
+                                      </p:cBhvr>
+                                      <p:to>
+                                        <p:strVal val="visible"/>
+                                      </p:to>
+                                    </p:set>
+                                  </p:childTnLst>
+                                </p:cTn>
+                              </p:par>
+                            </p:childTnLst>
+                          </p:cTn>
+                        </p:par>
+                      </p:childTnLst>
+                    </p:cTn>
+                  </p:par>
+                  <p:par>
+                    <p:cTn id="7" fill="hold">
+                      <p:stCondLst>
+                        <p:cond delay="indefinite"/>
+                      </p:stCondLst>
+                      <p:childTnLst>
+                        <p:par>
+                          <p:cTn id="8" fill="hold">
+                            <p:stCondLst>
+                              <p:cond delay="0"/>
+                            </p:stCondLst>
+                            <p:childTnLst>
+                              <p:par>
+                                <p:cTn id="9" presetID="1" presetClass="entr" presetSubtype="0" fill="hold" nodeType="clickEffect">
+                                  <p:stCondLst>
+                                    <p:cond delay="0"/>
+                                  </p:stCondLst>
+                                  <p:childTnLst>
+                                    <p:set>
+                                      <p:cBhvr>
+                                        <p:cTn id="10" dur="1" fill="hold">
+                                          <p:stCondLst>
+                                            <p:cond delay="0"/>
+                                          </p:stCondLst>
+                                        </p:cTn>
+                                        <p:tgtEl>
+                                          <p:spTgt spid="3">
+                                            <p:txEl>
+                                              <p:pRg st="1" end="1"/>
+                                            </p:txEl>
+                                          </p:spTgt>
+                                        </p:tgtEl>
+                                        <p:attrNameLst>
+                                          <p:attrName>style.visibility</p:attrName>
+                                        </p:attrNameLst>
+                                      </p:cBhvr>
+                                      <p:to>
+                                        <p:strVal val="visible"/>
+                                      </p:to>
+                                    </p:set>
+                                  </p:childTnLst>
+                                </p:cTn>
+                              </p:par>
+                            </p:childTnLst>
+                          </p:cTn>
+                        </p:par>
+                      </p:childTnLst>
+                    </p:cTn>
+                  </p:par>
+                  <p:par>
+                    <p:cTn id="11" fill="hold">
+                      <p:stCondLst>
+                        <p:cond delay="indefinite"/>
+                      </p:stCondLst>
+                      <p:childTnLst>
+                        <p:par>
+                          <p:cTn id="12" fill="hold">
+                            <p:stCondLst>
+                              <p:cond delay="0"/>
+                            </p:stCondLst>
+                            <p:childTnLst>
+                              <p:par>
+                                <p:cTn id="13" presetID="1" presetClass="entr" presetSubtype="0" fill="hold" nodeType="clickEffect">
+                                  <p:stCondLst>
+                                    <p:cond delay="0"/>
+                                  </p:stCondLst>
+                                  <p:childTnLst>
+                                    <p:set>
+                                      <p:cBhvr>
+                                        <p:cTn id="14" dur="1" fill="hold">
+                                          <p:stCondLst>
+                                            <p:cond delay="0"/>
+                                          </p:stCondLst>
+                                        </p:cTn>
+                                        <p:tgtEl>
+                                          <p:spTgt spid="3">
+                                            <p:txEl>
+                                              <p:pRg st="2" end="2"/>
+                                            </p:txEl>
+                                          </p:spTgt>
+                                        </p:tgtEl>
+                                        <p:attrNameLst>
+                                          <p:attrName>style.visibility</p:attrName>
+                                        </p:attrNameLst>
+                                      </p:cBhvr>
+                                      <p:to>
+                                        <p:strVal val="visible"/>
+                                      </p:to>
+                                    </p:set>
+                                  </p:childTnLst>
+                                </p:cTn>
+                              </p:par>
+                            </p:childTnLst>
+                          </p:cTn>
+                        </p:par>
+                      </p:childTnLst>
+                    </p:cTn>
+                  </p:par>
+                  <p:par>
+                    <p:cTn id="15" fill="hold">
+                      <p:stCondLst>
+                        <p:cond delay="indefinite"/>
+                      </p:stCondLst>
+                      <p:childTnLst>
+                        <p:par>
+                          <p:cTn id="16" fill="hold">
+                            <p:stCondLst>
+                              <p:cond delay="0"/>
+                            </p:stCondLst>
+                            <p:childTnLst>
+                              <p:par>
+                                <p:cTn id="17" presetID="1" presetClass="entr" presetSubtype="0" fill="hold" nodeType="clickEffect">
+                                  <p:stCondLst>
+                                    <p:cond delay="0"/>
+                                  </p:stCondLst>
+                                  <p:childTnLst>
+                                    <p:set>
+                                      <p:cBhvr>
+                                        <p:cTn id="18" dur="1" fill="hold">
+                                          <p:stCondLst>
+                                            <p:cond delay="0"/>
+                                          </p:stCondLst>
+                                        </p:cTn>
+                                        <p:tgtEl>
+                                          <p:spTgt spid="3">
+                                            <p:txEl>
+                                              <p:pRg st="3" end="3"/>
+                                            </p:txEl>
+                                          </p:spTgt>
+                                        </p:tgtEl>
+                                        <p:attrNameLst>
+                                          <p:attrName>style.visibility</p:attrName>
+                                        </p:attrNameLst>
+                                      </p:cBhvr>
+                                      <p:to>
+                                        <p:strVal val="visible"/>
+                                      </p:to>
+                                    </p:set>
+                                  </p:childTnLst>
+                                </p:cTn>
+                              </p:par>
+                            </p:childTnLst>
+                          </p:cTn>
+                        </p:par>
+                      </p:childTnLst>
+                    </p:cTn>
+                  </p:par>
+                  <p:par>
+                    <p:cTn id="19" fill="hold">
+                      <p:stCondLst>
+                        <p:cond delay="indefinite"/>
+                      </p:stCondLst>
+                      <p:childTnLst>
+                        <p:par>
+                          <p:cTn id="20" fill="hold">
+                            <p:stCondLst>
+                              <p:cond delay="0"/>
+                            </p:stCondLst>
+                            <p:childTnLst>
+                              <p:par>
+                                <p:cTn id="21" presetID="1" presetClass="entr" presetSubtype="0" fill="hold" nodeType="clickEffect">
+                                  <p:stCondLst>
+                                    <p:cond delay="0"/>
+                                  </p:stCondLst>
+                                  <p:childTnLst>
+                                    <p:set>
+                                      <p:cBhvr>
+                                        <p:cTn id="22" dur="1" fill="hold">
+                                          <p:stCondLst>
+                                            <p:cond delay="0"/>
+                                          </p:stCondLst>
+                                        </p:cTn>
+                                        <p:tgtEl>
+                                          <p:spTgt spid="3">
+                                            <p:txEl>
+                                              <p:pRg st="4" end="4"/>
+                                            </p:txEl>
+                                          </p:spTgt>
+                                        </p:tgtEl>
+                                        <p:attrNameLst>
+                                          <p:attrName>style.visibility</p:attrName>
+                                        </p:attrNameLst>
+                                      </p:cBhvr>
+                                      <p:to>
+                                        <p:strVal val="visible"/>
+                                      </p:to>
+                                    </p:set>
+                                  </p:childTnLst>
+                                </p:cTn>
+                              </p:par>
+                            </p:childTnLst>
+                          </p:cTn>
+                        </p:par>
+                      </p:childTnLst>
+                    </p:cTn>
+                  </p:par>
+                  <p:par>
+                    <p:cTn id="23" fill="hold">
+                      <p:stCondLst>
+                        <p:cond delay="indefinite"/>
+                      </p:stCondLst>
+                      <p:childTnLst>
+                        <p:par>
+                          <p:cTn id="24" fill="hold">
+                            <p:stCondLst>
+                              <p:cond delay="0"/>
+                            </p:stCondLst>
+                            <p:childTnLst>
+                              <p:par>
+                                <p:cTn id="25" presetID="1" presetClass="entr" presetSubtype="0" fill="hold" nodeType="clickEffect">
+                                  <p:stCondLst>
+                                    <p:cond delay="0"/>
+                                  </p:stCondLst>
+                                  <p:childTnLst>
+                                    <p:set>
+                                      <p:cBhvr>
+                                        <p:cTn id="26" dur="1" fill="hold">
+                                          <p:stCondLst>
+                                            <p:cond delay="0"/>
+                                          </p:stCondLst>
+                                        </p:cTn>
+                                        <p:tgtEl>
+                                          <p:spTgt spid="3">
+                                            <p:txEl>
+                                              <p:pRg st="5" end="5"/>
+                                            </p:txEl>
+                                          </p:spTgt>
+                                        </p:tgtEl>
+                                        <p:attrNameLst>
+                                          <p:attrName>style.visibility</p:attrName>
+                                        </p:attrNameLst>
+                                      </p:cBhvr>
+                                      <p:to>
+                                        <p:strVal val="visible"/>
+                                      </p:to>
+                                    </p:set>
+                                  </p:childTnLst>
+                                </p:cTn>
+                              </p:par>
+                            </p:childTnLst>
+                          </p:cTn>
+                        </p:par>
+                      </p:childTnLst>
+                    </p:cTn>
+                  </p:par>
+                  <p:par>
+                    <p:cTn id="27" fill="hold">
+                      <p:stCondLst>
+                        <p:cond delay="indefinite"/>
+                      </p:stCondLst>
+                      <p:childTnLst>
+                        <p:par>
+                          <p:cTn id="28" fill="hold">
+                            <p:stCondLst>
+                              <p:cond delay="0"/>
+                            </p:stCondLst>
+                            <p:childTnLst>
+                              <p:par>
+                                <p:cTn id="29" presetID="1" presetClass="entr" presetSubtype="0" fill="hold" nodeType="clickEffect">
+                                  <p:stCondLst>
+                                    <p:cond delay="0"/>
+                                  </p:stCondLst>
+                                  <p:childTnLst>
+                                    <p:set>
+                                      <p:cBhvr>
+                                        <p:cTn id="30" dur="1" fill="hold">
+                                          <p:stCondLst>
+                                            <p:cond delay="0"/>
+                                          </p:stCondLst>
+                                        </p:cTn>
+                                        <p:tgtEl>
+                                          <p:spTgt spid="3">
+                                            <p:txEl>
+                                              <p:pRg st="6" end="6"/>
+                                            </p:txEl>
+                                          </p:spTgt>
+                                        </p:tgtEl>
+                                        <p:attrNameLst>
+                                          <p:attrName>style.visibility</p:attrName>
+                                        </p:attrNameLst>
+                                      </p:cBhvr>
+                                      <p:to>
+                                        <p:strVal val="visible"/>
+                                      </p:to>
+                                    </p:set>
+                                  </p:childTnLst>
+                                </p:cTn>
+                              </p:par>
+                            </p:childTnLst>
+                          </p:cTn>
+                        </p:par>
+                      </p:childTnLst>
+                    </p:cTn>
+                  </p:par>
+                  <p:par>
+                    <p:cTn id="31" fill="hold">
+                      <p:stCondLst>
+                        <p:cond delay="indefinite"/>
+                      </p:stCondLst>
+                      <p:childTnLst>
+                        <p:par>
+                          <p:cTn id="32" fill="hold">
+                            <p:stCondLst>
+                              <p:cond delay="0"/>
+                            </p:stCondLst>
+                            <p:childTnLst>
+                              <p:par>
+                                <p:cTn id="33" presetID="1" presetClass="entr" presetSubtype="0" fill="hold" nodeType="clickEffect">
+                                  <p:stCondLst>
+                                    <p:cond delay="0"/>
+                                  </p:stCondLst>
+                                  <p:childTnLst>
+                                    <p:set>
+                                      <p:cBhvr>
+                                        <p:cTn id="34" dur="1" fill="hold">
+                                          <p:stCondLst>
+                                            <p:cond delay="0"/>
+                                          </p:stCondLst>
+                                        </p:cTn>
+                                        <p:tgtEl>
+                                          <p:spTgt spid="3">
+                                            <p:txEl>
+                                              <p:pRg st="8" end="8"/>
+                                            </p:txEl>
+                                          </p:spTgt>
+                                        </p:tgtEl>
+                                        <p:attrNameLst>
+                                          <p:attrName>style.visibility</p:attrName>
+                                        </p:attrNameLst>
+                                      </p:cBhvr>
+                                      <p:to>
+                                        <p:strVal val="visible"/>
+                                      </p:to>
+                                    </p:set>
+                                  </p:childTnLst>
+                                </p:cTn>
+                              </p:par>
+                            </p:childTnLst>
+                          </p:cTn>
+                        </p:par>
+                      </p:childTnLst>
+                    </p:cTn>
+                  </p:par>
+                  <p:par>
+                    <p:cTn id="35" fill="hold">
+                      <p:stCondLst>
+                        <p:cond delay="indefinite"/>
+                      </p:stCondLst>
+                      <p:childTnLst>
+                        <p:par>
+                          <p:cTn id="36" fill="hold">
+                            <p:stCondLst>
+                              <p:cond delay="0"/>
+                            </p:stCondLst>
+                            <p:childTnLst>
+                              <p:par>
+                                <p:cTn id="37" presetID="1" presetClass="entr" presetSubtype="0" fill="hold" nodeType="clickEffect">
+                                  <p:stCondLst>
+                                    <p:cond delay="0"/>
+                                  </p:stCondLst>
+                                  <p:childTnLst>
+                                    <p:set>
+                                      <p:cBhvr>
+                                        <p:cTn id="38" dur="1" fill="hold">
+                                          <p:stCondLst>
+                                            <p:cond delay="0"/>
+                                          </p:stCondLst>
+                                        </p:cTn>
+                                        <p:tgtEl>
+                                          <p:spTgt spid="3">
+                                            <p:txEl>
+                                              <p:pRg st="9" end="9"/>
+                                            </p:txEl>
+                                          </p:spTgt>
+                                        </p:tgtEl>
+                                        <p:attrNameLst>
+                                          <p:attrName>style.visibility</p:attrName>
+                                        </p:attrNameLst>
+                                      </p:cBhvr>
+                                      <p:to>
+                                        <p:strVal val="visible"/>
+                                      </p:to>
+                                    </p:set>
+                                  </p:childTnLst>
+                                </p:cTn>
+                              </p:par>
+                            </p:childTnLst>
+                          </p:cTn>
+                        </p:par>
+                      </p:childTnLst>
+                    </p:cTn>
+                  </p:par>
+                </p:childTnLst>
+              </p:cTn>
+              <p:prevCondLst>
+                <p:cond evt="onPrev" delay="0">
+                  <p:tgtEl>
+                    <p:sldTgt/>
+                  </p:tgtEl>
+                </p:cond>
+              </p:prevCondLst>
+              <p:nextCondLst>
+                <p:cond evt="onNext" delay="0">
+                  <p:tgtEl>
+                    <p:sldTgt/>
+                  </p:tgtEl>
+                </p:cond>
+              </p:nextCondLst>
+            </p:seq>
+          </p:childTnLst>
+        </p:cTn>
+      </p:par>
+    </p:tnLst>
+  </p:timing>
 </p:sld>
 </file>
 
@@ -20492,6 +26217,1517 @@
       </p:par>
     </p:tnLst>
   </p:timing>
+</p:sld>
+</file>
+
+<file path=ppt/slides/slide40.xml><?xml version="1.0" encoding="utf-8"?>
+<p:sld xmlns:a="http://schemas.openxmlformats.org/drawingml/2006/main" xmlns:r="http://schemas.openxmlformats.org/officeDocument/2006/relationships" xmlns:p="http://schemas.openxmlformats.org/presentationml/2006/main">
+  <p:cSld>
+    <p:spTree>
+      <p:nvGrpSpPr>
+        <p:cNvPr id="1" name="">
+          <a:extLst>
+            <a:ext uri="{FF2B5EF4-FFF2-40B4-BE49-F238E27FC236}">
+              <a16:creationId xmlns:a16="http://schemas.microsoft.com/office/drawing/2014/main" id="{7888A8E2-C461-788F-42A8-9083DC3DA8F5}"/>
+            </a:ext>
+          </a:extLst>
+        </p:cNvPr>
+        <p:cNvGrpSpPr/>
+        <p:nvPr/>
+      </p:nvGrpSpPr>
+      <p:grpSpPr>
+        <a:xfrm>
+          <a:off x="0" y="0"/>
+          <a:ext cx="0" cy="0"/>
+          <a:chOff x="0" y="0"/>
+          <a:chExt cx="0" cy="0"/>
+        </a:xfrm>
+      </p:grpSpPr>
+      <p:sp>
+        <p:nvSpPr>
+          <p:cNvPr id="2" name="Title 1">
+            <a:extLst>
+              <a:ext uri="{FF2B5EF4-FFF2-40B4-BE49-F238E27FC236}">
+                <a16:creationId xmlns:a16="http://schemas.microsoft.com/office/drawing/2014/main" id="{6B3A550C-07F0-F49E-364B-838253ACC52D}"/>
+              </a:ext>
+            </a:extLst>
+          </p:cNvPr>
+          <p:cNvSpPr>
+            <a:spLocks noGrp="1"/>
+          </p:cNvSpPr>
+          <p:nvPr>
+            <p:ph type="ctrTitle"/>
+          </p:nvPr>
+        </p:nvSpPr>
+        <p:spPr>
+          <a:xfrm>
+            <a:off x="1524000" y="382580"/>
+            <a:ext cx="9144000" cy="502003"/>
+          </a:xfrm>
+        </p:spPr>
+        <p:txBody>
+          <a:bodyPr>
+            <a:noAutofit/>
+          </a:bodyPr>
+          <a:lstStyle/>
+          <a:p>
+            <a:r>
+              <a:rPr lang="en-US" sz="3200" dirty="0" err="1"/>
+              <a:t>PySpark</a:t>
+            </a:r>
+            <a:r>
+              <a:rPr lang="en-US" sz="3200" dirty="0"/>
+              <a:t> </a:t>
+            </a:r>
+            <a:r>
+              <a:rPr lang="en-US" sz="3200" dirty="0" err="1"/>
+              <a:t>DataFrame</a:t>
+            </a:r>
+            <a:r>
+              <a:rPr lang="en-US" sz="3200" dirty="0"/>
+              <a:t> Example 2 - 0007</a:t>
+            </a:r>
+          </a:p>
+        </p:txBody>
+      </p:sp>
+      <p:sp>
+        <p:nvSpPr>
+          <p:cNvPr id="3" name="Subtitle 2">
+            <a:extLst>
+              <a:ext uri="{FF2B5EF4-FFF2-40B4-BE49-F238E27FC236}">
+                <a16:creationId xmlns:a16="http://schemas.microsoft.com/office/drawing/2014/main" id="{68D6EBF6-F292-FA1B-928C-7F87045BAF6D}"/>
+              </a:ext>
+            </a:extLst>
+          </p:cNvPr>
+          <p:cNvSpPr>
+            <a:spLocks noGrp="1"/>
+          </p:cNvSpPr>
+          <p:nvPr>
+            <p:ph type="subTitle" idx="1"/>
+          </p:nvPr>
+        </p:nvSpPr>
+        <p:spPr>
+          <a:xfrm>
+            <a:off x="1524000" y="884584"/>
+            <a:ext cx="9144000" cy="5088834"/>
+          </a:xfrm>
+        </p:spPr>
+        <p:txBody>
+          <a:bodyPr>
+            <a:normAutofit/>
+          </a:bodyPr>
+          <a:lstStyle/>
+          <a:p>
+            <a:r>
+              <a:rPr lang="en-US" sz="2000" dirty="0">
+                <a:solidFill>
+                  <a:schemeClr val="tx1"/>
+                </a:solidFill>
+                <a:latin typeface="Consolas" panose="020B0609020204030204" pitchFamily="49" charset="0"/>
+                <a:cs typeface="Consolas" panose="020B0609020204030204" pitchFamily="49" charset="0"/>
+              </a:rPr>
+              <a:t>--- Aggregated Category Metrics ---</a:t>
+            </a:r>
+          </a:p>
+          <a:p>
+            <a:r>
+              <a:rPr lang="en-US" sz="2000" dirty="0">
+                <a:solidFill>
+                  <a:schemeClr val="tx1"/>
+                </a:solidFill>
+                <a:latin typeface="Consolas" panose="020B0609020204030204" pitchFamily="49" charset="0"/>
+                <a:cs typeface="Consolas" panose="020B0609020204030204" pitchFamily="49" charset="0"/>
+              </a:rPr>
+              <a:t>+-----------+-------------+-------------+----------------+</a:t>
+            </a:r>
+          </a:p>
+          <a:p>
+            <a:r>
+              <a:rPr lang="en-US" sz="2000" dirty="0">
+                <a:solidFill>
+                  <a:schemeClr val="tx1"/>
+                </a:solidFill>
+                <a:latin typeface="Consolas" panose="020B0609020204030204" pitchFamily="49" charset="0"/>
+                <a:cs typeface="Consolas" panose="020B0609020204030204" pitchFamily="49" charset="0"/>
+              </a:rPr>
+              <a:t>|   </a:t>
+            </a:r>
+            <a:r>
+              <a:rPr lang="en-US" sz="2000" dirty="0" err="1">
+                <a:solidFill>
+                  <a:schemeClr val="tx1"/>
+                </a:solidFill>
+                <a:highlight>
+                  <a:srgbClr val="00FF00"/>
+                </a:highlight>
+                <a:latin typeface="Consolas" panose="020B0609020204030204" pitchFamily="49" charset="0"/>
+                <a:cs typeface="Consolas" panose="020B0609020204030204" pitchFamily="49" charset="0"/>
+              </a:rPr>
+              <a:t>Category|Total_Revenue|Average_Spend|Unique_Customers</a:t>
+            </a:r>
+            <a:r>
+              <a:rPr lang="en-US" sz="2000" dirty="0">
+                <a:solidFill>
+                  <a:schemeClr val="tx1"/>
+                </a:solidFill>
+                <a:latin typeface="Consolas" panose="020B0609020204030204" pitchFamily="49" charset="0"/>
+                <a:cs typeface="Consolas" panose="020B0609020204030204" pitchFamily="49" charset="0"/>
+              </a:rPr>
+              <a:t>|</a:t>
+            </a:r>
+          </a:p>
+          <a:p>
+            <a:r>
+              <a:rPr lang="en-US" sz="2000" dirty="0">
+                <a:solidFill>
+                  <a:schemeClr val="tx1"/>
+                </a:solidFill>
+                <a:latin typeface="Consolas" panose="020B0609020204030204" pitchFamily="49" charset="0"/>
+                <a:cs typeface="Consolas" panose="020B0609020204030204" pitchFamily="49" charset="0"/>
+              </a:rPr>
+              <a:t>+-----------+-------------+-------------+----------------+</a:t>
+            </a:r>
+          </a:p>
+          <a:p>
+            <a:r>
+              <a:rPr lang="en-US" sz="2000" dirty="0">
+                <a:solidFill>
+                  <a:schemeClr val="tx1"/>
+                </a:solidFill>
+                <a:latin typeface="Consolas" panose="020B0609020204030204" pitchFamily="49" charset="0"/>
+                <a:cs typeface="Consolas" panose="020B0609020204030204" pitchFamily="49" charset="0"/>
+              </a:rPr>
+              <a:t>|Electronics|       1350.0|        450.0|               2|</a:t>
+            </a:r>
+          </a:p>
+          <a:p>
+            <a:r>
+              <a:rPr lang="en-US" sz="2000" dirty="0">
+                <a:solidFill>
+                  <a:schemeClr val="tx1"/>
+                </a:solidFill>
+                <a:latin typeface="Consolas" panose="020B0609020204030204" pitchFamily="49" charset="0"/>
+                <a:cs typeface="Consolas" panose="020B0609020204030204" pitchFamily="49" charset="0"/>
+              </a:rPr>
+              <a:t>|   Clothing|        125.5|        62.75|               1|</a:t>
+            </a:r>
+          </a:p>
+          <a:p>
+            <a:r>
+              <a:rPr lang="en-US" sz="2000" dirty="0">
+                <a:solidFill>
+                  <a:schemeClr val="tx1"/>
+                </a:solidFill>
+                <a:latin typeface="Consolas" panose="020B0609020204030204" pitchFamily="49" charset="0"/>
+                <a:cs typeface="Consolas" panose="020B0609020204030204" pitchFamily="49" charset="0"/>
+              </a:rPr>
+              <a:t>|      Books|        37.75|        18.88|               2|</a:t>
+            </a:r>
+          </a:p>
+          <a:p>
+            <a:r>
+              <a:rPr lang="en-US" sz="2000" dirty="0">
+                <a:solidFill>
+                  <a:schemeClr val="tx1"/>
+                </a:solidFill>
+                <a:latin typeface="Consolas" panose="020B0609020204030204" pitchFamily="49" charset="0"/>
+                <a:cs typeface="Consolas" panose="020B0609020204030204" pitchFamily="49" charset="0"/>
+              </a:rPr>
+              <a:t>+-----------+-------------+-------------+----------------+</a:t>
+            </a:r>
+          </a:p>
+        </p:txBody>
+      </p:sp>
+    </p:spTree>
+    <p:extLst>
+      <p:ext uri="{BB962C8B-B14F-4D97-AF65-F5344CB8AC3E}">
+        <p14:creationId xmlns:p14="http://schemas.microsoft.com/office/powerpoint/2010/main" val="1178155355"/>
+      </p:ext>
+    </p:extLst>
+  </p:cSld>
+  <p:clrMapOvr>
+    <a:masterClrMapping/>
+  </p:clrMapOvr>
+  <p:timing>
+    <p:tnLst>
+      <p:par>
+        <p:cTn id="1" dur="indefinite" restart="never" nodeType="tmRoot">
+          <p:childTnLst>
+            <p:seq concurrent="1" nextAc="seek">
+              <p:cTn id="2" dur="indefinite" nodeType="mainSeq">
+                <p:childTnLst>
+                  <p:par>
+                    <p:cTn id="3" fill="hold">
+                      <p:stCondLst>
+                        <p:cond delay="indefinite"/>
+                      </p:stCondLst>
+                      <p:childTnLst>
+                        <p:par>
+                          <p:cTn id="4" fill="hold">
+                            <p:stCondLst>
+                              <p:cond delay="0"/>
+                            </p:stCondLst>
+                            <p:childTnLst>
+                              <p:par>
+                                <p:cTn id="5" presetID="1" presetClass="entr" presetSubtype="0" fill="hold" nodeType="clickEffect">
+                                  <p:stCondLst>
+                                    <p:cond delay="0"/>
+                                  </p:stCondLst>
+                                  <p:childTnLst>
+                                    <p:set>
+                                      <p:cBhvr>
+                                        <p:cTn id="6" dur="1" fill="hold">
+                                          <p:stCondLst>
+                                            <p:cond delay="0"/>
+                                          </p:stCondLst>
+                                        </p:cTn>
+                                        <p:tgtEl>
+                                          <p:spTgt spid="3">
+                                            <p:txEl>
+                                              <p:pRg st="0" end="0"/>
+                                            </p:txEl>
+                                          </p:spTgt>
+                                        </p:tgtEl>
+                                        <p:attrNameLst>
+                                          <p:attrName>style.visibility</p:attrName>
+                                        </p:attrNameLst>
+                                      </p:cBhvr>
+                                      <p:to>
+                                        <p:strVal val="visible"/>
+                                      </p:to>
+                                    </p:set>
+                                  </p:childTnLst>
+                                </p:cTn>
+                              </p:par>
+                            </p:childTnLst>
+                          </p:cTn>
+                        </p:par>
+                      </p:childTnLst>
+                    </p:cTn>
+                  </p:par>
+                  <p:par>
+                    <p:cTn id="7" fill="hold">
+                      <p:stCondLst>
+                        <p:cond delay="indefinite"/>
+                      </p:stCondLst>
+                      <p:childTnLst>
+                        <p:par>
+                          <p:cTn id="8" fill="hold">
+                            <p:stCondLst>
+                              <p:cond delay="0"/>
+                            </p:stCondLst>
+                            <p:childTnLst>
+                              <p:par>
+                                <p:cTn id="9" presetID="1" presetClass="entr" presetSubtype="0" fill="hold" nodeType="clickEffect">
+                                  <p:stCondLst>
+                                    <p:cond delay="0"/>
+                                  </p:stCondLst>
+                                  <p:childTnLst>
+                                    <p:set>
+                                      <p:cBhvr>
+                                        <p:cTn id="10" dur="1" fill="hold">
+                                          <p:stCondLst>
+                                            <p:cond delay="0"/>
+                                          </p:stCondLst>
+                                        </p:cTn>
+                                        <p:tgtEl>
+                                          <p:spTgt spid="3">
+                                            <p:txEl>
+                                              <p:pRg st="1" end="1"/>
+                                            </p:txEl>
+                                          </p:spTgt>
+                                        </p:tgtEl>
+                                        <p:attrNameLst>
+                                          <p:attrName>style.visibility</p:attrName>
+                                        </p:attrNameLst>
+                                      </p:cBhvr>
+                                      <p:to>
+                                        <p:strVal val="visible"/>
+                                      </p:to>
+                                    </p:set>
+                                  </p:childTnLst>
+                                </p:cTn>
+                              </p:par>
+                            </p:childTnLst>
+                          </p:cTn>
+                        </p:par>
+                      </p:childTnLst>
+                    </p:cTn>
+                  </p:par>
+                  <p:par>
+                    <p:cTn id="11" fill="hold">
+                      <p:stCondLst>
+                        <p:cond delay="indefinite"/>
+                      </p:stCondLst>
+                      <p:childTnLst>
+                        <p:par>
+                          <p:cTn id="12" fill="hold">
+                            <p:stCondLst>
+                              <p:cond delay="0"/>
+                            </p:stCondLst>
+                            <p:childTnLst>
+                              <p:par>
+                                <p:cTn id="13" presetID="1" presetClass="entr" presetSubtype="0" fill="hold" nodeType="clickEffect">
+                                  <p:stCondLst>
+                                    <p:cond delay="0"/>
+                                  </p:stCondLst>
+                                  <p:childTnLst>
+                                    <p:set>
+                                      <p:cBhvr>
+                                        <p:cTn id="14" dur="1" fill="hold">
+                                          <p:stCondLst>
+                                            <p:cond delay="0"/>
+                                          </p:stCondLst>
+                                        </p:cTn>
+                                        <p:tgtEl>
+                                          <p:spTgt spid="3">
+                                            <p:txEl>
+                                              <p:pRg st="2" end="2"/>
+                                            </p:txEl>
+                                          </p:spTgt>
+                                        </p:tgtEl>
+                                        <p:attrNameLst>
+                                          <p:attrName>style.visibility</p:attrName>
+                                        </p:attrNameLst>
+                                      </p:cBhvr>
+                                      <p:to>
+                                        <p:strVal val="visible"/>
+                                      </p:to>
+                                    </p:set>
+                                  </p:childTnLst>
+                                </p:cTn>
+                              </p:par>
+                            </p:childTnLst>
+                          </p:cTn>
+                        </p:par>
+                      </p:childTnLst>
+                    </p:cTn>
+                  </p:par>
+                  <p:par>
+                    <p:cTn id="15" fill="hold">
+                      <p:stCondLst>
+                        <p:cond delay="indefinite"/>
+                      </p:stCondLst>
+                      <p:childTnLst>
+                        <p:par>
+                          <p:cTn id="16" fill="hold">
+                            <p:stCondLst>
+                              <p:cond delay="0"/>
+                            </p:stCondLst>
+                            <p:childTnLst>
+                              <p:par>
+                                <p:cTn id="17" presetID="1" presetClass="entr" presetSubtype="0" fill="hold" nodeType="clickEffect">
+                                  <p:stCondLst>
+                                    <p:cond delay="0"/>
+                                  </p:stCondLst>
+                                  <p:childTnLst>
+                                    <p:set>
+                                      <p:cBhvr>
+                                        <p:cTn id="18" dur="1" fill="hold">
+                                          <p:stCondLst>
+                                            <p:cond delay="0"/>
+                                          </p:stCondLst>
+                                        </p:cTn>
+                                        <p:tgtEl>
+                                          <p:spTgt spid="3">
+                                            <p:txEl>
+                                              <p:pRg st="3" end="3"/>
+                                            </p:txEl>
+                                          </p:spTgt>
+                                        </p:tgtEl>
+                                        <p:attrNameLst>
+                                          <p:attrName>style.visibility</p:attrName>
+                                        </p:attrNameLst>
+                                      </p:cBhvr>
+                                      <p:to>
+                                        <p:strVal val="visible"/>
+                                      </p:to>
+                                    </p:set>
+                                  </p:childTnLst>
+                                </p:cTn>
+                              </p:par>
+                            </p:childTnLst>
+                          </p:cTn>
+                        </p:par>
+                      </p:childTnLst>
+                    </p:cTn>
+                  </p:par>
+                  <p:par>
+                    <p:cTn id="19" fill="hold">
+                      <p:stCondLst>
+                        <p:cond delay="indefinite"/>
+                      </p:stCondLst>
+                      <p:childTnLst>
+                        <p:par>
+                          <p:cTn id="20" fill="hold">
+                            <p:stCondLst>
+                              <p:cond delay="0"/>
+                            </p:stCondLst>
+                            <p:childTnLst>
+                              <p:par>
+                                <p:cTn id="21" presetID="1" presetClass="entr" presetSubtype="0" fill="hold" nodeType="clickEffect">
+                                  <p:stCondLst>
+                                    <p:cond delay="0"/>
+                                  </p:stCondLst>
+                                  <p:childTnLst>
+                                    <p:set>
+                                      <p:cBhvr>
+                                        <p:cTn id="22" dur="1" fill="hold">
+                                          <p:stCondLst>
+                                            <p:cond delay="0"/>
+                                          </p:stCondLst>
+                                        </p:cTn>
+                                        <p:tgtEl>
+                                          <p:spTgt spid="3">
+                                            <p:txEl>
+                                              <p:pRg st="4" end="4"/>
+                                            </p:txEl>
+                                          </p:spTgt>
+                                        </p:tgtEl>
+                                        <p:attrNameLst>
+                                          <p:attrName>style.visibility</p:attrName>
+                                        </p:attrNameLst>
+                                      </p:cBhvr>
+                                      <p:to>
+                                        <p:strVal val="visible"/>
+                                      </p:to>
+                                    </p:set>
+                                  </p:childTnLst>
+                                </p:cTn>
+                              </p:par>
+                            </p:childTnLst>
+                          </p:cTn>
+                        </p:par>
+                      </p:childTnLst>
+                    </p:cTn>
+                  </p:par>
+                  <p:par>
+                    <p:cTn id="23" fill="hold">
+                      <p:stCondLst>
+                        <p:cond delay="indefinite"/>
+                      </p:stCondLst>
+                      <p:childTnLst>
+                        <p:par>
+                          <p:cTn id="24" fill="hold">
+                            <p:stCondLst>
+                              <p:cond delay="0"/>
+                            </p:stCondLst>
+                            <p:childTnLst>
+                              <p:par>
+                                <p:cTn id="25" presetID="1" presetClass="entr" presetSubtype="0" fill="hold" nodeType="clickEffect">
+                                  <p:stCondLst>
+                                    <p:cond delay="0"/>
+                                  </p:stCondLst>
+                                  <p:childTnLst>
+                                    <p:set>
+                                      <p:cBhvr>
+                                        <p:cTn id="26" dur="1" fill="hold">
+                                          <p:stCondLst>
+                                            <p:cond delay="0"/>
+                                          </p:stCondLst>
+                                        </p:cTn>
+                                        <p:tgtEl>
+                                          <p:spTgt spid="3">
+                                            <p:txEl>
+                                              <p:pRg st="5" end="5"/>
+                                            </p:txEl>
+                                          </p:spTgt>
+                                        </p:tgtEl>
+                                        <p:attrNameLst>
+                                          <p:attrName>style.visibility</p:attrName>
+                                        </p:attrNameLst>
+                                      </p:cBhvr>
+                                      <p:to>
+                                        <p:strVal val="visible"/>
+                                      </p:to>
+                                    </p:set>
+                                  </p:childTnLst>
+                                </p:cTn>
+                              </p:par>
+                            </p:childTnLst>
+                          </p:cTn>
+                        </p:par>
+                      </p:childTnLst>
+                    </p:cTn>
+                  </p:par>
+                  <p:par>
+                    <p:cTn id="27" fill="hold">
+                      <p:stCondLst>
+                        <p:cond delay="indefinite"/>
+                      </p:stCondLst>
+                      <p:childTnLst>
+                        <p:par>
+                          <p:cTn id="28" fill="hold">
+                            <p:stCondLst>
+                              <p:cond delay="0"/>
+                            </p:stCondLst>
+                            <p:childTnLst>
+                              <p:par>
+                                <p:cTn id="29" presetID="1" presetClass="entr" presetSubtype="0" fill="hold" nodeType="clickEffect">
+                                  <p:stCondLst>
+                                    <p:cond delay="0"/>
+                                  </p:stCondLst>
+                                  <p:childTnLst>
+                                    <p:set>
+                                      <p:cBhvr>
+                                        <p:cTn id="30" dur="1" fill="hold">
+                                          <p:stCondLst>
+                                            <p:cond delay="0"/>
+                                          </p:stCondLst>
+                                        </p:cTn>
+                                        <p:tgtEl>
+                                          <p:spTgt spid="3">
+                                            <p:txEl>
+                                              <p:pRg st="6" end="6"/>
+                                            </p:txEl>
+                                          </p:spTgt>
+                                        </p:tgtEl>
+                                        <p:attrNameLst>
+                                          <p:attrName>style.visibility</p:attrName>
+                                        </p:attrNameLst>
+                                      </p:cBhvr>
+                                      <p:to>
+                                        <p:strVal val="visible"/>
+                                      </p:to>
+                                    </p:set>
+                                  </p:childTnLst>
+                                </p:cTn>
+                              </p:par>
+                            </p:childTnLst>
+                          </p:cTn>
+                        </p:par>
+                      </p:childTnLst>
+                    </p:cTn>
+                  </p:par>
+                  <p:par>
+                    <p:cTn id="31" fill="hold">
+                      <p:stCondLst>
+                        <p:cond delay="indefinite"/>
+                      </p:stCondLst>
+                      <p:childTnLst>
+                        <p:par>
+                          <p:cTn id="32" fill="hold">
+                            <p:stCondLst>
+                              <p:cond delay="0"/>
+                            </p:stCondLst>
+                            <p:childTnLst>
+                              <p:par>
+                                <p:cTn id="33" presetID="1" presetClass="entr" presetSubtype="0" fill="hold" nodeType="clickEffect">
+                                  <p:stCondLst>
+                                    <p:cond delay="0"/>
+                                  </p:stCondLst>
+                                  <p:childTnLst>
+                                    <p:set>
+                                      <p:cBhvr>
+                                        <p:cTn id="34" dur="1" fill="hold">
+                                          <p:stCondLst>
+                                            <p:cond delay="0"/>
+                                          </p:stCondLst>
+                                        </p:cTn>
+                                        <p:tgtEl>
+                                          <p:spTgt spid="3">
+                                            <p:txEl>
+                                              <p:pRg st="7" end="7"/>
+                                            </p:txEl>
+                                          </p:spTgt>
+                                        </p:tgtEl>
+                                        <p:attrNameLst>
+                                          <p:attrName>style.visibility</p:attrName>
+                                        </p:attrNameLst>
+                                      </p:cBhvr>
+                                      <p:to>
+                                        <p:strVal val="visible"/>
+                                      </p:to>
+                                    </p:set>
+                                  </p:childTnLst>
+                                </p:cTn>
+                              </p:par>
+                            </p:childTnLst>
+                          </p:cTn>
+                        </p:par>
+                      </p:childTnLst>
+                    </p:cTn>
+                  </p:par>
+                </p:childTnLst>
+              </p:cTn>
+              <p:prevCondLst>
+                <p:cond evt="onPrev" delay="0">
+                  <p:tgtEl>
+                    <p:sldTgt/>
+                  </p:tgtEl>
+                </p:cond>
+              </p:prevCondLst>
+              <p:nextCondLst>
+                <p:cond evt="onNext" delay="0">
+                  <p:tgtEl>
+                    <p:sldTgt/>
+                  </p:tgtEl>
+                </p:cond>
+              </p:nextCondLst>
+            </p:seq>
+          </p:childTnLst>
+        </p:cTn>
+      </p:par>
+    </p:tnLst>
+  </p:timing>
+</p:sld>
+</file>
+
+<file path=ppt/slides/slide41.xml><?xml version="1.0" encoding="utf-8"?>
+<p:sld xmlns:a="http://schemas.openxmlformats.org/drawingml/2006/main" xmlns:r="http://schemas.openxmlformats.org/officeDocument/2006/relationships" xmlns:p="http://schemas.openxmlformats.org/presentationml/2006/main">
+  <p:cSld>
+    <p:spTree>
+      <p:nvGrpSpPr>
+        <p:cNvPr id="1" name=""/>
+        <p:cNvGrpSpPr/>
+        <p:nvPr/>
+      </p:nvGrpSpPr>
+      <p:grpSpPr>
+        <a:xfrm>
+          <a:off x="0" y="0"/>
+          <a:ext cx="0" cy="0"/>
+          <a:chOff x="0" y="0"/>
+          <a:chExt cx="0" cy="0"/>
+        </a:xfrm>
+      </p:grpSpPr>
+      <p:sp>
+        <p:nvSpPr>
+          <p:cNvPr id="2" name="Title 1">
+            <a:extLst>
+              <a:ext uri="{FF2B5EF4-FFF2-40B4-BE49-F238E27FC236}">
+                <a16:creationId xmlns:a16="http://schemas.microsoft.com/office/drawing/2014/main" id="{8207F09F-B406-FB4C-ABE0-890E4E4F95C8}"/>
+              </a:ext>
+            </a:extLst>
+          </p:cNvPr>
+          <p:cNvSpPr>
+            <a:spLocks noGrp="1"/>
+          </p:cNvSpPr>
+          <p:nvPr>
+            <p:ph type="ctrTitle"/>
+          </p:nvPr>
+        </p:nvSpPr>
+        <p:spPr>
+          <a:xfrm>
+            <a:off x="1524000" y="974035"/>
+            <a:ext cx="9144000" cy="1222893"/>
+          </a:xfrm>
+        </p:spPr>
+        <p:txBody>
+          <a:bodyPr>
+            <a:normAutofit fontScale="90000"/>
+          </a:bodyPr>
+          <a:lstStyle/>
+          <a:p>
+            <a:r>
+              <a:rPr lang="en-US"/>
+              <a:t>3. Main Course Components</a:t>
+            </a:r>
+            <a:br>
+              <a:rPr lang="en-US"/>
+            </a:br>
+            <a:r>
+              <a:rPr lang="en-US" sz="4800"/>
+              <a:t>Serverless SQL Access to Big Data (15%)</a:t>
+            </a:r>
+            <a:endParaRPr lang="en-US"/>
+          </a:p>
+        </p:txBody>
+      </p:sp>
+      <p:sp>
+        <p:nvSpPr>
+          <p:cNvPr id="3" name="Subtitle 2">
+            <a:extLst>
+              <a:ext uri="{FF2B5EF4-FFF2-40B4-BE49-F238E27FC236}">
+                <a16:creationId xmlns:a16="http://schemas.microsoft.com/office/drawing/2014/main" id="{67BA4937-A89D-8343-B4A3-942B771C889A}"/>
+              </a:ext>
+            </a:extLst>
+          </p:cNvPr>
+          <p:cNvSpPr>
+            <a:spLocks noGrp="1"/>
+          </p:cNvSpPr>
+          <p:nvPr>
+            <p:ph type="subTitle" idx="1"/>
+          </p:nvPr>
+        </p:nvSpPr>
+        <p:spPr>
+          <a:xfrm>
+            <a:off x="1524000" y="2415209"/>
+            <a:ext cx="9144000" cy="3558208"/>
+          </a:xfrm>
+        </p:spPr>
+        <p:txBody>
+          <a:bodyPr>
+            <a:normAutofit/>
+          </a:bodyPr>
+          <a:lstStyle/>
+          <a:p>
+            <a:pPr marL="1485900" lvl="2" indent="-571500" algn="l">
+              <a:buFont typeface="Arial" panose="020B0604020202020204" pitchFamily="34" charset="0"/>
+              <a:buChar char="•"/>
+            </a:pPr>
+            <a:r>
+              <a:rPr lang="en-US" sz="3600" dirty="0"/>
+              <a:t>Amazon Athena</a:t>
+            </a:r>
+          </a:p>
+          <a:p>
+            <a:pPr marL="1485900" lvl="2" indent="-571500" algn="l">
+              <a:buFont typeface="Arial" panose="020B0604020202020204" pitchFamily="34" charset="0"/>
+              <a:buChar char="•"/>
+            </a:pPr>
+            <a:r>
+              <a:rPr lang="en-US" sz="4000" dirty="0"/>
+              <a:t>Google BigQuery</a:t>
+            </a:r>
+          </a:p>
+          <a:p>
+            <a:pPr marL="1485900" lvl="2" indent="-571500" algn="l">
+              <a:buFont typeface="Arial" panose="020B0604020202020204" pitchFamily="34" charset="0"/>
+              <a:buChar char="•"/>
+            </a:pPr>
+            <a:r>
+              <a:rPr lang="en-US" sz="4000" dirty="0"/>
+              <a:t>Snowflake</a:t>
+            </a:r>
+          </a:p>
+          <a:p>
+            <a:pPr lvl="1" algn="l"/>
+            <a:endParaRPr lang="en-US" sz="1200" dirty="0"/>
+          </a:p>
+          <a:p>
+            <a:pPr marL="800100" lvl="1" indent="-342900" algn="l">
+              <a:buFont typeface="+mj-lt"/>
+              <a:buAutoNum type="arabicPeriod"/>
+            </a:pPr>
+            <a:endParaRPr lang="en-US" sz="1200" dirty="0"/>
+          </a:p>
+        </p:txBody>
+      </p:sp>
+    </p:spTree>
+    <p:extLst>
+      <p:ext uri="{BB962C8B-B14F-4D97-AF65-F5344CB8AC3E}">
+        <p14:creationId xmlns:p14="http://schemas.microsoft.com/office/powerpoint/2010/main" val="839248039"/>
+      </p:ext>
+    </p:extLst>
+  </p:cSld>
+  <p:clrMapOvr>
+    <a:masterClrMapping/>
+  </p:clrMapOvr>
+  <p:timing>
+    <p:tnLst>
+      <p:par>
+        <p:cTn id="1" dur="indefinite" restart="never" nodeType="tmRoot">
+          <p:childTnLst>
+            <p:seq concurrent="1" nextAc="seek">
+              <p:cTn id="2" dur="indefinite" nodeType="mainSeq">
+                <p:childTnLst>
+                  <p:par>
+                    <p:cTn id="3" fill="hold">
+                      <p:stCondLst>
+                        <p:cond delay="indefinite"/>
+                        <p:cond evt="onBegin" delay="0">
+                          <p:tn val="2"/>
+                        </p:cond>
+                      </p:stCondLst>
+                      <p:childTnLst>
+                        <p:par>
+                          <p:cTn id="4" fill="hold">
+                            <p:stCondLst>
+                              <p:cond delay="0"/>
+                            </p:stCondLst>
+                            <p:childTnLst>
+                              <p:par>
+                                <p:cTn id="5" presetID="1" presetClass="entr" presetSubtype="0" fill="hold" nodeType="withEffect">
+                                  <p:stCondLst>
+                                    <p:cond delay="0"/>
+                                  </p:stCondLst>
+                                  <p:childTnLst>
+                                    <p:set>
+                                      <p:cBhvr>
+                                        <p:cTn id="6" dur="1" fill="hold">
+                                          <p:stCondLst>
+                                            <p:cond delay="0"/>
+                                          </p:stCondLst>
+                                        </p:cTn>
+                                        <p:tgtEl>
+                                          <p:spTgt spid="3">
+                                            <p:txEl>
+                                              <p:pRg st="0" end="0"/>
+                                            </p:txEl>
+                                          </p:spTgt>
+                                        </p:tgtEl>
+                                        <p:attrNameLst>
+                                          <p:attrName>style.visibility</p:attrName>
+                                        </p:attrNameLst>
+                                      </p:cBhvr>
+                                      <p:to>
+                                        <p:strVal val="visible"/>
+                                      </p:to>
+                                    </p:set>
+                                  </p:childTnLst>
+                                </p:cTn>
+                              </p:par>
+                              <p:par>
+                                <p:cTn id="7" presetID="1" presetClass="entr" presetSubtype="0" fill="hold" nodeType="withEffect">
+                                  <p:stCondLst>
+                                    <p:cond delay="0"/>
+                                  </p:stCondLst>
+                                  <p:childTnLst>
+                                    <p:set>
+                                      <p:cBhvr>
+                                        <p:cTn id="8" dur="1" fill="hold">
+                                          <p:stCondLst>
+                                            <p:cond delay="0"/>
+                                          </p:stCondLst>
+                                        </p:cTn>
+                                        <p:tgtEl>
+                                          <p:spTgt spid="3">
+                                            <p:txEl>
+                                              <p:pRg st="1" end="1"/>
+                                            </p:txEl>
+                                          </p:spTgt>
+                                        </p:tgtEl>
+                                        <p:attrNameLst>
+                                          <p:attrName>style.visibility</p:attrName>
+                                        </p:attrNameLst>
+                                      </p:cBhvr>
+                                      <p:to>
+                                        <p:strVal val="visible"/>
+                                      </p:to>
+                                    </p:set>
+                                  </p:childTnLst>
+                                </p:cTn>
+                              </p:par>
+                              <p:par>
+                                <p:cTn id="9" presetID="1" presetClass="entr" presetSubtype="0" fill="hold" nodeType="withEffect">
+                                  <p:stCondLst>
+                                    <p:cond delay="0"/>
+                                  </p:stCondLst>
+                                  <p:childTnLst>
+                                    <p:set>
+                                      <p:cBhvr>
+                                        <p:cTn id="10" dur="1" fill="hold">
+                                          <p:stCondLst>
+                                            <p:cond delay="0"/>
+                                          </p:stCondLst>
+                                        </p:cTn>
+                                        <p:tgtEl>
+                                          <p:spTgt spid="3">
+                                            <p:txEl>
+                                              <p:pRg st="2" end="2"/>
+                                            </p:txEl>
+                                          </p:spTgt>
+                                        </p:tgtEl>
+                                        <p:attrNameLst>
+                                          <p:attrName>style.visibility</p:attrName>
+                                        </p:attrNameLst>
+                                      </p:cBhvr>
+                                      <p:to>
+                                        <p:strVal val="visible"/>
+                                      </p:to>
+                                    </p:set>
+                                  </p:childTnLst>
+                                </p:cTn>
+                              </p:par>
+                            </p:childTnLst>
+                          </p:cTn>
+                        </p:par>
+                      </p:childTnLst>
+                    </p:cTn>
+                  </p:par>
+                </p:childTnLst>
+              </p:cTn>
+              <p:prevCondLst>
+                <p:cond evt="onPrev" delay="0">
+                  <p:tgtEl>
+                    <p:sldTgt/>
+                  </p:tgtEl>
+                </p:cond>
+              </p:prevCondLst>
+              <p:nextCondLst>
+                <p:cond evt="onNext" delay="0">
+                  <p:tgtEl>
+                    <p:sldTgt/>
+                  </p:tgtEl>
+                </p:cond>
+              </p:nextCondLst>
+            </p:seq>
+          </p:childTnLst>
+        </p:cTn>
+      </p:par>
+    </p:tnLst>
+  </p:timing>
+</p:sld>
+</file>
+
+<file path=ppt/slides/slide42.xml><?xml version="1.0" encoding="utf-8"?>
+<p:sld xmlns:a="http://schemas.openxmlformats.org/drawingml/2006/main" xmlns:r="http://schemas.openxmlformats.org/officeDocument/2006/relationships" xmlns:p="http://schemas.openxmlformats.org/presentationml/2006/main">
+  <p:cSld>
+    <p:spTree>
+      <p:nvGrpSpPr>
+        <p:cNvPr id="1" name=""/>
+        <p:cNvGrpSpPr/>
+        <p:nvPr/>
+      </p:nvGrpSpPr>
+      <p:grpSpPr>
+        <a:xfrm>
+          <a:off x="0" y="0"/>
+          <a:ext cx="0" cy="0"/>
+          <a:chOff x="0" y="0"/>
+          <a:chExt cx="0" cy="0"/>
+        </a:xfrm>
+      </p:grpSpPr>
+      <p:sp>
+        <p:nvSpPr>
+          <p:cNvPr id="2" name="Title 1">
+            <a:extLst>
+              <a:ext uri="{FF2B5EF4-FFF2-40B4-BE49-F238E27FC236}">
+                <a16:creationId xmlns:a16="http://schemas.microsoft.com/office/drawing/2014/main" id="{8207F09F-B406-FB4C-ABE0-890E4E4F95C8}"/>
+              </a:ext>
+            </a:extLst>
+          </p:cNvPr>
+          <p:cNvSpPr>
+            <a:spLocks noGrp="1"/>
+          </p:cNvSpPr>
+          <p:nvPr>
+            <p:ph type="ctrTitle"/>
+          </p:nvPr>
+        </p:nvSpPr>
+        <p:spPr>
+          <a:xfrm>
+            <a:off x="1524000" y="1122363"/>
+            <a:ext cx="9144000" cy="706437"/>
+          </a:xfrm>
+        </p:spPr>
+        <p:txBody>
+          <a:bodyPr>
+            <a:normAutofit fontScale="90000"/>
+          </a:bodyPr>
+          <a:lstStyle/>
+          <a:p>
+            <a:r>
+              <a:rPr lang="en-US"/>
+              <a:t>Amazon Athena</a:t>
+            </a:r>
+          </a:p>
+        </p:txBody>
+      </p:sp>
+      <p:sp>
+        <p:nvSpPr>
+          <p:cNvPr id="3" name="Subtitle 2">
+            <a:extLst>
+              <a:ext uri="{FF2B5EF4-FFF2-40B4-BE49-F238E27FC236}">
+                <a16:creationId xmlns:a16="http://schemas.microsoft.com/office/drawing/2014/main" id="{67BA4937-A89D-8343-B4A3-942B771C889A}"/>
+              </a:ext>
+            </a:extLst>
+          </p:cNvPr>
+          <p:cNvSpPr>
+            <a:spLocks noGrp="1"/>
+          </p:cNvSpPr>
+          <p:nvPr>
+            <p:ph type="subTitle" idx="1"/>
+          </p:nvPr>
+        </p:nvSpPr>
+        <p:spPr>
+          <a:xfrm>
+            <a:off x="1524000" y="1828800"/>
+            <a:ext cx="9144000" cy="4144617"/>
+          </a:xfrm>
+        </p:spPr>
+        <p:txBody>
+          <a:bodyPr>
+            <a:normAutofit/>
+          </a:bodyPr>
+          <a:lstStyle/>
+          <a:p>
+            <a:pPr marL="457200" indent="-457200" algn="l">
+              <a:buFont typeface="Arial" panose="020B0604020202020204" pitchFamily="34" charset="0"/>
+              <a:buChar char="•"/>
+            </a:pPr>
+            <a:r>
+              <a:rPr lang="en-US" sz="2800"/>
+              <a:t>Interactive query service</a:t>
+            </a:r>
+          </a:p>
+          <a:p>
+            <a:pPr marL="457200" indent="-457200" algn="l">
+              <a:buFont typeface="Arial" panose="020B0604020202020204" pitchFamily="34" charset="0"/>
+              <a:buChar char="•"/>
+            </a:pPr>
+            <a:r>
+              <a:rPr lang="en-US" sz="2800"/>
+              <a:t>Serverless. Zero infrastructure. Zero administration.</a:t>
+            </a:r>
+          </a:p>
+          <a:p>
+            <a:pPr marL="457200" indent="-457200" algn="l">
+              <a:buFont typeface="Arial" panose="020B0604020202020204" pitchFamily="34" charset="0"/>
+              <a:buChar char="•"/>
+            </a:pPr>
+            <a:r>
+              <a:rPr lang="en-US" sz="2800"/>
+              <a:t>Put your data in S3</a:t>
+            </a:r>
+          </a:p>
+          <a:p>
+            <a:pPr marL="457200" indent="-457200" algn="l">
+              <a:buFont typeface="Arial" panose="020B0604020202020204" pitchFamily="34" charset="0"/>
+              <a:buChar char="•"/>
+            </a:pPr>
+            <a:r>
+              <a:rPr lang="en-US" sz="2800"/>
+              <a:t>Access your data by SQL</a:t>
+            </a:r>
+          </a:p>
+          <a:p>
+            <a:pPr marL="457200" indent="-457200" algn="l">
+              <a:buFont typeface="Arial" panose="020B0604020202020204" pitchFamily="34" charset="0"/>
+              <a:buChar char="•"/>
+            </a:pPr>
+            <a:r>
+              <a:rPr lang="en-US" sz="2800"/>
+              <a:t>Pay by query</a:t>
+            </a:r>
+          </a:p>
+          <a:p>
+            <a:pPr marL="457200" indent="-457200" algn="l">
+              <a:buFont typeface="Arial" panose="020B0604020202020204" pitchFamily="34" charset="0"/>
+              <a:buChar char="•"/>
+            </a:pPr>
+            <a:r>
+              <a:rPr lang="en-US" sz="2800"/>
+              <a:t>Fast performance</a:t>
+            </a:r>
+          </a:p>
+        </p:txBody>
+      </p:sp>
+    </p:spTree>
+    <p:extLst>
+      <p:ext uri="{BB962C8B-B14F-4D97-AF65-F5344CB8AC3E}">
+        <p14:creationId xmlns:p14="http://schemas.microsoft.com/office/powerpoint/2010/main" val="3364964900"/>
+      </p:ext>
+    </p:extLst>
+  </p:cSld>
+  <p:clrMapOvr>
+    <a:masterClrMapping/>
+  </p:clrMapOvr>
+  <p:timing>
+    <p:tnLst>
+      <p:par>
+        <p:cTn id="1" dur="indefinite" restart="never" nodeType="tmRoot">
+          <p:childTnLst>
+            <p:seq concurrent="1" nextAc="seek">
+              <p:cTn id="2" dur="indefinite" nodeType="mainSeq">
+                <p:childTnLst>
+                  <p:par>
+                    <p:cTn id="3" fill="hold">
+                      <p:stCondLst>
+                        <p:cond delay="indefinite"/>
+                      </p:stCondLst>
+                      <p:childTnLst>
+                        <p:par>
+                          <p:cTn id="4" fill="hold">
+                            <p:stCondLst>
+                              <p:cond delay="0"/>
+                            </p:stCondLst>
+                            <p:childTnLst>
+                              <p:par>
+                                <p:cTn id="5" presetID="1" presetClass="entr" presetSubtype="0" fill="hold" nodeType="clickEffect">
+                                  <p:stCondLst>
+                                    <p:cond delay="0"/>
+                                  </p:stCondLst>
+                                  <p:childTnLst>
+                                    <p:set>
+                                      <p:cBhvr>
+                                        <p:cTn id="6" dur="1" fill="hold">
+                                          <p:stCondLst>
+                                            <p:cond delay="0"/>
+                                          </p:stCondLst>
+                                        </p:cTn>
+                                        <p:tgtEl>
+                                          <p:spTgt spid="3">
+                                            <p:txEl>
+                                              <p:pRg st="0" end="0"/>
+                                            </p:txEl>
+                                          </p:spTgt>
+                                        </p:tgtEl>
+                                        <p:attrNameLst>
+                                          <p:attrName>style.visibility</p:attrName>
+                                        </p:attrNameLst>
+                                      </p:cBhvr>
+                                      <p:to>
+                                        <p:strVal val="visible"/>
+                                      </p:to>
+                                    </p:set>
+                                  </p:childTnLst>
+                                </p:cTn>
+                              </p:par>
+                            </p:childTnLst>
+                          </p:cTn>
+                        </p:par>
+                      </p:childTnLst>
+                    </p:cTn>
+                  </p:par>
+                  <p:par>
+                    <p:cTn id="7" fill="hold">
+                      <p:stCondLst>
+                        <p:cond delay="indefinite"/>
+                      </p:stCondLst>
+                      <p:childTnLst>
+                        <p:par>
+                          <p:cTn id="8" fill="hold">
+                            <p:stCondLst>
+                              <p:cond delay="0"/>
+                            </p:stCondLst>
+                            <p:childTnLst>
+                              <p:par>
+                                <p:cTn id="9" presetID="1" presetClass="entr" presetSubtype="0" fill="hold" nodeType="clickEffect">
+                                  <p:stCondLst>
+                                    <p:cond delay="0"/>
+                                  </p:stCondLst>
+                                  <p:childTnLst>
+                                    <p:set>
+                                      <p:cBhvr>
+                                        <p:cTn id="10" dur="1" fill="hold">
+                                          <p:stCondLst>
+                                            <p:cond delay="0"/>
+                                          </p:stCondLst>
+                                        </p:cTn>
+                                        <p:tgtEl>
+                                          <p:spTgt spid="3">
+                                            <p:txEl>
+                                              <p:pRg st="1" end="1"/>
+                                            </p:txEl>
+                                          </p:spTgt>
+                                        </p:tgtEl>
+                                        <p:attrNameLst>
+                                          <p:attrName>style.visibility</p:attrName>
+                                        </p:attrNameLst>
+                                      </p:cBhvr>
+                                      <p:to>
+                                        <p:strVal val="visible"/>
+                                      </p:to>
+                                    </p:set>
+                                  </p:childTnLst>
+                                </p:cTn>
+                              </p:par>
+                            </p:childTnLst>
+                          </p:cTn>
+                        </p:par>
+                      </p:childTnLst>
+                    </p:cTn>
+                  </p:par>
+                  <p:par>
+                    <p:cTn id="11" fill="hold">
+                      <p:stCondLst>
+                        <p:cond delay="indefinite"/>
+                      </p:stCondLst>
+                      <p:childTnLst>
+                        <p:par>
+                          <p:cTn id="12" fill="hold">
+                            <p:stCondLst>
+                              <p:cond delay="0"/>
+                            </p:stCondLst>
+                            <p:childTnLst>
+                              <p:par>
+                                <p:cTn id="13" presetID="1" presetClass="entr" presetSubtype="0" fill="hold" nodeType="clickEffect">
+                                  <p:stCondLst>
+                                    <p:cond delay="0"/>
+                                  </p:stCondLst>
+                                  <p:childTnLst>
+                                    <p:set>
+                                      <p:cBhvr>
+                                        <p:cTn id="14" dur="1" fill="hold">
+                                          <p:stCondLst>
+                                            <p:cond delay="0"/>
+                                          </p:stCondLst>
+                                        </p:cTn>
+                                        <p:tgtEl>
+                                          <p:spTgt spid="3">
+                                            <p:txEl>
+                                              <p:pRg st="2" end="2"/>
+                                            </p:txEl>
+                                          </p:spTgt>
+                                        </p:tgtEl>
+                                        <p:attrNameLst>
+                                          <p:attrName>style.visibility</p:attrName>
+                                        </p:attrNameLst>
+                                      </p:cBhvr>
+                                      <p:to>
+                                        <p:strVal val="visible"/>
+                                      </p:to>
+                                    </p:set>
+                                  </p:childTnLst>
+                                </p:cTn>
+                              </p:par>
+                            </p:childTnLst>
+                          </p:cTn>
+                        </p:par>
+                      </p:childTnLst>
+                    </p:cTn>
+                  </p:par>
+                  <p:par>
+                    <p:cTn id="15" fill="hold">
+                      <p:stCondLst>
+                        <p:cond delay="indefinite"/>
+                      </p:stCondLst>
+                      <p:childTnLst>
+                        <p:par>
+                          <p:cTn id="16" fill="hold">
+                            <p:stCondLst>
+                              <p:cond delay="0"/>
+                            </p:stCondLst>
+                            <p:childTnLst>
+                              <p:par>
+                                <p:cTn id="17" presetID="1" presetClass="entr" presetSubtype="0" fill="hold" nodeType="clickEffect">
+                                  <p:stCondLst>
+                                    <p:cond delay="0"/>
+                                  </p:stCondLst>
+                                  <p:childTnLst>
+                                    <p:set>
+                                      <p:cBhvr>
+                                        <p:cTn id="18" dur="1" fill="hold">
+                                          <p:stCondLst>
+                                            <p:cond delay="0"/>
+                                          </p:stCondLst>
+                                        </p:cTn>
+                                        <p:tgtEl>
+                                          <p:spTgt spid="3">
+                                            <p:txEl>
+                                              <p:pRg st="3" end="3"/>
+                                            </p:txEl>
+                                          </p:spTgt>
+                                        </p:tgtEl>
+                                        <p:attrNameLst>
+                                          <p:attrName>style.visibility</p:attrName>
+                                        </p:attrNameLst>
+                                      </p:cBhvr>
+                                      <p:to>
+                                        <p:strVal val="visible"/>
+                                      </p:to>
+                                    </p:set>
+                                  </p:childTnLst>
+                                </p:cTn>
+                              </p:par>
+                            </p:childTnLst>
+                          </p:cTn>
+                        </p:par>
+                      </p:childTnLst>
+                    </p:cTn>
+                  </p:par>
+                  <p:par>
+                    <p:cTn id="19" fill="hold">
+                      <p:stCondLst>
+                        <p:cond delay="indefinite"/>
+                      </p:stCondLst>
+                      <p:childTnLst>
+                        <p:par>
+                          <p:cTn id="20" fill="hold">
+                            <p:stCondLst>
+                              <p:cond delay="0"/>
+                            </p:stCondLst>
+                            <p:childTnLst>
+                              <p:par>
+                                <p:cTn id="21" presetID="1" presetClass="entr" presetSubtype="0" fill="hold" nodeType="clickEffect">
+                                  <p:stCondLst>
+                                    <p:cond delay="0"/>
+                                  </p:stCondLst>
+                                  <p:childTnLst>
+                                    <p:set>
+                                      <p:cBhvr>
+                                        <p:cTn id="22" dur="1" fill="hold">
+                                          <p:stCondLst>
+                                            <p:cond delay="0"/>
+                                          </p:stCondLst>
+                                        </p:cTn>
+                                        <p:tgtEl>
+                                          <p:spTgt spid="3">
+                                            <p:txEl>
+                                              <p:pRg st="4" end="4"/>
+                                            </p:txEl>
+                                          </p:spTgt>
+                                        </p:tgtEl>
+                                        <p:attrNameLst>
+                                          <p:attrName>style.visibility</p:attrName>
+                                        </p:attrNameLst>
+                                      </p:cBhvr>
+                                      <p:to>
+                                        <p:strVal val="visible"/>
+                                      </p:to>
+                                    </p:set>
+                                  </p:childTnLst>
+                                </p:cTn>
+                              </p:par>
+                            </p:childTnLst>
+                          </p:cTn>
+                        </p:par>
+                      </p:childTnLst>
+                    </p:cTn>
+                  </p:par>
+                  <p:par>
+                    <p:cTn id="23" fill="hold">
+                      <p:stCondLst>
+                        <p:cond delay="indefinite"/>
+                      </p:stCondLst>
+                      <p:childTnLst>
+                        <p:par>
+                          <p:cTn id="24" fill="hold">
+                            <p:stCondLst>
+                              <p:cond delay="0"/>
+                            </p:stCondLst>
+                            <p:childTnLst>
+                              <p:par>
+                                <p:cTn id="25" presetID="1" presetClass="entr" presetSubtype="0" fill="hold" nodeType="clickEffect">
+                                  <p:stCondLst>
+                                    <p:cond delay="0"/>
+                                  </p:stCondLst>
+                                  <p:childTnLst>
+                                    <p:set>
+                                      <p:cBhvr>
+                                        <p:cTn id="26" dur="1" fill="hold">
+                                          <p:stCondLst>
+                                            <p:cond delay="0"/>
+                                          </p:stCondLst>
+                                        </p:cTn>
+                                        <p:tgtEl>
+                                          <p:spTgt spid="3">
+                                            <p:txEl>
+                                              <p:pRg st="5" end="5"/>
+                                            </p:txEl>
+                                          </p:spTgt>
+                                        </p:tgtEl>
+                                        <p:attrNameLst>
+                                          <p:attrName>style.visibility</p:attrName>
+                                        </p:attrNameLst>
+                                      </p:cBhvr>
+                                      <p:to>
+                                        <p:strVal val="visible"/>
+                                      </p:to>
+                                    </p:set>
+                                  </p:childTnLst>
+                                </p:cTn>
+                              </p:par>
+                            </p:childTnLst>
+                          </p:cTn>
+                        </p:par>
+                      </p:childTnLst>
+                    </p:cTn>
+                  </p:par>
+                </p:childTnLst>
+              </p:cTn>
+              <p:prevCondLst>
+                <p:cond evt="onPrev" delay="0">
+                  <p:tgtEl>
+                    <p:sldTgt/>
+                  </p:tgtEl>
+                </p:cond>
+              </p:prevCondLst>
+              <p:nextCondLst>
+                <p:cond evt="onNext" delay="0">
+                  <p:tgtEl>
+                    <p:sldTgt/>
+                  </p:tgtEl>
+                </p:cond>
+              </p:nextCondLst>
+            </p:seq>
+          </p:childTnLst>
+        </p:cTn>
+      </p:par>
+    </p:tnLst>
+  </p:timing>
+</p:sld>
+</file>
+
+<file path=ppt/slides/slide43.xml><?xml version="1.0" encoding="utf-8"?>
+<p:sld xmlns:a="http://schemas.openxmlformats.org/drawingml/2006/main" xmlns:r="http://schemas.openxmlformats.org/officeDocument/2006/relationships" xmlns:p="http://schemas.openxmlformats.org/presentationml/2006/main">
+  <p:cSld>
+    <p:spTree>
+      <p:nvGrpSpPr>
+        <p:cNvPr id="1" name=""/>
+        <p:cNvGrpSpPr/>
+        <p:nvPr/>
+      </p:nvGrpSpPr>
+      <p:grpSpPr>
+        <a:xfrm>
+          <a:off x="0" y="0"/>
+          <a:ext cx="0" cy="0"/>
+          <a:chOff x="0" y="0"/>
+          <a:chExt cx="0" cy="0"/>
+        </a:xfrm>
+      </p:grpSpPr>
+      <p:sp>
+        <p:nvSpPr>
+          <p:cNvPr id="2" name="Title 1">
+            <a:extLst>
+              <a:ext uri="{FF2B5EF4-FFF2-40B4-BE49-F238E27FC236}">
+                <a16:creationId xmlns:a16="http://schemas.microsoft.com/office/drawing/2014/main" id="{8207F09F-B406-FB4C-ABE0-890E4E4F95C8}"/>
+              </a:ext>
+            </a:extLst>
+          </p:cNvPr>
+          <p:cNvSpPr>
+            <a:spLocks noGrp="1"/>
+          </p:cNvSpPr>
+          <p:nvPr>
+            <p:ph type="ctrTitle"/>
+          </p:nvPr>
+        </p:nvSpPr>
+        <p:spPr>
+          <a:xfrm>
+            <a:off x="1524000" y="628093"/>
+            <a:ext cx="9144000" cy="915159"/>
+          </a:xfrm>
+        </p:spPr>
+        <p:txBody>
+          <a:bodyPr/>
+          <a:lstStyle/>
+          <a:p>
+            <a:r>
+              <a:rPr lang="en-US"/>
+              <a:t>Amazon Athena</a:t>
+            </a:r>
+          </a:p>
+        </p:txBody>
+      </p:sp>
+      <p:pic>
+        <p:nvPicPr>
+          <p:cNvPr id="5" name="Picture 4" descr="Diagram&#10;&#10;Description automatically generated">
+            <a:extLst>
+              <a:ext uri="{FF2B5EF4-FFF2-40B4-BE49-F238E27FC236}">
+                <a16:creationId xmlns:a16="http://schemas.microsoft.com/office/drawing/2014/main" id="{A8FA6E48-77E3-5068-7DC9-F7519FBE0CB8}"/>
+              </a:ext>
+            </a:extLst>
+          </p:cNvPr>
+          <p:cNvPicPr>
+            <a:picLocks noChangeAspect="1"/>
+          </p:cNvPicPr>
+          <p:nvPr/>
+        </p:nvPicPr>
+        <p:blipFill>
+          <a:blip r:embed="rId2"/>
+          <a:stretch>
+            <a:fillRect/>
+          </a:stretch>
+        </p:blipFill>
+        <p:spPr>
+          <a:xfrm>
+            <a:off x="1754659" y="1878226"/>
+            <a:ext cx="7253417" cy="3150973"/>
+          </a:xfrm>
+          <a:prstGeom prst="rect">
+            <a:avLst/>
+          </a:prstGeom>
+        </p:spPr>
+      </p:pic>
+    </p:spTree>
+    <p:extLst>
+      <p:ext uri="{BB962C8B-B14F-4D97-AF65-F5344CB8AC3E}">
+        <p14:creationId xmlns:p14="http://schemas.microsoft.com/office/powerpoint/2010/main" val="2977580650"/>
+      </p:ext>
+    </p:extLst>
+  </p:cSld>
+  <p:clrMapOvr>
+    <a:masterClrMapping/>
+  </p:clrMapOvr>
 </p:sld>
 </file>
 

--- a/course_information/COURSE_OUTLINE_10_WEEKS.pptx
+++ b/course_information/COURSE_OUTLINE_10_WEEKS.pptx
@@ -5,7 +5,7 @@
     <p:sldMasterId id="2147483660" r:id="rId1"/>
   </p:sldMasterIdLst>
   <p:notesMasterIdLst>
-    <p:notesMasterId r:id="rId45"/>
+    <p:notesMasterId r:id="rId46"/>
   </p:notesMasterIdLst>
   <p:sldIdLst>
     <p:sldId id="256" r:id="rId2"/>
@@ -41,16 +41,17 @@
     <p:sldId id="274" r:id="rId32"/>
     <p:sldId id="285" r:id="rId33"/>
     <p:sldId id="286" r:id="rId34"/>
-    <p:sldId id="294" r:id="rId35"/>
-    <p:sldId id="295" r:id="rId36"/>
-    <p:sldId id="296" r:id="rId37"/>
-    <p:sldId id="297" r:id="rId38"/>
-    <p:sldId id="298" r:id="rId39"/>
-    <p:sldId id="299" r:id="rId40"/>
-    <p:sldId id="300" r:id="rId41"/>
-    <p:sldId id="276" r:id="rId42"/>
-    <p:sldId id="266" r:id="rId43"/>
-    <p:sldId id="267" r:id="rId44"/>
+    <p:sldId id="301" r:id="rId35"/>
+    <p:sldId id="294" r:id="rId36"/>
+    <p:sldId id="295" r:id="rId37"/>
+    <p:sldId id="296" r:id="rId38"/>
+    <p:sldId id="297" r:id="rId39"/>
+    <p:sldId id="298" r:id="rId40"/>
+    <p:sldId id="299" r:id="rId41"/>
+    <p:sldId id="300" r:id="rId42"/>
+    <p:sldId id="276" r:id="rId43"/>
+    <p:sldId id="266" r:id="rId44"/>
+    <p:sldId id="267" r:id="rId45"/>
   </p:sldIdLst>
   <p:sldSz cx="12192000" cy="6858000"/>
   <p:notesSz cx="6858000" cy="9144000"/>
@@ -239,7 +240,7 @@
           <a:p>
             <a:fld id="{3D165E93-E323-764B-9CF0-D55E433161EB}" type="datetimeFigureOut">
               <a:rPr lang="en-US" smtClean="0"/>
-              <a:t>9/8/26</a:t>
+              <a:t>9/9/26</a:t>
             </a:fld>
             <a:endParaRPr lang="en-US"/>
           </a:p>
@@ -7589,7 +7590,22 @@
           <a:p>
             <a:r>
               <a:rPr lang="en-US" dirty="0"/>
-              <a:t>1. MapReduce Paradigm</a:t>
+              <a:t>1. MapReduce Paradigm: </a:t>
+            </a:r>
+            <a:br>
+              <a:rPr lang="en-US" dirty="0"/>
+            </a:br>
+            <a:r>
+              <a:rPr lang="en-US" dirty="0"/>
+              <a:t>     </a:t>
+            </a:r>
+            <a:r>
+              <a:rPr lang="en-US" dirty="0">
+                <a:highlight>
+                  <a:srgbClr val="00FF00"/>
+                </a:highlight>
+              </a:rPr>
+              <a:t>split  data into chunks: then parallelize</a:t>
             </a:r>
           </a:p>
         </p:txBody>
@@ -7642,8 +7658,8 @@
         </p:nvSpPr>
         <p:spPr>
           <a:xfrm>
-            <a:off x="1524000" y="1567965"/>
-            <a:ext cx="9144000" cy="3968678"/>
+            <a:off x="1524000" y="1748413"/>
+            <a:ext cx="9144000" cy="3788230"/>
           </a:xfrm>
         </p:spPr>
         <p:txBody>
@@ -8246,12 +8262,14 @@
         </p:nvSpPr>
         <p:spPr>
           <a:xfrm>
-            <a:off x="1524000" y="652805"/>
-            <a:ext cx="9144000" cy="915159"/>
+            <a:off x="1524000" y="652806"/>
+            <a:ext cx="9144000" cy="703722"/>
           </a:xfrm>
         </p:spPr>
         <p:txBody>
-          <a:bodyPr/>
+          <a:bodyPr>
+            <a:normAutofit fontScale="90000"/>
+          </a:bodyPr>
           <a:lstStyle/>
           <a:p>
             <a:r>
@@ -8279,26 +8297,49 @@
         </p:nvSpPr>
         <p:spPr>
           <a:xfrm>
-            <a:off x="1524000" y="1689652"/>
-            <a:ext cx="9144000" cy="4283765"/>
+            <a:off x="1524000" y="1467060"/>
+            <a:ext cx="9144000" cy="4506358"/>
           </a:xfrm>
         </p:spPr>
         <p:txBody>
           <a:bodyPr>
-            <a:normAutofit/>
+            <a:normAutofit fontScale="92500" lnSpcReduction="10000"/>
           </a:bodyPr>
           <a:lstStyle/>
           <a:p>
             <a:pPr algn="l"/>
             <a:r>
               <a:rPr lang="en-US" sz="3600" dirty="0"/>
-              <a:t>MapReduce has 3 functions:</a:t>
+              <a:t>MapReduce: </a:t>
+            </a:r>
+          </a:p>
+          <a:p>
+            <a:pPr marL="571500" indent="-571500" algn="l">
+              <a:buFont typeface="Arial" panose="020B0604020202020204" pitchFamily="34" charset="0"/>
+              <a:buChar char="•"/>
+            </a:pPr>
+            <a:r>
+              <a:rPr lang="en-US" sz="3600" dirty="0"/>
+              <a:t>split data into chunks and then</a:t>
+            </a:r>
+          </a:p>
+          <a:p>
+            <a:pPr marL="571500" indent="-571500" algn="l">
+              <a:buFont typeface="Arial" panose="020B0604020202020204" pitchFamily="34" charset="0"/>
+              <a:buChar char="•"/>
+            </a:pPr>
+            <a:r>
+              <a:rPr lang="en-US" sz="3600" dirty="0"/>
+              <a:t>use  3 functions:</a:t>
             </a:r>
           </a:p>
           <a:p>
             <a:pPr marL="457200" lvl="1" algn="l"/>
             <a:r>
               <a:rPr lang="en-US" sz="3200" b="1" dirty="0">
+                <a:highlight>
+                  <a:srgbClr val="00FF00"/>
+                </a:highlight>
                 <a:latin typeface="Consolas" panose="020B0609020204030204" pitchFamily="49" charset="0"/>
                 <a:cs typeface="Consolas" panose="020B0609020204030204" pitchFamily="49" charset="0"/>
               </a:rPr>
@@ -8322,6 +8363,9 @@
             <a:pPr marL="457200" lvl="1" algn="l"/>
             <a:r>
               <a:rPr lang="en-US" sz="3200" b="1" dirty="0">
+                <a:highlight>
+                  <a:srgbClr val="00FF00"/>
+                </a:highlight>
                 <a:latin typeface="Consolas" panose="020B0609020204030204" pitchFamily="49" charset="0"/>
                 <a:cs typeface="Consolas" panose="020B0609020204030204" pitchFamily="49" charset="0"/>
               </a:rPr>
@@ -8345,6 +8389,9 @@
             <a:pPr marL="457200" lvl="1" algn="l"/>
             <a:r>
               <a:rPr lang="en-US" sz="3200" b="1" dirty="0">
+                <a:highlight>
+                  <a:srgbClr val="00FF00"/>
+                </a:highlight>
                 <a:latin typeface="Consolas" panose="020B0609020204030204" pitchFamily="49" charset="0"/>
                 <a:cs typeface="Consolas" panose="020B0609020204030204" pitchFamily="49" charset="0"/>
               </a:rPr>
@@ -8352,6 +8399,9 @@
             </a:r>
             <a:r>
               <a:rPr lang="en-US" sz="800" b="1" dirty="0">
+                <a:highlight>
+                  <a:srgbClr val="00FF00"/>
+                </a:highlight>
                 <a:latin typeface="Consolas" panose="020B0609020204030204" pitchFamily="49" charset="0"/>
                 <a:cs typeface="Consolas" panose="020B0609020204030204" pitchFamily="49" charset="0"/>
               </a:rPr>
@@ -8455,15 +8505,33 @@
                                   </p:childTnLst>
                                 </p:cTn>
                               </p:par>
+                            </p:childTnLst>
+                          </p:cTn>
+                        </p:par>
+                      </p:childTnLst>
+                    </p:cTn>
+                  </p:par>
+                  <p:par>
+                    <p:cTn id="7" fill="hold">
+                      <p:stCondLst>
+                        <p:cond delay="indefinite"/>
+                      </p:stCondLst>
+                      <p:childTnLst>
+                        <p:par>
+                          <p:cTn id="8" fill="hold">
+                            <p:stCondLst>
+                              <p:cond delay="0"/>
+                            </p:stCondLst>
+                            <p:childTnLst>
                               <p:par>
-                                <p:cTn id="7" presetID="1" presetClass="entr" presetSubtype="0" fill="hold" nodeType="withEffect">
+                                <p:cTn id="9" presetID="1" presetClass="entr" presetSubtype="0" fill="hold" nodeType="clickEffect">
                                   <p:stCondLst>
                                     <p:cond delay="0"/>
                                   </p:stCondLst>
                                   <p:childTnLst>
                                     <p:set>
                                       <p:cBhvr>
-                                        <p:cTn id="8" dur="1" fill="hold">
+                                        <p:cTn id="10" dur="1" fill="hold">
                                           <p:stCondLst>
                                             <p:cond delay="0"/>
                                           </p:stCondLst>
@@ -8486,70 +8554,26 @@
                                   </p:childTnLst>
                                 </p:cTn>
                               </p:par>
+                            </p:childTnLst>
+                          </p:cTn>
+                        </p:par>
+                      </p:childTnLst>
+                    </p:cTn>
+                  </p:par>
+                  <p:par>
+                    <p:cTn id="11" fill="hold">
+                      <p:stCondLst>
+                        <p:cond delay="indefinite"/>
+                      </p:stCondLst>
+                      <p:childTnLst>
+                        <p:par>
+                          <p:cTn id="12" fill="hold">
+                            <p:stCondLst>
+                              <p:cond delay="0"/>
+                            </p:stCondLst>
+                            <p:childTnLst>
                               <p:par>
-                                <p:cTn id="9" presetID="1" presetClass="entr" presetSubtype="0" fill="hold" nodeType="withEffect">
-                                  <p:stCondLst>
-                                    <p:cond delay="0"/>
-                                  </p:stCondLst>
-                                  <p:childTnLst>
-                                    <p:set>
-                                      <p:cBhvr>
-                                        <p:cTn id="10" dur="1" fill="hold">
-                                          <p:stCondLst>
-                                            <p:cond delay="0"/>
-                                          </p:stCondLst>
-                                        </p:cTn>
-                                        <p:tgtEl>
-                                          <p:spTgt spid="3">
-                                            <p:txEl>
-                                              <p:pRg st="2" end="2"/>
-                                            </p:txEl>
-                                          </p:spTgt>
-                                        </p:tgtEl>
-                                        <p:attrNameLst>
-                                          <p:attrName>style.visibility</p:attrName>
-                                        </p:attrNameLst>
-                                      </p:cBhvr>
-                                      <p:to>
-                                        <p:strVal val="visible"/>
-                                      </p:to>
-                                    </p:set>
-                                  </p:childTnLst>
-                                </p:cTn>
-                              </p:par>
-                              <p:par>
-                                <p:cTn id="11" presetID="1" presetClass="entr" presetSubtype="0" fill="hold" nodeType="withEffect">
-                                  <p:stCondLst>
-                                    <p:cond delay="0"/>
-                                  </p:stCondLst>
-                                  <p:childTnLst>
-                                    <p:set>
-                                      <p:cBhvr>
-                                        <p:cTn id="12" dur="1" fill="hold">
-                                          <p:stCondLst>
-                                            <p:cond delay="0"/>
-                                          </p:stCondLst>
-                                        </p:cTn>
-                                        <p:tgtEl>
-                                          <p:spTgt spid="3">
-                                            <p:txEl>
-                                              <p:pRg st="3" end="3"/>
-                                            </p:txEl>
-                                          </p:spTgt>
-                                        </p:tgtEl>
-                                        <p:attrNameLst>
-                                          <p:attrName>style.visibility</p:attrName>
-                                        </p:attrNameLst>
-                                      </p:cBhvr>
-                                      <p:to>
-                                        <p:strVal val="visible"/>
-                                      </p:to>
-                                    </p:set>
-                                  </p:childTnLst>
-                                </p:cTn>
-                              </p:par>
-                              <p:par>
-                                <p:cTn id="13" presetID="1" presetClass="entr" presetSubtype="0" fill="hold" nodeType="withEffect">
+                                <p:cTn id="13" presetID="1" presetClass="entr" presetSubtype="0" fill="hold" nodeType="clickEffect">
                                   <p:stCondLst>
                                     <p:cond delay="0"/>
                                   </p:stCondLst>
@@ -8564,7 +8588,7 @@
                                         <p:tgtEl>
                                           <p:spTgt spid="3">
                                             <p:txEl>
-                                              <p:pRg st="4" end="4"/>
+                                              <p:pRg st="2" end="2"/>
                                             </p:txEl>
                                           </p:spTgt>
                                         </p:tgtEl>
@@ -8595,7 +8619,7 @@
                                         <p:tgtEl>
                                           <p:spTgt spid="3">
                                             <p:txEl>
-                                              <p:pRg st="5" end="5"/>
+                                              <p:pRg st="3" end="3"/>
                                             </p:txEl>
                                           </p:spTgt>
                                         </p:tgtEl>
@@ -8626,7 +8650,131 @@
                                         <p:tgtEl>
                                           <p:spTgt spid="3">
                                             <p:txEl>
+                                              <p:pRg st="4" end="4"/>
+                                            </p:txEl>
+                                          </p:spTgt>
+                                        </p:tgtEl>
+                                        <p:attrNameLst>
+                                          <p:attrName>style.visibility</p:attrName>
+                                        </p:attrNameLst>
+                                      </p:cBhvr>
+                                      <p:to>
+                                        <p:strVal val="visible"/>
+                                      </p:to>
+                                    </p:set>
+                                  </p:childTnLst>
+                                </p:cTn>
+                              </p:par>
+                              <p:par>
+                                <p:cTn id="19" presetID="1" presetClass="entr" presetSubtype="0" fill="hold" nodeType="withEffect">
+                                  <p:stCondLst>
+                                    <p:cond delay="0"/>
+                                  </p:stCondLst>
+                                  <p:childTnLst>
+                                    <p:set>
+                                      <p:cBhvr>
+                                        <p:cTn id="20" dur="1" fill="hold">
+                                          <p:stCondLst>
+                                            <p:cond delay="0"/>
+                                          </p:stCondLst>
+                                        </p:cTn>
+                                        <p:tgtEl>
+                                          <p:spTgt spid="3">
+                                            <p:txEl>
+                                              <p:pRg st="5" end="5"/>
+                                            </p:txEl>
+                                          </p:spTgt>
+                                        </p:tgtEl>
+                                        <p:attrNameLst>
+                                          <p:attrName>style.visibility</p:attrName>
+                                        </p:attrNameLst>
+                                      </p:cBhvr>
+                                      <p:to>
+                                        <p:strVal val="visible"/>
+                                      </p:to>
+                                    </p:set>
+                                  </p:childTnLst>
+                                </p:cTn>
+                              </p:par>
+                              <p:par>
+                                <p:cTn id="21" presetID="1" presetClass="entr" presetSubtype="0" fill="hold" nodeType="withEffect">
+                                  <p:stCondLst>
+                                    <p:cond delay="0"/>
+                                  </p:stCondLst>
+                                  <p:childTnLst>
+                                    <p:set>
+                                      <p:cBhvr>
+                                        <p:cTn id="22" dur="1" fill="hold">
+                                          <p:stCondLst>
+                                            <p:cond delay="0"/>
+                                          </p:stCondLst>
+                                        </p:cTn>
+                                        <p:tgtEl>
+                                          <p:spTgt spid="3">
+                                            <p:txEl>
                                               <p:pRg st="6" end="6"/>
+                                            </p:txEl>
+                                          </p:spTgt>
+                                        </p:tgtEl>
+                                        <p:attrNameLst>
+                                          <p:attrName>style.visibility</p:attrName>
+                                        </p:attrNameLst>
+                                      </p:cBhvr>
+                                      <p:to>
+                                        <p:strVal val="visible"/>
+                                      </p:to>
+                                    </p:set>
+                                  </p:childTnLst>
+                                </p:cTn>
+                              </p:par>
+                              <p:par>
+                                <p:cTn id="23" presetID="1" presetClass="entr" presetSubtype="0" fill="hold" nodeType="withEffect">
+                                  <p:stCondLst>
+                                    <p:cond delay="0"/>
+                                  </p:stCondLst>
+                                  <p:childTnLst>
+                                    <p:set>
+                                      <p:cBhvr>
+                                        <p:cTn id="24" dur="1" fill="hold">
+                                          <p:stCondLst>
+                                            <p:cond delay="0"/>
+                                          </p:stCondLst>
+                                        </p:cTn>
+                                        <p:tgtEl>
+                                          <p:spTgt spid="3">
+                                            <p:txEl>
+                                              <p:pRg st="7" end="7"/>
+                                            </p:txEl>
+                                          </p:spTgt>
+                                        </p:tgtEl>
+                                        <p:attrNameLst>
+                                          <p:attrName>style.visibility</p:attrName>
+                                        </p:attrNameLst>
+                                      </p:cBhvr>
+                                      <p:to>
+                                        <p:strVal val="visible"/>
+                                      </p:to>
+                                    </p:set>
+                                  </p:childTnLst>
+                                </p:cTn>
+                              </p:par>
+                              <p:par>
+                                <p:cTn id="25" presetID="1" presetClass="entr" presetSubtype="0" fill="hold" nodeType="withEffect">
+                                  <p:stCondLst>
+                                    <p:cond delay="0"/>
+                                  </p:stCondLst>
+                                  <p:childTnLst>
+                                    <p:set>
+                                      <p:cBhvr>
+                                        <p:cTn id="26" dur="1" fill="hold">
+                                          <p:stCondLst>
+                                            <p:cond delay="0"/>
+                                          </p:stCondLst>
+                                        </p:cTn>
+                                        <p:tgtEl>
+                                          <p:spTgt spid="3">
+                                            <p:txEl>
+                                              <p:pRg st="8" end="8"/>
                                             </p:txEl>
                                           </p:spTgt>
                                         </p:tgtEl>
@@ -16217,7 +16365,7 @@
         <p:spPr>
           <a:xfrm>
             <a:off x="1524000" y="565772"/>
-            <a:ext cx="9144000" cy="1544546"/>
+            <a:ext cx="9144000" cy="1876058"/>
           </a:xfrm>
         </p:spPr>
         <p:txBody>
@@ -16227,34 +16375,34 @@
           <a:lstStyle/>
           <a:p>
             <a:r>
-              <a:rPr lang="en-US" sz="3600"/>
+              <a:rPr lang="en-US" sz="3600" dirty="0"/>
               <a:t>Spark Data Abstractions: RDDs</a:t>
             </a:r>
             <a:br>
-              <a:rPr lang="en-US" sz="3600"/>
+              <a:rPr lang="en-US" sz="3600" dirty="0"/>
             </a:br>
             <a:r>
-              <a:rPr lang="en-US" sz="3600"/>
+              <a:rPr lang="en-US" sz="3600" dirty="0"/>
               <a:t>Billions of data elements</a:t>
             </a:r>
             <a:br>
-              <a:rPr lang="en-US"/>
+              <a:rPr lang="en-US" dirty="0"/>
             </a:br>
             <a:r>
-              <a:rPr lang="en-US" b="1"/>
-              <a:t>Each element</a:t>
-            </a:r>
-            <a:r>
-              <a:rPr lang="en-US"/>
+              <a:rPr lang="en-US" b="1" dirty="0"/>
+              <a:t>Each RDD element</a:t>
+            </a:r>
+            <a:r>
+              <a:rPr lang="en-US" dirty="0"/>
               <a:t>: </a:t>
             </a:r>
             <a:r>
-              <a:rPr lang="en-US" sz="3600">
+              <a:rPr lang="en-US" sz="2700" b="1" dirty="0">
                 <a:latin typeface="Courier" pitchFamily="2" charset="0"/>
               </a:rPr>
               <a:t>(String, (Float, Float))</a:t>
             </a:r>
-            <a:endParaRPr lang="en-US">
+            <a:endParaRPr lang="en-US" b="1" dirty="0">
               <a:latin typeface="Courier" pitchFamily="2" charset="0"/>
             </a:endParaRPr>
           </a:p>
@@ -16547,7 +16695,7 @@
           <a:lstStyle/>
           <a:p>
             <a:r>
-              <a:rPr lang="en-US"/>
+              <a:rPr lang="en-US" dirty="0"/>
               <a:t>Element-1:</a:t>
             </a:r>
           </a:p>
@@ -16799,7 +16947,7 @@
             </a:r>
             <a:r>
               <a:rPr lang="en-US" sz="3200" dirty="0"/>
-              <a:t> Example</a:t>
+              <a:t> Example-1</a:t>
             </a:r>
           </a:p>
         </p:txBody>
@@ -17800,7 +17948,7 @@
             </a:r>
             <a:r>
               <a:rPr lang="en-US" sz="3200" dirty="0"/>
-              <a:t> Example </a:t>
+              <a:t> Example-1 </a:t>
             </a:r>
             <a:r>
               <a:rPr lang="en-US" sz="1600" dirty="0"/>
@@ -18841,6 +18989,754 @@
         <p:cNvPr id="1" name="">
           <a:extLst>
             <a:ext uri="{FF2B5EF4-FFF2-40B4-BE49-F238E27FC236}">
+              <a16:creationId xmlns:a16="http://schemas.microsoft.com/office/drawing/2014/main" id="{1A569E83-AC26-1D39-228D-CF195ADB583A}"/>
+            </a:ext>
+          </a:extLst>
+        </p:cNvPr>
+        <p:cNvGrpSpPr/>
+        <p:nvPr/>
+      </p:nvGrpSpPr>
+      <p:grpSpPr>
+        <a:xfrm>
+          <a:off x="0" y="0"/>
+          <a:ext cx="0" cy="0"/>
+          <a:chOff x="0" y="0"/>
+          <a:chExt cx="0" cy="0"/>
+        </a:xfrm>
+      </p:grpSpPr>
+      <p:sp>
+        <p:nvSpPr>
+          <p:cNvPr id="2" name="Title 1">
+            <a:extLst>
+              <a:ext uri="{FF2B5EF4-FFF2-40B4-BE49-F238E27FC236}">
+                <a16:creationId xmlns:a16="http://schemas.microsoft.com/office/drawing/2014/main" id="{62CB487F-7417-A4D6-1BF1-F1FD387ABAB7}"/>
+              </a:ext>
+            </a:extLst>
+          </p:cNvPr>
+          <p:cNvSpPr>
+            <a:spLocks noGrp="1"/>
+          </p:cNvSpPr>
+          <p:nvPr>
+            <p:ph type="ctrTitle"/>
+          </p:nvPr>
+        </p:nvSpPr>
+        <p:spPr>
+          <a:xfrm>
+            <a:off x="1524000" y="401935"/>
+            <a:ext cx="9144000" cy="582804"/>
+          </a:xfrm>
+        </p:spPr>
+        <p:txBody>
+          <a:bodyPr>
+            <a:noAutofit/>
+          </a:bodyPr>
+          <a:lstStyle/>
+          <a:p>
+            <a:r>
+              <a:rPr lang="en-US" sz="3200" dirty="0" err="1">
+                <a:highlight>
+                  <a:srgbClr val="00FFFF"/>
+                </a:highlight>
+              </a:rPr>
+              <a:t>PySpark</a:t>
+            </a:r>
+            <a:r>
+              <a:rPr lang="en-US" sz="3200" dirty="0">
+                <a:highlight>
+                  <a:srgbClr val="00FFFF"/>
+                </a:highlight>
+              </a:rPr>
+              <a:t>: create a </a:t>
+            </a:r>
+            <a:r>
+              <a:rPr lang="en-US" sz="3200" dirty="0" err="1">
+                <a:highlight>
+                  <a:srgbClr val="00FFFF"/>
+                </a:highlight>
+              </a:rPr>
+              <a:t>DataFrame</a:t>
+            </a:r>
+            <a:r>
+              <a:rPr lang="en-US" sz="3200" dirty="0">
+                <a:highlight>
+                  <a:srgbClr val="00FFFF"/>
+                </a:highlight>
+              </a:rPr>
+              <a:t> from a CSV File</a:t>
+            </a:r>
+          </a:p>
+        </p:txBody>
+      </p:sp>
+      <p:sp>
+        <p:nvSpPr>
+          <p:cNvPr id="3" name="Subtitle 2">
+            <a:extLst>
+              <a:ext uri="{FF2B5EF4-FFF2-40B4-BE49-F238E27FC236}">
+                <a16:creationId xmlns:a16="http://schemas.microsoft.com/office/drawing/2014/main" id="{72BEB1A1-4525-6F4C-F211-E8BCA829B9A4}"/>
+              </a:ext>
+            </a:extLst>
+          </p:cNvPr>
+          <p:cNvSpPr>
+            <a:spLocks noGrp="1"/>
+          </p:cNvSpPr>
+          <p:nvPr>
+            <p:ph type="subTitle" idx="1"/>
+          </p:nvPr>
+        </p:nvSpPr>
+        <p:spPr>
+          <a:xfrm>
+            <a:off x="1524000" y="1135464"/>
+            <a:ext cx="9144000" cy="4837953"/>
+          </a:xfrm>
+        </p:spPr>
+        <p:txBody>
+          <a:bodyPr>
+            <a:normAutofit/>
+          </a:bodyPr>
+          <a:lstStyle/>
+          <a:p>
+            <a:r>
+              <a:rPr lang="en-US" dirty="0">
+                <a:solidFill>
+                  <a:schemeClr val="tx1"/>
+                </a:solidFill>
+                <a:highlight>
+                  <a:srgbClr val="00FF00"/>
+                </a:highlight>
+                <a:latin typeface="Consolas" panose="020B0609020204030204" pitchFamily="49" charset="0"/>
+                <a:cs typeface="Consolas" panose="020B0609020204030204" pitchFamily="49" charset="0"/>
+              </a:rPr>
+              <a:t># Read data from a CSV file with a header </a:t>
+            </a:r>
+          </a:p>
+          <a:p>
+            <a:r>
+              <a:rPr lang="en-US" dirty="0">
+                <a:solidFill>
+                  <a:schemeClr val="tx1"/>
+                </a:solidFill>
+                <a:latin typeface="Consolas" panose="020B0609020204030204" pitchFamily="49" charset="0"/>
+                <a:cs typeface="Consolas" panose="020B0609020204030204" pitchFamily="49" charset="0"/>
+              </a:rPr>
+              <a:t>INPUT_PATH = "path/to/your/</a:t>
+            </a:r>
+            <a:r>
+              <a:rPr lang="en-US" dirty="0" err="1">
+                <a:solidFill>
+                  <a:schemeClr val="tx1"/>
+                </a:solidFill>
+                <a:latin typeface="Consolas" panose="020B0609020204030204" pitchFamily="49" charset="0"/>
+                <a:cs typeface="Consolas" panose="020B0609020204030204" pitchFamily="49" charset="0"/>
+              </a:rPr>
+              <a:t>file.csv</a:t>
+            </a:r>
+            <a:r>
+              <a:rPr lang="en-US" dirty="0">
+                <a:solidFill>
+                  <a:schemeClr val="tx1"/>
+                </a:solidFill>
+                <a:latin typeface="Consolas" panose="020B0609020204030204" pitchFamily="49" charset="0"/>
+                <a:cs typeface="Consolas" panose="020B0609020204030204" pitchFamily="49" charset="0"/>
+              </a:rPr>
+              <a:t>"</a:t>
+            </a:r>
+          </a:p>
+          <a:p>
+            <a:r>
+              <a:rPr lang="en-US" dirty="0" err="1">
+                <a:solidFill>
+                  <a:schemeClr val="tx1"/>
+                </a:solidFill>
+                <a:latin typeface="Consolas" panose="020B0609020204030204" pitchFamily="49" charset="0"/>
+                <a:cs typeface="Consolas" panose="020B0609020204030204" pitchFamily="49" charset="0"/>
+              </a:rPr>
+              <a:t>df</a:t>
+            </a:r>
+            <a:r>
+              <a:rPr lang="en-US" dirty="0">
+                <a:solidFill>
+                  <a:schemeClr val="tx1"/>
+                </a:solidFill>
+                <a:latin typeface="Consolas" panose="020B0609020204030204" pitchFamily="49" charset="0"/>
+                <a:cs typeface="Consolas" panose="020B0609020204030204" pitchFamily="49" charset="0"/>
+              </a:rPr>
+              <a:t> = </a:t>
+            </a:r>
+            <a:r>
+              <a:rPr lang="en-US" dirty="0" err="1">
+                <a:solidFill>
+                  <a:schemeClr val="tx1"/>
+                </a:solidFill>
+                <a:latin typeface="Consolas" panose="020B0609020204030204" pitchFamily="49" charset="0"/>
+                <a:cs typeface="Consolas" panose="020B0609020204030204" pitchFamily="49" charset="0"/>
+              </a:rPr>
+              <a:t>spark.read.csv</a:t>
+            </a:r>
+            <a:r>
+              <a:rPr lang="en-US" dirty="0">
+                <a:solidFill>
+                  <a:schemeClr val="tx1"/>
+                </a:solidFill>
+                <a:latin typeface="Consolas" panose="020B0609020204030204" pitchFamily="49" charset="0"/>
+                <a:cs typeface="Consolas" panose="020B0609020204030204" pitchFamily="49" charset="0"/>
+              </a:rPr>
+              <a:t>(</a:t>
+            </a:r>
+          </a:p>
+          <a:p>
+            <a:r>
+              <a:rPr lang="en-US" dirty="0">
+                <a:solidFill>
+                  <a:schemeClr val="tx1"/>
+                </a:solidFill>
+                <a:latin typeface="Consolas" panose="020B0609020204030204" pitchFamily="49" charset="0"/>
+                <a:cs typeface="Consolas" panose="020B0609020204030204" pitchFamily="49" charset="0"/>
+              </a:rPr>
+              <a:t>   INPUT_PATH,</a:t>
+            </a:r>
+          </a:p>
+          <a:p>
+            <a:r>
+              <a:rPr lang="en-US" dirty="0">
+                <a:solidFill>
+                  <a:schemeClr val="tx1"/>
+                </a:solidFill>
+                <a:latin typeface="Consolas" panose="020B0609020204030204" pitchFamily="49" charset="0"/>
+                <a:cs typeface="Consolas" panose="020B0609020204030204" pitchFamily="49" charset="0"/>
+              </a:rPr>
+              <a:t>   header=True, </a:t>
+            </a:r>
+          </a:p>
+          <a:p>
+            <a:r>
+              <a:rPr lang="en-US" dirty="0">
+                <a:solidFill>
+                  <a:schemeClr val="tx1"/>
+                </a:solidFill>
+                <a:latin typeface="Consolas" panose="020B0609020204030204" pitchFamily="49" charset="0"/>
+                <a:cs typeface="Consolas" panose="020B0609020204030204" pitchFamily="49" charset="0"/>
+              </a:rPr>
+              <a:t>   </a:t>
+            </a:r>
+            <a:r>
+              <a:rPr lang="en-US" dirty="0" err="1">
+                <a:solidFill>
+                  <a:schemeClr val="tx1"/>
+                </a:solidFill>
+                <a:latin typeface="Consolas" panose="020B0609020204030204" pitchFamily="49" charset="0"/>
+                <a:cs typeface="Consolas" panose="020B0609020204030204" pitchFamily="49" charset="0"/>
+              </a:rPr>
+              <a:t>inferSchema</a:t>
+            </a:r>
+            <a:r>
+              <a:rPr lang="en-US" dirty="0">
+                <a:solidFill>
+                  <a:schemeClr val="tx1"/>
+                </a:solidFill>
+                <a:latin typeface="Consolas" panose="020B0609020204030204" pitchFamily="49" charset="0"/>
+                <a:cs typeface="Consolas" panose="020B0609020204030204" pitchFamily="49" charset="0"/>
+              </a:rPr>
+              <a:t>=True) </a:t>
+            </a:r>
+          </a:p>
+          <a:p>
+            <a:endParaRPr lang="en-US" dirty="0">
+              <a:solidFill>
+                <a:schemeClr val="tx1"/>
+              </a:solidFill>
+              <a:latin typeface="Consolas" panose="020B0609020204030204" pitchFamily="49" charset="0"/>
+              <a:cs typeface="Consolas" panose="020B0609020204030204" pitchFamily="49" charset="0"/>
+            </a:endParaRPr>
+          </a:p>
+          <a:p>
+            <a:r>
+              <a:rPr lang="en-US" dirty="0">
+                <a:solidFill>
+                  <a:schemeClr val="tx1"/>
+                </a:solidFill>
+                <a:highlight>
+                  <a:srgbClr val="00FF00"/>
+                </a:highlight>
+                <a:latin typeface="Consolas" panose="020B0609020204030204" pitchFamily="49" charset="0"/>
+                <a:cs typeface="Consolas" panose="020B0609020204030204" pitchFamily="49" charset="0"/>
+              </a:rPr>
+              <a:t># Show the first few rows of the CSV data </a:t>
+            </a:r>
+          </a:p>
+          <a:p>
+            <a:r>
+              <a:rPr lang="en-US" dirty="0" err="1">
+                <a:solidFill>
+                  <a:schemeClr val="tx1"/>
+                </a:solidFill>
+                <a:latin typeface="Consolas" panose="020B0609020204030204" pitchFamily="49" charset="0"/>
+                <a:cs typeface="Consolas" panose="020B0609020204030204" pitchFamily="49" charset="0"/>
+              </a:rPr>
+              <a:t>df.show</a:t>
+            </a:r>
+            <a:r>
+              <a:rPr lang="en-US" dirty="0">
+                <a:solidFill>
+                  <a:schemeClr val="tx1"/>
+                </a:solidFill>
+                <a:latin typeface="Consolas" panose="020B0609020204030204" pitchFamily="49" charset="0"/>
+                <a:cs typeface="Consolas" panose="020B0609020204030204" pitchFamily="49" charset="0"/>
+              </a:rPr>
+              <a:t>()</a:t>
+            </a:r>
+            <a:endParaRPr lang="en-US" sz="2800" dirty="0">
+              <a:solidFill>
+                <a:schemeClr val="tx1"/>
+              </a:solidFill>
+              <a:latin typeface="Consolas" panose="020B0609020204030204" pitchFamily="49" charset="0"/>
+              <a:cs typeface="Consolas" panose="020B0609020204030204" pitchFamily="49" charset="0"/>
+            </a:endParaRPr>
+          </a:p>
+        </p:txBody>
+      </p:sp>
+    </p:spTree>
+    <p:extLst>
+      <p:ext uri="{BB962C8B-B14F-4D97-AF65-F5344CB8AC3E}">
+        <p14:creationId xmlns:p14="http://schemas.microsoft.com/office/powerpoint/2010/main" val="54200526"/>
+      </p:ext>
+    </p:extLst>
+  </p:cSld>
+  <p:clrMapOvr>
+    <a:masterClrMapping/>
+  </p:clrMapOvr>
+  <p:timing>
+    <p:tnLst>
+      <p:par>
+        <p:cTn id="1" dur="indefinite" restart="never" nodeType="tmRoot">
+          <p:childTnLst>
+            <p:seq concurrent="1" nextAc="seek">
+              <p:cTn id="2" dur="indefinite" nodeType="mainSeq">
+                <p:childTnLst>
+                  <p:par>
+                    <p:cTn id="3" fill="hold">
+                      <p:stCondLst>
+                        <p:cond delay="indefinite"/>
+                      </p:stCondLst>
+                      <p:childTnLst>
+                        <p:par>
+                          <p:cTn id="4" fill="hold">
+                            <p:stCondLst>
+                              <p:cond delay="0"/>
+                            </p:stCondLst>
+                            <p:childTnLst>
+                              <p:par>
+                                <p:cTn id="5" presetID="1" presetClass="entr" presetSubtype="0" fill="hold" nodeType="clickEffect">
+                                  <p:stCondLst>
+                                    <p:cond delay="0"/>
+                                  </p:stCondLst>
+                                  <p:childTnLst>
+                                    <p:set>
+                                      <p:cBhvr>
+                                        <p:cTn id="6" dur="1" fill="hold">
+                                          <p:stCondLst>
+                                            <p:cond delay="0"/>
+                                          </p:stCondLst>
+                                        </p:cTn>
+                                        <p:tgtEl>
+                                          <p:spTgt spid="3">
+                                            <p:txEl>
+                                              <p:pRg st="0" end="0"/>
+                                            </p:txEl>
+                                          </p:spTgt>
+                                        </p:tgtEl>
+                                        <p:attrNameLst>
+                                          <p:attrName>style.visibility</p:attrName>
+                                        </p:attrNameLst>
+                                      </p:cBhvr>
+                                      <p:to>
+                                        <p:strVal val="visible"/>
+                                      </p:to>
+                                    </p:set>
+                                  </p:childTnLst>
+                                </p:cTn>
+                              </p:par>
+                            </p:childTnLst>
+                          </p:cTn>
+                        </p:par>
+                      </p:childTnLst>
+                    </p:cTn>
+                  </p:par>
+                  <p:par>
+                    <p:cTn id="7" fill="hold">
+                      <p:stCondLst>
+                        <p:cond delay="indefinite"/>
+                      </p:stCondLst>
+                      <p:childTnLst>
+                        <p:par>
+                          <p:cTn id="8" fill="hold">
+                            <p:stCondLst>
+                              <p:cond delay="0"/>
+                            </p:stCondLst>
+                            <p:childTnLst>
+                              <p:par>
+                                <p:cTn id="9" presetID="1" presetClass="entr" presetSubtype="0" fill="hold" nodeType="clickEffect">
+                                  <p:stCondLst>
+                                    <p:cond delay="0"/>
+                                  </p:stCondLst>
+                                  <p:childTnLst>
+                                    <p:set>
+                                      <p:cBhvr>
+                                        <p:cTn id="10" dur="1" fill="hold">
+                                          <p:stCondLst>
+                                            <p:cond delay="0"/>
+                                          </p:stCondLst>
+                                        </p:cTn>
+                                        <p:tgtEl>
+                                          <p:spTgt spid="3">
+                                            <p:txEl>
+                                              <p:pRg st="1" end="1"/>
+                                            </p:txEl>
+                                          </p:spTgt>
+                                        </p:tgtEl>
+                                        <p:attrNameLst>
+                                          <p:attrName>style.visibility</p:attrName>
+                                        </p:attrNameLst>
+                                      </p:cBhvr>
+                                      <p:to>
+                                        <p:strVal val="visible"/>
+                                      </p:to>
+                                    </p:set>
+                                  </p:childTnLst>
+                                </p:cTn>
+                              </p:par>
+                            </p:childTnLst>
+                          </p:cTn>
+                        </p:par>
+                      </p:childTnLst>
+                    </p:cTn>
+                  </p:par>
+                  <p:par>
+                    <p:cTn id="11" fill="hold">
+                      <p:stCondLst>
+                        <p:cond delay="indefinite"/>
+                      </p:stCondLst>
+                      <p:childTnLst>
+                        <p:par>
+                          <p:cTn id="12" fill="hold">
+                            <p:stCondLst>
+                              <p:cond delay="0"/>
+                            </p:stCondLst>
+                            <p:childTnLst>
+                              <p:par>
+                                <p:cTn id="13" presetID="1" presetClass="entr" presetSubtype="0" fill="hold" nodeType="clickEffect">
+                                  <p:stCondLst>
+                                    <p:cond delay="0"/>
+                                  </p:stCondLst>
+                                  <p:childTnLst>
+                                    <p:set>
+                                      <p:cBhvr>
+                                        <p:cTn id="14" dur="1" fill="hold">
+                                          <p:stCondLst>
+                                            <p:cond delay="0"/>
+                                          </p:stCondLst>
+                                        </p:cTn>
+                                        <p:tgtEl>
+                                          <p:spTgt spid="3">
+                                            <p:txEl>
+                                              <p:pRg st="2" end="2"/>
+                                            </p:txEl>
+                                          </p:spTgt>
+                                        </p:tgtEl>
+                                        <p:attrNameLst>
+                                          <p:attrName>style.visibility</p:attrName>
+                                        </p:attrNameLst>
+                                      </p:cBhvr>
+                                      <p:to>
+                                        <p:strVal val="visible"/>
+                                      </p:to>
+                                    </p:set>
+                                  </p:childTnLst>
+                                </p:cTn>
+                              </p:par>
+                            </p:childTnLst>
+                          </p:cTn>
+                        </p:par>
+                      </p:childTnLst>
+                    </p:cTn>
+                  </p:par>
+                  <p:par>
+                    <p:cTn id="15" fill="hold">
+                      <p:stCondLst>
+                        <p:cond delay="indefinite"/>
+                      </p:stCondLst>
+                      <p:childTnLst>
+                        <p:par>
+                          <p:cTn id="16" fill="hold">
+                            <p:stCondLst>
+                              <p:cond delay="0"/>
+                            </p:stCondLst>
+                            <p:childTnLst>
+                              <p:par>
+                                <p:cTn id="17" presetID="1" presetClass="entr" presetSubtype="0" fill="hold" nodeType="clickEffect">
+                                  <p:stCondLst>
+                                    <p:cond delay="0"/>
+                                  </p:stCondLst>
+                                  <p:childTnLst>
+                                    <p:set>
+                                      <p:cBhvr>
+                                        <p:cTn id="18" dur="1" fill="hold">
+                                          <p:stCondLst>
+                                            <p:cond delay="0"/>
+                                          </p:stCondLst>
+                                        </p:cTn>
+                                        <p:tgtEl>
+                                          <p:spTgt spid="3">
+                                            <p:txEl>
+                                              <p:pRg st="3" end="3"/>
+                                            </p:txEl>
+                                          </p:spTgt>
+                                        </p:tgtEl>
+                                        <p:attrNameLst>
+                                          <p:attrName>style.visibility</p:attrName>
+                                        </p:attrNameLst>
+                                      </p:cBhvr>
+                                      <p:to>
+                                        <p:strVal val="visible"/>
+                                      </p:to>
+                                    </p:set>
+                                  </p:childTnLst>
+                                </p:cTn>
+                              </p:par>
+                            </p:childTnLst>
+                          </p:cTn>
+                        </p:par>
+                      </p:childTnLst>
+                    </p:cTn>
+                  </p:par>
+                  <p:par>
+                    <p:cTn id="19" fill="hold">
+                      <p:stCondLst>
+                        <p:cond delay="indefinite"/>
+                      </p:stCondLst>
+                      <p:childTnLst>
+                        <p:par>
+                          <p:cTn id="20" fill="hold">
+                            <p:stCondLst>
+                              <p:cond delay="0"/>
+                            </p:stCondLst>
+                            <p:childTnLst>
+                              <p:par>
+                                <p:cTn id="21" presetID="1" presetClass="entr" presetSubtype="0" fill="hold" nodeType="clickEffect">
+                                  <p:stCondLst>
+                                    <p:cond delay="0"/>
+                                  </p:stCondLst>
+                                  <p:childTnLst>
+                                    <p:set>
+                                      <p:cBhvr>
+                                        <p:cTn id="22" dur="1" fill="hold">
+                                          <p:stCondLst>
+                                            <p:cond delay="0"/>
+                                          </p:stCondLst>
+                                        </p:cTn>
+                                        <p:tgtEl>
+                                          <p:spTgt spid="3">
+                                            <p:txEl>
+                                              <p:pRg st="4" end="4"/>
+                                            </p:txEl>
+                                          </p:spTgt>
+                                        </p:tgtEl>
+                                        <p:attrNameLst>
+                                          <p:attrName>style.visibility</p:attrName>
+                                        </p:attrNameLst>
+                                      </p:cBhvr>
+                                      <p:to>
+                                        <p:strVal val="visible"/>
+                                      </p:to>
+                                    </p:set>
+                                  </p:childTnLst>
+                                </p:cTn>
+                              </p:par>
+                            </p:childTnLst>
+                          </p:cTn>
+                        </p:par>
+                      </p:childTnLst>
+                    </p:cTn>
+                  </p:par>
+                  <p:par>
+                    <p:cTn id="23" fill="hold">
+                      <p:stCondLst>
+                        <p:cond delay="indefinite"/>
+                      </p:stCondLst>
+                      <p:childTnLst>
+                        <p:par>
+                          <p:cTn id="24" fill="hold">
+                            <p:stCondLst>
+                              <p:cond delay="0"/>
+                            </p:stCondLst>
+                            <p:childTnLst>
+                              <p:par>
+                                <p:cTn id="25" presetID="1" presetClass="entr" presetSubtype="0" fill="hold" nodeType="clickEffect">
+                                  <p:stCondLst>
+                                    <p:cond delay="0"/>
+                                  </p:stCondLst>
+                                  <p:childTnLst>
+                                    <p:set>
+                                      <p:cBhvr>
+                                        <p:cTn id="26" dur="1" fill="hold">
+                                          <p:stCondLst>
+                                            <p:cond delay="0"/>
+                                          </p:stCondLst>
+                                        </p:cTn>
+                                        <p:tgtEl>
+                                          <p:spTgt spid="3">
+                                            <p:txEl>
+                                              <p:pRg st="5" end="5"/>
+                                            </p:txEl>
+                                          </p:spTgt>
+                                        </p:tgtEl>
+                                        <p:attrNameLst>
+                                          <p:attrName>style.visibility</p:attrName>
+                                        </p:attrNameLst>
+                                      </p:cBhvr>
+                                      <p:to>
+                                        <p:strVal val="visible"/>
+                                      </p:to>
+                                    </p:set>
+                                  </p:childTnLst>
+                                </p:cTn>
+                              </p:par>
+                            </p:childTnLst>
+                          </p:cTn>
+                        </p:par>
+                      </p:childTnLst>
+                    </p:cTn>
+                  </p:par>
+                  <p:par>
+                    <p:cTn id="27" fill="hold">
+                      <p:stCondLst>
+                        <p:cond delay="indefinite"/>
+                      </p:stCondLst>
+                      <p:childTnLst>
+                        <p:par>
+                          <p:cTn id="28" fill="hold">
+                            <p:stCondLst>
+                              <p:cond delay="0"/>
+                            </p:stCondLst>
+                            <p:childTnLst>
+                              <p:par>
+                                <p:cTn id="29" presetID="1" presetClass="entr" presetSubtype="0" fill="hold" nodeType="clickEffect">
+                                  <p:stCondLst>
+                                    <p:cond delay="0"/>
+                                  </p:stCondLst>
+                                  <p:childTnLst>
+                                    <p:set>
+                                      <p:cBhvr>
+                                        <p:cTn id="30" dur="1" fill="hold">
+                                          <p:stCondLst>
+                                            <p:cond delay="0"/>
+                                          </p:stCondLst>
+                                        </p:cTn>
+                                        <p:tgtEl>
+                                          <p:spTgt spid="3">
+                                            <p:txEl>
+                                              <p:pRg st="7" end="7"/>
+                                            </p:txEl>
+                                          </p:spTgt>
+                                        </p:tgtEl>
+                                        <p:attrNameLst>
+                                          <p:attrName>style.visibility</p:attrName>
+                                        </p:attrNameLst>
+                                      </p:cBhvr>
+                                      <p:to>
+                                        <p:strVal val="visible"/>
+                                      </p:to>
+                                    </p:set>
+                                  </p:childTnLst>
+                                </p:cTn>
+                              </p:par>
+                            </p:childTnLst>
+                          </p:cTn>
+                        </p:par>
+                      </p:childTnLst>
+                    </p:cTn>
+                  </p:par>
+                  <p:par>
+                    <p:cTn id="31" fill="hold">
+                      <p:stCondLst>
+                        <p:cond delay="indefinite"/>
+                      </p:stCondLst>
+                      <p:childTnLst>
+                        <p:par>
+                          <p:cTn id="32" fill="hold">
+                            <p:stCondLst>
+                              <p:cond delay="0"/>
+                            </p:stCondLst>
+                            <p:childTnLst>
+                              <p:par>
+                                <p:cTn id="33" presetID="1" presetClass="entr" presetSubtype="0" fill="hold" nodeType="clickEffect">
+                                  <p:stCondLst>
+                                    <p:cond delay="0"/>
+                                  </p:stCondLst>
+                                  <p:childTnLst>
+                                    <p:set>
+                                      <p:cBhvr>
+                                        <p:cTn id="34" dur="1" fill="hold">
+                                          <p:stCondLst>
+                                            <p:cond delay="0"/>
+                                          </p:stCondLst>
+                                        </p:cTn>
+                                        <p:tgtEl>
+                                          <p:spTgt spid="3">
+                                            <p:txEl>
+                                              <p:pRg st="8" end="8"/>
+                                            </p:txEl>
+                                          </p:spTgt>
+                                        </p:tgtEl>
+                                        <p:attrNameLst>
+                                          <p:attrName>style.visibility</p:attrName>
+                                        </p:attrNameLst>
+                                      </p:cBhvr>
+                                      <p:to>
+                                        <p:strVal val="visible"/>
+                                      </p:to>
+                                    </p:set>
+                                  </p:childTnLst>
+                                </p:cTn>
+                              </p:par>
+                            </p:childTnLst>
+                          </p:cTn>
+                        </p:par>
+                      </p:childTnLst>
+                    </p:cTn>
+                  </p:par>
+                </p:childTnLst>
+              </p:cTn>
+              <p:prevCondLst>
+                <p:cond evt="onPrev" delay="0">
+                  <p:tgtEl>
+                    <p:sldTgt/>
+                  </p:tgtEl>
+                </p:cond>
+              </p:prevCondLst>
+              <p:nextCondLst>
+                <p:cond evt="onNext" delay="0">
+                  <p:tgtEl>
+                    <p:sldTgt/>
+                  </p:tgtEl>
+                </p:cond>
+              </p:nextCondLst>
+            </p:seq>
+          </p:childTnLst>
+        </p:cTn>
+      </p:par>
+    </p:tnLst>
+  </p:timing>
+</p:sld>
+</file>
+
+<file path=ppt/slides/slide35.xml><?xml version="1.0" encoding="utf-8"?>
+<p:sld xmlns:a="http://schemas.openxmlformats.org/drawingml/2006/main" xmlns:r="http://schemas.openxmlformats.org/officeDocument/2006/relationships" xmlns:p="http://schemas.openxmlformats.org/presentationml/2006/main">
+  <p:cSld>
+    <p:spTree>
+      <p:nvGrpSpPr>
+        <p:cNvPr id="1" name="">
+          <a:extLst>
+            <a:ext uri="{FF2B5EF4-FFF2-40B4-BE49-F238E27FC236}">
               <a16:creationId xmlns:a16="http://schemas.microsoft.com/office/drawing/2014/main" id="{89EA3B6A-5B89-5D74-D46B-44E067DB7111}"/>
             </a:ext>
           </a:extLst>
@@ -18898,7 +19794,7 @@
             </a:r>
             <a:r>
               <a:rPr lang="en-US" sz="3200" dirty="0"/>
-              <a:t> Example 2 - 0001</a:t>
+              <a:t> Example-2 -  01</a:t>
             </a:r>
           </a:p>
         </p:txBody>
@@ -18937,7 +19833,7 @@
                   <a:schemeClr val="tx1"/>
                 </a:solidFill>
                 <a:highlight>
-                  <a:srgbClr val="C0C0C0"/>
+                  <a:srgbClr val="00FF00"/>
                 </a:highlight>
                 <a:latin typeface="Consolas" panose="020B0609020204030204" pitchFamily="49" charset="0"/>
                 <a:cs typeface="Consolas" panose="020B0609020204030204" pitchFamily="49" charset="0"/>
@@ -18952,7 +19848,7 @@
                   <a:schemeClr val="tx1"/>
                 </a:solidFill>
                 <a:highlight>
-                  <a:srgbClr val="C0C0C0"/>
+                  <a:srgbClr val="00FF00"/>
                 </a:highlight>
                 <a:latin typeface="Consolas" panose="020B0609020204030204" pitchFamily="49" charset="0"/>
                 <a:cs typeface="Consolas" panose="020B0609020204030204" pitchFamily="49" charset="0"/>
@@ -18965,7 +19861,7 @@
                   <a:schemeClr val="tx1"/>
                 </a:solidFill>
                 <a:highlight>
-                  <a:srgbClr val="C0C0C0"/>
+                  <a:srgbClr val="00FF00"/>
                 </a:highlight>
                 <a:latin typeface="Consolas" panose="020B0609020204030204" pitchFamily="49" charset="0"/>
                 <a:cs typeface="Consolas" panose="020B0609020204030204" pitchFamily="49" charset="0"/>
@@ -18978,7 +19874,7 @@
                   <a:schemeClr val="tx1"/>
                 </a:solidFill>
                 <a:highlight>
-                  <a:srgbClr val="C0C0C0"/>
+                  <a:srgbClr val="00FF00"/>
                 </a:highlight>
                 <a:latin typeface="Consolas" panose="020B0609020204030204" pitchFamily="49" charset="0"/>
                 <a:cs typeface="Consolas" panose="020B0609020204030204" pitchFamily="49" charset="0"/>
@@ -18991,7 +19887,7 @@
                   <a:schemeClr val="tx1"/>
                 </a:solidFill>
                 <a:highlight>
-                  <a:srgbClr val="C0C0C0"/>
+                  <a:srgbClr val="00FF00"/>
                 </a:highlight>
                 <a:latin typeface="Consolas" panose="020B0609020204030204" pitchFamily="49" charset="0"/>
                 <a:cs typeface="Consolas" panose="020B0609020204030204" pitchFamily="49" charset="0"/>
@@ -19004,7 +19900,7 @@
                   <a:schemeClr val="tx1"/>
                 </a:solidFill>
                 <a:highlight>
-                  <a:srgbClr val="C0C0C0"/>
+                  <a:srgbClr val="00FF00"/>
                 </a:highlight>
                 <a:latin typeface="Consolas" panose="020B0609020204030204" pitchFamily="49" charset="0"/>
                 <a:cs typeface="Consolas" panose="020B0609020204030204" pitchFamily="49" charset="0"/>
@@ -19017,7 +19913,7 @@
                   <a:schemeClr val="tx1"/>
                 </a:solidFill>
                 <a:highlight>
-                  <a:srgbClr val="C0C0C0"/>
+                  <a:srgbClr val="00FF00"/>
                 </a:highlight>
                 <a:latin typeface="Consolas" panose="020B0609020204030204" pitchFamily="49" charset="0"/>
                 <a:cs typeface="Consolas" panose="020B0609020204030204" pitchFamily="49" charset="0"/>
@@ -19032,7 +19928,7 @@
                   <a:schemeClr val="tx1"/>
                 </a:solidFill>
                 <a:highlight>
-                  <a:srgbClr val="C0C0C0"/>
+                  <a:srgbClr val="00FF00"/>
                 </a:highlight>
                 <a:latin typeface="Consolas" panose="020B0609020204030204" pitchFamily="49" charset="0"/>
                 <a:cs typeface="Consolas" panose="020B0609020204030204" pitchFamily="49" charset="0"/>
@@ -19045,7 +19941,7 @@
                   <a:schemeClr val="tx1"/>
                 </a:solidFill>
                 <a:highlight>
-                  <a:srgbClr val="C0C0C0"/>
+                  <a:srgbClr val="00FF00"/>
                 </a:highlight>
                 <a:latin typeface="Consolas" panose="020B0609020204030204" pitchFamily="49" charset="0"/>
                 <a:cs typeface="Consolas" panose="020B0609020204030204" pitchFamily="49" charset="0"/>
@@ -19058,7 +19954,7 @@
                   <a:schemeClr val="tx1"/>
                 </a:solidFill>
                 <a:highlight>
-                  <a:srgbClr val="C0C0C0"/>
+                  <a:srgbClr val="00FF00"/>
                 </a:highlight>
                 <a:latin typeface="Consolas" panose="020B0609020204030204" pitchFamily="49" charset="0"/>
                 <a:cs typeface="Consolas" panose="020B0609020204030204" pitchFamily="49" charset="0"/>
@@ -19071,7 +19967,7 @@
                   <a:schemeClr val="tx1"/>
                 </a:solidFill>
                 <a:highlight>
-                  <a:srgbClr val="C0C0C0"/>
+                  <a:srgbClr val="00FF00"/>
                 </a:highlight>
                 <a:latin typeface="Consolas" panose="020B0609020204030204" pitchFamily="49" charset="0"/>
                 <a:cs typeface="Consolas" panose="020B0609020204030204" pitchFamily="49" charset="0"/>
@@ -19084,7 +19980,7 @@
                   <a:schemeClr val="tx1"/>
                 </a:solidFill>
                 <a:highlight>
-                  <a:srgbClr val="C0C0C0"/>
+                  <a:srgbClr val="00FF00"/>
                 </a:highlight>
                 <a:latin typeface="Consolas" panose="020B0609020204030204" pitchFamily="49" charset="0"/>
                 <a:cs typeface="Consolas" panose="020B0609020204030204" pitchFamily="49" charset="0"/>
@@ -19097,7 +19993,7 @@
                   <a:schemeClr val="tx1"/>
                 </a:solidFill>
                 <a:highlight>
-                  <a:srgbClr val="C0C0C0"/>
+                  <a:srgbClr val="00FF00"/>
                 </a:highlight>
                 <a:latin typeface="Consolas" panose="020B0609020204030204" pitchFamily="49" charset="0"/>
                 <a:cs typeface="Consolas" panose="020B0609020204030204" pitchFamily="49" charset="0"/>
@@ -19758,7 +20654,7 @@
 </p:sld>
 </file>
 
-<file path=ppt/slides/slide35.xml><?xml version="1.0" encoding="utf-8"?>
+<file path=ppt/slides/slide36.xml><?xml version="1.0" encoding="utf-8"?>
 <p:sld xmlns:a="http://schemas.openxmlformats.org/drawingml/2006/main" xmlns:r="http://schemas.openxmlformats.org/officeDocument/2006/relationships" xmlns:p="http://schemas.openxmlformats.org/presentationml/2006/main">
   <p:cSld>
     <p:spTree>
@@ -19823,7 +20719,7 @@
             </a:r>
             <a:r>
               <a:rPr lang="en-US" sz="3200" dirty="0"/>
-              <a:t> Example 2 - 0002</a:t>
+              <a:t> Example-2 - 02</a:t>
             </a:r>
           </a:p>
         </p:txBody>
@@ -20818,7 +21714,7 @@
 </p:sld>
 </file>
 
-<file path=ppt/slides/slide36.xml><?xml version="1.0" encoding="utf-8"?>
+<file path=ppt/slides/slide37.xml><?xml version="1.0" encoding="utf-8"?>
 <p:sld xmlns:a="http://schemas.openxmlformats.org/drawingml/2006/main" xmlns:r="http://schemas.openxmlformats.org/officeDocument/2006/relationships" xmlns:p="http://schemas.openxmlformats.org/presentationml/2006/main">
   <p:cSld>
     <p:spTree>
@@ -20883,7 +21779,7 @@
             </a:r>
             <a:r>
               <a:rPr lang="en-US" sz="3200" dirty="0"/>
-              <a:t> Example 2 - 0003</a:t>
+              <a:t> Example-2 - 03</a:t>
             </a:r>
           </a:p>
         </p:txBody>
@@ -22226,7 +23122,7 @@
 </p:sld>
 </file>
 
-<file path=ppt/slides/slide37.xml><?xml version="1.0" encoding="utf-8"?>
+<file path=ppt/slides/slide38.xml><?xml version="1.0" encoding="utf-8"?>
 <p:sld xmlns:a="http://schemas.openxmlformats.org/drawingml/2006/main" xmlns:r="http://schemas.openxmlformats.org/officeDocument/2006/relationships" xmlns:p="http://schemas.openxmlformats.org/presentationml/2006/main">
   <p:cSld>
     <p:spTree>
@@ -22291,7 +23187,7 @@
             </a:r>
             <a:r>
               <a:rPr lang="en-US" sz="3200" dirty="0"/>
-              <a:t> Example 2 - 0004</a:t>
+              <a:t> Example-2 - 04</a:t>
             </a:r>
           </a:p>
         </p:txBody>
@@ -23331,7 +24227,7 @@
 </p:sld>
 </file>
 
-<file path=ppt/slides/slide38.xml><?xml version="1.0" encoding="utf-8"?>
+<file path=ppt/slides/slide39.xml><?xml version="1.0" encoding="utf-8"?>
 <p:sld xmlns:a="http://schemas.openxmlformats.org/drawingml/2006/main" xmlns:r="http://schemas.openxmlformats.org/officeDocument/2006/relationships" xmlns:p="http://schemas.openxmlformats.org/presentationml/2006/main">
   <p:cSld>
     <p:spTree>
@@ -23396,7 +24292,7 @@
             </a:r>
             <a:r>
               <a:rPr lang="en-US" sz="3200" dirty="0"/>
-              <a:t> Example 2 - 0005</a:t>
+              <a:t> Example-2 - 05</a:t>
             </a:r>
           </a:p>
         </p:txBody>
@@ -24400,1015 +25296,6 @@
 </p:sld>
 </file>
 
-<file path=ppt/slides/slide39.xml><?xml version="1.0" encoding="utf-8"?>
-<p:sld xmlns:a="http://schemas.openxmlformats.org/drawingml/2006/main" xmlns:r="http://schemas.openxmlformats.org/officeDocument/2006/relationships" xmlns:p="http://schemas.openxmlformats.org/presentationml/2006/main">
-  <p:cSld>
-    <p:spTree>
-      <p:nvGrpSpPr>
-        <p:cNvPr id="1" name="">
-          <a:extLst>
-            <a:ext uri="{FF2B5EF4-FFF2-40B4-BE49-F238E27FC236}">
-              <a16:creationId xmlns:a16="http://schemas.microsoft.com/office/drawing/2014/main" id="{24A807E0-766D-74F2-79CA-5B5E1CBFCCAF}"/>
-            </a:ext>
-          </a:extLst>
-        </p:cNvPr>
-        <p:cNvGrpSpPr/>
-        <p:nvPr/>
-      </p:nvGrpSpPr>
-      <p:grpSpPr>
-        <a:xfrm>
-          <a:off x="0" y="0"/>
-          <a:ext cx="0" cy="0"/>
-          <a:chOff x="0" y="0"/>
-          <a:chExt cx="0" cy="0"/>
-        </a:xfrm>
-      </p:grpSpPr>
-      <p:sp>
-        <p:nvSpPr>
-          <p:cNvPr id="2" name="Title 1">
-            <a:extLst>
-              <a:ext uri="{FF2B5EF4-FFF2-40B4-BE49-F238E27FC236}">
-                <a16:creationId xmlns:a16="http://schemas.microsoft.com/office/drawing/2014/main" id="{95D0148F-E00D-6F02-670E-AF88CB5B4537}"/>
-              </a:ext>
-            </a:extLst>
-          </p:cNvPr>
-          <p:cNvSpPr>
-            <a:spLocks noGrp="1"/>
-          </p:cNvSpPr>
-          <p:nvPr>
-            <p:ph type="ctrTitle"/>
-          </p:nvPr>
-        </p:nvSpPr>
-        <p:spPr>
-          <a:xfrm>
-            <a:off x="1524000" y="382580"/>
-            <a:ext cx="9144000" cy="502003"/>
-          </a:xfrm>
-        </p:spPr>
-        <p:txBody>
-          <a:bodyPr>
-            <a:noAutofit/>
-          </a:bodyPr>
-          <a:lstStyle/>
-          <a:p>
-            <a:r>
-              <a:rPr lang="en-US" sz="3200" dirty="0" err="1"/>
-              <a:t>PySpark</a:t>
-            </a:r>
-            <a:r>
-              <a:rPr lang="en-US" sz="3200" dirty="0"/>
-              <a:t> </a:t>
-            </a:r>
-            <a:r>
-              <a:rPr lang="en-US" sz="3200" dirty="0" err="1"/>
-              <a:t>DataFrame</a:t>
-            </a:r>
-            <a:r>
-              <a:rPr lang="en-US" sz="3200" dirty="0"/>
-              <a:t> Example 2 - 0006</a:t>
-            </a:r>
-          </a:p>
-        </p:txBody>
-      </p:sp>
-      <p:sp>
-        <p:nvSpPr>
-          <p:cNvPr id="3" name="Subtitle 2">
-            <a:extLst>
-              <a:ext uri="{FF2B5EF4-FFF2-40B4-BE49-F238E27FC236}">
-                <a16:creationId xmlns:a16="http://schemas.microsoft.com/office/drawing/2014/main" id="{D34D4C2F-A2C4-9BB5-9623-5F12F87EBBD7}"/>
-              </a:ext>
-            </a:extLst>
-          </p:cNvPr>
-          <p:cNvSpPr>
-            <a:spLocks noGrp="1"/>
-          </p:cNvSpPr>
-          <p:nvPr>
-            <p:ph type="subTitle" idx="1"/>
-          </p:nvPr>
-        </p:nvSpPr>
-        <p:spPr>
-          <a:xfrm>
-            <a:off x="1524000" y="884584"/>
-            <a:ext cx="9144000" cy="5088834"/>
-          </a:xfrm>
-        </p:spPr>
-        <p:txBody>
-          <a:bodyPr>
-            <a:normAutofit/>
-          </a:bodyPr>
-          <a:lstStyle/>
-          <a:p>
-            <a:r>
-              <a:rPr lang="en-US" sz="2000" dirty="0">
-                <a:solidFill>
-                  <a:schemeClr val="tx1"/>
-                </a:solidFill>
-                <a:highlight>
-                  <a:srgbClr val="FFFF00"/>
-                </a:highlight>
-                <a:latin typeface="Consolas" panose="020B0609020204030204" pitchFamily="49" charset="0"/>
-                <a:cs typeface="Consolas" panose="020B0609020204030204" pitchFamily="49" charset="0"/>
-              </a:rPr>
-              <a:t># 7. Data Aggregation: Calculate metrics by Category </a:t>
-            </a:r>
-          </a:p>
-          <a:p>
-            <a:r>
-              <a:rPr lang="en-US" sz="2000" dirty="0">
-                <a:solidFill>
-                  <a:schemeClr val="tx1"/>
-                </a:solidFill>
-                <a:highlight>
-                  <a:srgbClr val="FFFF00"/>
-                </a:highlight>
-                <a:latin typeface="Consolas" panose="020B0609020204030204" pitchFamily="49" charset="0"/>
-                <a:cs typeface="Consolas" panose="020B0609020204030204" pitchFamily="49" charset="0"/>
-              </a:rPr>
-              <a:t># </a:t>
-            </a:r>
-            <a:r>
-              <a:rPr lang="en-US" sz="1800" dirty="0">
-                <a:solidFill>
-                  <a:schemeClr val="tx1"/>
-                </a:solidFill>
-                <a:highlight>
-                  <a:srgbClr val="FFFF00"/>
-                </a:highlight>
-                <a:latin typeface="Consolas" panose="020B0609020204030204" pitchFamily="49" charset="0"/>
-                <a:cs typeface="Consolas" panose="020B0609020204030204" pitchFamily="49" charset="0"/>
-              </a:rPr>
-              <a:t>Total spend, average spend, and distinct customer count per category </a:t>
-            </a:r>
-            <a:endParaRPr lang="en-US" sz="2000" dirty="0">
-              <a:solidFill>
-                <a:schemeClr val="tx1"/>
-              </a:solidFill>
-              <a:highlight>
-                <a:srgbClr val="FFFF00"/>
-              </a:highlight>
-              <a:latin typeface="Consolas" panose="020B0609020204030204" pitchFamily="49" charset="0"/>
-              <a:cs typeface="Consolas" panose="020B0609020204030204" pitchFamily="49" charset="0"/>
-            </a:endParaRPr>
-          </a:p>
-          <a:p>
-            <a:r>
-              <a:rPr lang="en-US" sz="2000" dirty="0" err="1">
-                <a:solidFill>
-                  <a:schemeClr val="tx1"/>
-                </a:solidFill>
-                <a:latin typeface="Consolas" panose="020B0609020204030204" pitchFamily="49" charset="0"/>
-                <a:cs typeface="Consolas" panose="020B0609020204030204" pitchFamily="49" charset="0"/>
-              </a:rPr>
-              <a:t>df_metrics</a:t>
-            </a:r>
-            <a:r>
-              <a:rPr lang="en-US" sz="2000" dirty="0">
-                <a:solidFill>
-                  <a:schemeClr val="tx1"/>
-                </a:solidFill>
-                <a:latin typeface="Consolas" panose="020B0609020204030204" pitchFamily="49" charset="0"/>
-                <a:cs typeface="Consolas" panose="020B0609020204030204" pitchFamily="49" charset="0"/>
-              </a:rPr>
-              <a:t> = </a:t>
-            </a:r>
-            <a:r>
-              <a:rPr lang="en-US" sz="2000" dirty="0" err="1">
-                <a:solidFill>
-                  <a:schemeClr val="tx1"/>
-                </a:solidFill>
-                <a:latin typeface="Consolas" panose="020B0609020204030204" pitchFamily="49" charset="0"/>
-                <a:cs typeface="Consolas" panose="020B0609020204030204" pitchFamily="49" charset="0"/>
-              </a:rPr>
-              <a:t>df_transformed.groupBy</a:t>
-            </a:r>
-            <a:r>
-              <a:rPr lang="en-US" sz="2000" dirty="0">
-                <a:solidFill>
-                  <a:schemeClr val="tx1"/>
-                </a:solidFill>
-                <a:latin typeface="Consolas" panose="020B0609020204030204" pitchFamily="49" charset="0"/>
-                <a:cs typeface="Consolas" panose="020B0609020204030204" pitchFamily="49" charset="0"/>
-              </a:rPr>
-              <a:t>("Category").</a:t>
-            </a:r>
-            <a:r>
-              <a:rPr lang="en-US" sz="2000" dirty="0" err="1">
-                <a:solidFill>
-                  <a:schemeClr val="tx1"/>
-                </a:solidFill>
-                <a:latin typeface="Consolas" panose="020B0609020204030204" pitchFamily="49" charset="0"/>
-                <a:cs typeface="Consolas" panose="020B0609020204030204" pitchFamily="49" charset="0"/>
-              </a:rPr>
-              <a:t>agg</a:t>
-            </a:r>
-            <a:r>
-              <a:rPr lang="en-US" sz="2000" dirty="0">
-                <a:solidFill>
-                  <a:schemeClr val="tx1"/>
-                </a:solidFill>
-                <a:latin typeface="Consolas" panose="020B0609020204030204" pitchFamily="49" charset="0"/>
-                <a:cs typeface="Consolas" panose="020B0609020204030204" pitchFamily="49" charset="0"/>
-              </a:rPr>
-              <a:t>(     </a:t>
-            </a:r>
-          </a:p>
-          <a:p>
-            <a:r>
-              <a:rPr lang="en-US" sz="2000" dirty="0">
-                <a:solidFill>
-                  <a:schemeClr val="tx1"/>
-                </a:solidFill>
-                <a:latin typeface="Consolas" panose="020B0609020204030204" pitchFamily="49" charset="0"/>
-                <a:cs typeface="Consolas" panose="020B0609020204030204" pitchFamily="49" charset="0"/>
-              </a:rPr>
-              <a:t>   </a:t>
-            </a:r>
-            <a:r>
-              <a:rPr lang="en-US" sz="2000" dirty="0" err="1">
-                <a:solidFill>
-                  <a:schemeClr val="tx1"/>
-                </a:solidFill>
-                <a:latin typeface="Consolas" panose="020B0609020204030204" pitchFamily="49" charset="0"/>
-                <a:cs typeface="Consolas" panose="020B0609020204030204" pitchFamily="49" charset="0"/>
-              </a:rPr>
-              <a:t>F.sum</a:t>
-            </a:r>
-            <a:r>
-              <a:rPr lang="en-US" sz="2000" dirty="0">
-                <a:solidFill>
-                  <a:schemeClr val="tx1"/>
-                </a:solidFill>
-                <a:latin typeface="Consolas" panose="020B0609020204030204" pitchFamily="49" charset="0"/>
-                <a:cs typeface="Consolas" panose="020B0609020204030204" pitchFamily="49" charset="0"/>
-              </a:rPr>
-              <a:t>("Amount").alias("</a:t>
-            </a:r>
-            <a:r>
-              <a:rPr lang="en-US" sz="2000" dirty="0" err="1">
-                <a:solidFill>
-                  <a:schemeClr val="tx1"/>
-                </a:solidFill>
-                <a:latin typeface="Consolas" panose="020B0609020204030204" pitchFamily="49" charset="0"/>
-                <a:cs typeface="Consolas" panose="020B0609020204030204" pitchFamily="49" charset="0"/>
-              </a:rPr>
-              <a:t>Total_Revenue</a:t>
-            </a:r>
-            <a:r>
-              <a:rPr lang="en-US" sz="2000" dirty="0">
-                <a:solidFill>
-                  <a:schemeClr val="tx1"/>
-                </a:solidFill>
-                <a:latin typeface="Consolas" panose="020B0609020204030204" pitchFamily="49" charset="0"/>
-                <a:cs typeface="Consolas" panose="020B0609020204030204" pitchFamily="49" charset="0"/>
-              </a:rPr>
-              <a:t>"), </a:t>
-            </a:r>
-          </a:p>
-          <a:p>
-            <a:r>
-              <a:rPr lang="en-US" sz="2000" dirty="0">
-                <a:solidFill>
-                  <a:schemeClr val="tx1"/>
-                </a:solidFill>
-                <a:latin typeface="Consolas" panose="020B0609020204030204" pitchFamily="49" charset="0"/>
-                <a:cs typeface="Consolas" panose="020B0609020204030204" pitchFamily="49" charset="0"/>
-              </a:rPr>
-              <a:t>   </a:t>
-            </a:r>
-            <a:r>
-              <a:rPr lang="en-US" sz="2000" dirty="0" err="1">
-                <a:solidFill>
-                  <a:schemeClr val="tx1"/>
-                </a:solidFill>
-                <a:latin typeface="Consolas" panose="020B0609020204030204" pitchFamily="49" charset="0"/>
-                <a:cs typeface="Consolas" panose="020B0609020204030204" pitchFamily="49" charset="0"/>
-              </a:rPr>
-              <a:t>F.round</a:t>
-            </a:r>
-            <a:r>
-              <a:rPr lang="en-US" sz="2000" dirty="0">
-                <a:solidFill>
-                  <a:schemeClr val="tx1"/>
-                </a:solidFill>
-                <a:latin typeface="Consolas" panose="020B0609020204030204" pitchFamily="49" charset="0"/>
-                <a:cs typeface="Consolas" panose="020B0609020204030204" pitchFamily="49" charset="0"/>
-              </a:rPr>
-              <a:t>(</a:t>
-            </a:r>
-            <a:r>
-              <a:rPr lang="en-US" sz="2000" dirty="0" err="1">
-                <a:solidFill>
-                  <a:schemeClr val="tx1"/>
-                </a:solidFill>
-                <a:latin typeface="Consolas" panose="020B0609020204030204" pitchFamily="49" charset="0"/>
-                <a:cs typeface="Consolas" panose="020B0609020204030204" pitchFamily="49" charset="0"/>
-              </a:rPr>
-              <a:t>F.avg</a:t>
-            </a:r>
-            <a:r>
-              <a:rPr lang="en-US" sz="2000" dirty="0">
-                <a:solidFill>
-                  <a:schemeClr val="tx1"/>
-                </a:solidFill>
-                <a:latin typeface="Consolas" panose="020B0609020204030204" pitchFamily="49" charset="0"/>
-                <a:cs typeface="Consolas" panose="020B0609020204030204" pitchFamily="49" charset="0"/>
-              </a:rPr>
-              <a:t>("Amount").alias("</a:t>
-            </a:r>
-            <a:r>
-              <a:rPr lang="en-US" sz="2000" dirty="0" err="1">
-                <a:solidFill>
-                  <a:schemeClr val="tx1"/>
-                </a:solidFill>
-                <a:latin typeface="Consolas" panose="020B0609020204030204" pitchFamily="49" charset="0"/>
-                <a:cs typeface="Consolas" panose="020B0609020204030204" pitchFamily="49" charset="0"/>
-              </a:rPr>
-              <a:t>Average_Spend</a:t>
-            </a:r>
-            <a:r>
-              <a:rPr lang="en-US" sz="2000" dirty="0">
-                <a:solidFill>
-                  <a:schemeClr val="tx1"/>
-                </a:solidFill>
-                <a:latin typeface="Consolas" panose="020B0609020204030204" pitchFamily="49" charset="0"/>
-                <a:cs typeface="Consolas" panose="020B0609020204030204" pitchFamily="49" charset="0"/>
-              </a:rPr>
-              <a:t>"),    </a:t>
-            </a:r>
-          </a:p>
-          <a:p>
-            <a:r>
-              <a:rPr lang="en-US" sz="2000" dirty="0">
-                <a:solidFill>
-                  <a:schemeClr val="tx1"/>
-                </a:solidFill>
-                <a:latin typeface="Consolas" panose="020B0609020204030204" pitchFamily="49" charset="0"/>
-                <a:cs typeface="Consolas" panose="020B0609020204030204" pitchFamily="49" charset="0"/>
-              </a:rPr>
-              <a:t>   </a:t>
-            </a:r>
-            <a:r>
-              <a:rPr lang="en-US" sz="2000" dirty="0" err="1">
-                <a:solidFill>
-                  <a:schemeClr val="tx1"/>
-                </a:solidFill>
-                <a:latin typeface="Consolas" panose="020B0609020204030204" pitchFamily="49" charset="0"/>
-                <a:cs typeface="Consolas" panose="020B0609020204030204" pitchFamily="49" charset="0"/>
-              </a:rPr>
-              <a:t>F.countDistinct</a:t>
-            </a:r>
-            <a:r>
-              <a:rPr lang="en-US" sz="2000" dirty="0">
-                <a:solidFill>
-                  <a:schemeClr val="tx1"/>
-                </a:solidFill>
-                <a:latin typeface="Consolas" panose="020B0609020204030204" pitchFamily="49" charset="0"/>
-                <a:cs typeface="Consolas" panose="020B0609020204030204" pitchFamily="49" charset="0"/>
-              </a:rPr>
-              <a:t>("</a:t>
-            </a:r>
-            <a:r>
-              <a:rPr lang="en-US" sz="2000" dirty="0" err="1">
-                <a:solidFill>
-                  <a:schemeClr val="tx1"/>
-                </a:solidFill>
-                <a:latin typeface="Consolas" panose="020B0609020204030204" pitchFamily="49" charset="0"/>
-                <a:cs typeface="Consolas" panose="020B0609020204030204" pitchFamily="49" charset="0"/>
-              </a:rPr>
-              <a:t>UserID</a:t>
-            </a:r>
-            <a:r>
-              <a:rPr lang="en-US" sz="2000" dirty="0">
-                <a:solidFill>
-                  <a:schemeClr val="tx1"/>
-                </a:solidFill>
-                <a:latin typeface="Consolas" panose="020B0609020204030204" pitchFamily="49" charset="0"/>
-                <a:cs typeface="Consolas" panose="020B0609020204030204" pitchFamily="49" charset="0"/>
-              </a:rPr>
-              <a:t>").alias("</a:t>
-            </a:r>
-            <a:r>
-              <a:rPr lang="en-US" sz="2000" dirty="0" err="1">
-                <a:solidFill>
-                  <a:schemeClr val="tx1"/>
-                </a:solidFill>
-                <a:latin typeface="Consolas" panose="020B0609020204030204" pitchFamily="49" charset="0"/>
-                <a:cs typeface="Consolas" panose="020B0609020204030204" pitchFamily="49" charset="0"/>
-              </a:rPr>
-              <a:t>Unique_Customers</a:t>
-            </a:r>
-            <a:r>
-              <a:rPr lang="en-US" sz="2000" dirty="0">
-                <a:solidFill>
-                  <a:schemeClr val="tx1"/>
-                </a:solidFill>
-                <a:latin typeface="Consolas" panose="020B0609020204030204" pitchFamily="49" charset="0"/>
-                <a:cs typeface="Consolas" panose="020B0609020204030204" pitchFamily="49" charset="0"/>
-              </a:rPr>
-              <a:t>") </a:t>
-            </a:r>
-          </a:p>
-          <a:p>
-            <a:r>
-              <a:rPr lang="en-US" sz="2000" dirty="0">
-                <a:solidFill>
-                  <a:schemeClr val="tx1"/>
-                </a:solidFill>
-                <a:latin typeface="Consolas" panose="020B0609020204030204" pitchFamily="49" charset="0"/>
-                <a:cs typeface="Consolas" panose="020B0609020204030204" pitchFamily="49" charset="0"/>
-              </a:rPr>
-              <a:t>).</a:t>
-            </a:r>
-            <a:r>
-              <a:rPr lang="en-US" sz="2000" dirty="0" err="1">
-                <a:solidFill>
-                  <a:schemeClr val="tx1"/>
-                </a:solidFill>
-                <a:latin typeface="Consolas" panose="020B0609020204030204" pitchFamily="49" charset="0"/>
-                <a:cs typeface="Consolas" panose="020B0609020204030204" pitchFamily="49" charset="0"/>
-              </a:rPr>
-              <a:t>orderBy</a:t>
-            </a:r>
-            <a:r>
-              <a:rPr lang="en-US" sz="2000" dirty="0">
-                <a:solidFill>
-                  <a:schemeClr val="tx1"/>
-                </a:solidFill>
-                <a:latin typeface="Consolas" panose="020B0609020204030204" pitchFamily="49" charset="0"/>
-                <a:cs typeface="Consolas" panose="020B0609020204030204" pitchFamily="49" charset="0"/>
-              </a:rPr>
-              <a:t>(</a:t>
-            </a:r>
-            <a:r>
-              <a:rPr lang="en-US" sz="2000" dirty="0" err="1">
-                <a:solidFill>
-                  <a:schemeClr val="tx1"/>
-                </a:solidFill>
-                <a:latin typeface="Consolas" panose="020B0609020204030204" pitchFamily="49" charset="0"/>
-                <a:cs typeface="Consolas" panose="020B0609020204030204" pitchFamily="49" charset="0"/>
-              </a:rPr>
-              <a:t>F.desc</a:t>
-            </a:r>
-            <a:r>
-              <a:rPr lang="en-US" sz="2000" dirty="0">
-                <a:solidFill>
-                  <a:schemeClr val="tx1"/>
-                </a:solidFill>
-                <a:latin typeface="Consolas" panose="020B0609020204030204" pitchFamily="49" charset="0"/>
-                <a:cs typeface="Consolas" panose="020B0609020204030204" pitchFamily="49" charset="0"/>
-              </a:rPr>
-              <a:t>("</a:t>
-            </a:r>
-            <a:r>
-              <a:rPr lang="en-US" sz="2000" dirty="0" err="1">
-                <a:solidFill>
-                  <a:schemeClr val="tx1"/>
-                </a:solidFill>
-                <a:latin typeface="Consolas" panose="020B0609020204030204" pitchFamily="49" charset="0"/>
-                <a:cs typeface="Consolas" panose="020B0609020204030204" pitchFamily="49" charset="0"/>
-              </a:rPr>
-              <a:t>Total_Revenue</a:t>
-            </a:r>
-            <a:r>
-              <a:rPr lang="en-US" sz="2000" dirty="0">
-                <a:solidFill>
-                  <a:schemeClr val="tx1"/>
-                </a:solidFill>
-                <a:latin typeface="Consolas" panose="020B0609020204030204" pitchFamily="49" charset="0"/>
-                <a:cs typeface="Consolas" panose="020B0609020204030204" pitchFamily="49" charset="0"/>
-              </a:rPr>
-              <a:t>")) </a:t>
-            </a:r>
-          </a:p>
-          <a:p>
-            <a:endParaRPr lang="en-US" sz="2000" dirty="0">
-              <a:solidFill>
-                <a:schemeClr val="tx1"/>
-              </a:solidFill>
-              <a:latin typeface="Consolas" panose="020B0609020204030204" pitchFamily="49" charset="0"/>
-              <a:cs typeface="Consolas" panose="020B0609020204030204" pitchFamily="49" charset="0"/>
-            </a:endParaRPr>
-          </a:p>
-          <a:p>
-            <a:r>
-              <a:rPr lang="en-US" sz="2000" dirty="0">
-                <a:solidFill>
-                  <a:schemeClr val="tx1"/>
-                </a:solidFill>
-                <a:latin typeface="Consolas" panose="020B0609020204030204" pitchFamily="49" charset="0"/>
-                <a:cs typeface="Consolas" panose="020B0609020204030204" pitchFamily="49" charset="0"/>
-              </a:rPr>
-              <a:t>print("--- Aggregated Category Metrics ---") </a:t>
-            </a:r>
-          </a:p>
-          <a:p>
-            <a:r>
-              <a:rPr lang="en-US" sz="2000" dirty="0" err="1">
-                <a:solidFill>
-                  <a:schemeClr val="tx1"/>
-                </a:solidFill>
-                <a:latin typeface="Consolas" panose="020B0609020204030204" pitchFamily="49" charset="0"/>
-                <a:cs typeface="Consolas" panose="020B0609020204030204" pitchFamily="49" charset="0"/>
-              </a:rPr>
-              <a:t>df_metrics.show</a:t>
-            </a:r>
-            <a:r>
-              <a:rPr lang="en-US" sz="2000" dirty="0">
-                <a:solidFill>
-                  <a:schemeClr val="tx1"/>
-                </a:solidFill>
-                <a:latin typeface="Consolas" panose="020B0609020204030204" pitchFamily="49" charset="0"/>
-                <a:cs typeface="Consolas" panose="020B0609020204030204" pitchFamily="49" charset="0"/>
-              </a:rPr>
-              <a:t>()</a:t>
-            </a:r>
-          </a:p>
-        </p:txBody>
-      </p:sp>
-    </p:spTree>
-    <p:extLst>
-      <p:ext uri="{BB962C8B-B14F-4D97-AF65-F5344CB8AC3E}">
-        <p14:creationId xmlns:p14="http://schemas.microsoft.com/office/powerpoint/2010/main" val="2571302331"/>
-      </p:ext>
-    </p:extLst>
-  </p:cSld>
-  <p:clrMapOvr>
-    <a:masterClrMapping/>
-  </p:clrMapOvr>
-  <p:timing>
-    <p:tnLst>
-      <p:par>
-        <p:cTn id="1" dur="indefinite" restart="never" nodeType="tmRoot">
-          <p:childTnLst>
-            <p:seq concurrent="1" nextAc="seek">
-              <p:cTn id="2" dur="indefinite" nodeType="mainSeq">
-                <p:childTnLst>
-                  <p:par>
-                    <p:cTn id="3" fill="hold">
-                      <p:stCondLst>
-                        <p:cond delay="indefinite"/>
-                      </p:stCondLst>
-                      <p:childTnLst>
-                        <p:par>
-                          <p:cTn id="4" fill="hold">
-                            <p:stCondLst>
-                              <p:cond delay="0"/>
-                            </p:stCondLst>
-                            <p:childTnLst>
-                              <p:par>
-                                <p:cTn id="5" presetID="1" presetClass="entr" presetSubtype="0" fill="hold" nodeType="clickEffect">
-                                  <p:stCondLst>
-                                    <p:cond delay="0"/>
-                                  </p:stCondLst>
-                                  <p:childTnLst>
-                                    <p:set>
-                                      <p:cBhvr>
-                                        <p:cTn id="6" dur="1" fill="hold">
-                                          <p:stCondLst>
-                                            <p:cond delay="0"/>
-                                          </p:stCondLst>
-                                        </p:cTn>
-                                        <p:tgtEl>
-                                          <p:spTgt spid="3">
-                                            <p:txEl>
-                                              <p:pRg st="0" end="0"/>
-                                            </p:txEl>
-                                          </p:spTgt>
-                                        </p:tgtEl>
-                                        <p:attrNameLst>
-                                          <p:attrName>style.visibility</p:attrName>
-                                        </p:attrNameLst>
-                                      </p:cBhvr>
-                                      <p:to>
-                                        <p:strVal val="visible"/>
-                                      </p:to>
-                                    </p:set>
-                                  </p:childTnLst>
-                                </p:cTn>
-                              </p:par>
-                            </p:childTnLst>
-                          </p:cTn>
-                        </p:par>
-                      </p:childTnLst>
-                    </p:cTn>
-                  </p:par>
-                  <p:par>
-                    <p:cTn id="7" fill="hold">
-                      <p:stCondLst>
-                        <p:cond delay="indefinite"/>
-                      </p:stCondLst>
-                      <p:childTnLst>
-                        <p:par>
-                          <p:cTn id="8" fill="hold">
-                            <p:stCondLst>
-                              <p:cond delay="0"/>
-                            </p:stCondLst>
-                            <p:childTnLst>
-                              <p:par>
-                                <p:cTn id="9" presetID="1" presetClass="entr" presetSubtype="0" fill="hold" nodeType="clickEffect">
-                                  <p:stCondLst>
-                                    <p:cond delay="0"/>
-                                  </p:stCondLst>
-                                  <p:childTnLst>
-                                    <p:set>
-                                      <p:cBhvr>
-                                        <p:cTn id="10" dur="1" fill="hold">
-                                          <p:stCondLst>
-                                            <p:cond delay="0"/>
-                                          </p:stCondLst>
-                                        </p:cTn>
-                                        <p:tgtEl>
-                                          <p:spTgt spid="3">
-                                            <p:txEl>
-                                              <p:pRg st="1" end="1"/>
-                                            </p:txEl>
-                                          </p:spTgt>
-                                        </p:tgtEl>
-                                        <p:attrNameLst>
-                                          <p:attrName>style.visibility</p:attrName>
-                                        </p:attrNameLst>
-                                      </p:cBhvr>
-                                      <p:to>
-                                        <p:strVal val="visible"/>
-                                      </p:to>
-                                    </p:set>
-                                  </p:childTnLst>
-                                </p:cTn>
-                              </p:par>
-                            </p:childTnLst>
-                          </p:cTn>
-                        </p:par>
-                      </p:childTnLst>
-                    </p:cTn>
-                  </p:par>
-                  <p:par>
-                    <p:cTn id="11" fill="hold">
-                      <p:stCondLst>
-                        <p:cond delay="indefinite"/>
-                      </p:stCondLst>
-                      <p:childTnLst>
-                        <p:par>
-                          <p:cTn id="12" fill="hold">
-                            <p:stCondLst>
-                              <p:cond delay="0"/>
-                            </p:stCondLst>
-                            <p:childTnLst>
-                              <p:par>
-                                <p:cTn id="13" presetID="1" presetClass="entr" presetSubtype="0" fill="hold" nodeType="clickEffect">
-                                  <p:stCondLst>
-                                    <p:cond delay="0"/>
-                                  </p:stCondLst>
-                                  <p:childTnLst>
-                                    <p:set>
-                                      <p:cBhvr>
-                                        <p:cTn id="14" dur="1" fill="hold">
-                                          <p:stCondLst>
-                                            <p:cond delay="0"/>
-                                          </p:stCondLst>
-                                        </p:cTn>
-                                        <p:tgtEl>
-                                          <p:spTgt spid="3">
-                                            <p:txEl>
-                                              <p:pRg st="2" end="2"/>
-                                            </p:txEl>
-                                          </p:spTgt>
-                                        </p:tgtEl>
-                                        <p:attrNameLst>
-                                          <p:attrName>style.visibility</p:attrName>
-                                        </p:attrNameLst>
-                                      </p:cBhvr>
-                                      <p:to>
-                                        <p:strVal val="visible"/>
-                                      </p:to>
-                                    </p:set>
-                                  </p:childTnLst>
-                                </p:cTn>
-                              </p:par>
-                            </p:childTnLst>
-                          </p:cTn>
-                        </p:par>
-                      </p:childTnLst>
-                    </p:cTn>
-                  </p:par>
-                  <p:par>
-                    <p:cTn id="15" fill="hold">
-                      <p:stCondLst>
-                        <p:cond delay="indefinite"/>
-                      </p:stCondLst>
-                      <p:childTnLst>
-                        <p:par>
-                          <p:cTn id="16" fill="hold">
-                            <p:stCondLst>
-                              <p:cond delay="0"/>
-                            </p:stCondLst>
-                            <p:childTnLst>
-                              <p:par>
-                                <p:cTn id="17" presetID="1" presetClass="entr" presetSubtype="0" fill="hold" nodeType="clickEffect">
-                                  <p:stCondLst>
-                                    <p:cond delay="0"/>
-                                  </p:stCondLst>
-                                  <p:childTnLst>
-                                    <p:set>
-                                      <p:cBhvr>
-                                        <p:cTn id="18" dur="1" fill="hold">
-                                          <p:stCondLst>
-                                            <p:cond delay="0"/>
-                                          </p:stCondLst>
-                                        </p:cTn>
-                                        <p:tgtEl>
-                                          <p:spTgt spid="3">
-                                            <p:txEl>
-                                              <p:pRg st="3" end="3"/>
-                                            </p:txEl>
-                                          </p:spTgt>
-                                        </p:tgtEl>
-                                        <p:attrNameLst>
-                                          <p:attrName>style.visibility</p:attrName>
-                                        </p:attrNameLst>
-                                      </p:cBhvr>
-                                      <p:to>
-                                        <p:strVal val="visible"/>
-                                      </p:to>
-                                    </p:set>
-                                  </p:childTnLst>
-                                </p:cTn>
-                              </p:par>
-                            </p:childTnLst>
-                          </p:cTn>
-                        </p:par>
-                      </p:childTnLst>
-                    </p:cTn>
-                  </p:par>
-                  <p:par>
-                    <p:cTn id="19" fill="hold">
-                      <p:stCondLst>
-                        <p:cond delay="indefinite"/>
-                      </p:stCondLst>
-                      <p:childTnLst>
-                        <p:par>
-                          <p:cTn id="20" fill="hold">
-                            <p:stCondLst>
-                              <p:cond delay="0"/>
-                            </p:stCondLst>
-                            <p:childTnLst>
-                              <p:par>
-                                <p:cTn id="21" presetID="1" presetClass="entr" presetSubtype="0" fill="hold" nodeType="clickEffect">
-                                  <p:stCondLst>
-                                    <p:cond delay="0"/>
-                                  </p:stCondLst>
-                                  <p:childTnLst>
-                                    <p:set>
-                                      <p:cBhvr>
-                                        <p:cTn id="22" dur="1" fill="hold">
-                                          <p:stCondLst>
-                                            <p:cond delay="0"/>
-                                          </p:stCondLst>
-                                        </p:cTn>
-                                        <p:tgtEl>
-                                          <p:spTgt spid="3">
-                                            <p:txEl>
-                                              <p:pRg st="4" end="4"/>
-                                            </p:txEl>
-                                          </p:spTgt>
-                                        </p:tgtEl>
-                                        <p:attrNameLst>
-                                          <p:attrName>style.visibility</p:attrName>
-                                        </p:attrNameLst>
-                                      </p:cBhvr>
-                                      <p:to>
-                                        <p:strVal val="visible"/>
-                                      </p:to>
-                                    </p:set>
-                                  </p:childTnLst>
-                                </p:cTn>
-                              </p:par>
-                            </p:childTnLst>
-                          </p:cTn>
-                        </p:par>
-                      </p:childTnLst>
-                    </p:cTn>
-                  </p:par>
-                  <p:par>
-                    <p:cTn id="23" fill="hold">
-                      <p:stCondLst>
-                        <p:cond delay="indefinite"/>
-                      </p:stCondLst>
-                      <p:childTnLst>
-                        <p:par>
-                          <p:cTn id="24" fill="hold">
-                            <p:stCondLst>
-                              <p:cond delay="0"/>
-                            </p:stCondLst>
-                            <p:childTnLst>
-                              <p:par>
-                                <p:cTn id="25" presetID="1" presetClass="entr" presetSubtype="0" fill="hold" nodeType="clickEffect">
-                                  <p:stCondLst>
-                                    <p:cond delay="0"/>
-                                  </p:stCondLst>
-                                  <p:childTnLst>
-                                    <p:set>
-                                      <p:cBhvr>
-                                        <p:cTn id="26" dur="1" fill="hold">
-                                          <p:stCondLst>
-                                            <p:cond delay="0"/>
-                                          </p:stCondLst>
-                                        </p:cTn>
-                                        <p:tgtEl>
-                                          <p:spTgt spid="3">
-                                            <p:txEl>
-                                              <p:pRg st="5" end="5"/>
-                                            </p:txEl>
-                                          </p:spTgt>
-                                        </p:tgtEl>
-                                        <p:attrNameLst>
-                                          <p:attrName>style.visibility</p:attrName>
-                                        </p:attrNameLst>
-                                      </p:cBhvr>
-                                      <p:to>
-                                        <p:strVal val="visible"/>
-                                      </p:to>
-                                    </p:set>
-                                  </p:childTnLst>
-                                </p:cTn>
-                              </p:par>
-                            </p:childTnLst>
-                          </p:cTn>
-                        </p:par>
-                      </p:childTnLst>
-                    </p:cTn>
-                  </p:par>
-                  <p:par>
-                    <p:cTn id="27" fill="hold">
-                      <p:stCondLst>
-                        <p:cond delay="indefinite"/>
-                      </p:stCondLst>
-                      <p:childTnLst>
-                        <p:par>
-                          <p:cTn id="28" fill="hold">
-                            <p:stCondLst>
-                              <p:cond delay="0"/>
-                            </p:stCondLst>
-                            <p:childTnLst>
-                              <p:par>
-                                <p:cTn id="29" presetID="1" presetClass="entr" presetSubtype="0" fill="hold" nodeType="clickEffect">
-                                  <p:stCondLst>
-                                    <p:cond delay="0"/>
-                                  </p:stCondLst>
-                                  <p:childTnLst>
-                                    <p:set>
-                                      <p:cBhvr>
-                                        <p:cTn id="30" dur="1" fill="hold">
-                                          <p:stCondLst>
-                                            <p:cond delay="0"/>
-                                          </p:stCondLst>
-                                        </p:cTn>
-                                        <p:tgtEl>
-                                          <p:spTgt spid="3">
-                                            <p:txEl>
-                                              <p:pRg st="6" end="6"/>
-                                            </p:txEl>
-                                          </p:spTgt>
-                                        </p:tgtEl>
-                                        <p:attrNameLst>
-                                          <p:attrName>style.visibility</p:attrName>
-                                        </p:attrNameLst>
-                                      </p:cBhvr>
-                                      <p:to>
-                                        <p:strVal val="visible"/>
-                                      </p:to>
-                                    </p:set>
-                                  </p:childTnLst>
-                                </p:cTn>
-                              </p:par>
-                            </p:childTnLst>
-                          </p:cTn>
-                        </p:par>
-                      </p:childTnLst>
-                    </p:cTn>
-                  </p:par>
-                  <p:par>
-                    <p:cTn id="31" fill="hold">
-                      <p:stCondLst>
-                        <p:cond delay="indefinite"/>
-                      </p:stCondLst>
-                      <p:childTnLst>
-                        <p:par>
-                          <p:cTn id="32" fill="hold">
-                            <p:stCondLst>
-                              <p:cond delay="0"/>
-                            </p:stCondLst>
-                            <p:childTnLst>
-                              <p:par>
-                                <p:cTn id="33" presetID="1" presetClass="entr" presetSubtype="0" fill="hold" nodeType="clickEffect">
-                                  <p:stCondLst>
-                                    <p:cond delay="0"/>
-                                  </p:stCondLst>
-                                  <p:childTnLst>
-                                    <p:set>
-                                      <p:cBhvr>
-                                        <p:cTn id="34" dur="1" fill="hold">
-                                          <p:stCondLst>
-                                            <p:cond delay="0"/>
-                                          </p:stCondLst>
-                                        </p:cTn>
-                                        <p:tgtEl>
-                                          <p:spTgt spid="3">
-                                            <p:txEl>
-                                              <p:pRg st="8" end="8"/>
-                                            </p:txEl>
-                                          </p:spTgt>
-                                        </p:tgtEl>
-                                        <p:attrNameLst>
-                                          <p:attrName>style.visibility</p:attrName>
-                                        </p:attrNameLst>
-                                      </p:cBhvr>
-                                      <p:to>
-                                        <p:strVal val="visible"/>
-                                      </p:to>
-                                    </p:set>
-                                  </p:childTnLst>
-                                </p:cTn>
-                              </p:par>
-                            </p:childTnLst>
-                          </p:cTn>
-                        </p:par>
-                      </p:childTnLst>
-                    </p:cTn>
-                  </p:par>
-                  <p:par>
-                    <p:cTn id="35" fill="hold">
-                      <p:stCondLst>
-                        <p:cond delay="indefinite"/>
-                      </p:stCondLst>
-                      <p:childTnLst>
-                        <p:par>
-                          <p:cTn id="36" fill="hold">
-                            <p:stCondLst>
-                              <p:cond delay="0"/>
-                            </p:stCondLst>
-                            <p:childTnLst>
-                              <p:par>
-                                <p:cTn id="37" presetID="1" presetClass="entr" presetSubtype="0" fill="hold" nodeType="clickEffect">
-                                  <p:stCondLst>
-                                    <p:cond delay="0"/>
-                                  </p:stCondLst>
-                                  <p:childTnLst>
-                                    <p:set>
-                                      <p:cBhvr>
-                                        <p:cTn id="38" dur="1" fill="hold">
-                                          <p:stCondLst>
-                                            <p:cond delay="0"/>
-                                          </p:stCondLst>
-                                        </p:cTn>
-                                        <p:tgtEl>
-                                          <p:spTgt spid="3">
-                                            <p:txEl>
-                                              <p:pRg st="9" end="9"/>
-                                            </p:txEl>
-                                          </p:spTgt>
-                                        </p:tgtEl>
-                                        <p:attrNameLst>
-                                          <p:attrName>style.visibility</p:attrName>
-                                        </p:attrNameLst>
-                                      </p:cBhvr>
-                                      <p:to>
-                                        <p:strVal val="visible"/>
-                                      </p:to>
-                                    </p:set>
-                                  </p:childTnLst>
-                                </p:cTn>
-                              </p:par>
-                            </p:childTnLst>
-                          </p:cTn>
-                        </p:par>
-                      </p:childTnLst>
-                    </p:cTn>
-                  </p:par>
-                </p:childTnLst>
-              </p:cTn>
-              <p:prevCondLst>
-                <p:cond evt="onPrev" delay="0">
-                  <p:tgtEl>
-                    <p:sldTgt/>
-                  </p:tgtEl>
-                </p:cond>
-              </p:prevCondLst>
-              <p:nextCondLst>
-                <p:cond evt="onNext" delay="0">
-                  <p:tgtEl>
-                    <p:sldTgt/>
-                  </p:tgtEl>
-                </p:cond>
-              </p:nextCondLst>
-            </p:seq>
-          </p:childTnLst>
-        </p:cTn>
-      </p:par>
-    </p:tnLst>
-  </p:timing>
-</p:sld>
-</file>
-
 <file path=ppt/slides/slide4.xml><?xml version="1.0" encoding="utf-8"?>
 <p:sld xmlns:a="http://schemas.openxmlformats.org/drawingml/2006/main" xmlns:r="http://schemas.openxmlformats.org/officeDocument/2006/relationships" xmlns:p="http://schemas.openxmlformats.org/presentationml/2006/main">
   <p:cSld>
@@ -25498,14 +25385,22 @@
             <a:r>
               <a:rPr lang="en-US" sz="3600" dirty="0">
                 <a:solidFill>
-                  <a:schemeClr val="tx1"/>
-                </a:solidFill>
-              </a:rPr>
-              <a:t>Big data modeling is the process of </a:t>
+                  <a:srgbClr val="C00000"/>
+                </a:solidFill>
+              </a:rPr>
+              <a:t>Big data modeling  </a:t>
             </a:r>
             <a:r>
               <a:rPr lang="en-US" sz="3600" dirty="0">
                 <a:solidFill>
+                  <a:schemeClr val="tx1"/>
+                </a:solidFill>
+              </a:rPr>
+              <a:t>is the process of </a:t>
+            </a:r>
+            <a:r>
+              <a:rPr lang="en-US" sz="3600" dirty="0">
+                <a:solidFill>
                   <a:srgbClr val="00B0F0"/>
                 </a:solidFill>
               </a:rPr>
@@ -25626,7 +25521,7 @@
           <a:p>
             <a:r>
               <a:rPr lang="en-US" sz="3600" b="1" u="sng" dirty="0"/>
-              <a:t>Key Characteristics</a:t>
+              <a:t>Key Characteristics of Big Data:</a:t>
             </a:r>
             <a:endParaRPr lang="en-US" sz="3600" b="1" u="sng" dirty="0">
               <a:solidFill>
@@ -26228,6 +26123,1015 @@
         <p:cNvPr id="1" name="">
           <a:extLst>
             <a:ext uri="{FF2B5EF4-FFF2-40B4-BE49-F238E27FC236}">
+              <a16:creationId xmlns:a16="http://schemas.microsoft.com/office/drawing/2014/main" id="{24A807E0-766D-74F2-79CA-5B5E1CBFCCAF}"/>
+            </a:ext>
+          </a:extLst>
+        </p:cNvPr>
+        <p:cNvGrpSpPr/>
+        <p:nvPr/>
+      </p:nvGrpSpPr>
+      <p:grpSpPr>
+        <a:xfrm>
+          <a:off x="0" y="0"/>
+          <a:ext cx="0" cy="0"/>
+          <a:chOff x="0" y="0"/>
+          <a:chExt cx="0" cy="0"/>
+        </a:xfrm>
+      </p:grpSpPr>
+      <p:sp>
+        <p:nvSpPr>
+          <p:cNvPr id="2" name="Title 1">
+            <a:extLst>
+              <a:ext uri="{FF2B5EF4-FFF2-40B4-BE49-F238E27FC236}">
+                <a16:creationId xmlns:a16="http://schemas.microsoft.com/office/drawing/2014/main" id="{95D0148F-E00D-6F02-670E-AF88CB5B4537}"/>
+              </a:ext>
+            </a:extLst>
+          </p:cNvPr>
+          <p:cNvSpPr>
+            <a:spLocks noGrp="1"/>
+          </p:cNvSpPr>
+          <p:nvPr>
+            <p:ph type="ctrTitle"/>
+          </p:nvPr>
+        </p:nvSpPr>
+        <p:spPr>
+          <a:xfrm>
+            <a:off x="1524000" y="382580"/>
+            <a:ext cx="9144000" cy="502003"/>
+          </a:xfrm>
+        </p:spPr>
+        <p:txBody>
+          <a:bodyPr>
+            <a:noAutofit/>
+          </a:bodyPr>
+          <a:lstStyle/>
+          <a:p>
+            <a:r>
+              <a:rPr lang="en-US" sz="3200" dirty="0" err="1"/>
+              <a:t>PySpark</a:t>
+            </a:r>
+            <a:r>
+              <a:rPr lang="en-US" sz="3200" dirty="0"/>
+              <a:t> </a:t>
+            </a:r>
+            <a:r>
+              <a:rPr lang="en-US" sz="3200" dirty="0" err="1"/>
+              <a:t>DataFrame</a:t>
+            </a:r>
+            <a:r>
+              <a:rPr lang="en-US" sz="3200" dirty="0"/>
+              <a:t> Example-2 - 06</a:t>
+            </a:r>
+          </a:p>
+        </p:txBody>
+      </p:sp>
+      <p:sp>
+        <p:nvSpPr>
+          <p:cNvPr id="3" name="Subtitle 2">
+            <a:extLst>
+              <a:ext uri="{FF2B5EF4-FFF2-40B4-BE49-F238E27FC236}">
+                <a16:creationId xmlns:a16="http://schemas.microsoft.com/office/drawing/2014/main" id="{D34D4C2F-A2C4-9BB5-9623-5F12F87EBBD7}"/>
+              </a:ext>
+            </a:extLst>
+          </p:cNvPr>
+          <p:cNvSpPr>
+            <a:spLocks noGrp="1"/>
+          </p:cNvSpPr>
+          <p:nvPr>
+            <p:ph type="subTitle" idx="1"/>
+          </p:nvPr>
+        </p:nvSpPr>
+        <p:spPr>
+          <a:xfrm>
+            <a:off x="1524000" y="884584"/>
+            <a:ext cx="9144000" cy="5088834"/>
+          </a:xfrm>
+        </p:spPr>
+        <p:txBody>
+          <a:bodyPr>
+            <a:normAutofit/>
+          </a:bodyPr>
+          <a:lstStyle/>
+          <a:p>
+            <a:r>
+              <a:rPr lang="en-US" sz="2000" dirty="0">
+                <a:solidFill>
+                  <a:schemeClr val="tx1"/>
+                </a:solidFill>
+                <a:highlight>
+                  <a:srgbClr val="FFFF00"/>
+                </a:highlight>
+                <a:latin typeface="Consolas" panose="020B0609020204030204" pitchFamily="49" charset="0"/>
+                <a:cs typeface="Consolas" panose="020B0609020204030204" pitchFamily="49" charset="0"/>
+              </a:rPr>
+              <a:t># 7. Data Aggregation: Calculate metrics by Category </a:t>
+            </a:r>
+          </a:p>
+          <a:p>
+            <a:r>
+              <a:rPr lang="en-US" sz="2000" dirty="0">
+                <a:solidFill>
+                  <a:schemeClr val="tx1"/>
+                </a:solidFill>
+                <a:highlight>
+                  <a:srgbClr val="FFFF00"/>
+                </a:highlight>
+                <a:latin typeface="Consolas" panose="020B0609020204030204" pitchFamily="49" charset="0"/>
+                <a:cs typeface="Consolas" panose="020B0609020204030204" pitchFamily="49" charset="0"/>
+              </a:rPr>
+              <a:t># </a:t>
+            </a:r>
+            <a:r>
+              <a:rPr lang="en-US" sz="1800" dirty="0">
+                <a:solidFill>
+                  <a:schemeClr val="tx1"/>
+                </a:solidFill>
+                <a:highlight>
+                  <a:srgbClr val="FFFF00"/>
+                </a:highlight>
+                <a:latin typeface="Consolas" panose="020B0609020204030204" pitchFamily="49" charset="0"/>
+                <a:cs typeface="Consolas" panose="020B0609020204030204" pitchFamily="49" charset="0"/>
+              </a:rPr>
+              <a:t>Total spend, average spend, and distinct customer count per category </a:t>
+            </a:r>
+            <a:endParaRPr lang="en-US" sz="2000" dirty="0">
+              <a:solidFill>
+                <a:schemeClr val="tx1"/>
+              </a:solidFill>
+              <a:highlight>
+                <a:srgbClr val="FFFF00"/>
+              </a:highlight>
+              <a:latin typeface="Consolas" panose="020B0609020204030204" pitchFamily="49" charset="0"/>
+              <a:cs typeface="Consolas" panose="020B0609020204030204" pitchFamily="49" charset="0"/>
+            </a:endParaRPr>
+          </a:p>
+          <a:p>
+            <a:r>
+              <a:rPr lang="en-US" sz="2000" dirty="0" err="1">
+                <a:solidFill>
+                  <a:schemeClr val="tx1"/>
+                </a:solidFill>
+                <a:latin typeface="Consolas" panose="020B0609020204030204" pitchFamily="49" charset="0"/>
+                <a:cs typeface="Consolas" panose="020B0609020204030204" pitchFamily="49" charset="0"/>
+              </a:rPr>
+              <a:t>df_metrics</a:t>
+            </a:r>
+            <a:r>
+              <a:rPr lang="en-US" sz="2000" dirty="0">
+                <a:solidFill>
+                  <a:schemeClr val="tx1"/>
+                </a:solidFill>
+                <a:latin typeface="Consolas" panose="020B0609020204030204" pitchFamily="49" charset="0"/>
+                <a:cs typeface="Consolas" panose="020B0609020204030204" pitchFamily="49" charset="0"/>
+              </a:rPr>
+              <a:t> = </a:t>
+            </a:r>
+            <a:r>
+              <a:rPr lang="en-US" sz="2000" dirty="0" err="1">
+                <a:solidFill>
+                  <a:schemeClr val="tx1"/>
+                </a:solidFill>
+                <a:latin typeface="Consolas" panose="020B0609020204030204" pitchFamily="49" charset="0"/>
+                <a:cs typeface="Consolas" panose="020B0609020204030204" pitchFamily="49" charset="0"/>
+              </a:rPr>
+              <a:t>df_transformed.groupBy</a:t>
+            </a:r>
+            <a:r>
+              <a:rPr lang="en-US" sz="2000" dirty="0">
+                <a:solidFill>
+                  <a:schemeClr val="tx1"/>
+                </a:solidFill>
+                <a:latin typeface="Consolas" panose="020B0609020204030204" pitchFamily="49" charset="0"/>
+                <a:cs typeface="Consolas" panose="020B0609020204030204" pitchFamily="49" charset="0"/>
+              </a:rPr>
+              <a:t>("Category").</a:t>
+            </a:r>
+            <a:r>
+              <a:rPr lang="en-US" sz="2000" dirty="0" err="1">
+                <a:solidFill>
+                  <a:schemeClr val="tx1"/>
+                </a:solidFill>
+                <a:latin typeface="Consolas" panose="020B0609020204030204" pitchFamily="49" charset="0"/>
+                <a:cs typeface="Consolas" panose="020B0609020204030204" pitchFamily="49" charset="0"/>
+              </a:rPr>
+              <a:t>agg</a:t>
+            </a:r>
+            <a:r>
+              <a:rPr lang="en-US" sz="2000" dirty="0">
+                <a:solidFill>
+                  <a:schemeClr val="tx1"/>
+                </a:solidFill>
+                <a:latin typeface="Consolas" panose="020B0609020204030204" pitchFamily="49" charset="0"/>
+                <a:cs typeface="Consolas" panose="020B0609020204030204" pitchFamily="49" charset="0"/>
+              </a:rPr>
+              <a:t>(     </a:t>
+            </a:r>
+          </a:p>
+          <a:p>
+            <a:r>
+              <a:rPr lang="en-US" sz="2000" dirty="0">
+                <a:solidFill>
+                  <a:schemeClr val="tx1"/>
+                </a:solidFill>
+                <a:latin typeface="Consolas" panose="020B0609020204030204" pitchFamily="49" charset="0"/>
+                <a:cs typeface="Consolas" panose="020B0609020204030204" pitchFamily="49" charset="0"/>
+              </a:rPr>
+              <a:t>   </a:t>
+            </a:r>
+            <a:r>
+              <a:rPr lang="en-US" sz="2000" dirty="0" err="1">
+                <a:solidFill>
+                  <a:schemeClr val="tx1"/>
+                </a:solidFill>
+                <a:latin typeface="Consolas" panose="020B0609020204030204" pitchFamily="49" charset="0"/>
+                <a:cs typeface="Consolas" panose="020B0609020204030204" pitchFamily="49" charset="0"/>
+              </a:rPr>
+              <a:t>F.sum</a:t>
+            </a:r>
+            <a:r>
+              <a:rPr lang="en-US" sz="2000" dirty="0">
+                <a:solidFill>
+                  <a:schemeClr val="tx1"/>
+                </a:solidFill>
+                <a:latin typeface="Consolas" panose="020B0609020204030204" pitchFamily="49" charset="0"/>
+                <a:cs typeface="Consolas" panose="020B0609020204030204" pitchFamily="49" charset="0"/>
+              </a:rPr>
+              <a:t>("Amount").alias("</a:t>
+            </a:r>
+            <a:r>
+              <a:rPr lang="en-US" sz="2000" dirty="0" err="1">
+                <a:solidFill>
+                  <a:schemeClr val="tx1"/>
+                </a:solidFill>
+                <a:latin typeface="Consolas" panose="020B0609020204030204" pitchFamily="49" charset="0"/>
+                <a:cs typeface="Consolas" panose="020B0609020204030204" pitchFamily="49" charset="0"/>
+              </a:rPr>
+              <a:t>Total_Revenue</a:t>
+            </a:r>
+            <a:r>
+              <a:rPr lang="en-US" sz="2000" dirty="0">
+                <a:solidFill>
+                  <a:schemeClr val="tx1"/>
+                </a:solidFill>
+                <a:latin typeface="Consolas" panose="020B0609020204030204" pitchFamily="49" charset="0"/>
+                <a:cs typeface="Consolas" panose="020B0609020204030204" pitchFamily="49" charset="0"/>
+              </a:rPr>
+              <a:t>"), </a:t>
+            </a:r>
+          </a:p>
+          <a:p>
+            <a:r>
+              <a:rPr lang="en-US" sz="2000" dirty="0">
+                <a:solidFill>
+                  <a:schemeClr val="tx1"/>
+                </a:solidFill>
+                <a:latin typeface="Consolas" panose="020B0609020204030204" pitchFamily="49" charset="0"/>
+                <a:cs typeface="Consolas" panose="020B0609020204030204" pitchFamily="49" charset="0"/>
+              </a:rPr>
+              <a:t>   </a:t>
+            </a:r>
+            <a:r>
+              <a:rPr lang="en-US" sz="2000" dirty="0" err="1">
+                <a:solidFill>
+                  <a:schemeClr val="tx1"/>
+                </a:solidFill>
+                <a:latin typeface="Consolas" panose="020B0609020204030204" pitchFamily="49" charset="0"/>
+                <a:cs typeface="Consolas" panose="020B0609020204030204" pitchFamily="49" charset="0"/>
+              </a:rPr>
+              <a:t>F.round</a:t>
+            </a:r>
+            <a:r>
+              <a:rPr lang="en-US" sz="2000" dirty="0">
+                <a:solidFill>
+                  <a:schemeClr val="tx1"/>
+                </a:solidFill>
+                <a:latin typeface="Consolas" panose="020B0609020204030204" pitchFamily="49" charset="0"/>
+                <a:cs typeface="Consolas" panose="020B0609020204030204" pitchFamily="49" charset="0"/>
+              </a:rPr>
+              <a:t>(</a:t>
+            </a:r>
+            <a:r>
+              <a:rPr lang="en-US" sz="2000" dirty="0" err="1">
+                <a:solidFill>
+                  <a:schemeClr val="tx1"/>
+                </a:solidFill>
+                <a:latin typeface="Consolas" panose="020B0609020204030204" pitchFamily="49" charset="0"/>
+                <a:cs typeface="Consolas" panose="020B0609020204030204" pitchFamily="49" charset="0"/>
+              </a:rPr>
+              <a:t>F.avg</a:t>
+            </a:r>
+            <a:r>
+              <a:rPr lang="en-US" sz="2000" dirty="0">
+                <a:solidFill>
+                  <a:schemeClr val="tx1"/>
+                </a:solidFill>
+                <a:latin typeface="Consolas" panose="020B0609020204030204" pitchFamily="49" charset="0"/>
+                <a:cs typeface="Consolas" panose="020B0609020204030204" pitchFamily="49" charset="0"/>
+              </a:rPr>
+              <a:t>("Amount").alias("</a:t>
+            </a:r>
+            <a:r>
+              <a:rPr lang="en-US" sz="2000" dirty="0" err="1">
+                <a:solidFill>
+                  <a:schemeClr val="tx1"/>
+                </a:solidFill>
+                <a:latin typeface="Consolas" panose="020B0609020204030204" pitchFamily="49" charset="0"/>
+                <a:cs typeface="Consolas" panose="020B0609020204030204" pitchFamily="49" charset="0"/>
+              </a:rPr>
+              <a:t>Average_Spend</a:t>
+            </a:r>
+            <a:r>
+              <a:rPr lang="en-US" sz="2000" dirty="0">
+                <a:solidFill>
+                  <a:schemeClr val="tx1"/>
+                </a:solidFill>
+                <a:latin typeface="Consolas" panose="020B0609020204030204" pitchFamily="49" charset="0"/>
+                <a:cs typeface="Consolas" panose="020B0609020204030204" pitchFamily="49" charset="0"/>
+              </a:rPr>
+              <a:t>"),    </a:t>
+            </a:r>
+          </a:p>
+          <a:p>
+            <a:r>
+              <a:rPr lang="en-US" sz="2000" dirty="0">
+                <a:solidFill>
+                  <a:schemeClr val="tx1"/>
+                </a:solidFill>
+                <a:latin typeface="Consolas" panose="020B0609020204030204" pitchFamily="49" charset="0"/>
+                <a:cs typeface="Consolas" panose="020B0609020204030204" pitchFamily="49" charset="0"/>
+              </a:rPr>
+              <a:t>   </a:t>
+            </a:r>
+            <a:r>
+              <a:rPr lang="en-US" sz="2000" dirty="0" err="1">
+                <a:solidFill>
+                  <a:schemeClr val="tx1"/>
+                </a:solidFill>
+                <a:latin typeface="Consolas" panose="020B0609020204030204" pitchFamily="49" charset="0"/>
+                <a:cs typeface="Consolas" panose="020B0609020204030204" pitchFamily="49" charset="0"/>
+              </a:rPr>
+              <a:t>F.countDistinct</a:t>
+            </a:r>
+            <a:r>
+              <a:rPr lang="en-US" sz="2000" dirty="0">
+                <a:solidFill>
+                  <a:schemeClr val="tx1"/>
+                </a:solidFill>
+                <a:latin typeface="Consolas" panose="020B0609020204030204" pitchFamily="49" charset="0"/>
+                <a:cs typeface="Consolas" panose="020B0609020204030204" pitchFamily="49" charset="0"/>
+              </a:rPr>
+              <a:t>("</a:t>
+            </a:r>
+            <a:r>
+              <a:rPr lang="en-US" sz="2000" dirty="0" err="1">
+                <a:solidFill>
+                  <a:schemeClr val="tx1"/>
+                </a:solidFill>
+                <a:latin typeface="Consolas" panose="020B0609020204030204" pitchFamily="49" charset="0"/>
+                <a:cs typeface="Consolas" panose="020B0609020204030204" pitchFamily="49" charset="0"/>
+              </a:rPr>
+              <a:t>UserID</a:t>
+            </a:r>
+            <a:r>
+              <a:rPr lang="en-US" sz="2000" dirty="0">
+                <a:solidFill>
+                  <a:schemeClr val="tx1"/>
+                </a:solidFill>
+                <a:latin typeface="Consolas" panose="020B0609020204030204" pitchFamily="49" charset="0"/>
+                <a:cs typeface="Consolas" panose="020B0609020204030204" pitchFamily="49" charset="0"/>
+              </a:rPr>
+              <a:t>").alias("</a:t>
+            </a:r>
+            <a:r>
+              <a:rPr lang="en-US" sz="2000" dirty="0" err="1">
+                <a:solidFill>
+                  <a:schemeClr val="tx1"/>
+                </a:solidFill>
+                <a:latin typeface="Consolas" panose="020B0609020204030204" pitchFamily="49" charset="0"/>
+                <a:cs typeface="Consolas" panose="020B0609020204030204" pitchFamily="49" charset="0"/>
+              </a:rPr>
+              <a:t>Unique_Customers</a:t>
+            </a:r>
+            <a:r>
+              <a:rPr lang="en-US" sz="2000" dirty="0">
+                <a:solidFill>
+                  <a:schemeClr val="tx1"/>
+                </a:solidFill>
+                <a:latin typeface="Consolas" panose="020B0609020204030204" pitchFamily="49" charset="0"/>
+                <a:cs typeface="Consolas" panose="020B0609020204030204" pitchFamily="49" charset="0"/>
+              </a:rPr>
+              <a:t>") </a:t>
+            </a:r>
+          </a:p>
+          <a:p>
+            <a:r>
+              <a:rPr lang="en-US" sz="2000" dirty="0">
+                <a:solidFill>
+                  <a:schemeClr val="tx1"/>
+                </a:solidFill>
+                <a:latin typeface="Consolas" panose="020B0609020204030204" pitchFamily="49" charset="0"/>
+                <a:cs typeface="Consolas" panose="020B0609020204030204" pitchFamily="49" charset="0"/>
+              </a:rPr>
+              <a:t>).</a:t>
+            </a:r>
+            <a:r>
+              <a:rPr lang="en-US" sz="2000" dirty="0" err="1">
+                <a:solidFill>
+                  <a:schemeClr val="tx1"/>
+                </a:solidFill>
+                <a:latin typeface="Consolas" panose="020B0609020204030204" pitchFamily="49" charset="0"/>
+                <a:cs typeface="Consolas" panose="020B0609020204030204" pitchFamily="49" charset="0"/>
+              </a:rPr>
+              <a:t>orderBy</a:t>
+            </a:r>
+            <a:r>
+              <a:rPr lang="en-US" sz="2000" dirty="0">
+                <a:solidFill>
+                  <a:schemeClr val="tx1"/>
+                </a:solidFill>
+                <a:latin typeface="Consolas" panose="020B0609020204030204" pitchFamily="49" charset="0"/>
+                <a:cs typeface="Consolas" panose="020B0609020204030204" pitchFamily="49" charset="0"/>
+              </a:rPr>
+              <a:t>(</a:t>
+            </a:r>
+            <a:r>
+              <a:rPr lang="en-US" sz="2000" dirty="0" err="1">
+                <a:solidFill>
+                  <a:schemeClr val="tx1"/>
+                </a:solidFill>
+                <a:latin typeface="Consolas" panose="020B0609020204030204" pitchFamily="49" charset="0"/>
+                <a:cs typeface="Consolas" panose="020B0609020204030204" pitchFamily="49" charset="0"/>
+              </a:rPr>
+              <a:t>F.desc</a:t>
+            </a:r>
+            <a:r>
+              <a:rPr lang="en-US" sz="2000" dirty="0">
+                <a:solidFill>
+                  <a:schemeClr val="tx1"/>
+                </a:solidFill>
+                <a:latin typeface="Consolas" panose="020B0609020204030204" pitchFamily="49" charset="0"/>
+                <a:cs typeface="Consolas" panose="020B0609020204030204" pitchFamily="49" charset="0"/>
+              </a:rPr>
+              <a:t>("</a:t>
+            </a:r>
+            <a:r>
+              <a:rPr lang="en-US" sz="2000" dirty="0" err="1">
+                <a:solidFill>
+                  <a:schemeClr val="tx1"/>
+                </a:solidFill>
+                <a:latin typeface="Consolas" panose="020B0609020204030204" pitchFamily="49" charset="0"/>
+                <a:cs typeface="Consolas" panose="020B0609020204030204" pitchFamily="49" charset="0"/>
+              </a:rPr>
+              <a:t>Total_Revenue</a:t>
+            </a:r>
+            <a:r>
+              <a:rPr lang="en-US" sz="2000" dirty="0">
+                <a:solidFill>
+                  <a:schemeClr val="tx1"/>
+                </a:solidFill>
+                <a:latin typeface="Consolas" panose="020B0609020204030204" pitchFamily="49" charset="0"/>
+                <a:cs typeface="Consolas" panose="020B0609020204030204" pitchFamily="49" charset="0"/>
+              </a:rPr>
+              <a:t>")) </a:t>
+            </a:r>
+          </a:p>
+          <a:p>
+            <a:endParaRPr lang="en-US" sz="2000" dirty="0">
+              <a:solidFill>
+                <a:schemeClr val="tx1"/>
+              </a:solidFill>
+              <a:latin typeface="Consolas" panose="020B0609020204030204" pitchFamily="49" charset="0"/>
+              <a:cs typeface="Consolas" panose="020B0609020204030204" pitchFamily="49" charset="0"/>
+            </a:endParaRPr>
+          </a:p>
+          <a:p>
+            <a:r>
+              <a:rPr lang="en-US" sz="2000" dirty="0">
+                <a:solidFill>
+                  <a:schemeClr val="tx1"/>
+                </a:solidFill>
+                <a:latin typeface="Consolas" panose="020B0609020204030204" pitchFamily="49" charset="0"/>
+                <a:cs typeface="Consolas" panose="020B0609020204030204" pitchFamily="49" charset="0"/>
+              </a:rPr>
+              <a:t>print("--- Aggregated Category Metrics ---") </a:t>
+            </a:r>
+          </a:p>
+          <a:p>
+            <a:r>
+              <a:rPr lang="en-US" sz="2000" dirty="0" err="1">
+                <a:solidFill>
+                  <a:schemeClr val="tx1"/>
+                </a:solidFill>
+                <a:latin typeface="Consolas" panose="020B0609020204030204" pitchFamily="49" charset="0"/>
+                <a:cs typeface="Consolas" panose="020B0609020204030204" pitchFamily="49" charset="0"/>
+              </a:rPr>
+              <a:t>df_metrics.show</a:t>
+            </a:r>
+            <a:r>
+              <a:rPr lang="en-US" sz="2000" dirty="0">
+                <a:solidFill>
+                  <a:schemeClr val="tx1"/>
+                </a:solidFill>
+                <a:latin typeface="Consolas" panose="020B0609020204030204" pitchFamily="49" charset="0"/>
+                <a:cs typeface="Consolas" panose="020B0609020204030204" pitchFamily="49" charset="0"/>
+              </a:rPr>
+              <a:t>()</a:t>
+            </a:r>
+          </a:p>
+        </p:txBody>
+      </p:sp>
+    </p:spTree>
+    <p:extLst>
+      <p:ext uri="{BB962C8B-B14F-4D97-AF65-F5344CB8AC3E}">
+        <p14:creationId xmlns:p14="http://schemas.microsoft.com/office/powerpoint/2010/main" val="2571302331"/>
+      </p:ext>
+    </p:extLst>
+  </p:cSld>
+  <p:clrMapOvr>
+    <a:masterClrMapping/>
+  </p:clrMapOvr>
+  <p:timing>
+    <p:tnLst>
+      <p:par>
+        <p:cTn id="1" dur="indefinite" restart="never" nodeType="tmRoot">
+          <p:childTnLst>
+            <p:seq concurrent="1" nextAc="seek">
+              <p:cTn id="2" dur="indefinite" nodeType="mainSeq">
+                <p:childTnLst>
+                  <p:par>
+                    <p:cTn id="3" fill="hold">
+                      <p:stCondLst>
+                        <p:cond delay="indefinite"/>
+                      </p:stCondLst>
+                      <p:childTnLst>
+                        <p:par>
+                          <p:cTn id="4" fill="hold">
+                            <p:stCondLst>
+                              <p:cond delay="0"/>
+                            </p:stCondLst>
+                            <p:childTnLst>
+                              <p:par>
+                                <p:cTn id="5" presetID="1" presetClass="entr" presetSubtype="0" fill="hold" nodeType="clickEffect">
+                                  <p:stCondLst>
+                                    <p:cond delay="0"/>
+                                  </p:stCondLst>
+                                  <p:childTnLst>
+                                    <p:set>
+                                      <p:cBhvr>
+                                        <p:cTn id="6" dur="1" fill="hold">
+                                          <p:stCondLst>
+                                            <p:cond delay="0"/>
+                                          </p:stCondLst>
+                                        </p:cTn>
+                                        <p:tgtEl>
+                                          <p:spTgt spid="3">
+                                            <p:txEl>
+                                              <p:pRg st="0" end="0"/>
+                                            </p:txEl>
+                                          </p:spTgt>
+                                        </p:tgtEl>
+                                        <p:attrNameLst>
+                                          <p:attrName>style.visibility</p:attrName>
+                                        </p:attrNameLst>
+                                      </p:cBhvr>
+                                      <p:to>
+                                        <p:strVal val="visible"/>
+                                      </p:to>
+                                    </p:set>
+                                  </p:childTnLst>
+                                </p:cTn>
+                              </p:par>
+                            </p:childTnLst>
+                          </p:cTn>
+                        </p:par>
+                      </p:childTnLst>
+                    </p:cTn>
+                  </p:par>
+                  <p:par>
+                    <p:cTn id="7" fill="hold">
+                      <p:stCondLst>
+                        <p:cond delay="indefinite"/>
+                      </p:stCondLst>
+                      <p:childTnLst>
+                        <p:par>
+                          <p:cTn id="8" fill="hold">
+                            <p:stCondLst>
+                              <p:cond delay="0"/>
+                            </p:stCondLst>
+                            <p:childTnLst>
+                              <p:par>
+                                <p:cTn id="9" presetID="1" presetClass="entr" presetSubtype="0" fill="hold" nodeType="clickEffect">
+                                  <p:stCondLst>
+                                    <p:cond delay="0"/>
+                                  </p:stCondLst>
+                                  <p:childTnLst>
+                                    <p:set>
+                                      <p:cBhvr>
+                                        <p:cTn id="10" dur="1" fill="hold">
+                                          <p:stCondLst>
+                                            <p:cond delay="0"/>
+                                          </p:stCondLst>
+                                        </p:cTn>
+                                        <p:tgtEl>
+                                          <p:spTgt spid="3">
+                                            <p:txEl>
+                                              <p:pRg st="1" end="1"/>
+                                            </p:txEl>
+                                          </p:spTgt>
+                                        </p:tgtEl>
+                                        <p:attrNameLst>
+                                          <p:attrName>style.visibility</p:attrName>
+                                        </p:attrNameLst>
+                                      </p:cBhvr>
+                                      <p:to>
+                                        <p:strVal val="visible"/>
+                                      </p:to>
+                                    </p:set>
+                                  </p:childTnLst>
+                                </p:cTn>
+                              </p:par>
+                            </p:childTnLst>
+                          </p:cTn>
+                        </p:par>
+                      </p:childTnLst>
+                    </p:cTn>
+                  </p:par>
+                  <p:par>
+                    <p:cTn id="11" fill="hold">
+                      <p:stCondLst>
+                        <p:cond delay="indefinite"/>
+                      </p:stCondLst>
+                      <p:childTnLst>
+                        <p:par>
+                          <p:cTn id="12" fill="hold">
+                            <p:stCondLst>
+                              <p:cond delay="0"/>
+                            </p:stCondLst>
+                            <p:childTnLst>
+                              <p:par>
+                                <p:cTn id="13" presetID="1" presetClass="entr" presetSubtype="0" fill="hold" nodeType="clickEffect">
+                                  <p:stCondLst>
+                                    <p:cond delay="0"/>
+                                  </p:stCondLst>
+                                  <p:childTnLst>
+                                    <p:set>
+                                      <p:cBhvr>
+                                        <p:cTn id="14" dur="1" fill="hold">
+                                          <p:stCondLst>
+                                            <p:cond delay="0"/>
+                                          </p:stCondLst>
+                                        </p:cTn>
+                                        <p:tgtEl>
+                                          <p:spTgt spid="3">
+                                            <p:txEl>
+                                              <p:pRg st="2" end="2"/>
+                                            </p:txEl>
+                                          </p:spTgt>
+                                        </p:tgtEl>
+                                        <p:attrNameLst>
+                                          <p:attrName>style.visibility</p:attrName>
+                                        </p:attrNameLst>
+                                      </p:cBhvr>
+                                      <p:to>
+                                        <p:strVal val="visible"/>
+                                      </p:to>
+                                    </p:set>
+                                  </p:childTnLst>
+                                </p:cTn>
+                              </p:par>
+                            </p:childTnLst>
+                          </p:cTn>
+                        </p:par>
+                      </p:childTnLst>
+                    </p:cTn>
+                  </p:par>
+                  <p:par>
+                    <p:cTn id="15" fill="hold">
+                      <p:stCondLst>
+                        <p:cond delay="indefinite"/>
+                      </p:stCondLst>
+                      <p:childTnLst>
+                        <p:par>
+                          <p:cTn id="16" fill="hold">
+                            <p:stCondLst>
+                              <p:cond delay="0"/>
+                            </p:stCondLst>
+                            <p:childTnLst>
+                              <p:par>
+                                <p:cTn id="17" presetID="1" presetClass="entr" presetSubtype="0" fill="hold" nodeType="clickEffect">
+                                  <p:stCondLst>
+                                    <p:cond delay="0"/>
+                                  </p:stCondLst>
+                                  <p:childTnLst>
+                                    <p:set>
+                                      <p:cBhvr>
+                                        <p:cTn id="18" dur="1" fill="hold">
+                                          <p:stCondLst>
+                                            <p:cond delay="0"/>
+                                          </p:stCondLst>
+                                        </p:cTn>
+                                        <p:tgtEl>
+                                          <p:spTgt spid="3">
+                                            <p:txEl>
+                                              <p:pRg st="3" end="3"/>
+                                            </p:txEl>
+                                          </p:spTgt>
+                                        </p:tgtEl>
+                                        <p:attrNameLst>
+                                          <p:attrName>style.visibility</p:attrName>
+                                        </p:attrNameLst>
+                                      </p:cBhvr>
+                                      <p:to>
+                                        <p:strVal val="visible"/>
+                                      </p:to>
+                                    </p:set>
+                                  </p:childTnLst>
+                                </p:cTn>
+                              </p:par>
+                            </p:childTnLst>
+                          </p:cTn>
+                        </p:par>
+                      </p:childTnLst>
+                    </p:cTn>
+                  </p:par>
+                  <p:par>
+                    <p:cTn id="19" fill="hold">
+                      <p:stCondLst>
+                        <p:cond delay="indefinite"/>
+                      </p:stCondLst>
+                      <p:childTnLst>
+                        <p:par>
+                          <p:cTn id="20" fill="hold">
+                            <p:stCondLst>
+                              <p:cond delay="0"/>
+                            </p:stCondLst>
+                            <p:childTnLst>
+                              <p:par>
+                                <p:cTn id="21" presetID="1" presetClass="entr" presetSubtype="0" fill="hold" nodeType="clickEffect">
+                                  <p:stCondLst>
+                                    <p:cond delay="0"/>
+                                  </p:stCondLst>
+                                  <p:childTnLst>
+                                    <p:set>
+                                      <p:cBhvr>
+                                        <p:cTn id="22" dur="1" fill="hold">
+                                          <p:stCondLst>
+                                            <p:cond delay="0"/>
+                                          </p:stCondLst>
+                                        </p:cTn>
+                                        <p:tgtEl>
+                                          <p:spTgt spid="3">
+                                            <p:txEl>
+                                              <p:pRg st="4" end="4"/>
+                                            </p:txEl>
+                                          </p:spTgt>
+                                        </p:tgtEl>
+                                        <p:attrNameLst>
+                                          <p:attrName>style.visibility</p:attrName>
+                                        </p:attrNameLst>
+                                      </p:cBhvr>
+                                      <p:to>
+                                        <p:strVal val="visible"/>
+                                      </p:to>
+                                    </p:set>
+                                  </p:childTnLst>
+                                </p:cTn>
+                              </p:par>
+                            </p:childTnLst>
+                          </p:cTn>
+                        </p:par>
+                      </p:childTnLst>
+                    </p:cTn>
+                  </p:par>
+                  <p:par>
+                    <p:cTn id="23" fill="hold">
+                      <p:stCondLst>
+                        <p:cond delay="indefinite"/>
+                      </p:stCondLst>
+                      <p:childTnLst>
+                        <p:par>
+                          <p:cTn id="24" fill="hold">
+                            <p:stCondLst>
+                              <p:cond delay="0"/>
+                            </p:stCondLst>
+                            <p:childTnLst>
+                              <p:par>
+                                <p:cTn id="25" presetID="1" presetClass="entr" presetSubtype="0" fill="hold" nodeType="clickEffect">
+                                  <p:stCondLst>
+                                    <p:cond delay="0"/>
+                                  </p:stCondLst>
+                                  <p:childTnLst>
+                                    <p:set>
+                                      <p:cBhvr>
+                                        <p:cTn id="26" dur="1" fill="hold">
+                                          <p:stCondLst>
+                                            <p:cond delay="0"/>
+                                          </p:stCondLst>
+                                        </p:cTn>
+                                        <p:tgtEl>
+                                          <p:spTgt spid="3">
+                                            <p:txEl>
+                                              <p:pRg st="5" end="5"/>
+                                            </p:txEl>
+                                          </p:spTgt>
+                                        </p:tgtEl>
+                                        <p:attrNameLst>
+                                          <p:attrName>style.visibility</p:attrName>
+                                        </p:attrNameLst>
+                                      </p:cBhvr>
+                                      <p:to>
+                                        <p:strVal val="visible"/>
+                                      </p:to>
+                                    </p:set>
+                                  </p:childTnLst>
+                                </p:cTn>
+                              </p:par>
+                            </p:childTnLst>
+                          </p:cTn>
+                        </p:par>
+                      </p:childTnLst>
+                    </p:cTn>
+                  </p:par>
+                  <p:par>
+                    <p:cTn id="27" fill="hold">
+                      <p:stCondLst>
+                        <p:cond delay="indefinite"/>
+                      </p:stCondLst>
+                      <p:childTnLst>
+                        <p:par>
+                          <p:cTn id="28" fill="hold">
+                            <p:stCondLst>
+                              <p:cond delay="0"/>
+                            </p:stCondLst>
+                            <p:childTnLst>
+                              <p:par>
+                                <p:cTn id="29" presetID="1" presetClass="entr" presetSubtype="0" fill="hold" nodeType="clickEffect">
+                                  <p:stCondLst>
+                                    <p:cond delay="0"/>
+                                  </p:stCondLst>
+                                  <p:childTnLst>
+                                    <p:set>
+                                      <p:cBhvr>
+                                        <p:cTn id="30" dur="1" fill="hold">
+                                          <p:stCondLst>
+                                            <p:cond delay="0"/>
+                                          </p:stCondLst>
+                                        </p:cTn>
+                                        <p:tgtEl>
+                                          <p:spTgt spid="3">
+                                            <p:txEl>
+                                              <p:pRg st="6" end="6"/>
+                                            </p:txEl>
+                                          </p:spTgt>
+                                        </p:tgtEl>
+                                        <p:attrNameLst>
+                                          <p:attrName>style.visibility</p:attrName>
+                                        </p:attrNameLst>
+                                      </p:cBhvr>
+                                      <p:to>
+                                        <p:strVal val="visible"/>
+                                      </p:to>
+                                    </p:set>
+                                  </p:childTnLst>
+                                </p:cTn>
+                              </p:par>
+                            </p:childTnLst>
+                          </p:cTn>
+                        </p:par>
+                      </p:childTnLst>
+                    </p:cTn>
+                  </p:par>
+                  <p:par>
+                    <p:cTn id="31" fill="hold">
+                      <p:stCondLst>
+                        <p:cond delay="indefinite"/>
+                      </p:stCondLst>
+                      <p:childTnLst>
+                        <p:par>
+                          <p:cTn id="32" fill="hold">
+                            <p:stCondLst>
+                              <p:cond delay="0"/>
+                            </p:stCondLst>
+                            <p:childTnLst>
+                              <p:par>
+                                <p:cTn id="33" presetID="1" presetClass="entr" presetSubtype="0" fill="hold" nodeType="clickEffect">
+                                  <p:stCondLst>
+                                    <p:cond delay="0"/>
+                                  </p:stCondLst>
+                                  <p:childTnLst>
+                                    <p:set>
+                                      <p:cBhvr>
+                                        <p:cTn id="34" dur="1" fill="hold">
+                                          <p:stCondLst>
+                                            <p:cond delay="0"/>
+                                          </p:stCondLst>
+                                        </p:cTn>
+                                        <p:tgtEl>
+                                          <p:spTgt spid="3">
+                                            <p:txEl>
+                                              <p:pRg st="8" end="8"/>
+                                            </p:txEl>
+                                          </p:spTgt>
+                                        </p:tgtEl>
+                                        <p:attrNameLst>
+                                          <p:attrName>style.visibility</p:attrName>
+                                        </p:attrNameLst>
+                                      </p:cBhvr>
+                                      <p:to>
+                                        <p:strVal val="visible"/>
+                                      </p:to>
+                                    </p:set>
+                                  </p:childTnLst>
+                                </p:cTn>
+                              </p:par>
+                            </p:childTnLst>
+                          </p:cTn>
+                        </p:par>
+                      </p:childTnLst>
+                    </p:cTn>
+                  </p:par>
+                  <p:par>
+                    <p:cTn id="35" fill="hold">
+                      <p:stCondLst>
+                        <p:cond delay="indefinite"/>
+                      </p:stCondLst>
+                      <p:childTnLst>
+                        <p:par>
+                          <p:cTn id="36" fill="hold">
+                            <p:stCondLst>
+                              <p:cond delay="0"/>
+                            </p:stCondLst>
+                            <p:childTnLst>
+                              <p:par>
+                                <p:cTn id="37" presetID="1" presetClass="entr" presetSubtype="0" fill="hold" nodeType="clickEffect">
+                                  <p:stCondLst>
+                                    <p:cond delay="0"/>
+                                  </p:stCondLst>
+                                  <p:childTnLst>
+                                    <p:set>
+                                      <p:cBhvr>
+                                        <p:cTn id="38" dur="1" fill="hold">
+                                          <p:stCondLst>
+                                            <p:cond delay="0"/>
+                                          </p:stCondLst>
+                                        </p:cTn>
+                                        <p:tgtEl>
+                                          <p:spTgt spid="3">
+                                            <p:txEl>
+                                              <p:pRg st="9" end="9"/>
+                                            </p:txEl>
+                                          </p:spTgt>
+                                        </p:tgtEl>
+                                        <p:attrNameLst>
+                                          <p:attrName>style.visibility</p:attrName>
+                                        </p:attrNameLst>
+                                      </p:cBhvr>
+                                      <p:to>
+                                        <p:strVal val="visible"/>
+                                      </p:to>
+                                    </p:set>
+                                  </p:childTnLst>
+                                </p:cTn>
+                              </p:par>
+                            </p:childTnLst>
+                          </p:cTn>
+                        </p:par>
+                      </p:childTnLst>
+                    </p:cTn>
+                  </p:par>
+                </p:childTnLst>
+              </p:cTn>
+              <p:prevCondLst>
+                <p:cond evt="onPrev" delay="0">
+                  <p:tgtEl>
+                    <p:sldTgt/>
+                  </p:tgtEl>
+                </p:cond>
+              </p:prevCondLst>
+              <p:nextCondLst>
+                <p:cond evt="onNext" delay="0">
+                  <p:tgtEl>
+                    <p:sldTgt/>
+                  </p:tgtEl>
+                </p:cond>
+              </p:nextCondLst>
+            </p:seq>
+          </p:childTnLst>
+        </p:cTn>
+      </p:par>
+    </p:tnLst>
+  </p:timing>
+</p:sld>
+</file>
+
+<file path=ppt/slides/slide41.xml><?xml version="1.0" encoding="utf-8"?>
+<p:sld xmlns:a="http://schemas.openxmlformats.org/drawingml/2006/main" xmlns:r="http://schemas.openxmlformats.org/officeDocument/2006/relationships" xmlns:p="http://schemas.openxmlformats.org/presentationml/2006/main">
+  <p:cSld>
+    <p:spTree>
+      <p:nvGrpSpPr>
+        <p:cNvPr id="1" name="">
+          <a:extLst>
+            <a:ext uri="{FF2B5EF4-FFF2-40B4-BE49-F238E27FC236}">
               <a16:creationId xmlns:a16="http://schemas.microsoft.com/office/drawing/2014/main" id="{7888A8E2-C461-788F-42A8-9083DC3DA8F5}"/>
             </a:ext>
           </a:extLst>
@@ -26285,7 +27189,7 @@
             </a:r>
             <a:r>
               <a:rPr lang="en-US" sz="3200" dirty="0"/>
-              <a:t> Example 2 - 0007</a:t>
+              <a:t> Example-2 - 07</a:t>
             </a:r>
           </a:p>
         </p:txBody>
@@ -26873,7 +27777,7 @@
 </p:sld>
 </file>
 
-<file path=ppt/slides/slide41.xml><?xml version="1.0" encoding="utf-8"?>
+<file path=ppt/slides/slide42.xml><?xml version="1.0" encoding="utf-8"?>
 <p:sld xmlns:a="http://schemas.openxmlformats.org/drawingml/2006/main" xmlns:r="http://schemas.openxmlformats.org/officeDocument/2006/relationships" xmlns:p="http://schemas.openxmlformats.org/presentationml/2006/main">
   <p:cSld>
     <p:spTree>
@@ -27160,7 +28064,7 @@
 </p:sld>
 </file>
 
-<file path=ppt/slides/slide42.xml><?xml version="1.0" encoding="utf-8"?>
+<file path=ppt/slides/slide43.xml><?xml version="1.0" encoding="utf-8"?>
 <p:sld xmlns:a="http://schemas.openxmlformats.org/drawingml/2006/main" xmlns:r="http://schemas.openxmlformats.org/officeDocument/2006/relationships" xmlns:p="http://schemas.openxmlformats.org/presentationml/2006/main">
   <p:cSld>
     <p:spTree>
@@ -27638,7 +28542,7 @@
 </p:sld>
 </file>
 
-<file path=ppt/slides/slide43.xml><?xml version="1.0" encoding="utf-8"?>
+<file path=ppt/slides/slide44.xml><?xml version="1.0" encoding="utf-8"?>
 <p:sld xmlns:a="http://schemas.openxmlformats.org/drawingml/2006/main" xmlns:r="http://schemas.openxmlformats.org/officeDocument/2006/relationships" xmlns:p="http://schemas.openxmlformats.org/presentationml/2006/main">
   <p:cSld>
     <p:spTree>
@@ -27870,7 +28774,39 @@
                   <a:srgbClr val="00B0F0"/>
                 </a:solidFill>
               </a:rPr>
-              <a:t>Turn complex raw data into a reliable structure for analysis and decision-making.</a:t>
+              <a:t>Turn </a:t>
+            </a:r>
+            <a:r>
+              <a:rPr lang="en-US" sz="3600" u="sng" dirty="0">
+                <a:solidFill>
+                  <a:srgbClr val="00B0F0"/>
+                </a:solidFill>
+              </a:rPr>
+              <a:t>complex raw data</a:t>
+            </a:r>
+            <a:r>
+              <a:rPr lang="en-US" sz="3600" dirty="0">
+                <a:solidFill>
+                  <a:srgbClr val="00B0F0"/>
+                </a:solidFill>
+              </a:rPr>
+              <a:t> into a </a:t>
+            </a:r>
+            <a:r>
+              <a:rPr lang="en-US" sz="3600" u="sng" dirty="0">
+                <a:solidFill>
+                  <a:srgbClr val="00B0F0"/>
+                </a:solidFill>
+              </a:rPr>
+              <a:t>reliable structure</a:t>
+            </a:r>
+            <a:r>
+              <a:rPr lang="en-US" sz="3600" dirty="0">
+                <a:solidFill>
+                  <a:srgbClr val="00B0F0"/>
+                </a:solidFill>
+              </a:rPr>
+              <a:t> for analysis and decision-making.</a:t>
             </a:r>
           </a:p>
           <a:p>
@@ -28348,27 +29284,26 @@
                   <a:schemeClr val="tx1"/>
                 </a:solidFill>
               </a:rPr>
-              <a:t>- Descriptive: What happened?</a:t>
-            </a:r>
-          </a:p>
-          <a:p>
+              <a:t>- </a:t>
+            </a:r>
             <a:r>
               <a:rPr lang="en-US" sz="3600" dirty="0">
                 <a:solidFill>
                   <a:schemeClr val="tx1"/>
                 </a:solidFill>
-              </a:rPr>
-              <a:t>- Diagnostic: Why did it happen?</a:t>
-            </a:r>
-          </a:p>
-          <a:p>
+                <a:highlight>
+                  <a:srgbClr val="00FF00"/>
+                </a:highlight>
+              </a:rPr>
+              <a:t>Descriptive</a:t>
+            </a:r>
             <a:r>
               <a:rPr lang="en-US" sz="3600" dirty="0">
                 <a:solidFill>
                   <a:schemeClr val="tx1"/>
                 </a:solidFill>
               </a:rPr>
-              <a:t>- Predictive: What is likely to happen?</a:t>
+              <a:t>: What happened?</a:t>
             </a:r>
           </a:p>
           <a:p>
@@ -28378,7 +29313,84 @@
                   <a:schemeClr val="tx1"/>
                 </a:solidFill>
               </a:rPr>
-              <a:t>- Prescriptive: What action should be taken?</a:t>
+              <a:t>- </a:t>
+            </a:r>
+            <a:r>
+              <a:rPr lang="en-US" sz="3600" dirty="0">
+                <a:solidFill>
+                  <a:schemeClr val="tx1"/>
+                </a:solidFill>
+                <a:highlight>
+                  <a:srgbClr val="00FF00"/>
+                </a:highlight>
+              </a:rPr>
+              <a:t>Diagnostic</a:t>
+            </a:r>
+            <a:r>
+              <a:rPr lang="en-US" sz="3600" dirty="0">
+                <a:solidFill>
+                  <a:schemeClr val="tx1"/>
+                </a:solidFill>
+              </a:rPr>
+              <a:t>: Why did it happen?</a:t>
+            </a:r>
+          </a:p>
+          <a:p>
+            <a:r>
+              <a:rPr lang="en-US" sz="3600" dirty="0">
+                <a:solidFill>
+                  <a:schemeClr val="tx1"/>
+                </a:solidFill>
+              </a:rPr>
+              <a:t>- </a:t>
+            </a:r>
+            <a:r>
+              <a:rPr lang="en-US" sz="3600" dirty="0">
+                <a:solidFill>
+                  <a:schemeClr val="tx1"/>
+                </a:solidFill>
+                <a:highlight>
+                  <a:srgbClr val="00FF00"/>
+                </a:highlight>
+              </a:rPr>
+              <a:t>Predictive</a:t>
+            </a:r>
+            <a:r>
+              <a:rPr lang="en-US" sz="3600" dirty="0">
+                <a:solidFill>
+                  <a:schemeClr val="tx1"/>
+                </a:solidFill>
+              </a:rPr>
+              <a:t>: What is likely to happen?</a:t>
+            </a:r>
+          </a:p>
+          <a:p>
+            <a:r>
+              <a:rPr lang="en-US" sz="3600" dirty="0">
+                <a:solidFill>
+                  <a:schemeClr val="tx1"/>
+                </a:solidFill>
+              </a:rPr>
+              <a:t>- </a:t>
+            </a:r>
+            <a:r>
+              <a:rPr lang="en-US" sz="3600" dirty="0">
+                <a:solidFill>
+                  <a:schemeClr val="tx1"/>
+                </a:solidFill>
+                <a:highlight>
+                  <a:srgbClr val="00FF00"/>
+                </a:highlight>
+              </a:rPr>
+              <a:t>Prescriptive</a:t>
+            </a:r>
+            <a:r>
+              <a:rPr lang="en-US" sz="3600" dirty="0">
+                <a:solidFill>
+                  <a:schemeClr val="tx1"/>
+                </a:solidFill>
+              </a:rPr>
+              <a:t>: What action should be taken?</a:t>
             </a:r>
           </a:p>
           <a:p>
@@ -29610,8 +30622,8 @@
         </p:nvSpPr>
         <p:spPr>
           <a:xfrm>
-            <a:off x="1524000" y="1122364"/>
-            <a:ext cx="9144000" cy="716376"/>
+            <a:off x="1524000" y="1122363"/>
+            <a:ext cx="9144000" cy="1299289"/>
           </a:xfrm>
         </p:spPr>
         <p:txBody>
@@ -29622,7 +30634,14 @@
           <a:p>
             <a:r>
               <a:rPr lang="en-US" dirty="0"/>
-              <a:t>Main Course Components:</a:t>
+              <a:t>Big Data Modeling</a:t>
+            </a:r>
+            <a:br>
+              <a:rPr lang="en-US" dirty="0"/>
+            </a:br>
+            <a:r>
+              <a:rPr lang="en-US" dirty="0"/>
+              <a:t>Course Components:</a:t>
             </a:r>
           </a:p>
         </p:txBody>
@@ -29645,8 +30664,8 @@
         </p:nvSpPr>
         <p:spPr>
           <a:xfrm>
-            <a:off x="1307184" y="2074410"/>
-            <a:ext cx="9144000" cy="4134677"/>
+            <a:off x="1307184" y="2632669"/>
+            <a:ext cx="9144000" cy="2572378"/>
           </a:xfrm>
         </p:spPr>
         <p:txBody>

--- a/course_information/COURSE_OUTLINE_10_WEEKS.pptx
+++ b/course_information/COURSE_OUTLINE_10_WEEKS.pptx
@@ -240,7 +240,7 @@
           <a:p>
             <a:fld id="{3D165E93-E323-764B-9CF0-D55E433161EB}" type="datetimeFigureOut">
               <a:rPr lang="en-US" smtClean="0"/>
-              <a:t>9/9/26</a:t>
+              <a:t>9/10/26</a:t>
             </a:fld>
             <a:endParaRPr lang="en-US"/>
           </a:p>
@@ -5206,7 +5206,7 @@
         </p:blipFill>
         <p:spPr>
           <a:xfrm>
-            <a:off x="11590525" y="6280526"/>
+            <a:off x="289734" y="6320283"/>
             <a:ext cx="440951" cy="440951"/>
           </a:xfrm>
           <a:prstGeom prst="rect">
@@ -6622,6 +6622,49 @@
           <a:lstStyle/>
           <a:p>
             <a:endParaRPr lang="en-US" sz="2400"/>
+          </a:p>
+        </p:txBody>
+      </p:sp>
+      <p:sp>
+        <p:nvSpPr>
+          <p:cNvPr id="5" name="Footer Placeholder 4">
+            <a:extLst>
+              <a:ext uri="{FF2B5EF4-FFF2-40B4-BE49-F238E27FC236}">
+                <a16:creationId xmlns:a16="http://schemas.microsoft.com/office/drawing/2014/main" id="{8F21CCDD-D3EB-A388-581E-4D04CB9C14A1}"/>
+              </a:ext>
+            </a:extLst>
+          </p:cNvPr>
+          <p:cNvSpPr>
+            <a:spLocks noGrp="1"/>
+          </p:cNvSpPr>
+          <p:nvPr>
+            <p:ph type="ftr" sz="quarter" idx="3"/>
+          </p:nvPr>
+        </p:nvSpPr>
+        <p:spPr>
+          <a:xfrm>
+            <a:off x="4038600" y="6356350"/>
+            <a:ext cx="4114800" cy="365125"/>
+          </a:xfrm>
+          <a:prstGeom prst="rect">
+            <a:avLst/>
+          </a:prstGeom>
+        </p:spPr>
+        <p:txBody>
+          <a:bodyPr vert="horz" lIns="91440" tIns="45720" rIns="91440" bIns="45720" rtlCol="0" anchor="ctr"/>
+          <a:lstStyle>
+            <a:lvl1pPr algn="ctr">
+              <a:defRPr sz="1200">
+                <a:solidFill>
+                  <a:schemeClr val="tx1">
+                    <a:tint val="82000"/>
+                  </a:schemeClr>
+                </a:solidFill>
+              </a:defRPr>
+            </a:lvl1pPr>
+          </a:lstStyle>
+          <a:p>
+            <a:endParaRPr lang="en-US" dirty="0"/>
           </a:p>
         </p:txBody>
       </p:sp>
@@ -7096,6 +7139,60 @@
           </a:p>
         </p:txBody>
       </p:sp>
+      <p:sp>
+        <p:nvSpPr>
+          <p:cNvPr id="4" name="Slide Number">
+            <a:extLst>
+              <a:ext uri="{FF2B5EF4-FFF2-40B4-BE49-F238E27FC236}">
+                <a16:creationId xmlns:a16="http://schemas.microsoft.com/office/drawing/2014/main" id="{90295111-642A-45CA-B8EA-9089545A24F5}"/>
+              </a:ext>
+            </a:extLst>
+          </p:cNvPr>
+          <p:cNvSpPr>
+            <a:spLocks noGrp="1"/>
+          </p:cNvSpPr>
+          <p:nvPr/>
+        </p:nvSpPr>
+        <p:spPr>
+          <a:xfrm>
+            <a:off x="11334750" y="6457950"/>
+            <a:ext cx="571500" cy="266700"/>
+          </a:xfrm>
+          <a:prstGeom prst="rect">
+            <a:avLst/>
+          </a:prstGeom>
+          <a:noFill/>
+          <a:ln w="0">
+            <a:noFill/>
+          </a:ln>
+        </p:spPr>
+        <p:txBody>
+          <a:bodyPr/>
+          <a:lstStyle/>
+          <a:p>
+            <a:pPr algn="r">
+              <a:defRPr sz="1350">
+                <a:solidFill>
+                  <a:srgbClr val="555555"/>
+                </a:solidFill>
+              </a:defRPr>
+            </a:pPr>
+            <a:fld id="{DE4AF838-0BE2-4E69-9255-C1424E4D1425}" type="slidenum">
+              <a:rPr sz="1350">
+                <a:solidFill>
+                  <a:srgbClr val="555555"/>
+                </a:solidFill>
+              </a:rPr>
+              <a:t>1</a:t>
+            </a:fld>
+            <a:endParaRPr sz="1350">
+              <a:solidFill>
+                <a:srgbClr val="555555"/>
+              </a:solidFill>
+            </a:endParaRPr>
+          </a:p>
+        </p:txBody>
+      </p:sp>
     </p:spTree>
     <p:extLst>
       <p:ext uri="{BB962C8B-B14F-4D97-AF65-F5344CB8AC3E}">
@@ -7300,6 +7397,60 @@
               <a:buAutoNum type="arabicPeriod"/>
             </a:pPr>
             <a:endParaRPr lang="en-US" sz="1200" dirty="0"/>
+          </a:p>
+        </p:txBody>
+      </p:sp>
+      <p:sp>
+        <p:nvSpPr>
+          <p:cNvPr id="4" name="Slide Number">
+            <a:extLst>
+              <a:ext uri="{FF2B5EF4-FFF2-40B4-BE49-F238E27FC236}">
+                <a16:creationId xmlns:a16="http://schemas.microsoft.com/office/drawing/2014/main" id="{90295111-642A-45CA-B8EA-9089545A24F5}"/>
+              </a:ext>
+            </a:extLst>
+          </p:cNvPr>
+          <p:cNvSpPr>
+            <a:spLocks noGrp="1"/>
+          </p:cNvSpPr>
+          <p:nvPr/>
+        </p:nvSpPr>
+        <p:spPr>
+          <a:xfrm>
+            <a:off x="11334750" y="6457950"/>
+            <a:ext cx="571500" cy="266700"/>
+          </a:xfrm>
+          <a:prstGeom prst="rect">
+            <a:avLst/>
+          </a:prstGeom>
+          <a:noFill/>
+          <a:ln w="0">
+            <a:noFill/>
+          </a:ln>
+        </p:spPr>
+        <p:txBody>
+          <a:bodyPr/>
+          <a:lstStyle/>
+          <a:p>
+            <a:pPr algn="r">
+              <a:defRPr sz="1350">
+                <a:solidFill>
+                  <a:srgbClr val="555555"/>
+                </a:solidFill>
+              </a:defRPr>
+            </a:pPr>
+            <a:fld id="{BDD7D45F-6CAC-451F-8DF7-B8F1C03E7153}" type="slidenum">
+              <a:rPr sz="1350">
+                <a:solidFill>
+                  <a:srgbClr val="555555"/>
+                </a:solidFill>
+              </a:rPr>
+              <a:t>10</a:t>
+            </a:fld>
+            <a:endParaRPr sz="1350">
+              <a:solidFill>
+                <a:srgbClr val="555555"/>
+              </a:solidFill>
+            </a:endParaRPr>
           </a:p>
         </p:txBody>
       </p:sp>
@@ -7673,6 +7824,60 @@
           </a:p>
         </p:txBody>
       </p:sp>
+      <p:sp>
+        <p:nvSpPr>
+          <p:cNvPr id="5" name="Slide Number">
+            <a:extLst>
+              <a:ext uri="{FF2B5EF4-FFF2-40B4-BE49-F238E27FC236}">
+                <a16:creationId xmlns:a16="http://schemas.microsoft.com/office/drawing/2014/main" id="{90295111-642A-45CA-B8EA-9089545A24F5}"/>
+              </a:ext>
+            </a:extLst>
+          </p:cNvPr>
+          <p:cNvSpPr>
+            <a:spLocks noGrp="1"/>
+          </p:cNvSpPr>
+          <p:nvPr/>
+        </p:nvSpPr>
+        <p:spPr>
+          <a:xfrm>
+            <a:off x="11334750" y="6457950"/>
+            <a:ext cx="571500" cy="266700"/>
+          </a:xfrm>
+          <a:prstGeom prst="rect">
+            <a:avLst/>
+          </a:prstGeom>
+          <a:noFill/>
+          <a:ln w="0">
+            <a:noFill/>
+          </a:ln>
+        </p:spPr>
+        <p:txBody>
+          <a:bodyPr/>
+          <a:lstStyle/>
+          <a:p>
+            <a:pPr algn="r">
+              <a:defRPr sz="1350">
+                <a:solidFill>
+                  <a:srgbClr val="555555"/>
+                </a:solidFill>
+              </a:defRPr>
+            </a:pPr>
+            <a:fld id="{F46E0F9F-9D80-452F-B288-B13DCB2BF98D}" type="slidenum">
+              <a:rPr sz="1350">
+                <a:solidFill>
+                  <a:srgbClr val="555555"/>
+                </a:solidFill>
+              </a:rPr>
+              <a:t>11</a:t>
+            </a:fld>
+            <a:endParaRPr sz="1350">
+              <a:solidFill>
+                <a:srgbClr val="555555"/>
+              </a:solidFill>
+            </a:endParaRPr>
+          </a:p>
+        </p:txBody>
+      </p:sp>
     </p:spTree>
     <p:extLst>
       <p:ext uri="{BB962C8B-B14F-4D97-AF65-F5344CB8AC3E}">
@@ -7985,6 +8190,60 @@
               <a:t>Data-intensive text processing with MapReduce</a:t>
             </a:r>
             <a:endParaRPr lang="en-US" sz="2400" dirty="0"/>
+          </a:p>
+        </p:txBody>
+      </p:sp>
+      <p:sp>
+        <p:nvSpPr>
+          <p:cNvPr id="4" name="Slide Number">
+            <a:extLst>
+              <a:ext uri="{FF2B5EF4-FFF2-40B4-BE49-F238E27FC236}">
+                <a16:creationId xmlns:a16="http://schemas.microsoft.com/office/drawing/2014/main" id="{90295111-642A-45CA-B8EA-9089545A24F5}"/>
+              </a:ext>
+            </a:extLst>
+          </p:cNvPr>
+          <p:cNvSpPr>
+            <a:spLocks noGrp="1"/>
+          </p:cNvSpPr>
+          <p:nvPr/>
+        </p:nvSpPr>
+        <p:spPr>
+          <a:xfrm>
+            <a:off x="11334750" y="6457950"/>
+            <a:ext cx="571500" cy="266700"/>
+          </a:xfrm>
+          <a:prstGeom prst="rect">
+            <a:avLst/>
+          </a:prstGeom>
+          <a:noFill/>
+          <a:ln w="0">
+            <a:noFill/>
+          </a:ln>
+        </p:spPr>
+        <p:txBody>
+          <a:bodyPr/>
+          <a:lstStyle/>
+          <a:p>
+            <a:pPr algn="r">
+              <a:defRPr sz="1350">
+                <a:solidFill>
+                  <a:srgbClr val="555555"/>
+                </a:solidFill>
+              </a:defRPr>
+            </a:pPr>
+            <a:fld id="{5960DE2C-97A4-4C39-BE40-723BCDCABF0B}" type="slidenum">
+              <a:rPr sz="1350">
+                <a:solidFill>
+                  <a:srgbClr val="555555"/>
+                </a:solidFill>
+              </a:rPr>
+              <a:t>12</a:t>
+            </a:fld>
+            <a:endParaRPr sz="1350">
+              <a:solidFill>
+                <a:srgbClr val="555555"/>
+              </a:solidFill>
+            </a:endParaRPr>
           </a:p>
         </p:txBody>
       </p:sp>
@@ -8441,6 +8700,60 @@
               <a:buAutoNum type="arabicPeriod"/>
             </a:pPr>
             <a:endParaRPr lang="en-US" sz="1200" dirty="0"/>
+          </a:p>
+        </p:txBody>
+      </p:sp>
+      <p:sp>
+        <p:nvSpPr>
+          <p:cNvPr id="4" name="Slide Number">
+            <a:extLst>
+              <a:ext uri="{FF2B5EF4-FFF2-40B4-BE49-F238E27FC236}">
+                <a16:creationId xmlns:a16="http://schemas.microsoft.com/office/drawing/2014/main" id="{90295111-642A-45CA-B8EA-9089545A24F5}"/>
+              </a:ext>
+            </a:extLst>
+          </p:cNvPr>
+          <p:cNvSpPr>
+            <a:spLocks noGrp="1"/>
+          </p:cNvSpPr>
+          <p:nvPr/>
+        </p:nvSpPr>
+        <p:spPr>
+          <a:xfrm>
+            <a:off x="11334750" y="6457950"/>
+            <a:ext cx="571500" cy="266700"/>
+          </a:xfrm>
+          <a:prstGeom prst="rect">
+            <a:avLst/>
+          </a:prstGeom>
+          <a:noFill/>
+          <a:ln w="0">
+            <a:noFill/>
+          </a:ln>
+        </p:spPr>
+        <p:txBody>
+          <a:bodyPr/>
+          <a:lstStyle/>
+          <a:p>
+            <a:pPr algn="r">
+              <a:defRPr sz="1350">
+                <a:solidFill>
+                  <a:srgbClr val="555555"/>
+                </a:solidFill>
+              </a:defRPr>
+            </a:pPr>
+            <a:fld id="{E6BC3BF8-7257-4F72-B43E-BF162A0EC35B}" type="slidenum">
+              <a:rPr sz="1350">
+                <a:solidFill>
+                  <a:srgbClr val="555555"/>
+                </a:solidFill>
+              </a:rPr>
+              <a:t>13</a:t>
+            </a:fld>
+            <a:endParaRPr sz="1350">
+              <a:solidFill>
+                <a:srgbClr val="555555"/>
+              </a:solidFill>
+            </a:endParaRPr>
           </a:p>
         </p:txBody>
       </p:sp>
@@ -9073,6 +9386,60 @@
           </a:p>
         </p:txBody>
       </p:sp>
+      <p:sp>
+        <p:nvSpPr>
+          <p:cNvPr id="4" name="Slide Number">
+            <a:extLst>
+              <a:ext uri="{FF2B5EF4-FFF2-40B4-BE49-F238E27FC236}">
+                <a16:creationId xmlns:a16="http://schemas.microsoft.com/office/drawing/2014/main" id="{90295111-642A-45CA-B8EA-9089545A24F5}"/>
+              </a:ext>
+            </a:extLst>
+          </p:cNvPr>
+          <p:cNvSpPr>
+            <a:spLocks noGrp="1"/>
+          </p:cNvSpPr>
+          <p:nvPr/>
+        </p:nvSpPr>
+        <p:spPr>
+          <a:xfrm>
+            <a:off x="11334750" y="6457950"/>
+            <a:ext cx="571500" cy="266700"/>
+          </a:xfrm>
+          <a:prstGeom prst="rect">
+            <a:avLst/>
+          </a:prstGeom>
+          <a:noFill/>
+          <a:ln w="0">
+            <a:noFill/>
+          </a:ln>
+        </p:spPr>
+        <p:txBody>
+          <a:bodyPr/>
+          <a:lstStyle/>
+          <a:p>
+            <a:pPr algn="r">
+              <a:defRPr sz="1350">
+                <a:solidFill>
+                  <a:srgbClr val="555555"/>
+                </a:solidFill>
+              </a:defRPr>
+            </a:pPr>
+            <a:fld id="{03AAEBFF-DC56-4066-B10A-AB3F3DDD182F}" type="slidenum">
+              <a:rPr sz="1350">
+                <a:solidFill>
+                  <a:srgbClr val="555555"/>
+                </a:solidFill>
+              </a:rPr>
+              <a:t>14</a:t>
+            </a:fld>
+            <a:endParaRPr sz="1350">
+              <a:solidFill>
+                <a:srgbClr val="555555"/>
+              </a:solidFill>
+            </a:endParaRPr>
+          </a:p>
+        </p:txBody>
+      </p:sp>
     </p:spTree>
     <p:extLst>
       <p:ext uri="{BB962C8B-B14F-4D97-AF65-F5344CB8AC3E}">
@@ -9487,6 +9854,60 @@
           </a:prstGeom>
         </p:spPr>
       </p:pic>
+      <p:sp>
+        <p:nvSpPr>
+          <p:cNvPr id="6" name="Slide Number">
+            <a:extLst>
+              <a:ext uri="{FF2B5EF4-FFF2-40B4-BE49-F238E27FC236}">
+                <a16:creationId xmlns:a16="http://schemas.microsoft.com/office/drawing/2014/main" id="{90295111-642A-45CA-B8EA-9089545A24F5}"/>
+              </a:ext>
+            </a:extLst>
+          </p:cNvPr>
+          <p:cNvSpPr>
+            <a:spLocks noGrp="1"/>
+          </p:cNvSpPr>
+          <p:nvPr/>
+        </p:nvSpPr>
+        <p:spPr>
+          <a:xfrm>
+            <a:off x="11334750" y="6457950"/>
+            <a:ext cx="571500" cy="266700"/>
+          </a:xfrm>
+          <a:prstGeom prst="rect">
+            <a:avLst/>
+          </a:prstGeom>
+          <a:noFill/>
+          <a:ln w="0">
+            <a:noFill/>
+          </a:ln>
+        </p:spPr>
+        <p:txBody>
+          <a:bodyPr/>
+          <a:lstStyle/>
+          <a:p>
+            <a:pPr algn="r">
+              <a:defRPr sz="1350">
+                <a:solidFill>
+                  <a:srgbClr val="555555"/>
+                </a:solidFill>
+              </a:defRPr>
+            </a:pPr>
+            <a:fld id="{FA9BFF73-70C8-433B-A248-EF5C6D3A88EF}" type="slidenum">
+              <a:rPr sz="1350">
+                <a:solidFill>
+                  <a:srgbClr val="555555"/>
+                </a:solidFill>
+              </a:rPr>
+              <a:t>15</a:t>
+            </a:fld>
+            <a:endParaRPr sz="1350">
+              <a:solidFill>
+                <a:srgbClr val="555555"/>
+              </a:solidFill>
+            </a:endParaRPr>
+          </a:p>
+        </p:txBody>
+      </p:sp>
     </p:spTree>
     <p:extLst>
       <p:ext uri="{BB962C8B-B14F-4D97-AF65-F5344CB8AC3E}">
@@ -9582,6 +10003,60 @@
           </a:prstGeom>
         </p:spPr>
       </p:pic>
+      <p:sp>
+        <p:nvSpPr>
+          <p:cNvPr id="7" name="Slide Number">
+            <a:extLst>
+              <a:ext uri="{FF2B5EF4-FFF2-40B4-BE49-F238E27FC236}">
+                <a16:creationId xmlns:a16="http://schemas.microsoft.com/office/drawing/2014/main" id="{90295111-642A-45CA-B8EA-9089545A24F5}"/>
+              </a:ext>
+            </a:extLst>
+          </p:cNvPr>
+          <p:cNvSpPr>
+            <a:spLocks noGrp="1"/>
+          </p:cNvSpPr>
+          <p:nvPr/>
+        </p:nvSpPr>
+        <p:spPr>
+          <a:xfrm>
+            <a:off x="11334750" y="6457950"/>
+            <a:ext cx="571500" cy="266700"/>
+          </a:xfrm>
+          <a:prstGeom prst="rect">
+            <a:avLst/>
+          </a:prstGeom>
+          <a:noFill/>
+          <a:ln w="0">
+            <a:noFill/>
+          </a:ln>
+        </p:spPr>
+        <p:txBody>
+          <a:bodyPr/>
+          <a:lstStyle/>
+          <a:p>
+            <a:pPr algn="r">
+              <a:defRPr sz="1350">
+                <a:solidFill>
+                  <a:srgbClr val="555555"/>
+                </a:solidFill>
+              </a:defRPr>
+            </a:pPr>
+            <a:fld id="{C740E9F3-86C9-44C3-A56F-BB2E3C276860}" type="slidenum">
+              <a:rPr sz="1350">
+                <a:solidFill>
+                  <a:srgbClr val="555555"/>
+                </a:solidFill>
+              </a:rPr>
+              <a:t>16</a:t>
+            </a:fld>
+            <a:endParaRPr sz="1350">
+              <a:solidFill>
+                <a:srgbClr val="555555"/>
+              </a:solidFill>
+            </a:endParaRPr>
+          </a:p>
+        </p:txBody>
+      </p:sp>
     </p:spTree>
     <p:extLst>
       <p:ext uri="{BB962C8B-B14F-4D97-AF65-F5344CB8AC3E}">
@@ -9677,6 +10152,60 @@
           </a:prstGeom>
         </p:spPr>
       </p:pic>
+      <p:sp>
+        <p:nvSpPr>
+          <p:cNvPr id="5" name="Slide Number">
+            <a:extLst>
+              <a:ext uri="{FF2B5EF4-FFF2-40B4-BE49-F238E27FC236}">
+                <a16:creationId xmlns:a16="http://schemas.microsoft.com/office/drawing/2014/main" id="{90295111-642A-45CA-B8EA-9089545A24F5}"/>
+              </a:ext>
+            </a:extLst>
+          </p:cNvPr>
+          <p:cNvSpPr>
+            <a:spLocks noGrp="1"/>
+          </p:cNvSpPr>
+          <p:nvPr/>
+        </p:nvSpPr>
+        <p:spPr>
+          <a:xfrm>
+            <a:off x="11334750" y="6457950"/>
+            <a:ext cx="571500" cy="266700"/>
+          </a:xfrm>
+          <a:prstGeom prst="rect">
+            <a:avLst/>
+          </a:prstGeom>
+          <a:noFill/>
+          <a:ln w="0">
+            <a:noFill/>
+          </a:ln>
+        </p:spPr>
+        <p:txBody>
+          <a:bodyPr/>
+          <a:lstStyle/>
+          <a:p>
+            <a:pPr algn="r">
+              <a:defRPr sz="1350">
+                <a:solidFill>
+                  <a:srgbClr val="555555"/>
+                </a:solidFill>
+              </a:defRPr>
+            </a:pPr>
+            <a:fld id="{F7F59B27-C032-4F7B-8F96-BC395C676DA0}" type="slidenum">
+              <a:rPr sz="1350">
+                <a:solidFill>
+                  <a:srgbClr val="555555"/>
+                </a:solidFill>
+              </a:rPr>
+              <a:t>17</a:t>
+            </a:fld>
+            <a:endParaRPr sz="1350">
+              <a:solidFill>
+                <a:srgbClr val="555555"/>
+              </a:solidFill>
+            </a:endParaRPr>
+          </a:p>
+        </p:txBody>
+      </p:sp>
     </p:spTree>
     <p:extLst>
       <p:ext uri="{BB962C8B-B14F-4D97-AF65-F5344CB8AC3E}">
@@ -9772,6 +10301,60 @@
           </a:prstGeom>
         </p:spPr>
       </p:pic>
+      <p:sp>
+        <p:nvSpPr>
+          <p:cNvPr id="6" name="Slide Number">
+            <a:extLst>
+              <a:ext uri="{FF2B5EF4-FFF2-40B4-BE49-F238E27FC236}">
+                <a16:creationId xmlns:a16="http://schemas.microsoft.com/office/drawing/2014/main" id="{90295111-642A-45CA-B8EA-9089545A24F5}"/>
+              </a:ext>
+            </a:extLst>
+          </p:cNvPr>
+          <p:cNvSpPr>
+            <a:spLocks noGrp="1"/>
+          </p:cNvSpPr>
+          <p:nvPr/>
+        </p:nvSpPr>
+        <p:spPr>
+          <a:xfrm>
+            <a:off x="11334750" y="6457950"/>
+            <a:ext cx="571500" cy="266700"/>
+          </a:xfrm>
+          <a:prstGeom prst="rect">
+            <a:avLst/>
+          </a:prstGeom>
+          <a:noFill/>
+          <a:ln w="0">
+            <a:noFill/>
+          </a:ln>
+        </p:spPr>
+        <p:txBody>
+          <a:bodyPr/>
+          <a:lstStyle/>
+          <a:p>
+            <a:pPr algn="r">
+              <a:defRPr sz="1350">
+                <a:solidFill>
+                  <a:srgbClr val="555555"/>
+                </a:solidFill>
+              </a:defRPr>
+            </a:pPr>
+            <a:fld id="{E8DCD34D-0FF4-4BE5-BA92-EB2534BC6346}" type="slidenum">
+              <a:rPr sz="1350">
+                <a:solidFill>
+                  <a:srgbClr val="555555"/>
+                </a:solidFill>
+              </a:rPr>
+              <a:t>18</a:t>
+            </a:fld>
+            <a:endParaRPr sz="1350">
+              <a:solidFill>
+                <a:srgbClr val="555555"/>
+              </a:solidFill>
+            </a:endParaRPr>
+          </a:p>
+        </p:txBody>
+      </p:sp>
     </p:spTree>
     <p:extLst>
       <p:ext uri="{BB962C8B-B14F-4D97-AF65-F5344CB8AC3E}">
@@ -10002,6 +10585,60 @@
               </a:rPr>
               <a:t>. For example, K can be a record number and V can be the actual input record </a:t>
             </a:r>
+          </a:p>
+        </p:txBody>
+      </p:sp>
+      <p:sp>
+        <p:nvSpPr>
+          <p:cNvPr id="4" name="Slide Number">
+            <a:extLst>
+              <a:ext uri="{FF2B5EF4-FFF2-40B4-BE49-F238E27FC236}">
+                <a16:creationId xmlns:a16="http://schemas.microsoft.com/office/drawing/2014/main" id="{90295111-642A-45CA-B8EA-9089545A24F5}"/>
+              </a:ext>
+            </a:extLst>
+          </p:cNvPr>
+          <p:cNvSpPr>
+            <a:spLocks noGrp="1"/>
+          </p:cNvSpPr>
+          <p:nvPr/>
+        </p:nvSpPr>
+        <p:spPr>
+          <a:xfrm>
+            <a:off x="11334750" y="6457950"/>
+            <a:ext cx="571500" cy="266700"/>
+          </a:xfrm>
+          <a:prstGeom prst="rect">
+            <a:avLst/>
+          </a:prstGeom>
+          <a:noFill/>
+          <a:ln w="0">
+            <a:noFill/>
+          </a:ln>
+        </p:spPr>
+        <p:txBody>
+          <a:bodyPr/>
+          <a:lstStyle/>
+          <a:p>
+            <a:pPr algn="r">
+              <a:defRPr sz="1350">
+                <a:solidFill>
+                  <a:srgbClr val="555555"/>
+                </a:solidFill>
+              </a:defRPr>
+            </a:pPr>
+            <a:fld id="{105C829C-1559-4088-9357-5A5857D20C71}" type="slidenum">
+              <a:rPr sz="1350">
+                <a:solidFill>
+                  <a:srgbClr val="555555"/>
+                </a:solidFill>
+              </a:rPr>
+              <a:t>19</a:t>
+            </a:fld>
+            <a:endParaRPr sz="1350">
+              <a:solidFill>
+                <a:srgbClr val="555555"/>
+              </a:solidFill>
+            </a:endParaRPr>
           </a:p>
         </p:txBody>
       </p:sp>
@@ -10715,6 +11352,60 @@
           </a:p>
         </p:txBody>
       </p:sp>
+      <p:sp>
+        <p:nvSpPr>
+          <p:cNvPr id="4" name="Slide Number">
+            <a:extLst>
+              <a:ext uri="{FF2B5EF4-FFF2-40B4-BE49-F238E27FC236}">
+                <a16:creationId xmlns:a16="http://schemas.microsoft.com/office/drawing/2014/main" id="{90295111-642A-45CA-B8EA-9089545A24F5}"/>
+              </a:ext>
+            </a:extLst>
+          </p:cNvPr>
+          <p:cNvSpPr>
+            <a:spLocks noGrp="1"/>
+          </p:cNvSpPr>
+          <p:nvPr/>
+        </p:nvSpPr>
+        <p:spPr>
+          <a:xfrm>
+            <a:off x="11334750" y="6457950"/>
+            <a:ext cx="571500" cy="266700"/>
+          </a:xfrm>
+          <a:prstGeom prst="rect">
+            <a:avLst/>
+          </a:prstGeom>
+          <a:noFill/>
+          <a:ln w="0">
+            <a:noFill/>
+          </a:ln>
+        </p:spPr>
+        <p:txBody>
+          <a:bodyPr/>
+          <a:lstStyle/>
+          <a:p>
+            <a:pPr algn="r">
+              <a:defRPr sz="1350">
+                <a:solidFill>
+                  <a:srgbClr val="555555"/>
+                </a:solidFill>
+              </a:defRPr>
+            </a:pPr>
+            <a:fld id="{19723CD4-E252-411D-982D-B2872629E669}" type="slidenum">
+              <a:rPr sz="1350">
+                <a:solidFill>
+                  <a:srgbClr val="555555"/>
+                </a:solidFill>
+              </a:rPr>
+              <a:t>2</a:t>
+            </a:fld>
+            <a:endParaRPr sz="1350">
+              <a:solidFill>
+                <a:srgbClr val="555555"/>
+              </a:solidFill>
+            </a:endParaRPr>
+          </a:p>
+        </p:txBody>
+      </p:sp>
     </p:spTree>
     <p:extLst>
       <p:ext uri="{BB962C8B-B14F-4D97-AF65-F5344CB8AC3E}">
@@ -11499,6 +12190,60 @@
               </a:rPr>
               <a:t>are the unique keys created by all mappers</a:t>
             </a:r>
+          </a:p>
+        </p:txBody>
+      </p:sp>
+      <p:sp>
+        <p:nvSpPr>
+          <p:cNvPr id="4" name="Slide Number">
+            <a:extLst>
+              <a:ext uri="{FF2B5EF4-FFF2-40B4-BE49-F238E27FC236}">
+                <a16:creationId xmlns:a16="http://schemas.microsoft.com/office/drawing/2014/main" id="{90295111-642A-45CA-B8EA-9089545A24F5}"/>
+              </a:ext>
+            </a:extLst>
+          </p:cNvPr>
+          <p:cNvSpPr>
+            <a:spLocks noGrp="1"/>
+          </p:cNvSpPr>
+          <p:nvPr/>
+        </p:nvSpPr>
+        <p:spPr>
+          <a:xfrm>
+            <a:off x="11334750" y="6457950"/>
+            <a:ext cx="571500" cy="266700"/>
+          </a:xfrm>
+          <a:prstGeom prst="rect">
+            <a:avLst/>
+          </a:prstGeom>
+          <a:noFill/>
+          <a:ln w="0">
+            <a:noFill/>
+          </a:ln>
+        </p:spPr>
+        <p:txBody>
+          <a:bodyPr/>
+          <a:lstStyle/>
+          <a:p>
+            <a:pPr algn="r">
+              <a:defRPr sz="1350">
+                <a:solidFill>
+                  <a:srgbClr val="555555"/>
+                </a:solidFill>
+              </a:defRPr>
+            </a:pPr>
+            <a:fld id="{E738306D-979A-45C4-8C27-75E0D2901A15}" type="slidenum">
+              <a:rPr sz="1350">
+                <a:solidFill>
+                  <a:srgbClr val="555555"/>
+                </a:solidFill>
+              </a:rPr>
+              <a:t>20</a:t>
+            </a:fld>
+            <a:endParaRPr sz="1350">
+              <a:solidFill>
+                <a:srgbClr val="555555"/>
+              </a:solidFill>
+            </a:endParaRPr>
           </a:p>
         </p:txBody>
       </p:sp>
@@ -12215,6 +12960,60 @@
             <a:endParaRPr lang="en-US">
               <a:solidFill>
                 <a:schemeClr val="tx1"/>
+              </a:solidFill>
+            </a:endParaRPr>
+          </a:p>
+        </p:txBody>
+      </p:sp>
+      <p:sp>
+        <p:nvSpPr>
+          <p:cNvPr id="4" name="Slide Number">
+            <a:extLst>
+              <a:ext uri="{FF2B5EF4-FFF2-40B4-BE49-F238E27FC236}">
+                <a16:creationId xmlns:a16="http://schemas.microsoft.com/office/drawing/2014/main" id="{90295111-642A-45CA-B8EA-9089545A24F5}"/>
+              </a:ext>
+            </a:extLst>
+          </p:cNvPr>
+          <p:cNvSpPr>
+            <a:spLocks noGrp="1"/>
+          </p:cNvSpPr>
+          <p:nvPr/>
+        </p:nvSpPr>
+        <p:spPr>
+          <a:xfrm>
+            <a:off x="11334750" y="6457950"/>
+            <a:ext cx="571500" cy="266700"/>
+          </a:xfrm>
+          <a:prstGeom prst="rect">
+            <a:avLst/>
+          </a:prstGeom>
+          <a:noFill/>
+          <a:ln w="0">
+            <a:noFill/>
+          </a:ln>
+        </p:spPr>
+        <p:txBody>
+          <a:bodyPr/>
+          <a:lstStyle/>
+          <a:p>
+            <a:pPr algn="r">
+              <a:defRPr sz="1350">
+                <a:solidFill>
+                  <a:srgbClr val="555555"/>
+                </a:solidFill>
+              </a:defRPr>
+            </a:pPr>
+            <a:fld id="{CBA6DFC4-19DE-4E6E-BE2F-858D8885306D}" type="slidenum">
+              <a:rPr sz="1350">
+                <a:solidFill>
+                  <a:srgbClr val="555555"/>
+                </a:solidFill>
+              </a:rPr>
+              <a:t>21</a:t>
+            </a:fld>
+            <a:endParaRPr sz="1350">
+              <a:solidFill>
+                <a:srgbClr val="555555"/>
               </a:solidFill>
             </a:endParaRPr>
           </a:p>
@@ -13004,6 +13803,60 @@
           </a:p>
         </p:txBody>
       </p:sp>
+      <p:sp>
+        <p:nvSpPr>
+          <p:cNvPr id="4" name="Slide Number">
+            <a:extLst>
+              <a:ext uri="{FF2B5EF4-FFF2-40B4-BE49-F238E27FC236}">
+                <a16:creationId xmlns:a16="http://schemas.microsoft.com/office/drawing/2014/main" id="{90295111-642A-45CA-B8EA-9089545A24F5}"/>
+              </a:ext>
+            </a:extLst>
+          </p:cNvPr>
+          <p:cNvSpPr>
+            <a:spLocks noGrp="1"/>
+          </p:cNvSpPr>
+          <p:nvPr/>
+        </p:nvSpPr>
+        <p:spPr>
+          <a:xfrm>
+            <a:off x="11334750" y="6457950"/>
+            <a:ext cx="571500" cy="266700"/>
+          </a:xfrm>
+          <a:prstGeom prst="rect">
+            <a:avLst/>
+          </a:prstGeom>
+          <a:noFill/>
+          <a:ln w="0">
+            <a:noFill/>
+          </a:ln>
+        </p:spPr>
+        <p:txBody>
+          <a:bodyPr/>
+          <a:lstStyle/>
+          <a:p>
+            <a:pPr algn="r">
+              <a:defRPr sz="1350">
+                <a:solidFill>
+                  <a:srgbClr val="555555"/>
+                </a:solidFill>
+              </a:defRPr>
+            </a:pPr>
+            <a:fld id="{270BECFD-60E4-47ED-BA2F-171236B4C0B9}" type="slidenum">
+              <a:rPr sz="1350">
+                <a:solidFill>
+                  <a:srgbClr val="555555"/>
+                </a:solidFill>
+              </a:rPr>
+              <a:t>22</a:t>
+            </a:fld>
+            <a:endParaRPr sz="1350">
+              <a:solidFill>
+                <a:srgbClr val="555555"/>
+              </a:solidFill>
+            </a:endParaRPr>
+          </a:p>
+        </p:txBody>
+      </p:sp>
     </p:spTree>
     <p:extLst>
       <p:ext uri="{BB962C8B-B14F-4D97-AF65-F5344CB8AC3E}">
@@ -13728,6 +14581,60 @@
               </a:rPr>
               <a:t>4950</a:t>
             </a:r>
+          </a:p>
+        </p:txBody>
+      </p:sp>
+      <p:sp>
+        <p:nvSpPr>
+          <p:cNvPr id="4" name="Slide Number">
+            <a:extLst>
+              <a:ext uri="{FF2B5EF4-FFF2-40B4-BE49-F238E27FC236}">
+                <a16:creationId xmlns:a16="http://schemas.microsoft.com/office/drawing/2014/main" id="{90295111-642A-45CA-B8EA-9089545A24F5}"/>
+              </a:ext>
+            </a:extLst>
+          </p:cNvPr>
+          <p:cNvSpPr>
+            <a:spLocks noGrp="1"/>
+          </p:cNvSpPr>
+          <p:nvPr/>
+        </p:nvSpPr>
+        <p:spPr>
+          <a:xfrm>
+            <a:off x="11334750" y="6457950"/>
+            <a:ext cx="571500" cy="266700"/>
+          </a:xfrm>
+          <a:prstGeom prst="rect">
+            <a:avLst/>
+          </a:prstGeom>
+          <a:noFill/>
+          <a:ln w="0">
+            <a:noFill/>
+          </a:ln>
+        </p:spPr>
+        <p:txBody>
+          <a:bodyPr/>
+          <a:lstStyle/>
+          <a:p>
+            <a:pPr algn="r">
+              <a:defRPr sz="1350">
+                <a:solidFill>
+                  <a:srgbClr val="555555"/>
+                </a:solidFill>
+              </a:defRPr>
+            </a:pPr>
+            <a:fld id="{0C2409FE-059B-4BDD-B577-9C7B526F5793}" type="slidenum">
+              <a:rPr sz="1350">
+                <a:solidFill>
+                  <a:srgbClr val="555555"/>
+                </a:solidFill>
+              </a:rPr>
+              <a:t>23</a:t>
+            </a:fld>
+            <a:endParaRPr sz="1350">
+              <a:solidFill>
+                <a:srgbClr val="555555"/>
+              </a:solidFill>
+            </a:endParaRPr>
           </a:p>
         </p:txBody>
       </p:sp>
@@ -14354,6 +15261,60 @@
           </a:prstGeom>
         </p:spPr>
       </p:pic>
+      <p:sp>
+        <p:nvSpPr>
+          <p:cNvPr id="6" name="Slide Number">
+            <a:extLst>
+              <a:ext uri="{FF2B5EF4-FFF2-40B4-BE49-F238E27FC236}">
+                <a16:creationId xmlns:a16="http://schemas.microsoft.com/office/drawing/2014/main" id="{90295111-642A-45CA-B8EA-9089545A24F5}"/>
+              </a:ext>
+            </a:extLst>
+          </p:cNvPr>
+          <p:cNvSpPr>
+            <a:spLocks noGrp="1"/>
+          </p:cNvSpPr>
+          <p:nvPr/>
+        </p:nvSpPr>
+        <p:spPr>
+          <a:xfrm>
+            <a:off x="11334750" y="6457950"/>
+            <a:ext cx="571500" cy="266700"/>
+          </a:xfrm>
+          <a:prstGeom prst="rect">
+            <a:avLst/>
+          </a:prstGeom>
+          <a:noFill/>
+          <a:ln w="0">
+            <a:noFill/>
+          </a:ln>
+        </p:spPr>
+        <p:txBody>
+          <a:bodyPr/>
+          <a:lstStyle/>
+          <a:p>
+            <a:pPr algn="r">
+              <a:defRPr sz="1350">
+                <a:solidFill>
+                  <a:srgbClr val="555555"/>
+                </a:solidFill>
+              </a:defRPr>
+            </a:pPr>
+            <a:fld id="{A909FE6B-E9D7-417A-B8A2-BA8457121B70}" type="slidenum">
+              <a:rPr sz="1350">
+                <a:solidFill>
+                  <a:srgbClr val="555555"/>
+                </a:solidFill>
+              </a:rPr>
+              <a:t>24</a:t>
+            </a:fld>
+            <a:endParaRPr sz="1350">
+              <a:solidFill>
+                <a:srgbClr val="555555"/>
+              </a:solidFill>
+            </a:endParaRPr>
+          </a:p>
+        </p:txBody>
+      </p:sp>
     </p:spTree>
     <p:extLst>
       <p:ext uri="{BB962C8B-B14F-4D97-AF65-F5344CB8AC3E}">
@@ -14597,6 +15558,60 @@
                 <a:srgbClr val="FFFF00"/>
               </a:highlight>
               <a:latin typeface="Courier" pitchFamily="2" charset="0"/>
+            </a:endParaRPr>
+          </a:p>
+        </p:txBody>
+      </p:sp>
+      <p:sp>
+        <p:nvSpPr>
+          <p:cNvPr id="4" name="Slide Number">
+            <a:extLst>
+              <a:ext uri="{FF2B5EF4-FFF2-40B4-BE49-F238E27FC236}">
+                <a16:creationId xmlns:a16="http://schemas.microsoft.com/office/drawing/2014/main" id="{90295111-642A-45CA-B8EA-9089545A24F5}"/>
+              </a:ext>
+            </a:extLst>
+          </p:cNvPr>
+          <p:cNvSpPr>
+            <a:spLocks noGrp="1"/>
+          </p:cNvSpPr>
+          <p:nvPr/>
+        </p:nvSpPr>
+        <p:spPr>
+          <a:xfrm>
+            <a:off x="11334750" y="6457950"/>
+            <a:ext cx="571500" cy="266700"/>
+          </a:xfrm>
+          <a:prstGeom prst="rect">
+            <a:avLst/>
+          </a:prstGeom>
+          <a:noFill/>
+          <a:ln w="0">
+            <a:noFill/>
+          </a:ln>
+        </p:spPr>
+        <p:txBody>
+          <a:bodyPr/>
+          <a:lstStyle/>
+          <a:p>
+            <a:pPr algn="r">
+              <a:defRPr sz="1350">
+                <a:solidFill>
+                  <a:srgbClr val="555555"/>
+                </a:solidFill>
+              </a:defRPr>
+            </a:pPr>
+            <a:fld id="{0467E1A8-AC54-431C-BF00-83F62F9662C0}" type="slidenum">
+              <a:rPr sz="1350">
+                <a:solidFill>
+                  <a:srgbClr val="555555"/>
+                </a:solidFill>
+              </a:rPr>
+              <a:t>25</a:t>
+            </a:fld>
+            <a:endParaRPr sz="1350">
+              <a:solidFill>
+                <a:srgbClr val="555555"/>
+              </a:solidFill>
             </a:endParaRPr>
           </a:p>
         </p:txBody>
@@ -15132,6 +16147,60 @@
           </a:prstGeom>
         </p:spPr>
       </p:pic>
+      <p:sp>
+        <p:nvSpPr>
+          <p:cNvPr id="6" name="Slide Number">
+            <a:extLst>
+              <a:ext uri="{FF2B5EF4-FFF2-40B4-BE49-F238E27FC236}">
+                <a16:creationId xmlns:a16="http://schemas.microsoft.com/office/drawing/2014/main" id="{90295111-642A-45CA-B8EA-9089545A24F5}"/>
+              </a:ext>
+            </a:extLst>
+          </p:cNvPr>
+          <p:cNvSpPr>
+            <a:spLocks noGrp="1"/>
+          </p:cNvSpPr>
+          <p:nvPr/>
+        </p:nvSpPr>
+        <p:spPr>
+          <a:xfrm>
+            <a:off x="11334750" y="6457950"/>
+            <a:ext cx="571500" cy="266700"/>
+          </a:xfrm>
+          <a:prstGeom prst="rect">
+            <a:avLst/>
+          </a:prstGeom>
+          <a:noFill/>
+          <a:ln w="0">
+            <a:noFill/>
+          </a:ln>
+        </p:spPr>
+        <p:txBody>
+          <a:bodyPr/>
+          <a:lstStyle/>
+          <a:p>
+            <a:pPr algn="r">
+              <a:defRPr sz="1350">
+                <a:solidFill>
+                  <a:srgbClr val="555555"/>
+                </a:solidFill>
+              </a:defRPr>
+            </a:pPr>
+            <a:fld id="{7EC95170-0CEF-4301-A8FC-15A420A66C6F}" type="slidenum">
+              <a:rPr sz="1350">
+                <a:solidFill>
+                  <a:srgbClr val="555555"/>
+                </a:solidFill>
+              </a:rPr>
+              <a:t>26</a:t>
+            </a:fld>
+            <a:endParaRPr sz="1350">
+              <a:solidFill>
+                <a:srgbClr val="555555"/>
+              </a:solidFill>
+            </a:endParaRPr>
+          </a:p>
+        </p:txBody>
+      </p:sp>
     </p:spTree>
     <p:extLst>
       <p:ext uri="{BB962C8B-B14F-4D97-AF65-F5344CB8AC3E}">
@@ -15227,6 +16296,60 @@
           </a:prstGeom>
         </p:spPr>
       </p:pic>
+      <p:sp>
+        <p:nvSpPr>
+          <p:cNvPr id="5" name="Slide Number">
+            <a:extLst>
+              <a:ext uri="{FF2B5EF4-FFF2-40B4-BE49-F238E27FC236}">
+                <a16:creationId xmlns:a16="http://schemas.microsoft.com/office/drawing/2014/main" id="{90295111-642A-45CA-B8EA-9089545A24F5}"/>
+              </a:ext>
+            </a:extLst>
+          </p:cNvPr>
+          <p:cNvSpPr>
+            <a:spLocks noGrp="1"/>
+          </p:cNvSpPr>
+          <p:nvPr/>
+        </p:nvSpPr>
+        <p:spPr>
+          <a:xfrm>
+            <a:off x="11334750" y="6457950"/>
+            <a:ext cx="571500" cy="266700"/>
+          </a:xfrm>
+          <a:prstGeom prst="rect">
+            <a:avLst/>
+          </a:prstGeom>
+          <a:noFill/>
+          <a:ln w="0">
+            <a:noFill/>
+          </a:ln>
+        </p:spPr>
+        <p:txBody>
+          <a:bodyPr/>
+          <a:lstStyle/>
+          <a:p>
+            <a:pPr algn="r">
+              <a:defRPr sz="1350">
+                <a:solidFill>
+                  <a:srgbClr val="555555"/>
+                </a:solidFill>
+              </a:defRPr>
+            </a:pPr>
+            <a:fld id="{00782FEE-6801-4492-8A1E-4EA88617AD41}" type="slidenum">
+              <a:rPr sz="1350">
+                <a:solidFill>
+                  <a:srgbClr val="555555"/>
+                </a:solidFill>
+              </a:rPr>
+              <a:t>27</a:t>
+            </a:fld>
+            <a:endParaRPr sz="1350">
+              <a:solidFill>
+                <a:srgbClr val="555555"/>
+              </a:solidFill>
+            </a:endParaRPr>
+          </a:p>
+        </p:txBody>
+      </p:sp>
     </p:spTree>
     <p:extLst>
       <p:ext uri="{BB962C8B-B14F-4D97-AF65-F5344CB8AC3E}">
@@ -15337,6 +16460,60 @@
           </a:prstGeom>
         </p:spPr>
       </p:pic>
+      <p:sp>
+        <p:nvSpPr>
+          <p:cNvPr id="6" name="Slide Number">
+            <a:extLst>
+              <a:ext uri="{FF2B5EF4-FFF2-40B4-BE49-F238E27FC236}">
+                <a16:creationId xmlns:a16="http://schemas.microsoft.com/office/drawing/2014/main" id="{90295111-642A-45CA-B8EA-9089545A24F5}"/>
+              </a:ext>
+            </a:extLst>
+          </p:cNvPr>
+          <p:cNvSpPr>
+            <a:spLocks noGrp="1"/>
+          </p:cNvSpPr>
+          <p:nvPr/>
+        </p:nvSpPr>
+        <p:spPr>
+          <a:xfrm>
+            <a:off x="11334750" y="6457950"/>
+            <a:ext cx="571500" cy="266700"/>
+          </a:xfrm>
+          <a:prstGeom prst="rect">
+            <a:avLst/>
+          </a:prstGeom>
+          <a:noFill/>
+          <a:ln w="0">
+            <a:noFill/>
+          </a:ln>
+        </p:spPr>
+        <p:txBody>
+          <a:bodyPr/>
+          <a:lstStyle/>
+          <a:p>
+            <a:pPr algn="r">
+              <a:defRPr sz="1350">
+                <a:solidFill>
+                  <a:srgbClr val="555555"/>
+                </a:solidFill>
+              </a:defRPr>
+            </a:pPr>
+            <a:fld id="{C1172B51-F80D-4CBB-ACBD-15C83187AF44}" type="slidenum">
+              <a:rPr sz="1350">
+                <a:solidFill>
+                  <a:srgbClr val="555555"/>
+                </a:solidFill>
+              </a:rPr>
+              <a:t>28</a:t>
+            </a:fld>
+            <a:endParaRPr sz="1350">
+              <a:solidFill>
+                <a:srgbClr val="555555"/>
+              </a:solidFill>
+            </a:endParaRPr>
+          </a:p>
+        </p:txBody>
+      </p:sp>
     </p:spTree>
     <p:extLst>
       <p:ext uri="{BB962C8B-B14F-4D97-AF65-F5344CB8AC3E}">
@@ -15573,6 +16750,60 @@
               <a:rPr lang="en-US" sz="2800" dirty="0"/>
               <a:t>Billions of rows of data</a:t>
             </a:r>
+          </a:p>
+        </p:txBody>
+      </p:sp>
+      <p:sp>
+        <p:nvSpPr>
+          <p:cNvPr id="4" name="Slide Number">
+            <a:extLst>
+              <a:ext uri="{FF2B5EF4-FFF2-40B4-BE49-F238E27FC236}">
+                <a16:creationId xmlns:a16="http://schemas.microsoft.com/office/drawing/2014/main" id="{90295111-642A-45CA-B8EA-9089545A24F5}"/>
+              </a:ext>
+            </a:extLst>
+          </p:cNvPr>
+          <p:cNvSpPr>
+            <a:spLocks noGrp="1"/>
+          </p:cNvSpPr>
+          <p:nvPr/>
+        </p:nvSpPr>
+        <p:spPr>
+          <a:xfrm>
+            <a:off x="11334750" y="6457950"/>
+            <a:ext cx="571500" cy="266700"/>
+          </a:xfrm>
+          <a:prstGeom prst="rect">
+            <a:avLst/>
+          </a:prstGeom>
+          <a:noFill/>
+          <a:ln w="0">
+            <a:noFill/>
+          </a:ln>
+        </p:spPr>
+        <p:txBody>
+          <a:bodyPr/>
+          <a:lstStyle/>
+          <a:p>
+            <a:pPr algn="r">
+              <a:defRPr sz="1350">
+                <a:solidFill>
+                  <a:srgbClr val="555555"/>
+                </a:solidFill>
+              </a:defRPr>
+            </a:pPr>
+            <a:fld id="{9FF0978F-5FD8-45E3-B0E9-BE1F24706434}" type="slidenum">
+              <a:rPr sz="1350">
+                <a:solidFill>
+                  <a:srgbClr val="555555"/>
+                </a:solidFill>
+              </a:rPr>
+              <a:t>29</a:t>
+            </a:fld>
+            <a:endParaRPr sz="1350">
+              <a:solidFill>
+                <a:srgbClr val="555555"/>
+              </a:solidFill>
+            </a:endParaRPr>
           </a:p>
         </p:txBody>
       </p:sp>
@@ -16316,6 +17547,60 @@
           </a:p>
         </p:txBody>
       </p:sp>
+      <p:sp>
+        <p:nvSpPr>
+          <p:cNvPr id="4" name="Slide Number">
+            <a:extLst>
+              <a:ext uri="{FF2B5EF4-FFF2-40B4-BE49-F238E27FC236}">
+                <a16:creationId xmlns:a16="http://schemas.microsoft.com/office/drawing/2014/main" id="{90295111-642A-45CA-B8EA-9089545A24F5}"/>
+              </a:ext>
+            </a:extLst>
+          </p:cNvPr>
+          <p:cNvSpPr>
+            <a:spLocks noGrp="1"/>
+          </p:cNvSpPr>
+          <p:nvPr/>
+        </p:nvSpPr>
+        <p:spPr>
+          <a:xfrm>
+            <a:off x="11334750" y="6457950"/>
+            <a:ext cx="571500" cy="266700"/>
+          </a:xfrm>
+          <a:prstGeom prst="rect">
+            <a:avLst/>
+          </a:prstGeom>
+          <a:noFill/>
+          <a:ln w="0">
+            <a:noFill/>
+          </a:ln>
+        </p:spPr>
+        <p:txBody>
+          <a:bodyPr/>
+          <a:lstStyle/>
+          <a:p>
+            <a:pPr algn="r">
+              <a:defRPr sz="1350">
+                <a:solidFill>
+                  <a:srgbClr val="555555"/>
+                </a:solidFill>
+              </a:defRPr>
+            </a:pPr>
+            <a:fld id="{55B68B6A-B980-46CC-A2AF-BBC70662A6DE}" type="slidenum">
+              <a:rPr sz="1350">
+                <a:solidFill>
+                  <a:srgbClr val="555555"/>
+                </a:solidFill>
+              </a:rPr>
+              <a:t>3</a:t>
+            </a:fld>
+            <a:endParaRPr sz="1350">
+              <a:solidFill>
+                <a:srgbClr val="555555"/>
+              </a:solidFill>
+            </a:endParaRPr>
+          </a:p>
+        </p:txBody>
+      </p:sp>
     </p:spTree>
     <p:extLst>
       <p:ext uri="{BB962C8B-B14F-4D97-AF65-F5344CB8AC3E}">
@@ -16771,6 +18056,60 @@
           </a:p>
         </p:txBody>
       </p:sp>
+      <p:sp>
+        <p:nvSpPr>
+          <p:cNvPr id="12" name="Slide Number">
+            <a:extLst>
+              <a:ext uri="{FF2B5EF4-FFF2-40B4-BE49-F238E27FC236}">
+                <a16:creationId xmlns:a16="http://schemas.microsoft.com/office/drawing/2014/main" id="{90295111-642A-45CA-B8EA-9089545A24F5}"/>
+              </a:ext>
+            </a:extLst>
+          </p:cNvPr>
+          <p:cNvSpPr>
+            <a:spLocks noGrp="1"/>
+          </p:cNvSpPr>
+          <p:nvPr/>
+        </p:nvSpPr>
+        <p:spPr>
+          <a:xfrm>
+            <a:off x="11334750" y="6457950"/>
+            <a:ext cx="571500" cy="266700"/>
+          </a:xfrm>
+          <a:prstGeom prst="rect">
+            <a:avLst/>
+          </a:prstGeom>
+          <a:noFill/>
+          <a:ln w="0">
+            <a:noFill/>
+          </a:ln>
+        </p:spPr>
+        <p:txBody>
+          <a:bodyPr/>
+          <a:lstStyle/>
+          <a:p>
+            <a:pPr algn="r">
+              <a:defRPr sz="1350">
+                <a:solidFill>
+                  <a:srgbClr val="555555"/>
+                </a:solidFill>
+              </a:defRPr>
+            </a:pPr>
+            <a:fld id="{45A92995-1414-48C8-A13C-7CA6461455F7}" type="slidenum">
+              <a:rPr sz="1350">
+                <a:solidFill>
+                  <a:srgbClr val="555555"/>
+                </a:solidFill>
+              </a:rPr>
+              <a:t>30</a:t>
+            </a:fld>
+            <a:endParaRPr sz="1350">
+              <a:solidFill>
+                <a:srgbClr val="555555"/>
+              </a:solidFill>
+            </a:endParaRPr>
+          </a:p>
+        </p:txBody>
+      </p:sp>
     </p:spTree>
     <p:extLst>
       <p:ext uri="{BB962C8B-B14F-4D97-AF65-F5344CB8AC3E}">
@@ -16869,6 +18208,60 @@
           </a:prstGeom>
         </p:spPr>
       </p:pic>
+      <p:sp>
+        <p:nvSpPr>
+          <p:cNvPr id="6" name="Slide Number">
+            <a:extLst>
+              <a:ext uri="{FF2B5EF4-FFF2-40B4-BE49-F238E27FC236}">
+                <a16:creationId xmlns:a16="http://schemas.microsoft.com/office/drawing/2014/main" id="{90295111-642A-45CA-B8EA-9089545A24F5}"/>
+              </a:ext>
+            </a:extLst>
+          </p:cNvPr>
+          <p:cNvSpPr>
+            <a:spLocks noGrp="1"/>
+          </p:cNvSpPr>
+          <p:nvPr/>
+        </p:nvSpPr>
+        <p:spPr>
+          <a:xfrm>
+            <a:off x="11334750" y="6457950"/>
+            <a:ext cx="571500" cy="266700"/>
+          </a:xfrm>
+          <a:prstGeom prst="rect">
+            <a:avLst/>
+          </a:prstGeom>
+          <a:noFill/>
+          <a:ln w="0">
+            <a:noFill/>
+          </a:ln>
+        </p:spPr>
+        <p:txBody>
+          <a:bodyPr/>
+          <a:lstStyle/>
+          <a:p>
+            <a:pPr algn="r">
+              <a:defRPr sz="1350">
+                <a:solidFill>
+                  <a:srgbClr val="555555"/>
+                </a:solidFill>
+              </a:defRPr>
+            </a:pPr>
+            <a:fld id="{DDC42E2E-CCC3-45EA-A34E-36AABEE70CF0}" type="slidenum">
+              <a:rPr sz="1350">
+                <a:solidFill>
+                  <a:srgbClr val="555555"/>
+                </a:solidFill>
+              </a:rPr>
+              <a:t>31</a:t>
+            </a:fld>
+            <a:endParaRPr sz="1350">
+              <a:solidFill>
+                <a:srgbClr val="555555"/>
+              </a:solidFill>
+            </a:endParaRPr>
+          </a:p>
+        </p:txBody>
+      </p:sp>
     </p:spTree>
     <p:extLst>
       <p:ext uri="{BB962C8B-B14F-4D97-AF65-F5344CB8AC3E}">
@@ -17346,6 +18739,60 @@
               </a:solidFill>
               <a:latin typeface="Consolas" panose="020B0609020204030204" pitchFamily="49" charset="0"/>
               <a:cs typeface="Consolas" panose="020B0609020204030204" pitchFamily="49" charset="0"/>
+            </a:endParaRPr>
+          </a:p>
+        </p:txBody>
+      </p:sp>
+      <p:sp>
+        <p:nvSpPr>
+          <p:cNvPr id="4" name="Slide Number">
+            <a:extLst>
+              <a:ext uri="{FF2B5EF4-FFF2-40B4-BE49-F238E27FC236}">
+                <a16:creationId xmlns:a16="http://schemas.microsoft.com/office/drawing/2014/main" id="{90295111-642A-45CA-B8EA-9089545A24F5}"/>
+              </a:ext>
+            </a:extLst>
+          </p:cNvPr>
+          <p:cNvSpPr>
+            <a:spLocks noGrp="1"/>
+          </p:cNvSpPr>
+          <p:nvPr/>
+        </p:nvSpPr>
+        <p:spPr>
+          <a:xfrm>
+            <a:off x="11334750" y="6457950"/>
+            <a:ext cx="571500" cy="266700"/>
+          </a:xfrm>
+          <a:prstGeom prst="rect">
+            <a:avLst/>
+          </a:prstGeom>
+          <a:noFill/>
+          <a:ln w="0">
+            <a:noFill/>
+          </a:ln>
+        </p:spPr>
+        <p:txBody>
+          <a:bodyPr/>
+          <a:lstStyle/>
+          <a:p>
+            <a:pPr algn="r">
+              <a:defRPr sz="1350">
+                <a:solidFill>
+                  <a:srgbClr val="555555"/>
+                </a:solidFill>
+              </a:defRPr>
+            </a:pPr>
+            <a:fld id="{19CCEE7C-8335-400E-8195-6B26E40CA9E7}" type="slidenum">
+              <a:rPr sz="1350">
+                <a:solidFill>
+                  <a:srgbClr val="555555"/>
+                </a:solidFill>
+              </a:rPr>
+              <a:t>32</a:t>
+            </a:fld>
+            <a:endParaRPr sz="1350">
+              <a:solidFill>
+                <a:srgbClr val="555555"/>
+              </a:solidFill>
             </a:endParaRPr>
           </a:p>
         </p:txBody>
@@ -18298,6 +19745,60 @@
               </a:rPr>
               <a:t>()   </a:t>
             </a:r>
+          </a:p>
+        </p:txBody>
+      </p:sp>
+      <p:sp>
+        <p:nvSpPr>
+          <p:cNvPr id="4" name="Slide Number">
+            <a:extLst>
+              <a:ext uri="{FF2B5EF4-FFF2-40B4-BE49-F238E27FC236}">
+                <a16:creationId xmlns:a16="http://schemas.microsoft.com/office/drawing/2014/main" id="{90295111-642A-45CA-B8EA-9089545A24F5}"/>
+              </a:ext>
+            </a:extLst>
+          </p:cNvPr>
+          <p:cNvSpPr>
+            <a:spLocks noGrp="1"/>
+          </p:cNvSpPr>
+          <p:nvPr/>
+        </p:nvSpPr>
+        <p:spPr>
+          <a:xfrm>
+            <a:off x="11334750" y="6457950"/>
+            <a:ext cx="571500" cy="266700"/>
+          </a:xfrm>
+          <a:prstGeom prst="rect">
+            <a:avLst/>
+          </a:prstGeom>
+          <a:noFill/>
+          <a:ln w="0">
+            <a:noFill/>
+          </a:ln>
+        </p:spPr>
+        <p:txBody>
+          <a:bodyPr/>
+          <a:lstStyle/>
+          <a:p>
+            <a:pPr algn="r">
+              <a:defRPr sz="1350">
+                <a:solidFill>
+                  <a:srgbClr val="555555"/>
+                </a:solidFill>
+              </a:defRPr>
+            </a:pPr>
+            <a:fld id="{81E8F909-E498-482C-AD1F-24B58B16BF67}" type="slidenum">
+              <a:rPr sz="1350">
+                <a:solidFill>
+                  <a:srgbClr val="555555"/>
+                </a:solidFill>
+              </a:rPr>
+              <a:t>33</a:t>
+            </a:fld>
+            <a:endParaRPr sz="1350">
+              <a:solidFill>
+                <a:srgbClr val="555555"/>
+              </a:solidFill>
+            </a:endParaRPr>
           </a:p>
         </p:txBody>
       </p:sp>
@@ -19294,6 +20795,60 @@
           </a:p>
         </p:txBody>
       </p:sp>
+      <p:sp>
+        <p:nvSpPr>
+          <p:cNvPr id="4" name="Slide Number">
+            <a:extLst>
+              <a:ext uri="{FF2B5EF4-FFF2-40B4-BE49-F238E27FC236}">
+                <a16:creationId xmlns:a16="http://schemas.microsoft.com/office/drawing/2014/main" id="{90295111-642A-45CA-B8EA-9089545A24F5}"/>
+              </a:ext>
+            </a:extLst>
+          </p:cNvPr>
+          <p:cNvSpPr>
+            <a:spLocks noGrp="1"/>
+          </p:cNvSpPr>
+          <p:nvPr/>
+        </p:nvSpPr>
+        <p:spPr>
+          <a:xfrm>
+            <a:off x="11334750" y="6457950"/>
+            <a:ext cx="571500" cy="266700"/>
+          </a:xfrm>
+          <a:prstGeom prst="rect">
+            <a:avLst/>
+          </a:prstGeom>
+          <a:noFill/>
+          <a:ln w="0">
+            <a:noFill/>
+          </a:ln>
+        </p:spPr>
+        <p:txBody>
+          <a:bodyPr/>
+          <a:lstStyle/>
+          <a:p>
+            <a:pPr algn="r">
+              <a:defRPr sz="1350">
+                <a:solidFill>
+                  <a:srgbClr val="555555"/>
+                </a:solidFill>
+              </a:defRPr>
+            </a:pPr>
+            <a:fld id="{B5A282BB-56EA-4265-85E3-FC8197E1882B}" type="slidenum">
+              <a:rPr sz="1350">
+                <a:solidFill>
+                  <a:srgbClr val="555555"/>
+                </a:solidFill>
+              </a:rPr>
+              <a:t>34</a:t>
+            </a:fld>
+            <a:endParaRPr sz="1350">
+              <a:solidFill>
+                <a:srgbClr val="555555"/>
+              </a:solidFill>
+            </a:endParaRPr>
+          </a:p>
+        </p:txBody>
+      </p:sp>
     </p:spTree>
     <p:extLst>
       <p:ext uri="{BB962C8B-B14F-4D97-AF65-F5344CB8AC3E}">
@@ -20215,6 +21770,60 @@
               </a:solidFill>
               <a:latin typeface="Consolas" panose="020B0609020204030204" pitchFamily="49" charset="0"/>
               <a:cs typeface="Consolas" panose="020B0609020204030204" pitchFamily="49" charset="0"/>
+            </a:endParaRPr>
+          </a:p>
+        </p:txBody>
+      </p:sp>
+      <p:sp>
+        <p:nvSpPr>
+          <p:cNvPr id="4" name="Slide Number">
+            <a:extLst>
+              <a:ext uri="{FF2B5EF4-FFF2-40B4-BE49-F238E27FC236}">
+                <a16:creationId xmlns:a16="http://schemas.microsoft.com/office/drawing/2014/main" id="{90295111-642A-45CA-B8EA-9089545A24F5}"/>
+              </a:ext>
+            </a:extLst>
+          </p:cNvPr>
+          <p:cNvSpPr>
+            <a:spLocks noGrp="1"/>
+          </p:cNvSpPr>
+          <p:nvPr/>
+        </p:nvSpPr>
+        <p:spPr>
+          <a:xfrm>
+            <a:off x="11334750" y="6457950"/>
+            <a:ext cx="571500" cy="266700"/>
+          </a:xfrm>
+          <a:prstGeom prst="rect">
+            <a:avLst/>
+          </a:prstGeom>
+          <a:noFill/>
+          <a:ln w="0">
+            <a:noFill/>
+          </a:ln>
+        </p:spPr>
+        <p:txBody>
+          <a:bodyPr/>
+          <a:lstStyle/>
+          <a:p>
+            <a:pPr algn="r">
+              <a:defRPr sz="1350">
+                <a:solidFill>
+                  <a:srgbClr val="555555"/>
+                </a:solidFill>
+              </a:defRPr>
+            </a:pPr>
+            <a:fld id="{75C4D696-821C-4F74-8F39-3CD4DD78B2BA}" type="slidenum">
+              <a:rPr sz="1350">
+                <a:solidFill>
+                  <a:srgbClr val="555555"/>
+                </a:solidFill>
+              </a:rPr>
+              <a:t>35</a:t>
+            </a:fld>
+            <a:endParaRPr sz="1350">
+              <a:solidFill>
+                <a:srgbClr val="555555"/>
+              </a:solidFill>
             </a:endParaRPr>
           </a:p>
         </p:txBody>
@@ -21129,6 +22738,60 @@
               </a:rPr>
               <a:t>", "Category", "Amount", "Country"]</a:t>
             </a:r>
+          </a:p>
+        </p:txBody>
+      </p:sp>
+      <p:sp>
+        <p:nvSpPr>
+          <p:cNvPr id="4" name="Slide Number">
+            <a:extLst>
+              <a:ext uri="{FF2B5EF4-FFF2-40B4-BE49-F238E27FC236}">
+                <a16:creationId xmlns:a16="http://schemas.microsoft.com/office/drawing/2014/main" id="{90295111-642A-45CA-B8EA-9089545A24F5}"/>
+              </a:ext>
+            </a:extLst>
+          </p:cNvPr>
+          <p:cNvSpPr>
+            <a:spLocks noGrp="1"/>
+          </p:cNvSpPr>
+          <p:nvPr/>
+        </p:nvSpPr>
+        <p:spPr>
+          <a:xfrm>
+            <a:off x="11334750" y="6457950"/>
+            <a:ext cx="571500" cy="266700"/>
+          </a:xfrm>
+          <a:prstGeom prst="rect">
+            <a:avLst/>
+          </a:prstGeom>
+          <a:noFill/>
+          <a:ln w="0">
+            <a:noFill/>
+          </a:ln>
+        </p:spPr>
+        <p:txBody>
+          <a:bodyPr/>
+          <a:lstStyle/>
+          <a:p>
+            <a:pPr algn="r">
+              <a:defRPr sz="1350">
+                <a:solidFill>
+                  <a:srgbClr val="555555"/>
+                </a:solidFill>
+              </a:defRPr>
+            </a:pPr>
+            <a:fld id="{BF43281D-5879-4807-9528-92802FC8C596}" type="slidenum">
+              <a:rPr sz="1350">
+                <a:solidFill>
+                  <a:srgbClr val="555555"/>
+                </a:solidFill>
+              </a:rPr>
+              <a:t>36</a:t>
+            </a:fld>
+            <a:endParaRPr sz="1350">
+              <a:solidFill>
+                <a:srgbClr val="555555"/>
+              </a:solidFill>
+            </a:endParaRPr>
           </a:p>
         </p:txBody>
       </p:sp>
@@ -22292,6 +23955,60 @@
               </a:rPr>
               <a:t>+------+-----------+------+-------+</a:t>
             </a:r>
+          </a:p>
+        </p:txBody>
+      </p:sp>
+      <p:sp>
+        <p:nvSpPr>
+          <p:cNvPr id="4" name="Slide Number">
+            <a:extLst>
+              <a:ext uri="{FF2B5EF4-FFF2-40B4-BE49-F238E27FC236}">
+                <a16:creationId xmlns:a16="http://schemas.microsoft.com/office/drawing/2014/main" id="{90295111-642A-45CA-B8EA-9089545A24F5}"/>
+              </a:ext>
+            </a:extLst>
+          </p:cNvPr>
+          <p:cNvSpPr>
+            <a:spLocks noGrp="1"/>
+          </p:cNvSpPr>
+          <p:nvPr/>
+        </p:nvSpPr>
+        <p:spPr>
+          <a:xfrm>
+            <a:off x="11334750" y="6457950"/>
+            <a:ext cx="571500" cy="266700"/>
+          </a:xfrm>
+          <a:prstGeom prst="rect">
+            <a:avLst/>
+          </a:prstGeom>
+          <a:noFill/>
+          <a:ln w="0">
+            <a:noFill/>
+          </a:ln>
+        </p:spPr>
+        <p:txBody>
+          <a:bodyPr/>
+          <a:lstStyle/>
+          <a:p>
+            <a:pPr algn="r">
+              <a:defRPr sz="1350">
+                <a:solidFill>
+                  <a:srgbClr val="555555"/>
+                </a:solidFill>
+              </a:defRPr>
+            </a:pPr>
+            <a:fld id="{469C1AB7-B47C-479E-81B8-1076FF142B5B}" type="slidenum">
+              <a:rPr sz="1350">
+                <a:solidFill>
+                  <a:srgbClr val="555555"/>
+                </a:solidFill>
+              </a:rPr>
+              <a:t>37</a:t>
+            </a:fld>
+            <a:endParaRPr sz="1350">
+              <a:solidFill>
+                <a:srgbClr val="555555"/>
+              </a:solidFill>
+            </a:endParaRPr>
           </a:p>
         </p:txBody>
       </p:sp>
@@ -23547,6 +25264,60 @@
           </a:p>
         </p:txBody>
       </p:sp>
+      <p:sp>
+        <p:nvSpPr>
+          <p:cNvPr id="4" name="Slide Number">
+            <a:extLst>
+              <a:ext uri="{FF2B5EF4-FFF2-40B4-BE49-F238E27FC236}">
+                <a16:creationId xmlns:a16="http://schemas.microsoft.com/office/drawing/2014/main" id="{90295111-642A-45CA-B8EA-9089545A24F5}"/>
+              </a:ext>
+            </a:extLst>
+          </p:cNvPr>
+          <p:cNvSpPr>
+            <a:spLocks noGrp="1"/>
+          </p:cNvSpPr>
+          <p:nvPr/>
+        </p:nvSpPr>
+        <p:spPr>
+          <a:xfrm>
+            <a:off x="11334750" y="6457950"/>
+            <a:ext cx="571500" cy="266700"/>
+          </a:xfrm>
+          <a:prstGeom prst="rect">
+            <a:avLst/>
+          </a:prstGeom>
+          <a:noFill/>
+          <a:ln w="0">
+            <a:noFill/>
+          </a:ln>
+        </p:spPr>
+        <p:txBody>
+          <a:bodyPr/>
+          <a:lstStyle/>
+          <a:p>
+            <a:pPr algn="r">
+              <a:defRPr sz="1350">
+                <a:solidFill>
+                  <a:srgbClr val="555555"/>
+                </a:solidFill>
+              </a:defRPr>
+            </a:pPr>
+            <a:fld id="{061C735B-FB3D-4BB5-822E-3BD6FE3F9E97}" type="slidenum">
+              <a:rPr sz="1350">
+                <a:solidFill>
+                  <a:srgbClr val="555555"/>
+                </a:solidFill>
+              </a:rPr>
+              <a:t>38</a:t>
+            </a:fld>
+            <a:endParaRPr sz="1350">
+              <a:solidFill>
+                <a:srgbClr val="555555"/>
+              </a:solidFill>
+            </a:endParaRPr>
+          </a:p>
+        </p:txBody>
+      </p:sp>
     </p:spTree>
     <p:extLst>
       <p:ext uri="{BB962C8B-B14F-4D97-AF65-F5344CB8AC3E}">
@@ -24665,6 +26436,60 @@
           </a:p>
         </p:txBody>
       </p:sp>
+      <p:sp>
+        <p:nvSpPr>
+          <p:cNvPr id="4" name="Slide Number">
+            <a:extLst>
+              <a:ext uri="{FF2B5EF4-FFF2-40B4-BE49-F238E27FC236}">
+                <a16:creationId xmlns:a16="http://schemas.microsoft.com/office/drawing/2014/main" id="{90295111-642A-45CA-B8EA-9089545A24F5}"/>
+              </a:ext>
+            </a:extLst>
+          </p:cNvPr>
+          <p:cNvSpPr>
+            <a:spLocks noGrp="1"/>
+          </p:cNvSpPr>
+          <p:nvPr/>
+        </p:nvSpPr>
+        <p:spPr>
+          <a:xfrm>
+            <a:off x="11334750" y="6457950"/>
+            <a:ext cx="571500" cy="266700"/>
+          </a:xfrm>
+          <a:prstGeom prst="rect">
+            <a:avLst/>
+          </a:prstGeom>
+          <a:noFill/>
+          <a:ln w="0">
+            <a:noFill/>
+          </a:ln>
+        </p:spPr>
+        <p:txBody>
+          <a:bodyPr/>
+          <a:lstStyle/>
+          <a:p>
+            <a:pPr algn="r">
+              <a:defRPr sz="1350">
+                <a:solidFill>
+                  <a:srgbClr val="555555"/>
+                </a:solidFill>
+              </a:defRPr>
+            </a:pPr>
+            <a:fld id="{D5C976C9-7303-4A34-897E-1F9FA86AD15F}" type="slidenum">
+              <a:rPr sz="1350">
+                <a:solidFill>
+                  <a:srgbClr val="555555"/>
+                </a:solidFill>
+              </a:rPr>
+              <a:t>39</a:t>
+            </a:fld>
+            <a:endParaRPr sz="1350">
+              <a:solidFill>
+                <a:srgbClr val="555555"/>
+              </a:solidFill>
+            </a:endParaRPr>
+          </a:p>
+        </p:txBody>
+      </p:sp>
     </p:spTree>
     <p:extLst>
       <p:ext uri="{BB962C8B-B14F-4D97-AF65-F5344CB8AC3E}">
@@ -25631,6 +27456,60 @@
           </a:p>
         </p:txBody>
       </p:sp>
+      <p:sp>
+        <p:nvSpPr>
+          <p:cNvPr id="4" name="Slide Number">
+            <a:extLst>
+              <a:ext uri="{FF2B5EF4-FFF2-40B4-BE49-F238E27FC236}">
+                <a16:creationId xmlns:a16="http://schemas.microsoft.com/office/drawing/2014/main" id="{90295111-642A-45CA-B8EA-9089545A24F5}"/>
+              </a:ext>
+            </a:extLst>
+          </p:cNvPr>
+          <p:cNvSpPr>
+            <a:spLocks noGrp="1"/>
+          </p:cNvSpPr>
+          <p:nvPr/>
+        </p:nvSpPr>
+        <p:spPr>
+          <a:xfrm>
+            <a:off x="11334750" y="6457950"/>
+            <a:ext cx="571500" cy="266700"/>
+          </a:xfrm>
+          <a:prstGeom prst="rect">
+            <a:avLst/>
+          </a:prstGeom>
+          <a:noFill/>
+          <a:ln w="0">
+            <a:noFill/>
+          </a:ln>
+        </p:spPr>
+        <p:txBody>
+          <a:bodyPr/>
+          <a:lstStyle/>
+          <a:p>
+            <a:pPr algn="r">
+              <a:defRPr sz="1350">
+                <a:solidFill>
+                  <a:srgbClr val="555555"/>
+                </a:solidFill>
+              </a:defRPr>
+            </a:pPr>
+            <a:fld id="{1D2C215F-622A-4B6A-98C5-30662BEA2626}" type="slidenum">
+              <a:rPr sz="1350">
+                <a:solidFill>
+                  <a:srgbClr val="555555"/>
+                </a:solidFill>
+              </a:rPr>
+              <a:t>4</a:t>
+            </a:fld>
+            <a:endParaRPr sz="1350">
+              <a:solidFill>
+                <a:srgbClr val="555555"/>
+              </a:solidFill>
+            </a:endParaRPr>
+          </a:p>
+        </p:txBody>
+      </p:sp>
     </p:spTree>
     <p:extLst>
       <p:ext uri="{BB962C8B-B14F-4D97-AF65-F5344CB8AC3E}">
@@ -26637,6 +28516,60 @@
               </a:rPr>
               <a:t>()</a:t>
             </a:r>
+          </a:p>
+        </p:txBody>
+      </p:sp>
+      <p:sp>
+        <p:nvSpPr>
+          <p:cNvPr id="4" name="Slide Number">
+            <a:extLst>
+              <a:ext uri="{FF2B5EF4-FFF2-40B4-BE49-F238E27FC236}">
+                <a16:creationId xmlns:a16="http://schemas.microsoft.com/office/drawing/2014/main" id="{90295111-642A-45CA-B8EA-9089545A24F5}"/>
+              </a:ext>
+            </a:extLst>
+          </p:cNvPr>
+          <p:cNvSpPr>
+            <a:spLocks noGrp="1"/>
+          </p:cNvSpPr>
+          <p:nvPr/>
+        </p:nvSpPr>
+        <p:spPr>
+          <a:xfrm>
+            <a:off x="11334750" y="6457950"/>
+            <a:ext cx="571500" cy="266700"/>
+          </a:xfrm>
+          <a:prstGeom prst="rect">
+            <a:avLst/>
+          </a:prstGeom>
+          <a:noFill/>
+          <a:ln w="0">
+            <a:noFill/>
+          </a:ln>
+        </p:spPr>
+        <p:txBody>
+          <a:bodyPr/>
+          <a:lstStyle/>
+          <a:p>
+            <a:pPr algn="r">
+              <a:defRPr sz="1350">
+                <a:solidFill>
+                  <a:srgbClr val="555555"/>
+                </a:solidFill>
+              </a:defRPr>
+            </a:pPr>
+            <a:fld id="{3DC2FE05-9360-424B-8FE6-559B6FDE051B}" type="slidenum">
+              <a:rPr sz="1350">
+                <a:solidFill>
+                  <a:srgbClr val="555555"/>
+                </a:solidFill>
+              </a:rPr>
+              <a:t>40</a:t>
+            </a:fld>
+            <a:endParaRPr sz="1350">
+              <a:solidFill>
+                <a:srgbClr val="555555"/>
+              </a:solidFill>
+            </a:endParaRPr>
           </a:p>
         </p:txBody>
       </p:sp>
@@ -27342,6 +29275,60 @@
           </a:p>
         </p:txBody>
       </p:sp>
+      <p:sp>
+        <p:nvSpPr>
+          <p:cNvPr id="4" name="Slide Number">
+            <a:extLst>
+              <a:ext uri="{FF2B5EF4-FFF2-40B4-BE49-F238E27FC236}">
+                <a16:creationId xmlns:a16="http://schemas.microsoft.com/office/drawing/2014/main" id="{90295111-642A-45CA-B8EA-9089545A24F5}"/>
+              </a:ext>
+            </a:extLst>
+          </p:cNvPr>
+          <p:cNvSpPr>
+            <a:spLocks noGrp="1"/>
+          </p:cNvSpPr>
+          <p:nvPr/>
+        </p:nvSpPr>
+        <p:spPr>
+          <a:xfrm>
+            <a:off x="11334750" y="6457950"/>
+            <a:ext cx="571500" cy="266700"/>
+          </a:xfrm>
+          <a:prstGeom prst="rect">
+            <a:avLst/>
+          </a:prstGeom>
+          <a:noFill/>
+          <a:ln w="0">
+            <a:noFill/>
+          </a:ln>
+        </p:spPr>
+        <p:txBody>
+          <a:bodyPr/>
+          <a:lstStyle/>
+          <a:p>
+            <a:pPr algn="r">
+              <a:defRPr sz="1350">
+                <a:solidFill>
+                  <a:srgbClr val="555555"/>
+                </a:solidFill>
+              </a:defRPr>
+            </a:pPr>
+            <a:fld id="{E778BBED-B3A7-495A-AE42-A012F5F1BCBF}" type="slidenum">
+              <a:rPr sz="1350">
+                <a:solidFill>
+                  <a:srgbClr val="555555"/>
+                </a:solidFill>
+              </a:rPr>
+              <a:t>41</a:t>
+            </a:fld>
+            <a:endParaRPr sz="1350">
+              <a:solidFill>
+                <a:srgbClr val="555555"/>
+              </a:solidFill>
+            </a:endParaRPr>
+          </a:p>
+        </p:txBody>
+      </p:sp>
     </p:spTree>
     <p:extLst>
       <p:ext uri="{BB962C8B-B14F-4D97-AF65-F5344CB8AC3E}">
@@ -27907,6 +29894,60 @@
           </a:p>
         </p:txBody>
       </p:sp>
+      <p:sp>
+        <p:nvSpPr>
+          <p:cNvPr id="4" name="Slide Number">
+            <a:extLst>
+              <a:ext uri="{FF2B5EF4-FFF2-40B4-BE49-F238E27FC236}">
+                <a16:creationId xmlns:a16="http://schemas.microsoft.com/office/drawing/2014/main" id="{90295111-642A-45CA-B8EA-9089545A24F5}"/>
+              </a:ext>
+            </a:extLst>
+          </p:cNvPr>
+          <p:cNvSpPr>
+            <a:spLocks noGrp="1"/>
+          </p:cNvSpPr>
+          <p:nvPr/>
+        </p:nvSpPr>
+        <p:spPr>
+          <a:xfrm>
+            <a:off x="11334750" y="6457950"/>
+            <a:ext cx="571500" cy="266700"/>
+          </a:xfrm>
+          <a:prstGeom prst="rect">
+            <a:avLst/>
+          </a:prstGeom>
+          <a:noFill/>
+          <a:ln w="0">
+            <a:noFill/>
+          </a:ln>
+        </p:spPr>
+        <p:txBody>
+          <a:bodyPr/>
+          <a:lstStyle/>
+          <a:p>
+            <a:pPr algn="r">
+              <a:defRPr sz="1350">
+                <a:solidFill>
+                  <a:srgbClr val="555555"/>
+                </a:solidFill>
+              </a:defRPr>
+            </a:pPr>
+            <a:fld id="{46043AF3-28D1-406F-8137-F1BEDEF97D28}" type="slidenum">
+              <a:rPr sz="1350">
+                <a:solidFill>
+                  <a:srgbClr val="555555"/>
+                </a:solidFill>
+              </a:rPr>
+              <a:t>42</a:t>
+            </a:fld>
+            <a:endParaRPr sz="1350">
+              <a:solidFill>
+                <a:srgbClr val="555555"/>
+              </a:solidFill>
+            </a:endParaRPr>
+          </a:p>
+        </p:txBody>
+      </p:sp>
     </p:spTree>
     <p:extLst>
       <p:ext uri="{BB962C8B-B14F-4D97-AF65-F5344CB8AC3E}">
@@ -28202,6 +30243,60 @@
               <a:rPr lang="en-US" sz="2800"/>
               <a:t>Fast performance</a:t>
             </a:r>
+          </a:p>
+        </p:txBody>
+      </p:sp>
+      <p:sp>
+        <p:nvSpPr>
+          <p:cNvPr id="4" name="Slide Number">
+            <a:extLst>
+              <a:ext uri="{FF2B5EF4-FFF2-40B4-BE49-F238E27FC236}">
+                <a16:creationId xmlns:a16="http://schemas.microsoft.com/office/drawing/2014/main" id="{90295111-642A-45CA-B8EA-9089545A24F5}"/>
+              </a:ext>
+            </a:extLst>
+          </p:cNvPr>
+          <p:cNvSpPr>
+            <a:spLocks noGrp="1"/>
+          </p:cNvSpPr>
+          <p:nvPr/>
+        </p:nvSpPr>
+        <p:spPr>
+          <a:xfrm>
+            <a:off x="11334750" y="6457950"/>
+            <a:ext cx="571500" cy="266700"/>
+          </a:xfrm>
+          <a:prstGeom prst="rect">
+            <a:avLst/>
+          </a:prstGeom>
+          <a:noFill/>
+          <a:ln w="0">
+            <a:noFill/>
+          </a:ln>
+        </p:spPr>
+        <p:txBody>
+          <a:bodyPr/>
+          <a:lstStyle/>
+          <a:p>
+            <a:pPr algn="r">
+              <a:defRPr sz="1350">
+                <a:solidFill>
+                  <a:srgbClr val="555555"/>
+                </a:solidFill>
+              </a:defRPr>
+            </a:pPr>
+            <a:fld id="{88D2668E-3CA8-4097-995B-77740B5AA64B}" type="slidenum">
+              <a:rPr sz="1350">
+                <a:solidFill>
+                  <a:srgbClr val="555555"/>
+                </a:solidFill>
+              </a:rPr>
+              <a:t>43</a:t>
+            </a:fld>
+            <a:endParaRPr sz="1350">
+              <a:solidFill>
+                <a:srgbClr val="555555"/>
+              </a:solidFill>
+            </a:endParaRPr>
           </a:p>
         </p:txBody>
       </p:sp>
@@ -28622,6 +30717,60 @@
           </a:prstGeom>
         </p:spPr>
       </p:pic>
+      <p:sp>
+        <p:nvSpPr>
+          <p:cNvPr id="6" name="Slide Number">
+            <a:extLst>
+              <a:ext uri="{FF2B5EF4-FFF2-40B4-BE49-F238E27FC236}">
+                <a16:creationId xmlns:a16="http://schemas.microsoft.com/office/drawing/2014/main" id="{90295111-642A-45CA-B8EA-9089545A24F5}"/>
+              </a:ext>
+            </a:extLst>
+          </p:cNvPr>
+          <p:cNvSpPr>
+            <a:spLocks noGrp="1"/>
+          </p:cNvSpPr>
+          <p:nvPr/>
+        </p:nvSpPr>
+        <p:spPr>
+          <a:xfrm>
+            <a:off x="11334750" y="6457950"/>
+            <a:ext cx="571500" cy="266700"/>
+          </a:xfrm>
+          <a:prstGeom prst="rect">
+            <a:avLst/>
+          </a:prstGeom>
+          <a:noFill/>
+          <a:ln w="0">
+            <a:noFill/>
+          </a:ln>
+        </p:spPr>
+        <p:txBody>
+          <a:bodyPr/>
+          <a:lstStyle/>
+          <a:p>
+            <a:pPr algn="r">
+              <a:defRPr sz="1350">
+                <a:solidFill>
+                  <a:srgbClr val="555555"/>
+                </a:solidFill>
+              </a:defRPr>
+            </a:pPr>
+            <a:fld id="{A3786D0A-3E51-4025-9432-7D52E9C0627C}" type="slidenum">
+              <a:rPr sz="1350">
+                <a:solidFill>
+                  <a:srgbClr val="555555"/>
+                </a:solidFill>
+              </a:rPr>
+              <a:t>44</a:t>
+            </a:fld>
+            <a:endParaRPr sz="1350">
+              <a:solidFill>
+                <a:srgbClr val="555555"/>
+              </a:solidFill>
+            </a:endParaRPr>
+          </a:p>
+        </p:txBody>
+      </p:sp>
     </p:spTree>
     <p:extLst>
       <p:ext uri="{BB962C8B-B14F-4D97-AF65-F5344CB8AC3E}">
@@ -28815,6 +30964,60 @@
               <a:buAutoNum type="arabicPeriod"/>
             </a:pPr>
             <a:endParaRPr lang="en-US" sz="1200" dirty="0"/>
+          </a:p>
+        </p:txBody>
+      </p:sp>
+      <p:sp>
+        <p:nvSpPr>
+          <p:cNvPr id="4" name="Slide Number">
+            <a:extLst>
+              <a:ext uri="{FF2B5EF4-FFF2-40B4-BE49-F238E27FC236}">
+                <a16:creationId xmlns:a16="http://schemas.microsoft.com/office/drawing/2014/main" id="{90295111-642A-45CA-B8EA-9089545A24F5}"/>
+              </a:ext>
+            </a:extLst>
+          </p:cNvPr>
+          <p:cNvSpPr>
+            <a:spLocks noGrp="1"/>
+          </p:cNvSpPr>
+          <p:nvPr/>
+        </p:nvSpPr>
+        <p:spPr>
+          <a:xfrm>
+            <a:off x="11334750" y="6457950"/>
+            <a:ext cx="571500" cy="266700"/>
+          </a:xfrm>
+          <a:prstGeom prst="rect">
+            <a:avLst/>
+          </a:prstGeom>
+          <a:noFill/>
+          <a:ln w="0">
+            <a:noFill/>
+          </a:ln>
+        </p:spPr>
+        <p:txBody>
+          <a:bodyPr/>
+          <a:lstStyle/>
+          <a:p>
+            <a:pPr algn="r">
+              <a:defRPr sz="1350">
+                <a:solidFill>
+                  <a:srgbClr val="555555"/>
+                </a:solidFill>
+              </a:defRPr>
+            </a:pPr>
+            <a:fld id="{369316FC-89B5-4051-8799-F7F620E44A97}" type="slidenum">
+              <a:rPr sz="1350">
+                <a:solidFill>
+                  <a:srgbClr val="555555"/>
+                </a:solidFill>
+              </a:rPr>
+              <a:t>5</a:t>
+            </a:fld>
+            <a:endParaRPr sz="1350">
+              <a:solidFill>
+                <a:srgbClr val="555555"/>
+              </a:solidFill>
+            </a:endParaRPr>
           </a:p>
         </p:txBody>
       </p:sp>
@@ -29427,6 +31630,60 @@
             <a:endParaRPr lang="en-US" sz="1200" dirty="0">
               <a:solidFill>
                 <a:schemeClr val="tx1"/>
+              </a:solidFill>
+            </a:endParaRPr>
+          </a:p>
+        </p:txBody>
+      </p:sp>
+      <p:sp>
+        <p:nvSpPr>
+          <p:cNvPr id="4" name="Slide Number">
+            <a:extLst>
+              <a:ext uri="{FF2B5EF4-FFF2-40B4-BE49-F238E27FC236}">
+                <a16:creationId xmlns:a16="http://schemas.microsoft.com/office/drawing/2014/main" id="{90295111-642A-45CA-B8EA-9089545A24F5}"/>
+              </a:ext>
+            </a:extLst>
+          </p:cNvPr>
+          <p:cNvSpPr>
+            <a:spLocks noGrp="1"/>
+          </p:cNvSpPr>
+          <p:nvPr/>
+        </p:nvSpPr>
+        <p:spPr>
+          <a:xfrm>
+            <a:off x="11334750" y="6457950"/>
+            <a:ext cx="571500" cy="266700"/>
+          </a:xfrm>
+          <a:prstGeom prst="rect">
+            <a:avLst/>
+          </a:prstGeom>
+          <a:noFill/>
+          <a:ln w="0">
+            <a:noFill/>
+          </a:ln>
+        </p:spPr>
+        <p:txBody>
+          <a:bodyPr/>
+          <a:lstStyle/>
+          <a:p>
+            <a:pPr algn="r">
+              <a:defRPr sz="1350">
+                <a:solidFill>
+                  <a:srgbClr val="555555"/>
+                </a:solidFill>
+              </a:defRPr>
+            </a:pPr>
+            <a:fld id="{98B38167-5F5E-4C91-9C66-0F9BB3BDD299}" type="slidenum">
+              <a:rPr sz="1350">
+                <a:solidFill>
+                  <a:srgbClr val="555555"/>
+                </a:solidFill>
+              </a:rPr>
+              <a:t>6</a:t>
+            </a:fld>
+            <a:endParaRPr sz="1350">
+              <a:solidFill>
+                <a:srgbClr val="555555"/>
               </a:solidFill>
             </a:endParaRPr>
           </a:p>
@@ -30146,6 +32403,60 @@
           </a:p>
         </p:txBody>
       </p:sp>
+      <p:sp>
+        <p:nvSpPr>
+          <p:cNvPr id="4" name="Slide Number">
+            <a:extLst>
+              <a:ext uri="{FF2B5EF4-FFF2-40B4-BE49-F238E27FC236}">
+                <a16:creationId xmlns:a16="http://schemas.microsoft.com/office/drawing/2014/main" id="{90295111-642A-45CA-B8EA-9089545A24F5}"/>
+              </a:ext>
+            </a:extLst>
+          </p:cNvPr>
+          <p:cNvSpPr>
+            <a:spLocks noGrp="1"/>
+          </p:cNvSpPr>
+          <p:nvPr/>
+        </p:nvSpPr>
+        <p:spPr>
+          <a:xfrm>
+            <a:off x="11334750" y="6457950"/>
+            <a:ext cx="571500" cy="266700"/>
+          </a:xfrm>
+          <a:prstGeom prst="rect">
+            <a:avLst/>
+          </a:prstGeom>
+          <a:noFill/>
+          <a:ln w="0">
+            <a:noFill/>
+          </a:ln>
+        </p:spPr>
+        <p:txBody>
+          <a:bodyPr/>
+          <a:lstStyle/>
+          <a:p>
+            <a:pPr algn="r">
+              <a:defRPr sz="1350">
+                <a:solidFill>
+                  <a:srgbClr val="555555"/>
+                </a:solidFill>
+              </a:defRPr>
+            </a:pPr>
+            <a:fld id="{AC6A4259-CAE8-4DE1-BDBF-FC9EC356B58B}" type="slidenum">
+              <a:rPr sz="1350">
+                <a:solidFill>
+                  <a:srgbClr val="555555"/>
+                </a:solidFill>
+              </a:rPr>
+              <a:t>7</a:t>
+            </a:fld>
+            <a:endParaRPr sz="1350">
+              <a:solidFill>
+                <a:srgbClr val="555555"/>
+              </a:solidFill>
+            </a:endParaRPr>
+          </a:p>
+        </p:txBody>
+      </p:sp>
     </p:spTree>
     <p:extLst>
       <p:ext uri="{BB962C8B-B14F-4D97-AF65-F5344CB8AC3E}">
@@ -30732,6 +33043,60 @@
           </a:p>
         </p:txBody>
       </p:sp>
+      <p:sp>
+        <p:nvSpPr>
+          <p:cNvPr id="4" name="Slide Number">
+            <a:extLst>
+              <a:ext uri="{FF2B5EF4-FFF2-40B4-BE49-F238E27FC236}">
+                <a16:creationId xmlns:a16="http://schemas.microsoft.com/office/drawing/2014/main" id="{90295111-642A-45CA-B8EA-9089545A24F5}"/>
+              </a:ext>
+            </a:extLst>
+          </p:cNvPr>
+          <p:cNvSpPr>
+            <a:spLocks noGrp="1"/>
+          </p:cNvSpPr>
+          <p:nvPr/>
+        </p:nvSpPr>
+        <p:spPr>
+          <a:xfrm>
+            <a:off x="11334750" y="6457950"/>
+            <a:ext cx="571500" cy="266700"/>
+          </a:xfrm>
+          <a:prstGeom prst="rect">
+            <a:avLst/>
+          </a:prstGeom>
+          <a:noFill/>
+          <a:ln w="0">
+            <a:noFill/>
+          </a:ln>
+        </p:spPr>
+        <p:txBody>
+          <a:bodyPr/>
+          <a:lstStyle/>
+          <a:p>
+            <a:pPr algn="r">
+              <a:defRPr sz="1350">
+                <a:solidFill>
+                  <a:srgbClr val="555555"/>
+                </a:solidFill>
+              </a:defRPr>
+            </a:pPr>
+            <a:fld id="{A10E8A03-207E-4214-9D1C-29BFA44ED8E8}" type="slidenum">
+              <a:rPr sz="1350">
+                <a:solidFill>
+                  <a:srgbClr val="555555"/>
+                </a:solidFill>
+              </a:rPr>
+              <a:t>8</a:t>
+            </a:fld>
+            <a:endParaRPr sz="1350">
+              <a:solidFill>
+                <a:srgbClr val="555555"/>
+              </a:solidFill>
+            </a:endParaRPr>
+          </a:p>
+        </p:txBody>
+      </p:sp>
     </p:spTree>
     <p:extLst>
       <p:ext uri="{BB962C8B-B14F-4D97-AF65-F5344CB8AC3E}">
@@ -31742,6 +34107,60 @@
           </a:fontRef>
         </p:style>
       </p:cxnSp>
+      <p:sp>
+        <p:nvSpPr>
+          <p:cNvPr id="21" name="Slide Number">
+            <a:extLst>
+              <a:ext uri="{FF2B5EF4-FFF2-40B4-BE49-F238E27FC236}">
+                <a16:creationId xmlns:a16="http://schemas.microsoft.com/office/drawing/2014/main" id="{90295111-642A-45CA-B8EA-9089545A24F5}"/>
+              </a:ext>
+            </a:extLst>
+          </p:cNvPr>
+          <p:cNvSpPr>
+            <a:spLocks noGrp="1"/>
+          </p:cNvSpPr>
+          <p:nvPr/>
+        </p:nvSpPr>
+        <p:spPr>
+          <a:xfrm>
+            <a:off x="11334750" y="6457950"/>
+            <a:ext cx="571500" cy="266700"/>
+          </a:xfrm>
+          <a:prstGeom prst="rect">
+            <a:avLst/>
+          </a:prstGeom>
+          <a:noFill/>
+          <a:ln w="0">
+            <a:noFill/>
+          </a:ln>
+        </p:spPr>
+        <p:txBody>
+          <a:bodyPr/>
+          <a:lstStyle/>
+          <a:p>
+            <a:pPr algn="r">
+              <a:defRPr sz="1350">
+                <a:solidFill>
+                  <a:srgbClr val="555555"/>
+                </a:solidFill>
+              </a:defRPr>
+            </a:pPr>
+            <a:fld id="{E0D52BCA-5C7A-4213-8185-6FA1258B6670}" type="slidenum">
+              <a:rPr sz="1350">
+                <a:solidFill>
+                  <a:srgbClr val="555555"/>
+                </a:solidFill>
+              </a:rPr>
+              <a:t>9</a:t>
+            </a:fld>
+            <a:endParaRPr sz="1350">
+              <a:solidFill>
+                <a:srgbClr val="555555"/>
+              </a:solidFill>
+            </a:endParaRPr>
+          </a:p>
+        </p:txBody>
+      </p:sp>
     </p:spTree>
     <p:extLst>
       <p:ext uri="{BB962C8B-B14F-4D97-AF65-F5344CB8AC3E}">
